--- a/docs/Slide.pptx
+++ b/docs/Slide.pptx
@@ -525,7 +525,7 @@
           <a:lstStyle/>
           <a:p>
             <a:r>
-              <a:t>Chào thầy cô và các bạn. Nhóm chúng em trình bày MovieLOD, ứng dụng dữ liệu mở có liên kết về điện ảnh. Bài đi từ mô hình khái niệm, dữ liệu nguồn và RDF đến liên kết ngoài và truy vấn. Phiên bản hiện tại có 30 phim, 42 lớp ontology và 1.727 liên kết ngoài. Ví dụ xuyên suốt là Inception và Christopher Nolan. Bộ slide này có 24 trang; lời nói riêng và hướng dẫn chụp minh chứng Protégé đi kèm. Một số khung ảnh Protégé được để sẵn vì lần làm tài liệu này chưa chụp được giao diện trên máy. Các khung này ghi rõ yêu cầu, không được coi là ảnh minh chứng đã có.</a:t>
+              <a:t>Welcome. We present MovieLOD, a linked open data application for movies. The project connects a domain ontology, real source responses, RDF, external links and SPARQL queries. The current version contains 30 films, 42 declared classes and 1,727 external identity links. Inception and Christopher Nolan are our running examples. This deck has 24 slides. Vietnamese instructions remain inside the 11 empty Protégé screenshot slots so the team can add genuine evidence. These slots are placeholders, not screenshots. The demo video remains unchanged.</a:t>
             </a:r>
           </a:p>
         </p:txBody>
@@ -595,7 +595,7 @@
           <a:lstStyle/>
           <a:p>
             <a:r>
-              <a:t>Object property nối hai thực thể. contributionBy có domain Contribution và range Person; quan hệ ngược là hasContribution. contributionTo nối tới Film, hasRole nối tới ContributionRole. Ba quan hệ này có tính functional. Các quan hệ trực tiếp director, starring, writer, producer dùng từ DBpedia để hỏi thuận tiện. Những cặp như hasGenre/genreOf, hasProductionCompany/productionOf, hasAward/awardOf cho phép đi hai chiều. inverse là đảo hướng, không đồng nghĩa quan hệ đối xứng. Domain và range có thể giúp suy ra kiểu khi quan hệ được biết; chúng không tự đóng vai trò từ chối nhập liệu như một biểu mẫu. Ảnh yêu cầu chọn contributionBy để thấy domain/range/inverse/functional.</a:t>
+              <a:t>An object property connects two entities. contributionBy has domain Contribution, range Person and inverse hasContribution. contributionTo connects to Film; hasRole connects to ContributionRole. These three properties are functional. Direct director, starring, writer and producer properties reuse DBpedia vocabulary. Inverse pairs such as hasGenre/genreOf and hasAward/awardOf support navigation in either direction. An inverse is not a symmetric property. Domain and range can infer types; they are not input-rejection rules. The requested screenshot shows contributionBy’s domain, range, inverse and functional characteristic.</a:t>
             </a:r>
           </a:p>
           <a:p/>
@@ -632,12 +632,12 @@
           <a:p/>
           <a:p>
             <a:r>
-              <a:t>Bảng tra đủ 23 object property (không cần đọc hết khi thuyết trình):</a:t>
-            </a:r>
-          </a:p>
-          <a:p>
-            <a:r>
-              <a:t>| Quan hệ | Domain | Range | Inverse / đặc tính |</a:t>
+              <a:t>Reference: all 23 object properties (not intended to be read aloud in full):</a:t>
+            </a:r>
+          </a:p>
+          <a:p>
+            <a:r>
+              <a:t>| Property | Domain | Range | Inverse / characteristics |</a:t>
             </a:r>
           </a:p>
           <a:p>
@@ -672,7 +672,7 @@
           </a:p>
           <a:p>
             <a:r>
-              <a:t>| ex:awardOf | ex:Award | dbo:Film hoặc dbo:Person | ex:hasAward |</a:t>
+              <a:t>| ex:awardOf | ex:Award | dbo:Film or dbo:Person | ex:hasAward |</a:t>
             </a:r>
           </a:p>
           <a:p>
@@ -707,7 +707,7 @@
           </a:p>
           <a:p>
             <a:r>
-              <a:t>| ex:hasAward | dbo:Film hoặc dbo:Person | ex:Award | ex:awardOf |</a:t>
+              <a:t>| ex:hasAward | dbo:Film or dbo:Person | ex:Award | ex:awardOf |</a:t>
             </a:r>
           </a:p>
           <a:p>
@@ -827,7 +827,7 @@
           <a:lstStyle/>
           <a:p>
             <a:r>
-              <a:t>OWL cho phép định nghĩa tương đương lớp, giao, hợp, tồn tại, giá trị cố định và cardinality. Ví dụ Contribution có exactly một Person, một Film và một Role; DirectingContribution được nhận diện khi hasRole có giá trị DirectorRole. Quan hệ inverse suy ra đường đi ngược. Disjointness chỉ dùng cho các lớp không thể chồng lấp theo mô hình, không dùng cho Actor với Filmmaker. Cần nhớ giả định thế giới mở: thiếu một triple không tự chứng minh sự việc không có. Các IRI khác nhau cũng không tự bảo đảm là cá thể khác nhau. Vì vậy ứng dụng dùng kiểm tra Python riêng để phát hiện thiếu hoặc thừa trường, còn OWL phát biểu ý nghĩa và hỗ trợ phân loại.</a:t>
+              <a:t>OWL supports equivalent class definitions, intersections, unions, existential restrictions, fixed values and cardinality. Contribution connects exactly one suitable Person, Film and Role. A contribution with DirectorRole belongs to DirectingContribution. Inverse properties support reverse paths. Disjointness is used for incompatible entity categories, not for Actor and Filmmaker. Under the open-world assumption, a missing triple is not evidence that something is false. Different IRIs need not denote different individuals. Python checks required application fields, while OWL expresses meaning and supports classification.</a:t>
             </a:r>
           </a:p>
         </p:txBody>
@@ -897,7 +897,7 @@
           <a:lstStyle/>
           <a:p>
             <a:r>
-              <a:t>Bảng này cho thấy toàn bộ 14 lớp có kiểu được bổ sung. Bốn nhóm Contribution dùng role, ba nhóm người dùng đóng góp hoặc giải, năm nhóm phim dùng thể loại hoặc giải. Mười hai lớp thuộc phần xử lý bằng luật OWL RL. Hai lớp còn lại, MultiGenreFilm và FilmStudio, dùng truy vấn COUNT DISTINCT sau bước luật. Các số đếm chỉ tính tài nguyên nội bộ để tránh alias sameAs làm tăng số. Bảng là kết quả trong ontology_reasoning.json, không phải 14 kiểu gán sẵn trong movies.ttl. Hai truy vấn người có LIMIT 20; số hiển thị không phải tổng 769 Actor hoặc 89 Filmmaker. Phần cardinality được giải thích riêng ở slide sau.</a:t>
+              <a:t>This table summarizes additional classification in the application. Four contribution classes use roles, three person classes use contributions or awards, and five film classes use genres or awards. Those twelve classes use OWL RL, and their counts are independently confirmed by HermiT and Pellet. MultiGenreFilm and FilmStudio use COUNT DISTINCT after rule closure. Counts include only local resource IRIs to avoid duplicate sameAs aliases. This application table comes from ontology_reasoning.json. HermiT and Pellet infer zero instances for the two counting classes. Person queries have LIMIT 20, so their returned rows are not the totals of 769 Actors or 89 Filmmakers.</a:t>
             </a:r>
           </a:p>
         </p:txBody>
@@ -967,7 +967,7 @@
           <a:lstStyle/>
           <a:p>
             <a:r>
-              <a:t>Dữ liệu gốc chỉ khai báo Nolan là Person, cùng các quan hệ đóng góp và giải. Một Contribution của Nolan trong Inception có DirectorRole. Định nghĩa hasValue phân loại bản ghi này là DirectingContribution. Từ Person có loại đóng góp đạo diễn, biên kịch hoặc sản xuất, định nghĩa dùng giao, hợp và tồn tại phân loại Nolan là Filmmaker. Nolan còn có giải riêng nên được bổ sung AwardWinner. Đây là khác biệt giữa kiểu gán ban đầu và kiểu suy ra trong ứng dụng. Khung ảnh yêu cầu Class Description và Equivalent To của Filmmaker. Ảnh này chứng minh công thức đã khai báo; kết quả thực thi được kiểm chứng riêng bằng terminal và tests.</a:t>
+              <a:t>The asserted data types Nolan as Person and records his contributions and awards. One of his Inception contributions has DirectorRole. A hasValue definition classifies it as DirectingContribution. Filmmaker combines Person with the existence of a directing, writing or producing contribution. Nolan also receives awards, so he is inferred to be an AwardWinner. HermiT and Pellet confirm both types. The screenshot slot requests Filmmaker’s Equivalent To expression. A definition screenshot proves the axiom is present; execution logs separately demonstrate the inference.</a:t>
             </a:r>
           </a:p>
           <a:p/>
@@ -1068,7 +1068,7 @@
           <a:lstStyle/>
           <a:p>
             <a:r>
-              <a:t>MultiGenreFilm được định nghĩa là Film có ít nhất hai Genre; FilmStudio là ProductionCompany có ít nhất ba Film qua productionOf. Trong mẫu, toàn bộ 30 phim có ít nhất hai thể loại và có sáu công ty đạt ngưỡng ba phim. Warner Bros. liên quan tới 11 phim trong mẫu. owlrl không xử lý các ngưỡng này theo nhu cầu của bài, nên reason.py dùng COUNT DISTINCT bổ sung sau khi suy ra inverse. Đếm IRI khác nhau là quy tắc ứng dụng; trong OWL, hai tên khác nhau có thể chỉ cùng một cá thể. HermiT/Pellet đã chạy: hai lớp này có không cá thể được suy luận, còn 30 và sáu là số đếm trong ứng dụng. Ảnh cần chụp công thức min 3 của FilmStudio, không yêu cầu giả lập kết quả reasoner.</a:t>
+              <a:t>MultiGenreFilm is a Film with at least two Genres. FilmStudio is a ProductionCompany with at least three Films through productionOf. All 30 sampled films have at least two genre IRIs; six companies meet the application’s three-film threshold. Warner Bros. is linked to eleven sampled films. reason.py uses COUNT DISTINCT after inverse-property closure because OWL RL does not cover these thresholds. Different IRIs need not be different individuals under OWL semantics. HermiT and Pellet infer zero instances for both classes. The figures thirty and six are application counts, not DL membership results. Capture the actual class definitions in Protégé.</a:t>
             </a:r>
           </a:p>
           <a:p/>
@@ -1169,7 +1169,7 @@
           <a:lstStyle/>
           <a:p>
             <a:r>
-              <a:t>Danh tính phim được xác định qua sitelink Wikipedia tiếng Anh chính xác, thay vì so tên gần giống. Wikidata cung cấp đạo diễn P57, diễn viên P161, biên kịch P58, nhà sản xuất P162, giải P166 và công ty P272. DBpedia chỉ nối khi chủ thể khớp tiêu đề và có kiểu Film; vì vậy có 28 liên kết DBpedia thay vì tự đoán đủ 30. Mỗi phản hồi có URL, provider, thời điểm, HTTP status, SHA-256 và đường dẫn. Hiện đủ 76 phản hồi và hash khớp. Một phản hồi tải lại đổi nội dung được ghi hash/time mới, đồng thời giữ danh mục lịch sử. Hash kiểm tra toàn vẹn byte, không chứng minh mọi phát biểu ngoài đời đúng.</a:t>
+              <a:t>Film identity is resolved through an exact English Wikipedia sitelink, rather than approximate title matching. Wikidata supplies directors, actors, writers, producers, awards and production companies. DBpedia links require the matched root subject to be a Film, resulting in twenty-eight verified links rather than guessing thirty. Each saved response has a URL, provider, timestamp, HTTP status, SHA-256 and path. All 76 responses are present and verified. A re-fetched response that changed was assigned its new timestamp and hash while retaining the historical manifest. Hashes verify byte integrity, not the truth of every claim.</a:t>
             </a:r>
           </a:p>
         </p:txBody>
@@ -1239,7 +1239,7 @@
           <a:lstStyle/>
           <a:p>
             <a:r>
-              <a:t>Một triple gồm chủ thể, quan hệ và đối tượng hoặc giá trị. Inception có đạo diễn Nolan, năm 2010 và thời lượng 148 phút. Quan hệ đạo diễn nối hai thực thể; năm và thời lượng là literal có datatype. Dùng QID để tạo IRI ổn định; chuẩn hóa các đơn vị giờ, phút, giây về phút và ghi các trường hợp nguồn có nhiều giá trị. Sáu datatype property khai báo là title, releaseYear, runtimeMinutes, sourceUrl, retrievedAt, sha256. Turtle và JSON-LD biểu diễn cùng graph; file OWL riêng có schema, file Knowledge Graph có schema và dữ liệu. Ảnh cần chọn runtimeMinutes trong Data properties để thấy domain Film và range decimal.</a:t>
+              <a:t>An RDF triple has a subject, predicate and object or literal. Inception is directed by Nolan, released in 2010 and has a runtime of 148 minutes. director links entities; year and runtime are typed literals. QIDs produce stable local IRIs. Hours, minutes and seconds are normalized to minutes, with ambiguous source values recorded for review. The six declared data properties are title, releaseYear, runtimeMinutes, sourceUrl, retrievedAt and sha256. All exports use millisecond timestamps. Turtle and JSON-LD represent the same graph; the main Knowledge Graph OWL contains schema and data. The screenshot slot requests runtimeMinutes with Film domain and decimal range.</a:t>
             </a:r>
           </a:p>
           <a:p/>
@@ -1340,7 +1340,7 @@
           <a:lstStyle/>
           <a:p>
             <a:r>
-              <a:t>Mức một sao bắt đầu với dữ liệu trên Web có giấy phép mở; hai sao là có cấu trúc; ba sao dùng định dạng mở; bốn sao dùng HTTP URI và chuẩn RDF để tra cứu; năm sao thêm liên kết tới dữ liệu khác. Bài có giấy phép CC BY-SA 4.0, RDF/Turtle/JSON-LD và các IRI có trang mô tả. Bản công khai đã được kiểm tra không đăng nhập, cả bốn graph RDF đối chiếu đều đẳng cấu với local. Có 1.699 liên kết Wikidata và 28 DBpedia. sameAs khẳng định cùng danh tính, còn sourceSnapshot ghi xuất xứ. Tái dùng dbo:Film là dùng từ vựng lớp ở YC1, khác liên kết cá thể ở YC4.</a:t>
+              <a:t>One-star data is available on the Web with an open license. Two-star data is structured; three-star data uses open formats. Four-star data uses HTTP identifiers and RDF for lookup. Five-star data adds links to other datasets. The project publishes CC BY-SA 4.0 data in Turtle and JSON-LD with resolvable descriptions. Four public RDF graphs were compared with local graphs without authentication. There are 1,699 Wikidata and 28 DBpedia identity links. sameAs expresses shared identity; sourceSnapshot records provenance. Reusing dbo:Film is vocabulary reuse in R1, distinct from linking individuals in R4.</a:t>
             </a:r>
           </a:p>
         </p:txBody>
@@ -1410,7 +1410,7 @@
           <a:lstStyle/>
           <a:p>
             <a:r>
-              <a:t>Trang Inception hiển thị tên, kiểu, năm, thời lượng, đạo diễn, đóng góp, liên kết ngoài và nguồn. Người đọc có thể tải mô tả Turtle; HTML cũng nhúng JSON-LD. Ở Flask local, Accept text turtle trả 303 đến mô tả RDF và curl trừ L theo chuyển hướng. Hosted tĩnh cung cấp HTML/JSON-LD và link RDF; không tự khẳng định nó có cùng hành vi 303 như Flask. Bên trái là ảnh ứng dụng thật. Bên phải là khung cần ảnh Individuals trong Protégé khi mở Knowledge Graph: chọn film-Q25188 và hiện kiểu cùng các thuộc tính. Không mở file chỉ schema để chụp cá thể.</a:t>
+              <a:t>The Inception page shows its title, types, year, runtime, director, contributions, external links and provenance. Readers can download Turtle; HTML also embeds JSON-LD. The local Flask server responds to a Turtle Accept header with a 303 redirect, which curl -L follows. The static hosted site provides HTML, JSON-LD and an RDF link; we do not claim it reproduces Flask’s 303 behavior. The left image is a real application screenshot. The right slot requests the Inception individual from the full Knowledge Graph in Protégé. A schema-only file has no film individuals to capture.</a:t>
             </a:r>
           </a:p>
           <a:p/>
@@ -1511,7 +1511,7 @@
           <a:lstStyle/>
           <a:p>
             <a:r>
-              <a:t>Truy vấn đầu tiên tìm phim tên Inception, đi theo director tới người và lấy nhãn người đó. Kết quả là Inception, 2010, 148 phút, Christopher Nolan. SELECT chọn cột, WHERE đưa mẫu đồ thị, dấu hỏi đánh dấu biến. OPTIONAL giữ dòng khi thuộc tính năm hoặc thời lượng có thể thiếu. Người dùng có thể sửa truy vấn, bấm Run query và tải kết quả. Giao diện có 14 mẫu trực tiếp. Ngoài SELECT trả bảng, ASK trả True hoặc False, CONSTRUCT tạo graph RDF. Kết quả được tính từ graph; danh sách phim hoặc tên đạo diễn không được nhập cứng trong bảng.</a:t>
+              <a:t>The first query matches Inception, follows director to a person and retrieves the person’s label. It returns Inception, 2010, 148 minutes and Christopher Nolan. SELECT chooses columns, WHERE matches graph patterns and question marks denote variables. OPTIONAL preserves rows when year or runtime is absent. Users can edit the query, run it and export results. The interface offers fourteen direct samples. ASK returns a boolean; CONSTRUCT returns an RDF graph. The query engine computes the results from RDF rather than displaying a hard-coded result table.</a:t>
             </a:r>
           </a:p>
         </p:txBody>
@@ -1581,7 +1581,7 @@
           <a:lstStyle/>
           <a:p>
             <a:r>
-              <a:t>Điện ảnh có nhiều thực thể và nhiều vai trò chồng lấp. Chúng ta muốn hỏi Nolan tham gia Inception ở những vai trò nào, phim này liên quan tới công ty nào hoặc dữ liệu lấy từ phản hồi nào. Năm yêu cầu của đề tạo thành một chuỗi công việc. Ontology định nghĩa khái niệm và quan hệ. Thu thập cung cấp dữ liệu thật. Chuyển đổi tạo RDF và IRI với giấy phép mở. Liên kết nối cá thể tới Wikidata và DBpedia. SPARQL cho phép đặt câu hỏi trên đồ thị. Đề còn yêu cầu báo cáo không quá 15 trang và video 3–5 phút; video demo hiện dài khoảng 4 phút 50 giây.</a:t>
+              <a:t>Movie data contains many related entities and overlapping roles. We want to identify Nolan’s roles in Inception, its production companies and the source of each claim. The five requirements form a workflow: define an ontology, collect real data, publish RDF with HTTP identifiers and an open license, link entities to external datasets, and provide SPARQL interfaces. Deliverables include a report of at most 15 pages, slides and a three-to-five-minute demo. The current video runs for about four minutes and fifty seconds.</a:t>
             </a:r>
           </a:p>
         </p:txBody>
@@ -1651,7 +1651,7 @@
           <a:lstStyle/>
           <a:p>
             <a:r>
-              <a:t>Câu hỏi toàn bộ đóng góp Inception trả 25 bản ghi, gồm 21 diễn viên, một đạo diễn, một biên kịch và hai nhà sản xuất. Ảnh trên slide lọc riêng Christopher Nolan nên chỉ còn ba dòng: Director, Writer, Producer. Chúng ta không lấy ba dòng này làm tổng đóng góp. Các truy vấn khác cho biết tám phim do Nolan đạo diễn trong mẫu, bốn công ty liên quan Inception và bảy giải của The Godfather. Việc thêm câu hỏi không cần nhập một bảng kết quả riêng; chúng dùng cùng đồ thị và mô hình. Download results xuất kết quả đang hiển thị. Các file truy vấn và biên bản cho phép kiểm tra lại những số này.</a:t>
+              <a:t>The complete Inception contribution query returns twenty-five records: twenty-one actors, one director, one writer and two producers. The screenshot filters Christopher Nolan and therefore shows only three rows. Those three rows are not the total contribution count. Other queries return eight sampled Nolan films, four Inception production companies and seven recorded Godfather awards. Additional questions reuse the graph and model without a separate manually populated result table. Download results exports the current result. Query files and execution reports make these counts reproducible.</a:t>
             </a:r>
           </a:p>
         </p:txBody>
@@ -1721,7 +1721,7 @@
           <a:lstStyle/>
           <a:p>
             <a:r>
-              <a:t>Bài có endpoint GET/POST và terminal, ngoài giao diện Web. SELECT và ASK trả JSON; CONSTRUCT và DESCRIBE trả Turtle. Endpoint mặc định chỉ nạp graph khai báo. Lệnh query.py với reasoned nạp thêm schema và inferred_classes.ttl. Cùng câu 24 trên Nolan trả một kiểu Person khi chạy gốc; chạy reasoned trả Person, Filmmaker, AwardWinner. File kiểu được tạo trước bởi reason.py, không tính suy luận mỗi lần gọi query.py. Truy vấn hierarchy như câu 13 cần schema; Actor/Filmmaker có LIMIT 20 nên tổng thực ở biên bản là 769 và 89. Khung ảnh Protégé yêu cầu Types của Nolan ở chế độ asserted; nếu ảnh sau reasoner phải ghi rõ trạng thái.</a:t>
+              <a:t>The project provides GET/POST endpoint and terminal interfaces in addition to the Web application. SELECT and ASK return JSON; CONSTRUCT and DESCRIBE return Turtle. The endpoint loads the asserted graph by default. query.py --reasoned also loads the schema and inferred_classes.ttl. Query 24 returns Person in asserted mode, and Person, Filmmaker and AwardWinner with inference. reason.py creates the saved types beforehand; querying does not rerun reasoning. Hierarchy query 13 requires the schema. Actor and Filmmaker queries have LIMIT 20, while full totals are 769 and 89. Capture Nolan’s asserted Types or clearly label a genuine inferred view.</a:t>
             </a:r>
           </a:p>
           <a:p/>
@@ -1758,12 +1758,12 @@
           <a:p/>
           <a:p>
             <a:r>
-              <a:t>Bảng tra 24 truy vấn; số là số dòng trả về, hoặc boolean đối với ASK:</a:t>
-            </a:r>
-          </a:p>
-          <a:p>
-            <a:r>
-              <a:t>| File | Gốc | Có schema / phân loại |</a:t>
+              <a:t>Reference: 24 queries; values are result-row counts or ASK booleans:</a:t>
+            </a:r>
+          </a:p>
+          <a:p>
+            <a:r>
+              <a:t>| File | Asserted | With schema / inference |</a:t>
             </a:r>
           </a:p>
           <a:p>
@@ -1893,7 +1893,7 @@
           </a:p>
           <a:p>
             <a:r>
-              <a:t>Câu 14/15 trả một dòng thống kê. Câu 17/18 có LIMIT 20; tổng Actor/Filmmaker là 769/89. Câu 24 có 1 kiểu gốc hoặc 3 kiểu khi nạp phân loại.</a:t>
+              <a:t>Queries 14/15 each return one aggregate row. Queries 17/18 have LIMIT 20; full Actor/Filmmaker totals are 769/89. Query 24 returns one asserted type or three with inference.</a:t>
             </a:r>
           </a:p>
         </p:txBody>
@@ -1963,7 +1963,7 @@
           <a:lstStyle/>
           <a:p>
             <a:r>
-              <a:t>validate đã kiểm tra tên, nguồn, liên kết của phim và các thành phần Contribution; 76 hash nguồn khớp và 24 file truy vấn đã chạy ở chế độ dữ liệu phù hợp. Có 14 test pass và chín kiểm tra trình duyệt đạt, gồm endpoint, Comunica, lỗi cú pháp, ASK, CONSTRUCT, trang IRI và màn hình mobile. Bản công khai được kiểm tra qua tám URL không có cookie hay đăng nhập; bốn graph RDF đều đẳng cấu với local, có giấy phép và link mô tả máy đọc được. HermiT/Pellet riêng đã xác nhận OWL nhất quán và không có lớp không khả thỏa. Test và hash không chứng minh mọi thông tin ngoài đời đúng. Timestamp OWL/Turtle/JSON-LD đã đồng bộ đến mili giây. Đó là lý do cần vừa nêu kết quả vừa giữ giới hạn phương pháp.</a:t>
+              <a:t>Validation checks film names, provenance, external links and contribution fields. All 76 source hashes match and all 24 query files execute in their appropriate graph mode. Fourteen tests and nine browser checks pass, covering endpoint behavior, Comunica, syntax errors, ASK, CONSTRUCT, IRI pages and mobile layout. Sixteen production query checks also pass. Eight public URLs are accessible without authentication; four checked RDF graphs are isomorphic to local graphs. HermiT and Pellet confirm consistency and no unsatisfiable named classes. OWL, Turtle and JSON-LD share millisecond timestamps. Tests and hashes do not establish the truth of every real-world claim.</a:t>
             </a:r>
           </a:p>
         </p:txBody>
@@ -2033,7 +2033,7 @@
           <a:lstStyle/>
           <a:p>
             <a:r>
-              <a:t>Ảnh đề gốc không đưa trọng số; nhóm dùng thang tự đánh giá chia đều hai điểm mỗi yêu cầu. Ontology, thu thập, RDF công khai, liên kết và truy vấn đều có minh chứng đạt nên đề xuất mười trên mười. Đây không phải điểm chính thức của giảng viên. Các giới hạn vẫn còn: mẫu 30 phim có chủ đích; nhóm thể loại và giải ánh xạ theo nhãn; chưa có ngân sách hoặc streaming; HermiT/Pellet đã xác nhận nhất quán, còn hai nhóm cardinality chỉ có số đếm ứng dụng 30/6; DL có không cá thể. SQL cũng có thể trả nhiều câu hỏi bằng JOIN/view/quy tắc. Giá trị Semantic Web ở đây là IRI dùng chung, từ vựng tái dùng, liên kết dataset, xuất xứ và định nghĩa ngữ nghĩa tường minh.</a:t>
+              <a:t>The assignment does not specify weights, so the team proposes two points per requirement. Ontology, collection, publication, external links and SPARQL interfaces each have evidence, giving a proposed ten out of ten rather than an official grade. Limitations remain: a selected thirty-film sample, label-based genre and award grouping, and no budget or streaming data. HermiT and Pellet confirm consistency, but the two cardinality classes still have zero DL-inferred instances, compared with application counts of thirty and six. SQL can answer many questions with joins, views and rules. The Semantic Web contribution is shared identifiers, reusable vocabulary, cross-dataset links, provenance and explicit definitions.</a:t>
             </a:r>
           </a:p>
         </p:txBody>
@@ -2103,7 +2103,7 @@
           <a:lstStyle/>
           <a:p>
             <a:r>
-              <a:t>MovieLOD đã nối mô hình, dữ liệu thật, nguồn, RDF, liên kết và truy vấn trong một ứng dụng. Bản này có 24 slide; nhóm có thể trình bày đầy đủ khoảng 18–22 phút hoặc chọn các trang chính để rút gọn. Trước khi nộp, điền tên thành viên và bổ sung các ảnh Protégé theo mã trên bảng. Các khung ảnh và hướng dẫn đã có ngay ở những slide liên quan. Giao diện macOS chưa cho phép chụp trong lần làm tài liệu này, nên không có ảnh Protégé giả được gắn vào. Có thể chèn ảnh trực tiếp trong PowerPoint hoặc lưu đúng tên ở evidence/protege rồi chạy lại trình tạo slide. Nhóm xin kết thúc và sẵn sàng trả lời câu hỏi.</a:t>
+              <a:t>MovieLOD connects a domain model, real source data, provenance, RDF, external links and queries in one application. This twenty-four-slide deck supports an eighteen-to-twenty-two-minute presentation or a shorter selection of key slides. Before submission, fill in team details and add genuine Protégé screenshots using the listed codes. Vietnamese instructions remain in the empty slots. No fabricated Protégé screenshots have been inserted. Images can be added directly in PowerPoint or saved with the expected filenames in evidence/protege before regenerating the deck. The demo video remains unchanged. Thank you; we welcome questions.</a:t>
             </a:r>
           </a:p>
         </p:txBody>
@@ -2173,7 +2173,7 @@
           <a:lstStyle/>
           <a:p>
             <a:r>
-              <a:t>Luồng xử lý bắt đầu từ danh sách phim trong config. collect lấy phản hồi nguồn và lưu metadata. build tạo ontology cùng graph RDF từ dữ liệu đã chuẩn hóa. validate kiểm tra trường ứng dụng, hash và truy vấn. reason bổ sung các kiểu phân loại ở file riêng. Web cục bộ gọi endpoint Flask dùng RDFLib; hosted dùng Comunica trong trình duyệt. Endpoint mặc định đọc movies.ttl, còn terminal với reasoned nạp thêm schema và inferred_classes.ttl. Tùy chọn này nạp kết quả phân loại đã lưu, không tự chạy reasoner mỗi lần truy vấn. Việc tách ba phần giúp phân biệt dữ kiện gốc với kiểu được bổ sung.</a:t>
+              <a:t>The pipeline starts with the film list in config. collect.py fetches responses and stores provenance metadata. build.py creates the ontology and normalized RDF graph. validate.py checks application fields, source hashes and queries. reason.py writes additional types to a separate file. The local application uses Flask and RDFLib; the hosted application runs Comunica in the browser. The endpoint loads movies.ttl by default. The terminal --reasoned option also loads the schema and saved inferred types; it does not start a reasoner for every query. All RDF exports now use millisecond timestamps, while raw source metadata retains its original precision.</a:t>
             </a:r>
           </a:p>
         </p:txBody>
@@ -2243,7 +2243,7 @@
           <a:lstStyle/>
           <a:p>
             <a:r>
-              <a:t>Mẫu hiện có 30 phim, 851 người và 1.010 bản ghi đóng góp. Ngoài ra có 45 công ty, 672 thực thể giải thưởng, 75 thể loại, 11 quốc gia và 15 ngôn ngữ. 76 phản hồi gốc được giữ và kiểm tra hash. Dữ liệu gồm 19.339 triple, tách khỏi 518 triple lược đồ. Cần đọc đúng đơn vị: 672 là số thực thể giải khác nhau, không phải số lần trao giải; 1.010 là bản ghi một người giữ một vai trò trong một phim, không phải số người. Mọi phim trong mẫu có năm, thời lượng và đạo diễn, nhưng mẫu này không đại diện toàn bộ điện ảnh.</a:t>
+              <a:t>The sample contains 30 films, 851 people and 1,010 contribution records. It also includes 45 companies, 672 award entities, 75 genres, 11 countries and 15 languages. All 76 raw source responses are present and their hashes match. The asserted graph has 19,339 triples, separate from 518 schema triples. Units matter: 672 counts distinct award entities, not award events; 1,010 counts person-film-role records, not people. All sampled films have a year, runtime and director. This selected sample does not represent the entire film industry.</a:t>
             </a:r>
           </a:p>
         </p:txBody>
@@ -2313,7 +2313,7 @@
           <a:lstStyle/>
           <a:p>
             <a:r>
-              <a:t>Ontology có 42 IRI lớp được khai báo owl Class, trong đó ba lớp dùng trực tiếp từ DBpedia, còn lại thuộc namespace của bài. Chúng ta có nhánh tác phẩm và phim; chủ thể người hoặc tổ chức; đóng góp và vai trò; thể loại; giải thưởng; và các lớp bổ trợ cho quốc gia, ngôn ngữ, nguồn, dataset. Trong số này, 14 lớp có kiểu được bổ sung từ định nghĩa hoặc quy tắc phân loại. Các lớp ngoài được tham chiếu qua equivalentClass có thể được Protégé tính thêm trong Metrics; vì vậy con số 42 dùng quy ước đếm lớp tự khai báo. Ảnh cần bổ sung ở bên phải là IRI ontology và versionInfo 2.0.0.</a:t>
+              <a:t>The ontology declares 42 named owl:Class IRIs. Three directly reuse DBpedia classes; the other 39 belong to our namespace. The six groups cover creative works and films, people and organizations, contributions and roles, genres, awards, and supporting context and provenance. Fourteen classes receive additional types through definitions or application rules. Protégé Metrics may include referenced external classes, so its total can differ from our count of explicitly declared classes. The screenshot slot requests the ontology IRI and versionInfo 2.0.0.</a:t>
             </a:r>
           </a:p>
           <a:p/>
@@ -2414,7 +2414,7 @@
           <a:lstStyle/>
           <a:p>
             <a:r>
-              <a:t>CreativeWork là nhánh tác phẩm. Film dùng IRI DBpedia và có các lớp con như FeatureFilm, AnimatedFilm, DocumentaryFilm. FeatureFilm và AnimatedFilm được ánh xạ theo quy tắc P31 của bài; đây là cách giản lược, không phải khẳng định đã kiểm tra mọi tiêu chí phát hành rạp. Các lớp ActionFilm, ComedyFilm, DramaFilm, ScienceFictionFilm, MultiGenreFilm và AwardWinningFilm được phân loại bổ sung. DocumentaryFilm hiện không có cá thể trong mẫu. Việc có một lớp trong mô hình không yêu cầu mẫu dữ liệu phải có sẵn mọi loại phim. Khung ảnh yêu cầu mở cây CreativeWork/Film và chọn Film để thấy IRI DBpedia.</a:t>
+              <a:t>CreativeWork is the top-level branch for works. Film reuses the DBpedia IRI. Its subclasses include FeatureFilm, AnimatedFilm and DocumentaryFilm. FeatureFilm and AnimatedFilm follow the project’s P31 mapping, a simplified rule rather than a full release-policy assessment. Genre-based film classes and AwardWinningFilm receive inferred types. MultiGenreFilm receives types through a separate counting rule in the application. DocumentaryFilm has no instances in this sample; defining a class does not require a sample instance. The requested Protégé view shows the asserted CreativeWork/Film hierarchy and Film’s DBpedia IRI.</a:t>
             </a:r>
           </a:p>
           <a:p/>
@@ -2515,7 +2515,7 @@
           <a:lstStyle/>
           <a:p>
             <a:r>
-              <a:t>Agent gồm Person và Organization. Person dùng lớp DBpedia và có các nhóm Actor, Filmmaker, AwardWinner. Organization có ProductionCompany; FilmStudio là nhóm công ty được ứng dụng phân loại theo ngưỡng số phim trong mẫu. Actor và Filmmaker không rời nhau, vì một người có thể vừa diễn xuất vừa đạo diễn hoặc biên kịch. Chúng ta cũng không dùng một lớp tổ hợp DirectorWriter để giữ hai nghề; từng công việc được ghi qua Contribution và SPARQL có thể JOIN các đóng góp. Số người hoặc công ty không được suy từ số dòng của một truy vấn có LIMIT. Ảnh cần chụp là cây Agent mở cả nhánh Person và Organization.</a:t>
+              <a:t>Agent includes Person and Organization. Person reuses DBpedia and has Actor, Filmmaker and AwardWinner subclasses. Organization includes ProductionCompany. The application classifies six companies as FilmStudio using the number of film IRIs, while the DL reasoners infer no FilmStudio instances under the current axioms. Actor and Filmmaker are not disjoint: a person can act and also direct or write. Each role is represented by its own Contribution, rather than a combined DirectorWriter class. A query with LIMIT cannot establish the total number of people. The screenshot slot requests both Person and Organization branches.</a:t>
             </a:r>
           </a:p>
           <a:p/>
@@ -2616,7 +2616,7 @@
           <a:lstStyle/>
           <a:p>
             <a:r>
-              <a:t>Genre có FictionGenre và NonFictionGenre; các lớp thể loại hành động, hài, chính kịch, khoa học viễn tưởng thuộc FictionGenre, còn DocumentaryGenre dưới NonFictionGenre. Award có các nhóm FilmAward, ActingAward, DirectingAward, WritingAward. Việc chia nhóm thể loại và giải hiện dùng từ khóa nhãn trong bước build, không phải suy luận tự khám phá nghĩa tiếng Anh. FilmAward là nhóm mặc định khi nhãn chưa khớp một nhóm nghề nghiệp. Các lớp Country, Language, SourceSnapshot và Dataset bổ sung bối cảnh và xuất xứ. Giải của người được giữ riêng với giải của phim. Khung ảnh cần mở hai nhánh Genre và Award, thu gọn nhánh khác để đọc rõ.</a:t>
+              <a:t>Genre contains FictionGenre and NonFictionGenre. Action, comedy, drama and science fiction genres belong to FictionGenre; DocumentaryGenre belongs to NonFictionGenre. Award includes FilmAward, ActingAward, DirectingAward and WritingAward. These groups are mapped from label keywords during build, rather than discovered automatically by reasoning. FilmAward is the fallback group when no role-specific keyword matches. Country, Language, SourceSnapshot and Dataset supply context and provenance. Awards received by people are kept distinct from awards received by films. The requested view shows the Genre and Award branches.</a:t>
             </a:r>
           </a:p>
           <a:p/>
@@ -2717,7 +2717,7 @@
           <a:lstStyle/>
           <a:p>
             <a:r>
-              <a:t>Nếu chỉ gắn một nhãn nghề nghiệp cho Nolan, chúng ta không biết vai trò đó thuộc phim nào. Contribution giải quyết bằng một bản ghi nối một người, một phim và một vai trò. contributionBy trỏ Person, contributionTo trỏ Film, hasRole trỏ ContributionRole. Mỗi quan hệ có ràng buộc đúng một giá trị phù hợp. Bốn cá thể vai trò là DirectorRole, ActorRole, WriterRole, ProducerRole. Nolan giữ ba vai trò trong Inception, vì vậy có ba Contribution riêng. Các nhóm Acting, Directing, Writing, ProducingContribution được phân loại từ hasRole. Ảnh cần chụp Class Description của Contribution, hiện cả exactly 1 và các restriction về loại giá trị.</a:t>
+              <a:t>A profession label alone does not identify a person’s role in a particular film. Contribution connects a person, film and role. contributionBy points to Person, contributionTo to Film, and hasRole to ContributionRole. Each relation has an exactly-one qualified restriction. Four role individuals are DirectorRole, ActorRole, WriterRole and ProducerRole. Nolan has three roles in Inception, represented by three separate contributions. Acting, Directing, Writing and ProducingContribution are classified from hasRole. The screenshot should show Contribution’s restrictions, including exactly-one and allValuesFrom expressions.</a:t>
             </a:r>
           </a:p>
           <a:p/>
@@ -5935,7 +5935,7 @@
               </a:defRPr>
             </a:pPr>
             <a:r>
-              <a:t>Ứng dụng dữ liệu phim liên kết · Semantic Web</a:t>
+              <a:t>Linked movie data application · Semantic Web</a:t>
             </a:r>
           </a:p>
         </p:txBody>
@@ -6023,7 +6023,7 @@
               </a:defRPr>
             </a:pPr>
             <a:r>
-              <a:t>Đối chiếu dữ liệu: 08/10/2026 • Nguồn: mã dự án và evidence/</a:t>
+              <a:t>Data checked: 08 Oct 2026 • Sources: project code and evidence/</a:t>
             </a:r>
           </a:p>
         </p:txBody>
@@ -6113,7 +6113,7 @@
               </a:defRPr>
             </a:pPr>
             <a:r>
-              <a:t>Từ dữ liệu điện ảnh</a:t>
+              <a:t>From movie data</a:t>
             </a:r>
           </a:p>
           <a:p>
@@ -6135,7 +6135,7 @@
               </a:defRPr>
             </a:pPr>
             <a:r>
-              <a:t>đến đồ thị tri thức</a:t>
+              <a:t>to a knowledge graph</a:t>
             </a:r>
           </a:p>
         </p:txBody>
@@ -6225,7 +6225,7 @@
               </a:defRPr>
             </a:pPr>
             <a:r>
-              <a:t>Bản đầy đủ 24 trang</a:t>
+              <a:t>Full 24-slide presentation</a:t>
             </a:r>
           </a:p>
           <a:p>
@@ -6247,7 +6247,7 @@
               </a:defRPr>
             </a:pPr>
             <a:r>
-              <a:t>Nhóm / thành viên / lớp: [điền trước khi nộp]</a:t>
+              <a:t>Team / members / class: [complete before submission]</a:t>
             </a:r>
           </a:p>
         </p:txBody>
@@ -6380,7 +6380,7 @@
               </a:defRPr>
             </a:pPr>
             <a:r>
-              <a:t>phim thật</a:t>
+              <a:t>real films</a:t>
             </a:r>
           </a:p>
         </p:txBody>
@@ -6513,7 +6513,7 @@
               </a:defRPr>
             </a:pPr>
             <a:r>
-              <a:t>lớp có tên</a:t>
+              <a:t>named classes</a:t>
             </a:r>
           </a:p>
         </p:txBody>
@@ -6601,7 +6601,7 @@
               </a:defRPr>
             </a:pPr>
             <a:r>
-              <a:t>1.727</a:t>
+              <a:t>1,727</a:t>
             </a:r>
           </a:p>
         </p:txBody>
@@ -6646,7 +6646,7 @@
               </a:defRPr>
             </a:pPr>
             <a:r>
-              <a:t>liên kết ngoài</a:t>
+              <a:t>external links</a:t>
             </a:r>
           </a:p>
         </p:txBody>
@@ -6805,7 +6805,7 @@
               </a:defRPr>
             </a:pPr>
             <a:r>
-              <a:t>YC1 · Quan hệ, domain/range và inverse</a:t>
+              <a:t>R1 · Properties, domain/range and inverses</a:t>
             </a:r>
           </a:p>
         </p:txBody>
@@ -6850,7 +6850,7 @@
               </a:defRPr>
             </a:pPr>
             <a:r>
-              <a:t>23 object property; chọn các quan hệ trung tâm để giải thích</a:t>
+              <a:t>23 object properties · selected central relationships</a:t>
             </a:r>
           </a:p>
         </p:txBody>
@@ -6938,7 +6938,7 @@
               </a:defRPr>
             </a:pPr>
             <a:r>
-              <a:t>Đối chiếu dữ liệu: 08/10/2026 • Nguồn: mã dự án và evidence/</a:t>
+              <a:t>Data checked: 08 Oct 2026 • Sources: project code and evidence/</a:t>
             </a:r>
           </a:p>
         </p:txBody>
@@ -7071,7 +7071,7 @@
               </a:defRPr>
             </a:pPr>
             <a:r>
-              <a:t>Quan hệ</a:t>
+              <a:t>Property</a:t>
             </a:r>
           </a:p>
         </p:txBody>
@@ -8238,7 +8238,7 @@
               </a:defRPr>
             </a:pPr>
             <a:r>
-              <a:t>Film hoặc Person </a:t>
+              <a:t>Film or Person </a:t>
             </a:r>
             <a:r>
               <a:rPr>
@@ -8299,14 +8299,14 @@
       </p:sp>
       <p:sp>
         <p:nvSpPr>
-          <p:cNvPr id="37" name="PHOTO_P05"/>
+          <p:cNvPr id="37" name="PHOTO_P05_0"/>
           <p:cNvSpPr/>
           <p:nvPr/>
         </p:nvSpPr>
         <p:spPr>
           <a:xfrm>
             <a:off x="7818120" y="2578608"/>
-            <a:ext cx="6080760" cy="4709160"/>
+            <a:ext cx="6080760" cy="4590288"/>
           </a:xfrm>
           <a:prstGeom prst="roundRect">
             <a:avLst/>
@@ -8344,7 +8344,7 @@
       </p:sp>
       <p:sp>
         <p:nvSpPr>
-          <p:cNvPr id="38" name="TextBox 37"/>
+          <p:cNvPr id="38" name="PHOTO_P05_1"/>
           <p:cNvSpPr txBox="1"/>
           <p:nvPr/>
         </p:nvSpPr>
@@ -8389,7 +8389,7 @@
       </p:sp>
       <p:sp>
         <p:nvSpPr>
-          <p:cNvPr id="39" name="Rounded Rectangle 38"/>
+          <p:cNvPr id="39" name="PHOTO_P05_2"/>
           <p:cNvSpPr/>
           <p:nvPr/>
         </p:nvSpPr>
@@ -8432,7 +8432,7 @@
       </p:sp>
       <p:sp>
         <p:nvSpPr>
-          <p:cNvPr id="40" name="TextBox 39"/>
+          <p:cNvPr id="40" name="PHOTO_P05_3"/>
           <p:cNvSpPr txBox="1"/>
           <p:nvPr/>
         </p:nvSpPr>
@@ -8477,7 +8477,7 @@
       </p:sp>
       <p:sp>
         <p:nvSpPr>
-          <p:cNvPr id="41" name="TextBox 40"/>
+          <p:cNvPr id="41" name="PHOTO_P05_4"/>
           <p:cNvSpPr txBox="1"/>
           <p:nvPr/>
         </p:nvSpPr>
@@ -8522,7 +8522,7 @@
       </p:sp>
       <p:sp>
         <p:nvSpPr>
-          <p:cNvPr id="42" name="TextBox 41"/>
+          <p:cNvPr id="42" name="PHOTO_P05_5"/>
           <p:cNvSpPr txBox="1"/>
           <p:nvPr/>
         </p:nvSpPr>
@@ -8585,7 +8585,7 @@
       </p:sp>
       <p:sp>
         <p:nvSpPr>
-          <p:cNvPr id="43" name="TextBox 42"/>
+          <p:cNvPr id="43" name="PHOTO_P05_6"/>
           <p:cNvSpPr txBox="1"/>
           <p:nvPr/>
         </p:nvSpPr>
@@ -8630,7 +8630,7 @@
       </p:sp>
       <p:sp>
         <p:nvSpPr>
-          <p:cNvPr id="44" name="TextBox 43"/>
+          <p:cNvPr id="44" name="PHOTO_P05_7"/>
           <p:cNvSpPr txBox="1"/>
           <p:nvPr/>
         </p:nvSpPr>
@@ -8675,13 +8675,13 @@
       </p:sp>
       <p:sp>
         <p:nvSpPr>
-          <p:cNvPr id="45" name="TextBox 44"/>
-          <p:cNvSpPr txBox="1"/>
-          <p:nvPr/>
-        </p:nvSpPr>
-        <p:spPr>
-          <a:xfrm>
-            <a:off x="8046720" y="6949440"/>
+          <p:cNvPr id="45" name="PHOTO_P05_8"/>
+          <p:cNvSpPr txBox="1"/>
+          <p:nvPr/>
+        </p:nvSpPr>
+        <p:spPr>
+          <a:xfrm>
+            <a:off x="8046720" y="6830568"/>
             <a:ext cx="5623560" cy="283464"/>
           </a:xfrm>
           <a:prstGeom prst="rect">
@@ -8758,7 +8758,7 @@
               </a:defRPr>
             </a:pPr>
             <a:r>
-              <a:t>contributionBy, contributionTo, hasRole: functional. Domain/range có thể suy ra kiểu; inverse là đảo hướng.</a:t>
+              <a:t>contributionBy / contributionTo / hasRole: functional. Domain/range can infer types; inverse reverses a relation.</a:t>
             </a:r>
           </a:p>
         </p:txBody>
@@ -8917,7 +8917,7 @@
               </a:defRPr>
             </a:pPr>
             <a:r>
-              <a:t>YC1 · OWL mô tả ngữ nghĩa như thế nào?</a:t>
+              <a:t>R1 · How OWL expresses meaning</a:t>
             </a:r>
           </a:p>
         </p:txBody>
@@ -8962,7 +8962,7 @@
               </a:defRPr>
             </a:pPr>
             <a:r>
-              <a:t>Các ràng buộc mô hình và kiểm tra trường ứng dụng có nhiệm vụ khác nhau</a:t>
+              <a:t>Ontology constraints and application validation serve different purposes</a:t>
             </a:r>
           </a:p>
         </p:txBody>
@@ -9050,7 +9050,7 @@
               </a:defRPr>
             </a:pPr>
             <a:r>
-              <a:t>Đối chiếu dữ liệu: 08/10/2026 • Nguồn: mã dự án và evidence/</a:t>
+              <a:t>Data checked: 08 Oct 2026 • Sources: project code and evidence/</a:t>
             </a:r>
           </a:p>
         </p:txBody>
@@ -9226,7 +9226,7 @@
               </a:defRPr>
             </a:pPr>
             <a:r>
-              <a:t>Định nghĩa lớp</a:t>
+              <a:t>Class definitions</a:t>
             </a:r>
           </a:p>
         </p:txBody>
@@ -9293,7 +9293,7 @@
               </a:defRPr>
             </a:pPr>
             <a:r>
-              <a:t>Ví dụ: Person có đóng góp làm phim </a:t>
+              <a:t>A Person with filmmaking contributions </a:t>
             </a:r>
             <a:r>
               <a:rPr>
@@ -9433,7 +9433,7 @@
               </a:defRPr>
             </a:pPr>
             <a:r>
-              <a:t>Cardinality và functional</a:t>
+              <a:t>Cardinality and functional</a:t>
             </a:r>
           </a:p>
         </p:txBody>
@@ -9478,7 +9478,7 @@
               </a:defRPr>
             </a:pPr>
             <a:r>
-              <a:t>Contribution: exactly 1 người / phim / vai trò.</a:t>
+              <a:t>Contribution: exactly one person / film / role.</a:t>
             </a:r>
           </a:p>
           <a:p>
@@ -9500,7 +9500,7 @@
               </a:defRPr>
             </a:pPr>
             <a:r>
-              <a:t>Functional: nhiều nhất một giá trị theo OWL.</a:t>
+              <a:t>Functional: at most one value under OWL semantics.</a:t>
             </a:r>
           </a:p>
         </p:txBody>
@@ -9631,7 +9631,7 @@
               </a:defRPr>
             </a:pPr>
             <a:r>
-              <a:t>Inverse và disjointness</a:t>
+              <a:t>Inverse and disjointness</a:t>
             </a:r>
           </a:p>
         </p:txBody>
@@ -9716,7 +9716,7 @@
               </a:defRPr>
             </a:pPr>
             <a:r>
-              <a:t>Actor và Filmmaker không disjoint.</a:t>
+              <a:t>Actor and Filmmaker are not disjoint.</a:t>
             </a:r>
           </a:p>
         </p:txBody>
@@ -9847,7 +9847,7 @@
               </a:defRPr>
             </a:pPr>
             <a:r>
-              <a:t>Thế giới mở</a:t>
+              <a:t>Open-world assumption</a:t>
             </a:r>
           </a:p>
         </p:txBody>
@@ -9892,7 +9892,7 @@
               </a:defRPr>
             </a:pPr>
             <a:r>
-              <a:t>Thiếu thông tin </a:t>
+              <a:t>Missing information </a:t>
             </a:r>
             <a:r>
               <a:rPr>
@@ -9901,7 +9901,7 @@
               <a:t>≠</a:t>
             </a:r>
             <a:r>
-              <a:t> phủ định.</a:t>
+              <a:t> negation.</a:t>
             </a:r>
           </a:p>
           <a:p>
@@ -9923,7 +9923,7 @@
               </a:defRPr>
             </a:pPr>
             <a:r>
-              <a:t>Python kiểm tra trường bắt buộc; OWL không thay</a:t>
+              <a:t>Python validates required fields; OWL defines</a:t>
             </a:r>
           </a:p>
           <a:p>
@@ -9945,7 +9945,7 @@
               </a:defRPr>
             </a:pPr>
             <a:r>
-              <a:t>biểu mẫu.</a:t>
+              <a:t>meaning.</a:t>
             </a:r>
           </a:p>
         </p:txBody>
@@ -10104,7 +10104,7 @@
               </a:defRPr>
             </a:pPr>
             <a:r>
-              <a:t>YC1 · 14 lớp có kiểu được bổ sung</a:t>
+              <a:t>R1 · Fourteen classes with additional types</a:t>
             </a:r>
           </a:p>
         </p:txBody>
@@ -10149,7 +10149,7 @@
               </a:defRPr>
             </a:pPr>
             <a:r>
-              <a:t>Graph gốc có 0 cá thể gán sẵn cho cả 14 lớp này</a:t>
+              <a:t>None of these 14 types is asserted in the original data graph</a:t>
             </a:r>
           </a:p>
         </p:txBody>
@@ -10237,7 +10237,7 @@
               </a:defRPr>
             </a:pPr>
             <a:r>
-              <a:t>Đối chiếu dữ liệu: 08/10/2026 • Nguồn: mã dự án và evidence/</a:t>
+              <a:t>Data checked: 08 Oct 2026 • Sources: project code and evidence/</a:t>
             </a:r>
           </a:p>
         </p:txBody>
@@ -10370,7 +10370,7 @@
               </a:defRPr>
             </a:pPr>
             <a:r>
-              <a:t>Lớp</a:t>
+              <a:t>Class</a:t>
             </a:r>
           </a:p>
         </p:txBody>
@@ -10415,7 +10415,7 @@
               </a:defRPr>
             </a:pPr>
             <a:r>
-              <a:t>Điều kiện đọc bằng lời</a:t>
+              <a:t>Condition in plain language</a:t>
             </a:r>
           </a:p>
         </p:txBody>
@@ -10460,7 +10460,7 @@
               </a:defRPr>
             </a:pPr>
             <a:r>
-              <a:t>Số</a:t>
+              <a:t>Count</a:t>
             </a:r>
           </a:p>
         </p:txBody>
@@ -10505,7 +10505,7 @@
               </a:defRPr>
             </a:pPr>
             <a:r>
-              <a:t>Cách làm</a:t>
+              <a:t>Method</a:t>
             </a:r>
           </a:p>
         </p:txBody>
@@ -10638,7 +10638,7 @@
               </a:defRPr>
             </a:pPr>
             <a:r>
-              <a:t>Contribution có ActorRole</a:t>
+              <a:t>Contribution with ActorRole</a:t>
             </a:r>
           </a:p>
         </p:txBody>
@@ -10861,7 +10861,7 @@
               </a:defRPr>
             </a:pPr>
             <a:r>
-              <a:t>Contribution có DirectorRole</a:t>
+              <a:t>Contribution with DirectorRole</a:t>
             </a:r>
           </a:p>
         </p:txBody>
@@ -11084,7 +11084,7 @@
               </a:defRPr>
             </a:pPr>
             <a:r>
-              <a:t>Contribution có WriterRole</a:t>
+              <a:t>Contribution with WriterRole</a:t>
             </a:r>
           </a:p>
         </p:txBody>
@@ -11307,7 +11307,7 @@
               </a:defRPr>
             </a:pPr>
             <a:r>
-              <a:t>Contribution có ProducerRole</a:t>
+              <a:t>Contribution with ProducerRole</a:t>
             </a:r>
           </a:p>
         </p:txBody>
@@ -11530,7 +11530,7 @@
               </a:defRPr>
             </a:pPr>
             <a:r>
-              <a:t>Person có đóng góp diễn xuất</a:t>
+              <a:t>Person with acting contributions</a:t>
             </a:r>
           </a:p>
         </p:txBody>
@@ -11753,7 +11753,7 @@
               </a:defRPr>
             </a:pPr>
             <a:r>
-              <a:t>Person có đóng góp làm phim</a:t>
+              <a:t>Person with filmmaking contributions</a:t>
             </a:r>
           </a:p>
         </p:txBody>
@@ -11976,7 +11976,7 @@
               </a:defRPr>
             </a:pPr>
             <a:r>
-              <a:t>Person có giải thưởng riêng</a:t>
+              <a:t>Person who receives an award</a:t>
             </a:r>
           </a:p>
         </p:txBody>
@@ -12199,7 +12199,7 @@
               </a:defRPr>
             </a:pPr>
             <a:r>
-              <a:t>Film có ActionGenre</a:t>
+              <a:t>Film with ActionGenre</a:t>
             </a:r>
           </a:p>
         </p:txBody>
@@ -12422,7 +12422,7 @@
               </a:defRPr>
             </a:pPr>
             <a:r>
-              <a:t>Film có ComedyGenre</a:t>
+              <a:t>Film with ComedyGenre</a:t>
             </a:r>
           </a:p>
         </p:txBody>
@@ -12645,7 +12645,7 @@
               </a:defRPr>
             </a:pPr>
             <a:r>
-              <a:t>Film có DramaGenre</a:t>
+              <a:t>Film with DramaGenre</a:t>
             </a:r>
           </a:p>
         </p:txBody>
@@ -12868,7 +12868,7 @@
               </a:defRPr>
             </a:pPr>
             <a:r>
-              <a:t>Film có ScienceFictionGenre</a:t>
+              <a:t>Film with ScienceFictionGenre</a:t>
             </a:r>
           </a:p>
         </p:txBody>
@@ -13091,7 +13091,7 @@
               </a:defRPr>
             </a:pPr>
             <a:r>
-              <a:t>Film có giải thưởng</a:t>
+              <a:t>Film that receives an award</a:t>
             </a:r>
           </a:p>
         </p:txBody>
@@ -13314,7 +13314,7 @@
               </a:defRPr>
             </a:pPr>
             <a:r>
-              <a:t>Film có từ 2 IRI Genre</a:t>
+              <a:t>Film with at least 2 Genre IRIs</a:t>
             </a:r>
           </a:p>
         </p:txBody>
@@ -13404,7 +13404,7 @@
               </a:defRPr>
             </a:pPr>
             <a:r>
-              <a:t>Đếm IRI</a:t>
+              <a:t>IRI counting</a:t>
             </a:r>
           </a:p>
         </p:txBody>
@@ -13537,7 +13537,7 @@
               </a:defRPr>
             </a:pPr>
             <a:r>
-              <a:t>Công ty có từ 3 IRI Film</a:t>
+              <a:t>Company with at least 3 Film IRIs</a:t>
             </a:r>
           </a:p>
         </p:txBody>
@@ -13627,7 +13627,7 @@
               </a:defRPr>
             </a:pPr>
             <a:r>
-              <a:t>Đếm IRI</a:t>
+              <a:t>IRI counting</a:t>
             </a:r>
           </a:p>
         </p:txBody>
@@ -13672,7 +13672,7 @@
               </a:defRPr>
             </a:pPr>
             <a:r>
-              <a:t>12 lớp: OWL RL, HermiT/Pellet khớp số lượng. 2 lớp cuối: COUNT DISTINCT; DL có 0 cá thể.</a:t>
+              <a:t>12 classes: OWL RL, with matching HermiT/Pellet counts. Last 2: COUNT DISTINCT; DL instances: 0.</a:t>
             </a:r>
           </a:p>
         </p:txBody>
@@ -13831,7 +13831,7 @@
               </a:defRPr>
             </a:pPr>
             <a:r>
-              <a:t>YC1 · Ví dụ suy luận: Christopher Nolan</a:t>
+              <a:t>R1 · Inference example: Christopher Nolan</a:t>
             </a:r>
           </a:p>
         </p:txBody>
@@ -13876,7 +13876,7 @@
               </a:defRPr>
             </a:pPr>
             <a:r>
-              <a:t>Contribution với DirectorRole </a:t>
+              <a:t>DirectorRole </a:t>
             </a:r>
             <a:r>
               <a:rPr>
@@ -13982,7 +13982,7 @@
               </a:defRPr>
             </a:pPr>
             <a:r>
-              <a:t>Đối chiếu dữ liệu: 08/10/2026 • Nguồn: mã dự án và evidence/</a:t>
+              <a:t>Data checked: 08 Oct 2026 • Sources: project code and evidence/</a:t>
             </a:r>
           </a:p>
         </p:txBody>
@@ -14158,7 +14158,7 @@
               </a:defRPr>
             </a:pPr>
             <a:r>
-              <a:t>DỮ KIỆN</a:t>
+              <a:t>FACTS</a:t>
             </a:r>
           </a:p>
         </p:txBody>
@@ -14404,7 +14404,7 @@
               </a:defRPr>
             </a:pPr>
             <a:r>
-              <a:t>LUẬT 1 · hasValue</a:t>
+              <a:t>RULE 1 · hasValue</a:t>
             </a:r>
           </a:p>
         </p:txBody>
@@ -14628,7 +14628,7 @@
               </a:defRPr>
             </a:pPr>
             <a:r>
-              <a:t>LUẬT 2 · SOME + OR</a:t>
+              <a:t>RULE 2 · SOME + OR</a:t>
             </a:r>
           </a:p>
         </p:txBody>
@@ -14680,14 +14680,14 @@
       </p:sp>
       <p:sp>
         <p:nvSpPr>
-          <p:cNvPr id="23" name="PHOTO_P06"/>
+          <p:cNvPr id="23" name="PHOTO_P06_0"/>
           <p:cNvSpPr/>
           <p:nvPr/>
         </p:nvSpPr>
         <p:spPr>
           <a:xfrm>
             <a:off x="7818120" y="2578608"/>
-            <a:ext cx="6080760" cy="4709160"/>
+            <a:ext cx="6080760" cy="4590288"/>
           </a:xfrm>
           <a:prstGeom prst="roundRect">
             <a:avLst/>
@@ -14725,7 +14725,7 @@
       </p:sp>
       <p:sp>
         <p:nvSpPr>
-          <p:cNvPr id="24" name="TextBox 23"/>
+          <p:cNvPr id="24" name="PHOTO_P06_1"/>
           <p:cNvSpPr txBox="1"/>
           <p:nvPr/>
         </p:nvSpPr>
@@ -14770,7 +14770,7 @@
       </p:sp>
       <p:sp>
         <p:nvSpPr>
-          <p:cNvPr id="25" name="Rounded Rectangle 24"/>
+          <p:cNvPr id="25" name="PHOTO_P06_2"/>
           <p:cNvSpPr/>
           <p:nvPr/>
         </p:nvSpPr>
@@ -14813,7 +14813,7 @@
       </p:sp>
       <p:sp>
         <p:nvSpPr>
-          <p:cNvPr id="26" name="TextBox 25"/>
+          <p:cNvPr id="26" name="PHOTO_P06_3"/>
           <p:cNvSpPr txBox="1"/>
           <p:nvPr/>
         </p:nvSpPr>
@@ -14858,7 +14858,7 @@
       </p:sp>
       <p:sp>
         <p:nvSpPr>
-          <p:cNvPr id="27" name="TextBox 26"/>
+          <p:cNvPr id="27" name="PHOTO_P06_4"/>
           <p:cNvSpPr txBox="1"/>
           <p:nvPr/>
         </p:nvSpPr>
@@ -14903,7 +14903,7 @@
       </p:sp>
       <p:sp>
         <p:nvSpPr>
-          <p:cNvPr id="28" name="TextBox 27"/>
+          <p:cNvPr id="28" name="PHOTO_P06_5"/>
           <p:cNvSpPr txBox="1"/>
           <p:nvPr/>
         </p:nvSpPr>
@@ -14966,7 +14966,7 @@
       </p:sp>
       <p:sp>
         <p:nvSpPr>
-          <p:cNvPr id="29" name="TextBox 28"/>
+          <p:cNvPr id="29" name="PHOTO_P06_6"/>
           <p:cNvSpPr txBox="1"/>
           <p:nvPr/>
         </p:nvSpPr>
@@ -15020,7 +15020,7 @@
       </p:sp>
       <p:sp>
         <p:nvSpPr>
-          <p:cNvPr id="30" name="TextBox 29"/>
+          <p:cNvPr id="30" name="PHOTO_P06_7"/>
           <p:cNvSpPr txBox="1"/>
           <p:nvPr/>
         </p:nvSpPr>
@@ -15087,13 +15087,13 @@
       </p:sp>
       <p:sp>
         <p:nvSpPr>
-          <p:cNvPr id="31" name="TextBox 30"/>
-          <p:cNvSpPr txBox="1"/>
-          <p:nvPr/>
-        </p:nvSpPr>
-        <p:spPr>
-          <a:xfrm>
-            <a:off x="8046720" y="6949440"/>
+          <p:cNvPr id="31" name="PHOTO_P06_8"/>
+          <p:cNvSpPr txBox="1"/>
+          <p:nvPr/>
+        </p:nvSpPr>
+        <p:spPr>
+          <a:xfrm>
+            <a:off x="8046720" y="6830568"/>
             <a:ext cx="5623560" cy="283464"/>
           </a:xfrm>
           <a:prstGeom prst="rect">
@@ -15170,7 +15170,7 @@
               </a:defRPr>
             </a:pPr>
             <a:r>
-              <a:t>Nolan: Person (gốc) </a:t>
+              <a:t>Nolan: Person (asserted) </a:t>
             </a:r>
             <a:r>
               <a:rPr>
@@ -15179,7 +15179,7 @@
               <a:t>→</a:t>
             </a:r>
             <a:r>
-              <a:t> Person + Filmmaker + AwardWinner (khi nạp file phân loại).</a:t>
+              <a:t> Person + Filmmaker + AwardWinner (with inferred types).</a:t>
             </a:r>
           </a:p>
         </p:txBody>
@@ -15338,7 +15338,7 @@
               </a:defRPr>
             </a:pPr>
             <a:r>
-              <a:t>YC1 · Cardinality: ngưỡng 2 và ngưỡng 3</a:t>
+              <a:t>R1 · Cardinality: thresholds of two and three</a:t>
             </a:r>
           </a:p>
         </p:txBody>
@@ -15383,7 +15383,7 @@
               </a:defRPr>
             </a:pPr>
             <a:r>
-              <a:t>Định nghĩa OWL và cách ứng dụng đếm IRI phải được phân biệt</a:t>
+              <a:t>Distinguish OWL definitions from counting distinct RDF terms</a:t>
             </a:r>
           </a:p>
         </p:txBody>
@@ -15471,7 +15471,7 @@
               </a:defRPr>
             </a:pPr>
             <a:r>
-              <a:t>Đối chiếu dữ liệu: 08/10/2026 • Nguồn: mã dự án và evidence/</a:t>
+              <a:t>Data checked: 08 Oct 2026 • Sources: project code and evidence/</a:t>
             </a:r>
           </a:p>
         </p:txBody>
@@ -15714,7 +15714,7 @@
               </a:defRPr>
             </a:pPr>
             <a:r>
-              <a:t>Kết quả ứng dụng: 30/30 phim.</a:t>
+              <a:t>Application: 30/30 films; DL: 0 inferred.</a:t>
             </a:r>
           </a:p>
         </p:txBody>
@@ -15912,7 +15912,7 @@
               </a:defRPr>
             </a:pPr>
             <a:r>
-              <a:t>6 công ty; Warner Bros.: 11 phim.</a:t>
+              <a:t>Application: 6 companies; DL: 0 inferred.</a:t>
             </a:r>
           </a:p>
         </p:txBody>
@@ -15957,7 +15957,7 @@
               </a:defRPr>
             </a:pPr>
             <a:r>
-              <a:t>Đếm IRI </a:t>
+              <a:t>Distinct IRIs </a:t>
             </a:r>
             <a:r>
               <a:rPr>
@@ -15966,21 +15966,21 @@
               <a:t>≠</a:t>
             </a:r>
             <a:r>
-              <a:t> chứng minh cá thể khác nhau theo OWL DL.</a:t>
-            </a:r>
-          </a:p>
-        </p:txBody>
-      </p:sp>
-      <p:sp>
-        <p:nvSpPr>
-          <p:cNvPr id="18" name="PHOTO_P07"/>
+              <a:t> provably different OWL individuals.</a:t>
+            </a:r>
+          </a:p>
+        </p:txBody>
+      </p:sp>
+      <p:sp>
+        <p:nvSpPr>
+          <p:cNvPr id="18" name="PHOTO_P07_0"/>
           <p:cNvSpPr/>
           <p:nvPr/>
         </p:nvSpPr>
         <p:spPr>
           <a:xfrm>
             <a:off x="7818120" y="2578608"/>
-            <a:ext cx="6080760" cy="4709160"/>
+            <a:ext cx="6080760" cy="4590288"/>
           </a:xfrm>
           <a:prstGeom prst="roundRect">
             <a:avLst/>
@@ -16018,7 +16018,7 @@
       </p:sp>
       <p:sp>
         <p:nvSpPr>
-          <p:cNvPr id="19" name="TextBox 18"/>
+          <p:cNvPr id="19" name="PHOTO_P07_1"/>
           <p:cNvSpPr txBox="1"/>
           <p:nvPr/>
         </p:nvSpPr>
@@ -16063,7 +16063,7 @@
       </p:sp>
       <p:sp>
         <p:nvSpPr>
-          <p:cNvPr id="20" name="Rounded Rectangle 19"/>
+          <p:cNvPr id="20" name="PHOTO_P07_2"/>
           <p:cNvSpPr/>
           <p:nvPr/>
         </p:nvSpPr>
@@ -16106,7 +16106,7 @@
       </p:sp>
       <p:sp>
         <p:nvSpPr>
-          <p:cNvPr id="21" name="TextBox 20"/>
+          <p:cNvPr id="21" name="PHOTO_P07_3"/>
           <p:cNvSpPr txBox="1"/>
           <p:nvPr/>
         </p:nvSpPr>
@@ -16151,7 +16151,7 @@
       </p:sp>
       <p:sp>
         <p:nvSpPr>
-          <p:cNvPr id="22" name="TextBox 21"/>
+          <p:cNvPr id="22" name="PHOTO_P07_4"/>
           <p:cNvSpPr txBox="1"/>
           <p:nvPr/>
         </p:nvSpPr>
@@ -16196,7 +16196,7 @@
       </p:sp>
       <p:sp>
         <p:nvSpPr>
-          <p:cNvPr id="23" name="TextBox 22"/>
+          <p:cNvPr id="23" name="PHOTO_P07_5"/>
           <p:cNvSpPr txBox="1"/>
           <p:nvPr/>
         </p:nvSpPr>
@@ -16259,7 +16259,7 @@
       </p:sp>
       <p:sp>
         <p:nvSpPr>
-          <p:cNvPr id="24" name="TextBox 23"/>
+          <p:cNvPr id="24" name="PHOTO_P07_6"/>
           <p:cNvSpPr txBox="1"/>
           <p:nvPr/>
         </p:nvSpPr>
@@ -16304,7 +16304,7 @@
       </p:sp>
       <p:sp>
         <p:nvSpPr>
-          <p:cNvPr id="25" name="TextBox 24"/>
+          <p:cNvPr id="25" name="PHOTO_P07_7"/>
           <p:cNvSpPr txBox="1"/>
           <p:nvPr/>
         </p:nvSpPr>
@@ -16349,13 +16349,13 @@
       </p:sp>
       <p:sp>
         <p:nvSpPr>
-          <p:cNvPr id="26" name="TextBox 25"/>
-          <p:cNvSpPr txBox="1"/>
-          <p:nvPr/>
-        </p:nvSpPr>
-        <p:spPr>
-          <a:xfrm>
-            <a:off x="8046720" y="6949440"/>
+          <p:cNvPr id="26" name="PHOTO_P07_8"/>
+          <p:cNvSpPr txBox="1"/>
+          <p:nvPr/>
+        </p:nvSpPr>
+        <p:spPr>
+          <a:xfrm>
+            <a:off x="8046720" y="6830568"/>
             <a:ext cx="5623560" cy="283464"/>
           </a:xfrm>
           <a:prstGeom prst="rect">
@@ -16432,7 +16432,7 @@
               </a:defRPr>
             </a:pPr>
             <a:r>
-              <a:t>FILTER namespace nội bộ + COUNT(DISTINCT IRI): tránh đếm các alias sameAs thành nhiều cá thể.</a:t>
+              <a:t>Local namespace filter + COUNT(DISTINCT IRI) avoids counting sameAs aliases as separate values.</a:t>
             </a:r>
           </a:p>
         </p:txBody>
@@ -16591,7 +16591,7 @@
               </a:defRPr>
             </a:pPr>
             <a:r>
-              <a:t>YC2 · Thu thập thật và giữ xuất xứ</a:t>
+              <a:t>R2 · Real collection and traceable sources</a:t>
             </a:r>
           </a:p>
         </p:txBody>
@@ -16636,7 +16636,7 @@
               </a:defRPr>
             </a:pPr>
             <a:r>
-              <a:t>76/76 phản hồi gốc có, 76/76 SHA-256 khớp</a:t>
+              <a:t>76/76 raw responses present · 76/76 SHA-256 hashes match</a:t>
             </a:r>
           </a:p>
         </p:txBody>
@@ -16724,7 +16724,7 @@
               </a:defRPr>
             </a:pPr>
             <a:r>
-              <a:t>Đối chiếu dữ liệu: 08/10/2026 • Nguồn: mã dự án và evidence/</a:t>
+              <a:t>Data checked: 08 Oct 2026 • Sources: project code and evidence/</a:t>
             </a:r>
           </a:p>
         </p:txBody>
@@ -16900,7 +16900,7 @@
               </a:defRPr>
             </a:pPr>
             <a:r>
-              <a:t>Xác định đúng thực thể</a:t>
+              <a:t>Resolve the right entity</a:t>
             </a:r>
           </a:p>
         </p:txBody>
@@ -16945,7 +16945,7 @@
               </a:defRPr>
             </a:pPr>
             <a:r>
-              <a:t>Wikidata: sitelink Wikipedia chính xác.</a:t>
+              <a:t>Wikidata: exact Wikipedia sitelink.</a:t>
             </a:r>
           </a:p>
           <a:p>
@@ -16967,7 +16967,7 @@
               </a:defRPr>
             </a:pPr>
             <a:r>
-              <a:t>DBpedia: root phải được khai báo Film.</a:t>
+              <a:t>DBpedia: matched root must be typed Film.</a:t>
             </a:r>
           </a:p>
         </p:txBody>
@@ -17098,7 +17098,7 @@
               </a:defRPr>
             </a:pPr>
             <a:r>
-              <a:t>Thuộc tính thu thập</a:t>
+              <a:t>Collect relevant claims</a:t>
             </a:r>
           </a:p>
         </p:txBody>
@@ -17143,7 +17143,7 @@
               </a:defRPr>
             </a:pPr>
             <a:r>
-              <a:t>P57 / P161 / P58 / P162: người và vai trò.</a:t>
+              <a:t>P57 / P161 / P58 / P162: people and roles.</a:t>
             </a:r>
           </a:p>
           <a:p>
@@ -17165,7 +17165,7 @@
               </a:defRPr>
             </a:pPr>
             <a:r>
-              <a:t>P166: giải; P272: công ty; còn năm/thời lượng/thể loại.</a:t>
+              <a:t>P166: awards; P272: companies; year/runtime/genre.</a:t>
             </a:r>
           </a:p>
         </p:txBody>
@@ -17296,7 +17296,7 @@
               </a:defRPr>
             </a:pPr>
             <a:r>
-              <a:t>Truy nguồn và tái lập</a:t>
+              <a:t>Trace and reproduce</a:t>
             </a:r>
           </a:p>
         </p:txBody>
@@ -17341,7 +17341,7 @@
               </a:defRPr>
             </a:pPr>
             <a:r>
-              <a:t>URL + thời điểm + HTTP status + SHA-256.</a:t>
+              <a:t>URL + retrieval time + HTTP status + SHA-256.</a:t>
             </a:r>
           </a:p>
           <a:p>
@@ -17363,7 +17363,7 @@
               </a:defRPr>
             </a:pPr>
             <a:r>
-              <a:t>collect từ cache </a:t>
+              <a:t>Cached collect </a:t>
             </a:r>
             <a:r>
               <a:rPr>
@@ -17381,14 +17381,14 @@
               <a:t>→</a:t>
             </a:r>
             <a:r>
-              <a:t> validate đã chạy lại.</a:t>
+              <a:t> validate rerun.</a:t>
             </a:r>
           </a:p>
         </p:txBody>
       </p:sp>
       <p:pic>
         <p:nvPicPr>
-          <p:cNvPr id="21" name="Picture 20" descr="03_sources.png"/>
+          <p:cNvPr id="21" name="Picture 20" descr="12_sources_en.png"/>
           <p:cNvPicPr>
             <a:picLocks noChangeAspect="1"/>
           </p:cNvPicPr>
@@ -17402,8 +17402,8 @@
         </p:blipFill>
         <p:spPr>
           <a:xfrm>
-            <a:off x="7726679" y="3236976"/>
-            <a:ext cx="6263640" cy="3520440"/>
+            <a:off x="7726679" y="2821686"/>
+            <a:ext cx="6263640" cy="4351020"/>
           </a:xfrm>
           <a:prstGeom prst="rect">
             <a:avLst/>
@@ -17450,7 +17450,7 @@
               </a:defRPr>
             </a:pPr>
             <a:r>
-              <a:t>Ảnh phải: metadata và trích phản hồi Wikidata thật; hash kiểm tra toàn vẹn, không chứng minh độ đúng ngoài đời.</a:t>
+              <a:t>Right: actual Wikidata metadata and response excerpt. Hashes verify integrity, not real-world truth.</a:t>
             </a:r>
           </a:p>
         </p:txBody>
@@ -17609,7 +17609,7 @@
               </a:defRPr>
             </a:pPr>
             <a:r>
-              <a:t>YC3 · RDF và giá trị có datatype</a:t>
+              <a:t>R3 · RDF and typed literal values</a:t>
             </a:r>
           </a:p>
         </p:txBody>
@@ -17654,7 +17654,7 @@
               </a:defRPr>
             </a:pPr>
             <a:r>
-              <a:t>19.339 triple dữ liệu · 518 triple schema · Turtle / JSON-LD / OWL</a:t>
+              <a:t>19,339 data triples · 518 schema triples · Turtle / JSON-LD / OWL</a:t>
             </a:r>
           </a:p>
         </p:txBody>
@@ -17742,7 +17742,7 @@
               </a:defRPr>
             </a:pPr>
             <a:r>
-              <a:t>Đối chiếu dữ liệu: 08/10/2026 • Nguồn: mã dự án và evidence/</a:t>
+              <a:t>Data checked: 08 Oct 2026 • Sources: project code and evidence/</a:t>
             </a:r>
           </a:p>
         </p:txBody>
@@ -18051,7 +18051,7 @@
               </a:defRPr>
             </a:pPr>
             <a:r>
-              <a:t>Datatype property</a:t>
+              <a:t>Data property</a:t>
             </a:r>
           </a:p>
         </p:txBody>
@@ -18096,7 +18096,7 @@
               </a:defRPr>
             </a:pPr>
             <a:r>
-              <a:t>Kiểu xsd:</a:t>
+              <a:t>xsd: type</a:t>
             </a:r>
           </a:p>
         </p:txBody>
@@ -18901,14 +18901,14 @@
       </p:sp>
       <p:sp>
         <p:nvSpPr>
-          <p:cNvPr id="32" name="PHOTO_P08"/>
+          <p:cNvPr id="32" name="PHOTO_P08_0"/>
           <p:cNvSpPr/>
           <p:nvPr/>
         </p:nvSpPr>
         <p:spPr>
           <a:xfrm>
             <a:off x="7818120" y="2578608"/>
-            <a:ext cx="6080760" cy="4709160"/>
+            <a:ext cx="6080760" cy="4590288"/>
           </a:xfrm>
           <a:prstGeom prst="roundRect">
             <a:avLst/>
@@ -18946,7 +18946,7 @@
       </p:sp>
       <p:sp>
         <p:nvSpPr>
-          <p:cNvPr id="33" name="TextBox 32"/>
+          <p:cNvPr id="33" name="PHOTO_P08_1"/>
           <p:cNvSpPr txBox="1"/>
           <p:nvPr/>
         </p:nvSpPr>
@@ -18991,7 +18991,7 @@
       </p:sp>
       <p:sp>
         <p:nvSpPr>
-          <p:cNvPr id="34" name="Rounded Rectangle 33"/>
+          <p:cNvPr id="34" name="PHOTO_P08_2"/>
           <p:cNvSpPr/>
           <p:nvPr/>
         </p:nvSpPr>
@@ -19034,7 +19034,7 @@
       </p:sp>
       <p:sp>
         <p:nvSpPr>
-          <p:cNvPr id="35" name="TextBox 34"/>
+          <p:cNvPr id="35" name="PHOTO_P08_3"/>
           <p:cNvSpPr txBox="1"/>
           <p:nvPr/>
         </p:nvSpPr>
@@ -19079,7 +19079,7 @@
       </p:sp>
       <p:sp>
         <p:nvSpPr>
-          <p:cNvPr id="36" name="TextBox 35"/>
+          <p:cNvPr id="36" name="PHOTO_P08_4"/>
           <p:cNvSpPr txBox="1"/>
           <p:nvPr/>
         </p:nvSpPr>
@@ -19124,7 +19124,7 @@
       </p:sp>
       <p:sp>
         <p:nvSpPr>
-          <p:cNvPr id="37" name="TextBox 36"/>
+          <p:cNvPr id="37" name="PHOTO_P08_5"/>
           <p:cNvSpPr txBox="1"/>
           <p:nvPr/>
         </p:nvSpPr>
@@ -19187,7 +19187,7 @@
       </p:sp>
       <p:sp>
         <p:nvSpPr>
-          <p:cNvPr id="38" name="TextBox 37"/>
+          <p:cNvPr id="38" name="PHOTO_P08_6"/>
           <p:cNvSpPr txBox="1"/>
           <p:nvPr/>
         </p:nvSpPr>
@@ -19232,7 +19232,7 @@
       </p:sp>
       <p:sp>
         <p:nvSpPr>
-          <p:cNvPr id="39" name="TextBox 38"/>
+          <p:cNvPr id="39" name="PHOTO_P08_7"/>
           <p:cNvSpPr txBox="1"/>
           <p:nvPr/>
         </p:nvSpPr>
@@ -19277,13 +19277,13 @@
       </p:sp>
       <p:sp>
         <p:nvSpPr>
-          <p:cNvPr id="40" name="TextBox 39"/>
-          <p:cNvSpPr txBox="1"/>
-          <p:nvPr/>
-        </p:nvSpPr>
-        <p:spPr>
-          <a:xfrm>
-            <a:off x="8046720" y="6949440"/>
+          <p:cNvPr id="40" name="PHOTO_P08_8"/>
+          <p:cNvSpPr txBox="1"/>
+          <p:nvPr/>
+        </p:nvSpPr>
+        <p:spPr>
+          <a:xfrm>
+            <a:off x="8046720" y="6830568"/>
             <a:ext cx="5623560" cy="283464"/>
           </a:xfrm>
           <a:prstGeom prst="rect">
@@ -19474,7 +19474,7 @@
               </a:defRPr>
             </a:pPr>
             <a:r>
-              <a:t>YC3–YC4 · Từ RDF đến Linked Open Data</a:t>
+              <a:t>R3–R4 · From RDF to Linked Open Data</a:t>
             </a:r>
           </a:p>
         </p:txBody>
@@ -19519,7 +19519,7 @@
               </a:defRPr>
             </a:pPr>
             <a:r>
-              <a:t>Mức sao cộng dồn; công bố và liên kết được kiểm chứng trên bản hiện tại</a:t>
+              <a:t>Star levels are cumulative · publication and links are verified</a:t>
             </a:r>
           </a:p>
         </p:txBody>
@@ -19607,7 +19607,7 @@
               </a:defRPr>
             </a:pPr>
             <a:r>
-              <a:t>Đối chiếu dữ liệu: 08/10/2026 • Nguồn: mã dự án và evidence/</a:t>
+              <a:t>Data checked: 08 Oct 2026 • Sources: project code and evidence/</a:t>
             </a:r>
           </a:p>
         </p:txBody>
@@ -19740,7 +19740,7 @@
               </a:defRPr>
             </a:pPr>
             <a:r>
-              <a:t>1 sao</a:t>
+              <a:t>1 star</a:t>
             </a:r>
           </a:p>
         </p:txBody>
@@ -19785,7 +19785,7 @@
               </a:defRPr>
             </a:pPr>
             <a:r>
-              <a:t>Public + giấy phép mở</a:t>
+              <a:t>Public data + open license</a:t>
             </a:r>
           </a:p>
         </p:txBody>
@@ -19918,7 +19918,7 @@
               </a:defRPr>
             </a:pPr>
             <a:r>
-              <a:t>2 sao</a:t>
+              <a:t>2 stars</a:t>
             </a:r>
           </a:p>
         </p:txBody>
@@ -19963,7 +19963,7 @@
               </a:defRPr>
             </a:pPr>
             <a:r>
-              <a:t>Dữ liệu có cấu trúc</a:t>
+              <a:t>Structured data</a:t>
             </a:r>
           </a:p>
         </p:txBody>
@@ -20008,7 +20008,7 @@
               </a:defRPr>
             </a:pPr>
             <a:r>
-              <a:t>Phim, người, vai trò, thuộc tính</a:t>
+              <a:t>Films, people, roles and attributes</a:t>
             </a:r>
           </a:p>
         </p:txBody>
@@ -20096,7 +20096,7 @@
               </a:defRPr>
             </a:pPr>
             <a:r>
-              <a:t>3 sao</a:t>
+              <a:t>3 stars</a:t>
             </a:r>
           </a:p>
         </p:txBody>
@@ -20141,7 +20141,7 @@
               </a:defRPr>
             </a:pPr>
             <a:r>
-              <a:t>Định dạng mở</a:t>
+              <a:t>Open formats</a:t>
             </a:r>
           </a:p>
         </p:txBody>
@@ -20274,7 +20274,7 @@
               </a:defRPr>
             </a:pPr>
             <a:r>
-              <a:t>4 sao</a:t>
+              <a:t>4 stars</a:t>
             </a:r>
           </a:p>
         </p:txBody>
@@ -20319,7 +20319,7 @@
               </a:defRPr>
             </a:pPr>
             <a:r>
-              <a:t>HTTP IRI + RDF + tra cứu</a:t>
+              <a:t>HTTP IRIs + RDF + lookup</a:t>
             </a:r>
           </a:p>
         </p:txBody>
@@ -20364,7 +20364,7 @@
               </a:defRPr>
             </a:pPr>
             <a:r>
-              <a:t>Mô tả HTML, JSON-LD và RDF</a:t>
+              <a:t>HTML, JSON-LD and RDF descriptions</a:t>
             </a:r>
           </a:p>
         </p:txBody>
@@ -20452,7 +20452,7 @@
               </a:defRPr>
             </a:pPr>
             <a:r>
-              <a:t>5 sao</a:t>
+              <a:t>5 stars</a:t>
             </a:r>
           </a:p>
         </p:txBody>
@@ -20497,7 +20497,7 @@
               </a:defRPr>
             </a:pPr>
             <a:r>
-              <a:t>Liên kết dataset khác</a:t>
+              <a:t>Links to external datasets</a:t>
             </a:r>
           </a:p>
         </p:txBody>
@@ -20542,7 +20542,7 @@
               </a:defRPr>
             </a:pPr>
             <a:r>
-              <a:t>1.699 Wikidata + 28 DBpedia</a:t>
+              <a:t>1,699 Wikidata + 28 DBpedia</a:t>
             </a:r>
           </a:p>
         </p:txBody>
@@ -20587,7 +20587,7 @@
               </a:defRPr>
             </a:pPr>
             <a:r>
-              <a:t>sameAs: cùng một thực thể. sourceSnapshot: xuất xứ. 4 graph public kiểm tra đều khớp local.</a:t>
+              <a:t>sameAs: shared identity. sourceSnapshot: provenance. All four checked public RDF graphs match local data.</a:t>
             </a:r>
           </a:p>
         </p:txBody>
@@ -20746,7 +20746,7 @@
               </a:defRPr>
             </a:pPr>
             <a:r>
-              <a:t>YC3 · Tra cứu IRI của Inception</a:t>
+              <a:t>R3 · Looking up Inception’s IRI</a:t>
             </a:r>
           </a:p>
         </p:txBody>
@@ -20791,7 +20791,7 @@
               </a:defRPr>
             </a:pPr>
             <a:r>
-              <a:t>Một định danh có mô tả cho người đọc và dữ liệu máy có thể đọc</a:t>
+              <a:t>One identifier offers readable and machine-readable descriptions</a:t>
             </a:r>
           </a:p>
         </p:txBody>
@@ -20879,7 +20879,7 @@
               </a:defRPr>
             </a:pPr>
             <a:r>
-              <a:t>Đối chiếu dữ liệu: 08/10/2026 • Nguồn: mã dự án và evidence/</a:t>
+              <a:t>Data checked: 08 Oct 2026 • Sources: project code and evidence/</a:t>
             </a:r>
           </a:p>
         </p:txBody>
@@ -20955,14 +20955,14 @@
       </p:pic>
       <p:sp>
         <p:nvSpPr>
-          <p:cNvPr id="10" name="PHOTO_P09"/>
+          <p:cNvPr id="10" name="PHOTO_P09_0"/>
           <p:cNvSpPr/>
           <p:nvPr/>
         </p:nvSpPr>
         <p:spPr>
           <a:xfrm>
             <a:off x="7818120" y="2578608"/>
-            <a:ext cx="6080760" cy="4709160"/>
+            <a:ext cx="6080760" cy="4590288"/>
           </a:xfrm>
           <a:prstGeom prst="roundRect">
             <a:avLst/>
@@ -21000,7 +21000,7 @@
       </p:sp>
       <p:sp>
         <p:nvSpPr>
-          <p:cNvPr id="11" name="TextBox 10"/>
+          <p:cNvPr id="11" name="PHOTO_P09_1"/>
           <p:cNvSpPr txBox="1"/>
           <p:nvPr/>
         </p:nvSpPr>
@@ -21045,7 +21045,7 @@
       </p:sp>
       <p:sp>
         <p:nvSpPr>
-          <p:cNvPr id="12" name="Rounded Rectangle 11"/>
+          <p:cNvPr id="12" name="PHOTO_P09_2"/>
           <p:cNvSpPr/>
           <p:nvPr/>
         </p:nvSpPr>
@@ -21088,7 +21088,7 @@
       </p:sp>
       <p:sp>
         <p:nvSpPr>
-          <p:cNvPr id="13" name="TextBox 12"/>
+          <p:cNvPr id="13" name="PHOTO_P09_3"/>
           <p:cNvSpPr txBox="1"/>
           <p:nvPr/>
         </p:nvSpPr>
@@ -21133,7 +21133,7 @@
       </p:sp>
       <p:sp>
         <p:nvSpPr>
-          <p:cNvPr id="14" name="TextBox 13"/>
+          <p:cNvPr id="14" name="PHOTO_P09_4"/>
           <p:cNvSpPr txBox="1"/>
           <p:nvPr/>
         </p:nvSpPr>
@@ -21178,7 +21178,7 @@
       </p:sp>
       <p:sp>
         <p:nvSpPr>
-          <p:cNvPr id="15" name="TextBox 14"/>
+          <p:cNvPr id="15" name="PHOTO_P09_5"/>
           <p:cNvSpPr txBox="1"/>
           <p:nvPr/>
         </p:nvSpPr>
@@ -21223,7 +21223,7 @@
       </p:sp>
       <p:sp>
         <p:nvSpPr>
-          <p:cNvPr id="16" name="TextBox 15"/>
+          <p:cNvPr id="16" name="PHOTO_P09_6"/>
           <p:cNvSpPr txBox="1"/>
           <p:nvPr/>
         </p:nvSpPr>
@@ -21277,7 +21277,7 @@
       </p:sp>
       <p:sp>
         <p:nvSpPr>
-          <p:cNvPr id="17" name="TextBox 16"/>
+          <p:cNvPr id="17" name="PHOTO_P09_7"/>
           <p:cNvSpPr txBox="1"/>
           <p:nvPr/>
         </p:nvSpPr>
@@ -21344,13 +21344,13 @@
       </p:sp>
       <p:sp>
         <p:nvSpPr>
-          <p:cNvPr id="18" name="TextBox 17"/>
-          <p:cNvSpPr txBox="1"/>
-          <p:nvPr/>
-        </p:nvSpPr>
-        <p:spPr>
-          <a:xfrm>
-            <a:off x="8046720" y="6949440"/>
+          <p:cNvPr id="18" name="PHOTO_P09_8"/>
+          <p:cNvSpPr txBox="1"/>
+          <p:nvPr/>
+        </p:nvSpPr>
+        <p:spPr>
+          <a:xfrm>
+            <a:off x="8046720" y="6830568"/>
             <a:ext cx="5623560" cy="283464"/>
           </a:xfrm>
           <a:prstGeom prst="rect">
@@ -21427,7 +21427,7 @@
               </a:defRPr>
             </a:pPr>
             <a:r>
-              <a:t>Ảnh trái: ứng dụng thật. Ảnh phải: cần chụp Individuals của Inception trong Movie_Knowledge_Graph.owl.</a:t>
+              <a:t>Left: real application screenshot. Right: pending Protégé evidence for Inception in the main Knowledge Graph.</a:t>
             </a:r>
           </a:p>
         </p:txBody>
@@ -21586,7 +21586,7 @@
               </a:defRPr>
             </a:pPr>
             <a:r>
-              <a:t>YC5 · Truy vấn Inception trên Web</a:t>
+              <a:t>R5 · Querying Inception on the Web</a:t>
             </a:r>
           </a:p>
         </p:txBody>
@@ -21640,7 +21640,7 @@
               <a:t>→</a:t>
             </a:r>
             <a:r>
-              <a:t> bảng gồm title, year, runtimeMinutes và director</a:t>
+              <a:t> title, year, runtimeMinutes and director</a:t>
             </a:r>
           </a:p>
         </p:txBody>
@@ -21728,7 +21728,7 @@
               </a:defRPr>
             </a:pPr>
             <a:r>
-              <a:t>Đối chiếu dữ liệu: 08/10/2026 • Nguồn: mã dự án và evidence/</a:t>
+              <a:t>Data checked: 08 Oct 2026 • Sources: project code and evidence/</a:t>
             </a:r>
           </a:p>
         </p:txBody>
@@ -22146,7 +22146,7 @@
               </a:defRPr>
             </a:pPr>
             <a:r>
-              <a:t>2010 · 148 phút · Nolan</a:t>
+              <a:t>2010 · 148 minutes · Nolan</a:t>
             </a:r>
           </a:p>
         </p:txBody>
@@ -22191,7 +22191,29 @@
               </a:defRPr>
             </a:pPr>
             <a:r>
-              <a:t>SELECT lấy cột; WHERE khớp mẫu; OPTIONAL giữ dòng.</a:t>
+              <a:t>SELECT chooses columns; WHERE matches; OPTIONAL</a:t>
+            </a:r>
+          </a:p>
+          <a:p>
+            <a:pPr>
+              <a:lnSpc>
+                <a:spcPts val="1920"/>
+              </a:lnSpc>
+              <a:spcBef>
+                <a:spcPts val="0"/>
+              </a:spcBef>
+              <a:spcAft>
+                <a:spcPts val="0"/>
+              </a:spcAft>
+              <a:defRPr sz="1500" b="0">
+                <a:solidFill>
+                  <a:srgbClr val="506776"/>
+                </a:solidFill>
+                <a:latin typeface="Be Vietnam Pro"/>
+              </a:defRPr>
+            </a:pPr>
+            <a:r>
+              <a:t>preserves rows.</a:t>
             </a:r>
           </a:p>
         </p:txBody>
@@ -22260,7 +22282,7 @@
               </a:defRPr>
             </a:pPr>
             <a:r>
-              <a:t>Dùng PREFIX của queries/02_inception.rq. Kết quả thật: 2010 · 148 phút · Christopher Nolan.</a:t>
+              <a:t>Use the PREFIX declarations in queries/02_inception.rq. Actual result: 2010 · 148 minutes · Christopher Nolan.</a:t>
             </a:r>
           </a:p>
         </p:txBody>
@@ -22419,7 +22441,7 @@
               </a:defRPr>
             </a:pPr>
             <a:r>
-              <a:t>Bài giải quyết gì? Đối chiếu đủ 5 yêu cầu</a:t>
+              <a:t>Problem and five assignment requirements</a:t>
             </a:r>
           </a:p>
         </p:txBody>
@@ -22464,7 +22486,7 @@
               </a:defRPr>
             </a:pPr>
             <a:r>
-              <a:t>Câu hỏi: ai làm gì trong phim nào, dữ liệu từ đâu và có thể truy vấn thế nào?</a:t>
+              <a:t>Who did what in which film? Where did the data come from? How can we query it?</a:t>
             </a:r>
           </a:p>
         </p:txBody>
@@ -22552,7 +22574,7 @@
               </a:defRPr>
             </a:pPr>
             <a:r>
-              <a:t>Đối chiếu dữ liệu: 08/10/2026 • Nguồn: mã dự án và evidence/</a:t>
+              <a:t>Data checked: 08 Oct 2026 • Sources: project code and evidence/</a:t>
             </a:r>
           </a:p>
         </p:txBody>
@@ -22685,7 +22707,7 @@
               </a:defRPr>
             </a:pPr>
             <a:r>
-              <a:t>Mã</a:t>
+              <a:t>ID</a:t>
             </a:r>
           </a:p>
         </p:txBody>
@@ -22730,7 +22752,7 @@
               </a:defRPr>
             </a:pPr>
             <a:r>
-              <a:t>Yêu cầu</a:t>
+              <a:t>Requirement</a:t>
             </a:r>
           </a:p>
         </p:txBody>
@@ -22775,7 +22797,7 @@
               </a:defRPr>
             </a:pPr>
             <a:r>
-              <a:t>Sản phẩm / minh chứng</a:t>
+              <a:t>Deliverable / evidence</a:t>
             </a:r>
           </a:p>
         </p:txBody>
@@ -22863,7 +22885,7 @@
               </a:defRPr>
             </a:pPr>
             <a:r>
-              <a:t>YC1</a:t>
+              <a:t>R1</a:t>
             </a:r>
           </a:p>
         </p:txBody>
@@ -22908,7 +22930,7 @@
               </a:defRPr>
             </a:pPr>
             <a:r>
-              <a:t>Định nghĩa ontology</a:t>
+              <a:t>Define an ontology</a:t>
             </a:r>
           </a:p>
         </p:txBody>
@@ -22953,7 +22975,7 @@
               </a:defRPr>
             </a:pPr>
             <a:r>
-              <a:t>OWL/Turtle, lớp, quan hệ, restriction</a:t>
+              <a:t>OWL/Turtle, classes, properties and restrictions</a:t>
             </a:r>
           </a:p>
         </p:txBody>
@@ -23041,7 +23063,7 @@
               </a:defRPr>
             </a:pPr>
             <a:r>
-              <a:t>YC2</a:t>
+              <a:t>R2</a:t>
             </a:r>
           </a:p>
         </p:txBody>
@@ -23086,7 +23108,7 @@
               </a:defRPr>
             </a:pPr>
             <a:r>
-              <a:t>Thu thập dữ liệu</a:t>
+              <a:t>Collect domain data</a:t>
             </a:r>
           </a:p>
         </p:txBody>
@@ -23131,7 +23153,7 @@
               </a:defRPr>
             </a:pPr>
             <a:r>
-              <a:t>API, phản hồi gốc, URL/time/hash</a:t>
+              <a:t>APIs, raw responses, URLs, timestamps and hashes</a:t>
             </a:r>
           </a:p>
         </p:txBody>
@@ -23219,7 +23241,7 @@
               </a:defRPr>
             </a:pPr>
             <a:r>
-              <a:t>YC3</a:t>
+              <a:t>R3</a:t>
             </a:r>
           </a:p>
         </p:txBody>
@@ -23264,7 +23286,7 @@
               </a:defRPr>
             </a:pPr>
             <a:r>
-              <a:t>Chuyển thành mức 4 sao</a:t>
+              <a:t>Publish four-star data</a:t>
             </a:r>
           </a:p>
         </p:txBody>
@@ -23309,7 +23331,7 @@
               </a:defRPr>
             </a:pPr>
             <a:r>
-              <a:t>RDF, HTTP IRI, giấy phép, công bố</a:t>
+              <a:t>RDF, HTTP IRIs, open license and publication</a:t>
             </a:r>
           </a:p>
         </p:txBody>
@@ -23397,7 +23419,7 @@
               </a:defRPr>
             </a:pPr>
             <a:r>
-              <a:t>YC4</a:t>
+              <a:t>R4</a:t>
             </a:r>
           </a:p>
         </p:txBody>
@@ -23442,7 +23464,7 @@
               </a:defRPr>
             </a:pPr>
             <a:r>
-              <a:t>Liên kết đạt mức 5 sao</a:t>
+              <a:t>Link to reach five stars</a:t>
             </a:r>
           </a:p>
         </p:txBody>
@@ -23487,7 +23509,7 @@
               </a:defRPr>
             </a:pPr>
             <a:r>
-              <a:t>sameAs, phương pháp nối, bản public</a:t>
+              <a:t>sameAs links, matching method and public data</a:t>
             </a:r>
           </a:p>
         </p:txBody>
@@ -23575,7 +23597,7 @@
               </a:defRPr>
             </a:pPr>
             <a:r>
-              <a:t>YC5</a:t>
+              <a:t>R5</a:t>
             </a:r>
           </a:p>
         </p:txBody>
@@ -23620,7 +23642,7 @@
               </a:defRPr>
             </a:pPr>
             <a:r>
-              <a:t>Giao diện SPARQL</a:t>
+              <a:t>Provide SPARQL interfaces</a:t>
             </a:r>
           </a:p>
         </p:txBody>
@@ -23665,7 +23687,7 @@
               </a:defRPr>
             </a:pPr>
             <a:r>
-              <a:t>Web, endpoint và terminal</a:t>
+              <a:t>Web application, endpoint and terminal</a:t>
             </a:r>
           </a:p>
         </p:txBody>
@@ -23710,7 +23732,7 @@
               </a:defRPr>
             </a:pPr>
             <a:r>
-              <a:t>Đề yêu cầu: báo cáo ≤15 trang · slide · video 3–5 phút. Ví dụ xuyên suốt: Inception và Nolan.</a:t>
+              <a:t>Required: report ≤15 pages · slides · 3–5-minute video. Running examples: Inception and Nolan.</a:t>
             </a:r>
           </a:p>
         </p:txBody>
@@ -23869,7 +23891,7 @@
               </a:defRPr>
             </a:pPr>
             <a:r>
-              <a:t>YC5 · Một người, nhiều vai trò và nhiều câu hỏi</a:t>
+              <a:t>R5 · One person, multiple roles and questions</a:t>
             </a:r>
           </a:p>
         </p:txBody>
@@ -23914,7 +23936,7 @@
               </a:defRPr>
             </a:pPr>
             <a:r>
-              <a:t>Ảnh đã lọc riêng Nolan: Director, Writer và Producer trong Inception</a:t>
+              <a:t>The screenshot filters Nolan: Director, Writer and Producer in Inception</a:t>
             </a:r>
           </a:p>
         </p:txBody>
@@ -24002,7 +24024,7 @@
               </a:defRPr>
             </a:pPr>
             <a:r>
-              <a:t>Đối chiếu dữ liệu: 08/10/2026 • Nguồn: mã dự án và evidence/</a:t>
+              <a:t>Data checked: 08 Oct 2026 • Sources: project code and evidence/</a:t>
             </a:r>
           </a:p>
         </p:txBody>
@@ -24202,7 +24224,7 @@
               </a:defRPr>
             </a:pPr>
             <a:r>
-              <a:t>25 bản ghi</a:t>
+              <a:t>25 records</a:t>
             </a:r>
           </a:p>
         </p:txBody>
@@ -24247,7 +24269,7 @@
               </a:defRPr>
             </a:pPr>
             <a:r>
-              <a:t>Đóng góp Inception; 3 dòng trong ảnh</a:t>
+              <a:t>All Inception contributions; the image</a:t>
             </a:r>
           </a:p>
           <a:p>
@@ -24269,7 +24291,7 @@
               </a:defRPr>
             </a:pPr>
             <a:r>
-              <a:t>chỉ là Nolan.</a:t>
+              <a:t>shows only Nolan.</a:t>
             </a:r>
           </a:p>
         </p:txBody>
@@ -24445,7 +24467,7 @@
               </a:defRPr>
             </a:pPr>
             <a:r>
-              <a:t>8 phim Nolan · 4 công ty Inception · 7</a:t>
+              <a:t>Nolan films / Inception companies /</a:t>
             </a:r>
           </a:p>
           <a:p>
@@ -24467,7 +24489,7 @@
               </a:defRPr>
             </a:pPr>
             <a:r>
-              <a:t>giải Godfather.</a:t>
+              <a:t>Godfather awards.</a:t>
             </a:r>
           </a:p>
         </p:txBody>
@@ -24598,7 +24620,7 @@
               </a:defRPr>
             </a:pPr>
             <a:r>
-              <a:t>14 mẫu Web / 24 file</a:t>
+              <a:t>14 Web samples / 24 files</a:t>
             </a:r>
           </a:p>
         </p:txBody>
@@ -24643,7 +24665,7 @@
               </a:defRPr>
             </a:pPr>
             <a:r>
-              <a:t>Trực tiếp; hierarchy cần schema; phân</a:t>
+              <a:t>Hierarchy requires schema; inferred</a:t>
             </a:r>
           </a:p>
           <a:p>
@@ -24665,7 +24687,7 @@
               </a:defRPr>
             </a:pPr>
             <a:r>
-              <a:t>loại cần --reasoned.</a:t>
+              <a:t>types require --reasoned.</a:t>
             </a:r>
           </a:p>
         </p:txBody>
@@ -24824,7 +24846,7 @@
               </a:defRPr>
             </a:pPr>
             <a:r>
-              <a:t>YC5 · Endpoint, terminal và kiểu được bổ sung</a:t>
+              <a:t>R5 · Endpoint, terminal and inferred types</a:t>
             </a:r>
           </a:p>
         </p:txBody>
@@ -24869,7 +24891,7 @@
               </a:defRPr>
             </a:pPr>
             <a:r>
-              <a:t>Cùng câu hỏi Nolan: 1 kiểu gốc </a:t>
+              <a:t>Same Nolan query: one asserted type </a:t>
             </a:r>
             <a:r>
               <a:rPr>
@@ -24878,7 +24900,7 @@
               <a:t>→</a:t>
             </a:r>
             <a:r>
-              <a:t> 3 kiểu khi nạp kết quả phân loại</a:t>
+              <a:t> three with saved inference</a:t>
             </a:r>
           </a:p>
         </p:txBody>
@@ -24966,7 +24988,7 @@
               </a:defRPr>
             </a:pPr>
             <a:r>
-              <a:t>Đối chiếu dữ liệu: 08/10/2026 • Nguồn: mã dự án và evidence/</a:t>
+              <a:t>Data checked: 08 Oct 2026 • Sources: project code and evidence/</a:t>
             </a:r>
           </a:p>
         </p:txBody>
@@ -25338,7 +25360,7 @@
               </a:defRPr>
             </a:pPr>
             <a:r>
-              <a:t>Chế độ</a:t>
+              <a:t>Mode</a:t>
             </a:r>
           </a:p>
         </p:txBody>
@@ -25383,7 +25405,7 @@
               </a:defRPr>
             </a:pPr>
             <a:r>
-              <a:t>Kiểu trả về cho Nolan</a:t>
+              <a:t>Nolan types returned</a:t>
             </a:r>
           </a:p>
         </p:txBody>
@@ -25471,7 +25493,7 @@
               </a:defRPr>
             </a:pPr>
             <a:r>
-              <a:t>Graph gốc</a:t>
+              <a:t>Asserted graph</a:t>
             </a:r>
           </a:p>
         </p:txBody>
@@ -25604,7 +25626,7 @@
               </a:defRPr>
             </a:pPr>
             <a:r>
-              <a:t>Có phân loại</a:t>
+              <a:t>With inference</a:t>
             </a:r>
           </a:p>
         </p:txBody>
@@ -25656,14 +25678,14 @@
       </p:sp>
       <p:sp>
         <p:nvSpPr>
-          <p:cNvPr id="20" name="PHOTO_P10"/>
+          <p:cNvPr id="20" name="PHOTO_P10_0"/>
           <p:cNvSpPr/>
           <p:nvPr/>
         </p:nvSpPr>
         <p:spPr>
           <a:xfrm>
             <a:off x="7818120" y="2578608"/>
-            <a:ext cx="6080760" cy="4709160"/>
+            <a:ext cx="6080760" cy="4590288"/>
           </a:xfrm>
           <a:prstGeom prst="roundRect">
             <a:avLst/>
@@ -25701,7 +25723,7 @@
       </p:sp>
       <p:sp>
         <p:nvSpPr>
-          <p:cNvPr id="21" name="TextBox 20"/>
+          <p:cNvPr id="21" name="PHOTO_P10_1"/>
           <p:cNvSpPr txBox="1"/>
           <p:nvPr/>
         </p:nvSpPr>
@@ -25746,7 +25768,7 @@
       </p:sp>
       <p:sp>
         <p:nvSpPr>
-          <p:cNvPr id="22" name="Rounded Rectangle 21"/>
+          <p:cNvPr id="22" name="PHOTO_P10_2"/>
           <p:cNvSpPr/>
           <p:nvPr/>
         </p:nvSpPr>
@@ -25789,7 +25811,7 @@
       </p:sp>
       <p:sp>
         <p:nvSpPr>
-          <p:cNvPr id="23" name="TextBox 22"/>
+          <p:cNvPr id="23" name="PHOTO_P10_3"/>
           <p:cNvSpPr txBox="1"/>
           <p:nvPr/>
         </p:nvSpPr>
@@ -25834,7 +25856,7 @@
       </p:sp>
       <p:sp>
         <p:nvSpPr>
-          <p:cNvPr id="24" name="TextBox 23"/>
+          <p:cNvPr id="24" name="PHOTO_P10_4"/>
           <p:cNvSpPr txBox="1"/>
           <p:nvPr/>
         </p:nvSpPr>
@@ -25879,7 +25901,7 @@
       </p:sp>
       <p:sp>
         <p:nvSpPr>
-          <p:cNvPr id="25" name="TextBox 24"/>
+          <p:cNvPr id="25" name="PHOTO_P10_5"/>
           <p:cNvSpPr txBox="1"/>
           <p:nvPr/>
         </p:nvSpPr>
@@ -25946,7 +25968,7 @@
       </p:sp>
       <p:sp>
         <p:nvSpPr>
-          <p:cNvPr id="26" name="TextBox 25"/>
+          <p:cNvPr id="26" name="PHOTO_P10_6"/>
           <p:cNvSpPr txBox="1"/>
           <p:nvPr/>
         </p:nvSpPr>
@@ -25991,7 +26013,7 @@
       </p:sp>
       <p:sp>
         <p:nvSpPr>
-          <p:cNvPr id="27" name="TextBox 26"/>
+          <p:cNvPr id="27" name="PHOTO_P10_7"/>
           <p:cNvSpPr txBox="1"/>
           <p:nvPr/>
         </p:nvSpPr>
@@ -26036,13 +26058,13 @@
       </p:sp>
       <p:sp>
         <p:nvSpPr>
-          <p:cNvPr id="28" name="TextBox 27"/>
-          <p:cNvSpPr txBox="1"/>
-          <p:nvPr/>
-        </p:nvSpPr>
-        <p:spPr>
-          <a:xfrm>
-            <a:off x="8046720" y="6949440"/>
+          <p:cNvPr id="28" name="PHOTO_P10_8"/>
+          <p:cNvSpPr txBox="1"/>
+          <p:nvPr/>
+        </p:nvSpPr>
+        <p:spPr>
+          <a:xfrm>
+            <a:off x="8046720" y="6830568"/>
             <a:ext cx="5623560" cy="283464"/>
           </a:xfrm>
           <a:prstGeom prst="rect">
@@ -26119,7 +26141,7 @@
               </a:defRPr>
             </a:pPr>
             <a:r>
-              <a:t>--reasoned nạp schema + kiểu đã lưu. Endpoint mặc định chỉ graph gốc; SELECT/ASK JSON, CONSTRUCT/DESCRIBE Turtle.</a:t>
+              <a:t>--reasoned loads schema + saved types. Endpoint: asserted graph by default. SELECT/ASK: JSON; graph queries: Turtle.</a:t>
             </a:r>
           </a:p>
         </p:txBody>
@@ -26278,7 +26300,7 @@
               </a:defRPr>
             </a:pPr>
             <a:r>
-              <a:t>Kiểm tra dữ liệu, ứng dụng và bản công khai</a:t>
+              <a:t>Validating data, application and publication</a:t>
             </a:r>
           </a:p>
         </p:txBody>
@@ -26323,7 +26345,7 @@
               </a:defRPr>
             </a:pPr>
             <a:r>
-              <a:t>Minh chứng thực thi nằm ở evidence/, không chỉ là mô tả trong báo cáo</a:t>
+              <a:t>Execution evidence is stored in evidence/</a:t>
             </a:r>
           </a:p>
         </p:txBody>
@@ -26411,7 +26433,7 @@
               </a:defRPr>
             </a:pPr>
             <a:r>
-              <a:t>Đối chiếu dữ liệu: 08/10/2026 • Nguồn: mã dự án và evidence/</a:t>
+              <a:t>Data checked: 08 Oct 2026 • Sources: project code and evidence/</a:t>
             </a:r>
           </a:p>
         </p:txBody>
@@ -26589,7 +26611,7 @@
               </a:defRPr>
             </a:pPr>
             <a:r>
-              <a:t>Nguồn khớp hash</a:t>
+              <a:t>Matching source hashes</a:t>
             </a:r>
           </a:p>
         </p:txBody>
@@ -26722,7 +26744,7 @@
               </a:defRPr>
             </a:pPr>
             <a:r>
-              <a:t>File truy vấn đã chạy</a:t>
+              <a:t>Query files executed</a:t>
             </a:r>
           </a:p>
         </p:txBody>
@@ -26855,7 +26877,7 @@
               </a:defRPr>
             </a:pPr>
             <a:r>
-              <a:t>Test + browser checks</a:t>
+              <a:t>Tests + browser checks</a:t>
             </a:r>
           </a:p>
         </p:txBody>
@@ -26988,14 +27010,36 @@
               </a:defRPr>
             </a:pPr>
             <a:r>
-              <a:t>Public 200 / đẳng cấu local</a:t>
+              <a:t>Public HTTP 200 / graph</a:t>
+            </a:r>
+          </a:p>
+          <a:p>
+            <a:pPr>
+              <a:lnSpc>
+                <a:spcPts val="2176"/>
+              </a:lnSpc>
+              <a:spcBef>
+                <a:spcPts val="0"/>
+              </a:spcBef>
+              <a:spcAft>
+                <a:spcPts val="0"/>
+              </a:spcAft>
+              <a:defRPr sz="1700" b="0">
+                <a:solidFill>
+                  <a:srgbClr val="152B3A"/>
+                </a:solidFill>
+                <a:latin typeface="Be Vietnam Pro"/>
+              </a:defRPr>
+            </a:pPr>
+            <a:r>
+              <a:t>match</a:t>
             </a:r>
           </a:p>
         </p:txBody>
       </p:sp>
       <p:pic>
         <p:nvPicPr>
-          <p:cNvPr id="21" name="Picture 20" descr="11_validation_current.png"/>
+          <p:cNvPr id="21" name="Picture 20" descr="13_validation_en.png"/>
           <p:cNvPicPr>
             <a:picLocks noChangeAspect="1"/>
           </p:cNvPicPr>
@@ -27009,8 +27053,8 @@
         </p:blipFill>
         <p:spPr>
           <a:xfrm>
-            <a:off x="7660386" y="2615184"/>
-            <a:ext cx="5737860" cy="4480560"/>
+            <a:off x="7302246" y="2615184"/>
+            <a:ext cx="6454140" cy="4480560"/>
           </a:xfrm>
           <a:prstGeom prst="rect">
             <a:avLst/>
@@ -27057,7 +27101,7 @@
               </a:defRPr>
             </a:pPr>
             <a:r>
-              <a:t>14 test / 9 browser checks. HermiT/Pellet kiểm tra DL riêng; ảnh là viewer log thực thi.</a:t>
+              <a:t>14 tests / 9 browser checks. HermiT/Pellet verify DL separately; the image shows actual execution logs.</a:t>
             </a:r>
           </a:p>
         </p:txBody>
@@ -27216,7 +27260,7 @@
               </a:defRPr>
             </a:pPr>
             <a:r>
-              <a:t>Đối chiếu đề và giới hạn cần nói rõ</a:t>
+              <a:t>Assessment and limitations</a:t>
             </a:r>
           </a:p>
         </p:txBody>
@@ -27261,7 +27305,7 @@
               </a:defRPr>
             </a:pPr>
             <a:r>
-              <a:t>5/5 yêu cầu có minh chứng; 10/10 là điểm tự đề xuất</a:t>
+              <a:t>Evidence for 5/5 requirements · 10/10 is a proposed self-score</a:t>
             </a:r>
           </a:p>
         </p:txBody>
@@ -27349,7 +27393,7 @@
               </a:defRPr>
             </a:pPr>
             <a:r>
-              <a:t>Đối chiếu dữ liệu: 08/10/2026 • Nguồn: mã dự án và evidence/</a:t>
+              <a:t>Data checked: 08 Oct 2026 • Sources: project code and evidence/</a:t>
             </a:r>
           </a:p>
         </p:txBody>
@@ -27482,7 +27526,7 @@
               </a:defRPr>
             </a:pPr>
             <a:r>
-              <a:t>YC</a:t>
+              <a:t>Req.</a:t>
             </a:r>
           </a:p>
         </p:txBody>
@@ -27527,7 +27571,7 @@
               </a:defRPr>
             </a:pPr>
             <a:r>
-              <a:t>Minh chứng</a:t>
+              <a:t>Evidence</a:t>
             </a:r>
           </a:p>
         </p:txBody>
@@ -27572,7 +27616,7 @@
               </a:defRPr>
             </a:pPr>
             <a:r>
-              <a:t>Điểm</a:t>
+              <a:t>Score</a:t>
             </a:r>
           </a:p>
         </p:txBody>
@@ -27660,7 +27704,7 @@
               </a:defRPr>
             </a:pPr>
             <a:r>
-              <a:t>YC1</a:t>
+              <a:t>R1</a:t>
             </a:r>
           </a:p>
         </p:txBody>
@@ -27705,7 +27749,7 @@
               </a:defRPr>
             </a:pPr>
             <a:r>
-              <a:t>Ontology + OWL + test</a:t>
+              <a:t>Ontology + OWL + tests</a:t>
             </a:r>
           </a:p>
         </p:txBody>
@@ -27838,7 +27882,7 @@
               </a:defRPr>
             </a:pPr>
             <a:r>
-              <a:t>YC2</a:t>
+              <a:t>R2</a:t>
             </a:r>
           </a:p>
         </p:txBody>
@@ -27883,7 +27927,7 @@
               </a:defRPr>
             </a:pPr>
             <a:r>
-              <a:t>76 nguồn + hash + tái lập</a:t>
+              <a:t>76 sources + hashes + reproducibility</a:t>
             </a:r>
           </a:p>
         </p:txBody>
@@ -28016,7 +28060,7 @@
               </a:defRPr>
             </a:pPr>
             <a:r>
-              <a:t>YC3</a:t>
+              <a:t>R3</a:t>
             </a:r>
           </a:p>
         </p:txBody>
@@ -28061,7 +28105,7 @@
               </a:defRPr>
             </a:pPr>
             <a:r>
-              <a:t>RDF public khớp local</a:t>
+              <a:t>Public RDF matches local data</a:t>
             </a:r>
           </a:p>
         </p:txBody>
@@ -28194,7 +28238,7 @@
               </a:defRPr>
             </a:pPr>
             <a:r>
-              <a:t>YC4</a:t>
+              <a:t>R4</a:t>
             </a:r>
           </a:p>
         </p:txBody>
@@ -28239,7 +28283,7 @@
               </a:defRPr>
             </a:pPr>
             <a:r>
-              <a:t>1.727 liên kết đã công bố</a:t>
+              <a:t>1,727 published identity links</a:t>
             </a:r>
           </a:p>
         </p:txBody>
@@ -28372,7 +28416,7 @@
               </a:defRPr>
             </a:pPr>
             <a:r>
-              <a:t>YC5</a:t>
+              <a:t>R5</a:t>
             </a:r>
           </a:p>
         </p:txBody>
@@ -28550,7 +28594,7 @@
               </a:defRPr>
             </a:pPr>
             <a:r>
-              <a:t>Tổng 10/10 · điểm tự đề xuất, không phải điểm giảng viên</a:t>
+              <a:t>Total 10/10 · proposed self-score, not an official grade</a:t>
             </a:r>
           </a:p>
         </p:txBody>
@@ -28681,7 +28725,7 @@
               </a:defRPr>
             </a:pPr>
             <a:r>
-              <a:t>Giới hạn dữ liệu</a:t>
+              <a:t>Data limitations</a:t>
             </a:r>
           </a:p>
         </p:txBody>
@@ -28726,7 +28770,7 @@
               </a:defRPr>
             </a:pPr>
             <a:r>
-              <a:t>30 phim có chủ đích; nhóm theo nhãn.</a:t>
+              <a:t>Selected 30-film sample; label-based groups.</a:t>
             </a:r>
           </a:p>
           <a:p>
@@ -28748,7 +28792,7 @@
               </a:defRPr>
             </a:pPr>
             <a:r>
-              <a:t>Hash </a:t>
+              <a:t>Hashes </a:t>
             </a:r>
             <a:r>
               <a:rPr>
@@ -28757,29 +28801,7 @@
               <a:t>≠</a:t>
             </a:r>
             <a:r>
-              <a:t> sự thật ngoài đời; chưa có ngân</a:t>
-            </a:r>
-          </a:p>
-          <a:p>
-            <a:pPr>
-              <a:lnSpc>
-                <a:spcPts val="2048"/>
-              </a:lnSpc>
-              <a:spcBef>
-                <a:spcPts val="0"/>
-              </a:spcBef>
-              <a:spcAft>
-                <a:spcPts val="0"/>
-              </a:spcAft>
-              <a:defRPr sz="1600" b="0">
-                <a:solidFill>
-                  <a:srgbClr val="506776"/>
-                </a:solidFill>
-                <a:latin typeface="Be Vietnam Pro"/>
-              </a:defRPr>
-            </a:pPr>
-            <a:r>
-              <a:t>sách/streaming.</a:t>
+              <a:t> truth; budget/streaming data absent.</a:t>
             </a:r>
           </a:p>
         </p:txBody>
@@ -28910,7 +28932,7 @@
               </a:defRPr>
             </a:pPr>
             <a:r>
-              <a:t>Giới hạn reasoning</a:t>
+              <a:t>Reasoning limitations</a:t>
             </a:r>
           </a:p>
         </p:txBody>
@@ -28955,7 +28977,7 @@
               </a:defRPr>
             </a:pPr>
             <a:r>
-              <a:t>12 lớp OWL RL; 2 lớp đếm IRI.</a:t>
+              <a:t>12 OWL RL classes; 2 IRI-counting rules.</a:t>
             </a:r>
           </a:p>
           <a:p>
@@ -28977,7 +28999,7 @@
               </a:defRPr>
             </a:pPr>
             <a:r>
-              <a:t>HermiT/Pellet: nhất quán; DL hai lớp ngưỡng = 0.</a:t>
+              <a:t>HermiT/Pellet: consistent; threshold classes: 0.</a:t>
             </a:r>
           </a:p>
         </p:txBody>
@@ -29108,7 +29130,7 @@
               </a:defRPr>
             </a:pPr>
             <a:r>
-              <a:t>Giá trị Semantic Web</a:t>
+              <a:t>Semantic Web value</a:t>
             </a:r>
           </a:p>
         </p:txBody>
@@ -29153,7 +29175,7 @@
               </a:defRPr>
             </a:pPr>
             <a:r>
-              <a:t>IRI + từ vựng chung + liên kết + xuất xứ.</a:t>
+              <a:t>Shared IRIs, vocabulary, links and provenance.</a:t>
             </a:r>
           </a:p>
           <a:p>
@@ -29175,7 +29197,7 @@
               </a:defRPr>
             </a:pPr>
             <a:r>
-              <a:t>Không nói SQL không thể trả các câu hỏi này.</a:t>
+              <a:t>SQL can also answer many of these questions.</a:t>
             </a:r>
           </a:p>
         </p:txBody>
@@ -29334,7 +29356,7 @@
               </a:defRPr>
             </a:pPr>
             <a:r>
-              <a:t>Kết luận và ảnh Protégé cần bổ sung</a:t>
+              <a:t>Conclusion and pending Protégé evidence</a:t>
             </a:r>
           </a:p>
         </p:txBody>
@@ -29379,7 +29401,7 @@
               </a:defRPr>
             </a:pPr>
             <a:r>
-              <a:t>24 slide · báo cáo 5 trang · video demo 4 phút 50 giây</a:t>
+              <a:t>24 slides · five-page report · four-minute-fifty-second demo</a:t>
             </a:r>
           </a:p>
         </p:txBody>
@@ -29467,7 +29489,7 @@
               </a:defRPr>
             </a:pPr>
             <a:r>
-              <a:t>Đối chiếu dữ liệu: 08/10/2026 • Nguồn: mã dự án và evidence/</a:t>
+              <a:t>Data checked: 08 Oct 2026 • Sources: project code and evidence/</a:t>
             </a:r>
           </a:p>
         </p:txBody>
@@ -29600,7 +29622,7 @@
               </a:defRPr>
             </a:pPr>
             <a:r>
-              <a:t>Ảnh</a:t>
+              <a:t>Image</a:t>
             </a:r>
           </a:p>
         </p:txBody>
@@ -29690,7 +29712,7 @@
               </a:defRPr>
             </a:pPr>
             <a:r>
-              <a:t>Nội dung cần chụp</a:t>
+              <a:t>Evidence to capture</a:t>
             </a:r>
           </a:p>
         </p:txBody>
@@ -29868,7 +29890,7 @@
               </a:defRPr>
             </a:pPr>
             <a:r>
-              <a:t>Ontology IRI và phiên bản</a:t>
+              <a:t>Ontology IRI and version</a:t>
             </a:r>
           </a:p>
         </p:txBody>
@@ -30046,7 +30068,7 @@
               </a:defRPr>
             </a:pPr>
             <a:r>
-              <a:t>Cây lớp phim</a:t>
+              <a:t>Film class hierarchy</a:t>
             </a:r>
           </a:p>
         </p:txBody>
@@ -30224,7 +30246,7 @@
               </a:defRPr>
             </a:pPr>
             <a:r>
-              <a:t>Cây người và tổ chức</a:t>
+              <a:t>People and organizations</a:t>
             </a:r>
           </a:p>
         </p:txBody>
@@ -30402,7 +30424,7 @@
               </a:defRPr>
             </a:pPr>
             <a:r>
-              <a:t>Cây Genre và Award</a:t>
+              <a:t>Genre and award hierarchies</a:t>
             </a:r>
           </a:p>
         </p:txBody>
@@ -30580,7 +30602,7 @@
               </a:defRPr>
             </a:pPr>
             <a:r>
-              <a:t>Ràng buộc của Contribution</a:t>
+              <a:t>Contribution restrictions</a:t>
             </a:r>
           </a:p>
         </p:txBody>
@@ -30758,7 +30780,7 @@
               </a:defRPr>
             </a:pPr>
             <a:r>
-              <a:t>Domain, range, inverse, functional</a:t>
+              <a:t>Domain, range, inverse and functional</a:t>
             </a:r>
           </a:p>
         </p:txBody>
@@ -30936,7 +30958,7 @@
               </a:defRPr>
             </a:pPr>
             <a:r>
-              <a:t>Định nghĩa Filmmaker</a:t>
+              <a:t>Filmmaker definition</a:t>
             </a:r>
           </a:p>
         </p:txBody>
@@ -31114,7 +31136,7 @@
               </a:defRPr>
             </a:pPr>
             <a:r>
-              <a:t>Định nghĩa FilmStudio</a:t>
+              <a:t>FilmStudio cardinality</a:t>
             </a:r>
           </a:p>
         </p:txBody>
@@ -31292,7 +31314,7 @@
               </a:defRPr>
             </a:pPr>
             <a:r>
-              <a:t>Datatype của thời lượng</a:t>
+              <a:t>Runtime datatype</a:t>
             </a:r>
           </a:p>
         </p:txBody>
@@ -31470,7 +31492,7 @@
               </a:defRPr>
             </a:pPr>
             <a:r>
-              <a:t>Cá thể Inception</a:t>
+              <a:t>Inception individual</a:t>
             </a:r>
           </a:p>
         </p:txBody>
@@ -31648,7 +31670,7 @@
               </a:defRPr>
             </a:pPr>
             <a:r>
-              <a:t>Kiểu khai báo của Nolan</a:t>
+              <a:t>Nolan asserted types</a:t>
             </a:r>
           </a:p>
         </p:txBody>
@@ -31779,7 +31801,7 @@
               </a:defRPr>
             </a:pPr>
             <a:r>
-              <a:t>Hoàn thiện trước khi nộp</a:t>
+              <a:t>Before submission</a:t>
             </a:r>
           </a:p>
         </p:txBody>
@@ -31824,7 +31846,7 @@
               </a:defRPr>
             </a:pPr>
             <a:r>
-              <a:t>1. Điền tên nhóm / thành viên.</a:t>
+              <a:t>1. Complete team / member details.</a:t>
             </a:r>
           </a:p>
           <a:p>
@@ -31865,7 +31887,7 @@
               </a:defRPr>
             </a:pPr>
             <a:r>
-              <a:t>2. Chèn 11 ảnh thật theo mã bên trái.</a:t>
+              <a:t>2. Insert 11 genuine screenshots.</a:t>
             </a:r>
           </a:p>
           <a:p>
@@ -31906,7 +31928,7 @@
               </a:defRPr>
             </a:pPr>
             <a:r>
-              <a:t>3. Lưu vào evidence/protege/ để tạo</a:t>
+              <a:t>3. Save them in evidence/protege/ for</a:t>
             </a:r>
           </a:p>
           <a:p>
@@ -31928,7 +31950,7 @@
               </a:defRPr>
             </a:pPr>
             <a:r>
-              <a:t>lại tự động.</a:t>
+              <a:t>automatic replacement.</a:t>
             </a:r>
           </a:p>
           <a:p>
@@ -31969,7 +31991,7 @@
               </a:defRPr>
             </a:pPr>
             <a:r>
-              <a:t>4. Tập nói theo</a:t>
+              <a:t>4. Rehearse with the speaker script and</a:t>
             </a:r>
           </a:p>
           <a:p>
@@ -31991,7 +32013,7 @@
               </a:defRPr>
             </a:pPr>
             <a:r>
-              <a:t>Script_thuyet_trinh.pdf; xem lại video.</a:t>
+              <a:t>review the video.</a:t>
             </a:r>
           </a:p>
         </p:txBody>
@@ -32036,7 +32058,7 @@
               </a:defRPr>
             </a:pPr>
             <a:r>
-              <a:t>Tất cả khung ảnh là chỗ chờ bổ sung, không phải minh chứng đã chụp. Lời nói đầy đủ nằm trong Speaker Notes.</a:t>
+              <a:t>Screenshot slots are placeholders, not captured evidence. Full English narration is in Speaker Notes.</a:t>
             </a:r>
           </a:p>
         </p:txBody>
@@ -32195,7 +32217,7 @@
               </a:defRPr>
             </a:pPr>
             <a:r>
-              <a:t>Kiến trúc và đường đi của dữ liệu</a:t>
+              <a:t>Architecture and data flow</a:t>
             </a:r>
           </a:p>
         </p:txBody>
@@ -32240,7 +32262,7 @@
               </a:defRPr>
             </a:pPr>
             <a:r>
-              <a:t>Graph khai báo, schema và kết quả phân loại được lưu riêng</a:t>
+              <a:t>Asserted data, schema and inferred types are stored separately</a:t>
             </a:r>
           </a:p>
         </p:txBody>
@@ -32328,7 +32350,7 @@
               </a:defRPr>
             </a:pPr>
             <a:r>
-              <a:t>Đối chiếu dữ liệu: 08/10/2026 • Nguồn: mã dự án và evidence/</a:t>
+              <a:t>Data checked: 08 Oct 2026 • Sources: project code and evidence/</a:t>
             </a:r>
           </a:p>
         </p:txBody>
@@ -32549,7 +32571,7 @@
               </a:defRPr>
             </a:pPr>
             <a:r>
-              <a:t>THU THẬP</a:t>
+              <a:t>COLLECT</a:t>
             </a:r>
           </a:p>
         </p:txBody>
@@ -32801,7 +32823,7 @@
               </a:defRPr>
             </a:pPr>
             <a:r>
-              <a:t>TẠO RDF</a:t>
+              <a:t>BUILD RDF</a:t>
             </a:r>
           </a:p>
         </p:txBody>
@@ -33053,7 +33075,7 @@
               </a:defRPr>
             </a:pPr>
             <a:r>
-              <a:t>KIỂM TRA</a:t>
+              <a:t>VALIDATE</a:t>
             </a:r>
           </a:p>
         </p:txBody>
@@ -33120,7 +33142,29 @@
               </a:defRPr>
             </a:pPr>
             <a:r>
-              <a:t>nguồn, trường, truy vấn</a:t>
+              <a:t>sources, fields and</a:t>
+            </a:r>
+          </a:p>
+          <a:p>
+            <a:pPr>
+              <a:lnSpc>
+                <a:spcPts val="2176"/>
+              </a:lnSpc>
+              <a:spcBef>
+                <a:spcPts val="0"/>
+              </a:spcBef>
+              <a:spcAft>
+                <a:spcPts val="0"/>
+              </a:spcAft>
+              <a:defRPr sz="1700" b="0">
+                <a:solidFill>
+                  <a:srgbClr val="506776"/>
+                </a:solidFill>
+                <a:latin typeface="Be Vietnam Pro"/>
+              </a:defRPr>
+            </a:pPr>
+            <a:r>
+              <a:t>queries</a:t>
             </a:r>
           </a:p>
         </p:txBody>
@@ -33296,7 +33340,7 @@
               </a:defRPr>
             </a:pPr>
             <a:r>
-              <a:t>PHÂN LOẠI</a:t>
+              <a:t>CLASSIFY</a:t>
             </a:r>
           </a:p>
         </p:txBody>
@@ -33457,7 +33501,7 @@
               </a:defRPr>
             </a:pPr>
             <a:r>
-              <a:t>ỨNG DỤNG: Web / Flask + RDFLib / Comunica / Terminal</a:t>
+              <a:t>APPLICATION: Web / Flask + RDFLib / Comunica / Terminal</a:t>
             </a:r>
           </a:p>
           <a:p>
@@ -33479,7 +33523,7 @@
               </a:defRPr>
             </a:pPr>
             <a:r>
-              <a:t>Endpoint: movies.ttl. --reasoned: thêm schema + inferred_classes.ttl.</a:t>
+              <a:t>Endpoint: movies.ttl. --reasoned: adds schema + inferred_classes.ttl.</a:t>
             </a:r>
           </a:p>
         </p:txBody>
@@ -33638,7 +33682,7 @@
               </a:defRPr>
             </a:pPr>
             <a:r>
-              <a:t>Bộ dữ liệu hiện tại: đọc đúng các con số</a:t>
+              <a:t>Current dataset: interpreting the numbers</a:t>
             </a:r>
           </a:p>
         </p:txBody>
@@ -33683,7 +33727,7 @@
               </a:defRPr>
             </a:pPr>
             <a:r>
-              <a:t>Mẫu 30 phim có chủ đích; số liệu lấy từ evidence/statistics.json</a:t>
+              <a:t>A selected sample of 30 films · evidence/statistics.json</a:t>
             </a:r>
           </a:p>
         </p:txBody>
@@ -33771,7 +33815,7 @@
               </a:defRPr>
             </a:pPr>
             <a:r>
-              <a:t>Đối chiếu dữ liệu: 08/10/2026 • Nguồn: mã dự án và evidence/</a:t>
+              <a:t>Data checked: 08 Oct 2026 • Sources: project code and evidence/</a:t>
             </a:r>
           </a:p>
         </p:txBody>
@@ -33949,7 +33993,7 @@
               </a:defRPr>
             </a:pPr>
             <a:r>
-              <a:t>phim</a:t>
+              <a:t>films</a:t>
             </a:r>
           </a:p>
         </p:txBody>
@@ -34082,7 +34126,7 @@
               </a:defRPr>
             </a:pPr>
             <a:r>
-              <a:t>người</a:t>
+              <a:t>people</a:t>
             </a:r>
           </a:p>
         </p:txBody>
@@ -34170,7 +34214,7 @@
               </a:defRPr>
             </a:pPr>
             <a:r>
-              <a:t>1.010</a:t>
+              <a:t>1,010</a:t>
             </a:r>
           </a:p>
         </p:txBody>
@@ -34215,7 +34259,7 @@
               </a:defRPr>
             </a:pPr>
             <a:r>
-              <a:t>đóng góp</a:t>
+              <a:t>contributions</a:t>
             </a:r>
           </a:p>
         </p:txBody>
@@ -34348,7 +34392,7 @@
               </a:defRPr>
             </a:pPr>
             <a:r>
-              <a:t>công ty</a:t>
+              <a:t>companies</a:t>
             </a:r>
           </a:p>
         </p:txBody>
@@ -34481,7 +34525,7 @@
               </a:defRPr>
             </a:pPr>
             <a:r>
-              <a:t>thực thể giải</a:t>
+              <a:t>award entities</a:t>
             </a:r>
           </a:p>
         </p:txBody>
@@ -34614,7 +34658,7 @@
               </a:defRPr>
             </a:pPr>
             <a:r>
-              <a:t>nguồn khớp hash</a:t>
+              <a:t>verified source hashes</a:t>
             </a:r>
           </a:p>
         </p:txBody>
@@ -34659,7 +34703,7 @@
               </a:defRPr>
             </a:pPr>
             <a:r>
-              <a:t>19.339 triple dữ liệu · 518 triple schema · 75 thể loại · 11 quốc gia · 15 ngôn ngữ</a:t>
+              <a:t>19,339 data triples · 518 schema triples · 75 genres · 11 countries · 15 languages</a:t>
             </a:r>
           </a:p>
         </p:txBody>
@@ -34818,7 +34862,7 @@
               </a:defRPr>
             </a:pPr>
             <a:r>
-              <a:t>YC1 · Ontology: 42 lớp, 6 nhóm khái niệm</a:t>
+              <a:t>R1 · Ontology: 42 classes in six groups</a:t>
             </a:r>
           </a:p>
         </p:txBody>
@@ -34863,7 +34907,7 @@
               </a:defRPr>
             </a:pPr>
             <a:r>
-              <a:t>Tái dùng trực tiếp dbo:Film, dbo:Person và dbo:Country</a:t>
+              <a:t>Direct reuse of dbo:Film, dbo:Person and dbo:Country</a:t>
             </a:r>
           </a:p>
         </p:txBody>
@@ -34951,7 +34995,7 @@
               </a:defRPr>
             </a:pPr>
             <a:r>
-              <a:t>Đối chiếu dữ liệu: 08/10/2026 • Nguồn: mã dự án và evidence/</a:t>
+              <a:t>Data checked: 08 Oct 2026 • Sources: project code and evidence/</a:t>
             </a:r>
           </a:p>
         </p:txBody>
@@ -35084,7 +35128,7 @@
               </a:defRPr>
             </a:pPr>
             <a:r>
-              <a:t>11 lớp</a:t>
+              <a:t>11 classes</a:t>
             </a:r>
           </a:p>
         </p:txBody>
@@ -35217,7 +35261,7 @@
               </a:defRPr>
             </a:pPr>
             <a:r>
-              <a:t>8 lớp</a:t>
+              <a:t>8 classes</a:t>
             </a:r>
           </a:p>
         </p:txBody>
@@ -35350,7 +35394,7 @@
               </a:defRPr>
             </a:pPr>
             <a:r>
-              <a:t>6 lớp</a:t>
+              <a:t>6 classes</a:t>
             </a:r>
           </a:p>
         </p:txBody>
@@ -35483,7 +35527,7 @@
               </a:defRPr>
             </a:pPr>
             <a:r>
-              <a:t>8 lớp</a:t>
+              <a:t>8 classes</a:t>
             </a:r>
           </a:p>
         </p:txBody>
@@ -35616,7 +35660,7 @@
               </a:defRPr>
             </a:pPr>
             <a:r>
-              <a:t>5 lớp</a:t>
+              <a:t>5 classes</a:t>
             </a:r>
           </a:p>
         </p:txBody>
@@ -35749,7 +35793,7 @@
               </a:defRPr>
             </a:pPr>
             <a:r>
-              <a:t>4 lớp</a:t>
+              <a:t>4 classes</a:t>
             </a:r>
           </a:p>
         </p:txBody>
@@ -35839,7 +35883,7 @@
               </a:defRPr>
             </a:pPr>
             <a:r>
-              <a:t>3 lớp DBpedia + 39 lớp ex:</a:t>
+              <a:t>3 DBpedia classes + 39 ex: classes</a:t>
             </a:r>
           </a:p>
           <a:p>
@@ -35861,21 +35905,21 @@
               </a:defRPr>
             </a:pPr>
             <a:r>
-              <a:t>14 lớp có kiểu được bổ sung; 42 là số lớp tự khai báo.</a:t>
-            </a:r>
-          </a:p>
-        </p:txBody>
-      </p:sp>
-      <p:sp>
-        <p:nvSpPr>
-          <p:cNvPr id="28" name="PHOTO_P00"/>
+              <a:t>14 classes receive types; 42 classes explicitly declared.</a:t>
+            </a:r>
+          </a:p>
+        </p:txBody>
+      </p:sp>
+      <p:sp>
+        <p:nvSpPr>
+          <p:cNvPr id="28" name="PHOTO_P00_0"/>
           <p:cNvSpPr/>
           <p:nvPr/>
         </p:nvSpPr>
         <p:spPr>
           <a:xfrm>
             <a:off x="7818120" y="2578608"/>
-            <a:ext cx="6080760" cy="4709160"/>
+            <a:ext cx="6080760" cy="4590288"/>
           </a:xfrm>
           <a:prstGeom prst="roundRect">
             <a:avLst/>
@@ -35913,7 +35957,7 @@
       </p:sp>
       <p:sp>
         <p:nvSpPr>
-          <p:cNvPr id="29" name="TextBox 28"/>
+          <p:cNvPr id="29" name="PHOTO_P00_1"/>
           <p:cNvSpPr txBox="1"/>
           <p:nvPr/>
         </p:nvSpPr>
@@ -35958,7 +36002,7 @@
       </p:sp>
       <p:sp>
         <p:nvSpPr>
-          <p:cNvPr id="30" name="Rounded Rectangle 29"/>
+          <p:cNvPr id="30" name="PHOTO_P00_2"/>
           <p:cNvSpPr/>
           <p:nvPr/>
         </p:nvSpPr>
@@ -36001,7 +36045,7 @@
       </p:sp>
       <p:sp>
         <p:nvSpPr>
-          <p:cNvPr id="31" name="TextBox 30"/>
+          <p:cNvPr id="31" name="PHOTO_P00_3"/>
           <p:cNvSpPr txBox="1"/>
           <p:nvPr/>
         </p:nvSpPr>
@@ -36046,7 +36090,7 @@
       </p:sp>
       <p:sp>
         <p:nvSpPr>
-          <p:cNvPr id="32" name="TextBox 31"/>
+          <p:cNvPr id="32" name="PHOTO_P00_4"/>
           <p:cNvSpPr txBox="1"/>
           <p:nvPr/>
         </p:nvSpPr>
@@ -36091,7 +36135,7 @@
       </p:sp>
       <p:sp>
         <p:nvSpPr>
-          <p:cNvPr id="33" name="TextBox 32"/>
+          <p:cNvPr id="33" name="PHOTO_P00_5"/>
           <p:cNvSpPr txBox="1"/>
           <p:nvPr/>
         </p:nvSpPr>
@@ -36136,7 +36180,7 @@
       </p:sp>
       <p:sp>
         <p:nvSpPr>
-          <p:cNvPr id="34" name="TextBox 33"/>
+          <p:cNvPr id="34" name="PHOTO_P00_6"/>
           <p:cNvSpPr txBox="1"/>
           <p:nvPr/>
         </p:nvSpPr>
@@ -36181,7 +36225,7 @@
       </p:sp>
       <p:sp>
         <p:nvSpPr>
-          <p:cNvPr id="35" name="TextBox 34"/>
+          <p:cNvPr id="35" name="PHOTO_P00_7"/>
           <p:cNvSpPr txBox="1"/>
           <p:nvPr/>
         </p:nvSpPr>
@@ -36226,13 +36270,13 @@
       </p:sp>
       <p:sp>
         <p:nvSpPr>
-          <p:cNvPr id="36" name="TextBox 35"/>
-          <p:cNvSpPr txBox="1"/>
-          <p:nvPr/>
-        </p:nvSpPr>
-        <p:spPr>
-          <a:xfrm>
-            <a:off x="8046720" y="6949440"/>
+          <p:cNvPr id="36" name="PHOTO_P00_8"/>
+          <p:cNvSpPr txBox="1"/>
+          <p:nvPr/>
+        </p:nvSpPr>
+        <p:spPr>
+          <a:xfrm>
+            <a:off x="8046720" y="6830568"/>
             <a:ext cx="5623560" cy="283464"/>
           </a:xfrm>
           <a:prstGeom prst="rect">
@@ -36423,7 +36467,7 @@
               </a:defRPr>
             </a:pPr>
             <a:r>
-              <a:t>YC1 · Cây lớp tác phẩm và phim</a:t>
+              <a:t>R1 · Creative works and film classes</a:t>
             </a:r>
           </a:p>
         </p:txBody>
@@ -36468,7 +36512,7 @@
               </a:defRPr>
             </a:pPr>
             <a:r>
-              <a:t>Lớp có tên và lớp được phân loại: phân biệt bằng ký hiệu (I)</a:t>
+              <a:t>Class definitions and additional instance types · (I) marks additional classification</a:t>
             </a:r>
           </a:p>
         </p:txBody>
@@ -36556,7 +36600,7 @@
               </a:defRPr>
             </a:pPr>
             <a:r>
-              <a:t>Đối chiếu dữ liệu: 08/10/2026 • Nguồn: mã dự án và evidence/</a:t>
+              <a:t>Data checked: 08 Oct 2026 • Sources: project code and evidence/</a:t>
             </a:r>
           </a:p>
         </p:txBody>
@@ -36865,7 +36909,7 @@
               </a:defRPr>
             </a:pPr>
             <a:r>
-              <a:t>FeatureFilm · 29 phim</a:t>
+              <a:t>FeatureFilm · 29 films</a:t>
             </a:r>
           </a:p>
         </p:txBody>
@@ -36953,7 +36997,7 @@
               </a:defRPr>
             </a:pPr>
             <a:r>
-              <a:t>AnimatedFilm · 1 phim</a:t>
+              <a:t>AnimatedFilm · 1 film</a:t>
             </a:r>
           </a:p>
         </p:txBody>
@@ -37041,7 +37085,7 @@
               </a:defRPr>
             </a:pPr>
             <a:r>
-              <a:t>DocumentaryFilm · 0 phim</a:t>
+              <a:t>DocumentaryFilm · 0 films</a:t>
             </a:r>
           </a:p>
         </p:txBody>
@@ -37576,14 +37620,14 @@
       </p:sp>
       <p:sp>
         <p:nvSpPr>
-          <p:cNvPr id="31" name="PHOTO_P01"/>
+          <p:cNvPr id="31" name="PHOTO_P01_0"/>
           <p:cNvSpPr/>
           <p:nvPr/>
         </p:nvSpPr>
         <p:spPr>
           <a:xfrm>
             <a:off x="7818120" y="2578608"/>
-            <a:ext cx="6080760" cy="4709160"/>
+            <a:ext cx="6080760" cy="4590288"/>
           </a:xfrm>
           <a:prstGeom prst="roundRect">
             <a:avLst/>
@@ -37621,7 +37665,7 @@
       </p:sp>
       <p:sp>
         <p:nvSpPr>
-          <p:cNvPr id="32" name="TextBox 31"/>
+          <p:cNvPr id="32" name="PHOTO_P01_1"/>
           <p:cNvSpPr txBox="1"/>
           <p:nvPr/>
         </p:nvSpPr>
@@ -37666,7 +37710,7 @@
       </p:sp>
       <p:sp>
         <p:nvSpPr>
-          <p:cNvPr id="33" name="Rounded Rectangle 32"/>
+          <p:cNvPr id="33" name="PHOTO_P01_2"/>
           <p:cNvSpPr/>
           <p:nvPr/>
         </p:nvSpPr>
@@ -37709,7 +37753,7 @@
       </p:sp>
       <p:sp>
         <p:nvSpPr>
-          <p:cNvPr id="34" name="TextBox 33"/>
+          <p:cNvPr id="34" name="PHOTO_P01_3"/>
           <p:cNvSpPr txBox="1"/>
           <p:nvPr/>
         </p:nvSpPr>
@@ -37754,7 +37798,7 @@
       </p:sp>
       <p:sp>
         <p:nvSpPr>
-          <p:cNvPr id="35" name="TextBox 34"/>
+          <p:cNvPr id="35" name="PHOTO_P01_4"/>
           <p:cNvSpPr txBox="1"/>
           <p:nvPr/>
         </p:nvSpPr>
@@ -37799,7 +37843,7 @@
       </p:sp>
       <p:sp>
         <p:nvSpPr>
-          <p:cNvPr id="36" name="TextBox 35"/>
+          <p:cNvPr id="36" name="PHOTO_P01_5"/>
           <p:cNvSpPr txBox="1"/>
           <p:nvPr/>
         </p:nvSpPr>
@@ -37862,7 +37906,7 @@
       </p:sp>
       <p:sp>
         <p:nvSpPr>
-          <p:cNvPr id="37" name="TextBox 36"/>
+          <p:cNvPr id="37" name="PHOTO_P01_6"/>
           <p:cNvSpPr txBox="1"/>
           <p:nvPr/>
         </p:nvSpPr>
@@ -37907,7 +37951,7 @@
       </p:sp>
       <p:sp>
         <p:nvSpPr>
-          <p:cNvPr id="38" name="TextBox 37"/>
+          <p:cNvPr id="38" name="PHOTO_P01_7"/>
           <p:cNvSpPr txBox="1"/>
           <p:nvPr/>
         </p:nvSpPr>
@@ -37952,13 +37996,13 @@
       </p:sp>
       <p:sp>
         <p:nvSpPr>
-          <p:cNvPr id="39" name="TextBox 38"/>
-          <p:cNvSpPr txBox="1"/>
-          <p:nvPr/>
-        </p:nvSpPr>
-        <p:spPr>
-          <a:xfrm>
-            <a:off x="8046720" y="6949440"/>
+          <p:cNvPr id="39" name="PHOTO_P01_8"/>
+          <p:cNvSpPr txBox="1"/>
+          <p:nvPr/>
+        </p:nvSpPr>
+        <p:spPr>
+          <a:xfrm>
+            <a:off x="8046720" y="6830568"/>
             <a:ext cx="5623560" cy="283464"/>
           </a:xfrm>
           <a:prstGeom prst="rect">
@@ -38035,7 +38079,7 @@
               </a:defRPr>
             </a:pPr>
             <a:r>
-              <a:t>(I): kiểu được bổ sung. FeatureFilm/AnimatedFilm theo ánh xạ P31; lớp tài liệu có 0 cá thể trong mẫu.</a:t>
+              <a:t>(I): additional types. FeatureFilm/AnimatedFilm follow P31 mapping; DocumentaryFilm has no sample instances.</a:t>
             </a:r>
           </a:p>
         </p:txBody>
@@ -38194,7 +38238,7 @@
               </a:defRPr>
             </a:pPr>
             <a:r>
-              <a:t>YC1 · Người, tổ chức và vai trò nghề nghiệp</a:t>
+              <a:t>R1 · People, organizations and roles</a:t>
             </a:r>
           </a:p>
         </p:txBody>
@@ -38239,7 +38283,7 @@
               </a:defRPr>
             </a:pPr>
             <a:r>
-              <a:t>Một người có thể vừa là Actor vừa là Filmmaker</a:t>
+              <a:t>A person may be both an Actor and a Filmmaker</a:t>
             </a:r>
           </a:p>
         </p:txBody>
@@ -38327,7 +38371,7 @@
               </a:defRPr>
             </a:pPr>
             <a:r>
-              <a:t>Đối chiếu dữ liệu: 08/10/2026 • Nguồn: mã dự án và evidence/</a:t>
+              <a:t>Data checked: 08 Oct 2026 • Sources: project code and evidence/</a:t>
             </a:r>
           </a:p>
         </p:txBody>
@@ -38548,7 +38592,7 @@
               </a:defRPr>
             </a:pPr>
             <a:r>
-              <a:t>dbo:Person · 851 người</a:t>
+              <a:t>dbo:Person · 851 people</a:t>
             </a:r>
           </a:p>
         </p:txBody>
@@ -39076,21 +39120,21 @@
               </a:defRPr>
             </a:pPr>
             <a:r>
-              <a:t>FilmStudio (I) · 6</a:t>
-            </a:r>
-          </a:p>
-        </p:txBody>
-      </p:sp>
-      <p:sp>
-        <p:nvSpPr>
-          <p:cNvPr id="25" name="PHOTO_P02"/>
+              <a:t>FilmStudio · 6 by counting; DL: 0</a:t>
+            </a:r>
+          </a:p>
+        </p:txBody>
+      </p:sp>
+      <p:sp>
+        <p:nvSpPr>
+          <p:cNvPr id="25" name="PHOTO_P02_0"/>
           <p:cNvSpPr/>
           <p:nvPr/>
         </p:nvSpPr>
         <p:spPr>
           <a:xfrm>
             <a:off x="7818120" y="2578608"/>
-            <a:ext cx="6080760" cy="4709160"/>
+            <a:ext cx="6080760" cy="4590288"/>
           </a:xfrm>
           <a:prstGeom prst="roundRect">
             <a:avLst/>
@@ -39128,7 +39172,7 @@
       </p:sp>
       <p:sp>
         <p:nvSpPr>
-          <p:cNvPr id="26" name="TextBox 25"/>
+          <p:cNvPr id="26" name="PHOTO_P02_1"/>
           <p:cNvSpPr txBox="1"/>
           <p:nvPr/>
         </p:nvSpPr>
@@ -39173,7 +39217,7 @@
       </p:sp>
       <p:sp>
         <p:nvSpPr>
-          <p:cNvPr id="27" name="Rounded Rectangle 26"/>
+          <p:cNvPr id="27" name="PHOTO_P02_2"/>
           <p:cNvSpPr/>
           <p:nvPr/>
         </p:nvSpPr>
@@ -39216,7 +39260,7 @@
       </p:sp>
       <p:sp>
         <p:nvSpPr>
-          <p:cNvPr id="28" name="TextBox 27"/>
+          <p:cNvPr id="28" name="PHOTO_P02_3"/>
           <p:cNvSpPr txBox="1"/>
           <p:nvPr/>
         </p:nvSpPr>
@@ -39261,7 +39305,7 @@
       </p:sp>
       <p:sp>
         <p:nvSpPr>
-          <p:cNvPr id="29" name="TextBox 28"/>
+          <p:cNvPr id="29" name="PHOTO_P02_4"/>
           <p:cNvSpPr txBox="1"/>
           <p:nvPr/>
         </p:nvSpPr>
@@ -39306,7 +39350,7 @@
       </p:sp>
       <p:sp>
         <p:nvSpPr>
-          <p:cNvPr id="30" name="TextBox 29"/>
+          <p:cNvPr id="30" name="PHOTO_P02_5"/>
           <p:cNvSpPr txBox="1"/>
           <p:nvPr/>
         </p:nvSpPr>
@@ -39369,7 +39413,7 @@
       </p:sp>
       <p:sp>
         <p:nvSpPr>
-          <p:cNvPr id="31" name="TextBox 30"/>
+          <p:cNvPr id="31" name="PHOTO_P02_6"/>
           <p:cNvSpPr txBox="1"/>
           <p:nvPr/>
         </p:nvSpPr>
@@ -39423,7 +39467,7 @@
       </p:sp>
       <p:sp>
         <p:nvSpPr>
-          <p:cNvPr id="32" name="TextBox 31"/>
+          <p:cNvPr id="32" name="PHOTO_P02_7"/>
           <p:cNvSpPr txBox="1"/>
           <p:nvPr/>
         </p:nvSpPr>
@@ -39468,13 +39512,13 @@
       </p:sp>
       <p:sp>
         <p:nvSpPr>
-          <p:cNvPr id="33" name="TextBox 32"/>
-          <p:cNvSpPr txBox="1"/>
-          <p:nvPr/>
-        </p:nvSpPr>
-        <p:spPr>
-          <a:xfrm>
-            <a:off x="8046720" y="6949440"/>
+          <p:cNvPr id="33" name="PHOTO_P02_8"/>
+          <p:cNvSpPr txBox="1"/>
+          <p:nvPr/>
+        </p:nvSpPr>
+        <p:spPr>
+          <a:xfrm>
+            <a:off x="8046720" y="6830568"/>
             <a:ext cx="5623560" cy="283464"/>
           </a:xfrm>
           <a:prstGeom prst="rect">
@@ -39551,7 +39595,7 @@
               </a:defRPr>
             </a:pPr>
             <a:r>
-              <a:t>Person / Organization là hai loại chủ thể. Actor và Filmmaker có thể chồng lấp vai trò.</a:t>
+              <a:t>Person and Organization are different kinds of agent. Actor and Filmmaker may overlap.</a:t>
             </a:r>
           </a:p>
         </p:txBody>
@@ -39710,7 +39754,7 @@
               </a:defRPr>
             </a:pPr>
             <a:r>
-              <a:t>YC1 · Thể loại, giải thưởng và xuất xứ</a:t>
+              <a:t>R1 · Genres, awards and provenance</a:t>
             </a:r>
           </a:p>
         </p:txBody>
@@ -39755,7 +39799,7 @@
               </a:defRPr>
             </a:pPr>
             <a:r>
-              <a:t>Mỗi nhánh hỗ trợ một nhóm câu hỏi cụ thể</a:t>
+              <a:t>Each branch supports a specific group of questions</a:t>
             </a:r>
           </a:p>
         </p:txBody>
@@ -39843,7 +39887,7 @@
               </a:defRPr>
             </a:pPr>
             <a:r>
-              <a:t>Đối chiếu dữ liệu: 08/10/2026 • Nguồn: mã dự án và evidence/</a:t>
+              <a:t>Data checked: 08 Oct 2026 • Sources: project code and evidence/</a:t>
             </a:r>
           </a:p>
         </p:txBody>
@@ -41039,14 +41083,14 @@
       </p:sp>
       <p:sp>
         <p:nvSpPr>
-          <p:cNvPr id="35" name="PHOTO_P03"/>
+          <p:cNvPr id="35" name="PHOTO_P03_0"/>
           <p:cNvSpPr/>
           <p:nvPr/>
         </p:nvSpPr>
         <p:spPr>
           <a:xfrm>
             <a:off x="7818120" y="2578608"/>
-            <a:ext cx="6080760" cy="4709160"/>
+            <a:ext cx="6080760" cy="4590288"/>
           </a:xfrm>
           <a:prstGeom prst="roundRect">
             <a:avLst/>
@@ -41084,7 +41128,7 @@
       </p:sp>
       <p:sp>
         <p:nvSpPr>
-          <p:cNvPr id="36" name="TextBox 35"/>
+          <p:cNvPr id="36" name="PHOTO_P03_1"/>
           <p:cNvSpPr txBox="1"/>
           <p:nvPr/>
         </p:nvSpPr>
@@ -41129,7 +41173,7 @@
       </p:sp>
       <p:sp>
         <p:nvSpPr>
-          <p:cNvPr id="37" name="Rounded Rectangle 36"/>
+          <p:cNvPr id="37" name="PHOTO_P03_2"/>
           <p:cNvSpPr/>
           <p:nvPr/>
         </p:nvSpPr>
@@ -41172,7 +41216,7 @@
       </p:sp>
       <p:sp>
         <p:nvSpPr>
-          <p:cNvPr id="38" name="TextBox 37"/>
+          <p:cNvPr id="38" name="PHOTO_P03_3"/>
           <p:cNvSpPr txBox="1"/>
           <p:nvPr/>
         </p:nvSpPr>
@@ -41217,7 +41261,7 @@
       </p:sp>
       <p:sp>
         <p:nvSpPr>
-          <p:cNvPr id="39" name="TextBox 38"/>
+          <p:cNvPr id="39" name="PHOTO_P03_4"/>
           <p:cNvSpPr txBox="1"/>
           <p:nvPr/>
         </p:nvSpPr>
@@ -41262,7 +41306,7 @@
       </p:sp>
       <p:sp>
         <p:nvSpPr>
-          <p:cNvPr id="40" name="TextBox 39"/>
+          <p:cNvPr id="40" name="PHOTO_P03_5"/>
           <p:cNvSpPr txBox="1"/>
           <p:nvPr/>
         </p:nvSpPr>
@@ -41307,7 +41351,7 @@
       </p:sp>
       <p:sp>
         <p:nvSpPr>
-          <p:cNvPr id="41" name="TextBox 40"/>
+          <p:cNvPr id="41" name="PHOTO_P03_6"/>
           <p:cNvSpPr txBox="1"/>
           <p:nvPr/>
         </p:nvSpPr>
@@ -41361,7 +41405,7 @@
       </p:sp>
       <p:sp>
         <p:nvSpPr>
-          <p:cNvPr id="42" name="TextBox 41"/>
+          <p:cNvPr id="42" name="PHOTO_P03_7"/>
           <p:cNvSpPr txBox="1"/>
           <p:nvPr/>
         </p:nvSpPr>
@@ -41406,13 +41450,13 @@
       </p:sp>
       <p:sp>
         <p:nvSpPr>
-          <p:cNvPr id="43" name="TextBox 42"/>
-          <p:cNvSpPr txBox="1"/>
-          <p:nvPr/>
-        </p:nvSpPr>
-        <p:spPr>
-          <a:xfrm>
-            <a:off x="8046720" y="6949440"/>
+          <p:cNvPr id="43" name="PHOTO_P03_8"/>
+          <p:cNvSpPr txBox="1"/>
+          <p:nvPr/>
+        </p:nvSpPr>
+        <p:spPr>
+          <a:xfrm>
+            <a:off x="8046720" y="6830568"/>
             <a:ext cx="5623560" cy="283464"/>
           </a:xfrm>
           <a:prstGeom prst="rect">
@@ -41489,7 +41533,7 @@
               </a:defRPr>
             </a:pPr>
             <a:r>
-              <a:t>Bổ trợ: dbo:Country · Language · SourceSnapshot · Dataset. Ánh xạ nhóm theo nhãn là quy tắc build.</a:t>
+              <a:t>Supporting classes: dbo:Country · Language · SourceSnapshot · Dataset. Group mapping uses label keywords.</a:t>
             </a:r>
           </a:p>
         </p:txBody>
@@ -41648,7 +41692,7 @@
               </a:defRPr>
             </a:pPr>
             <a:r>
-              <a:t>YC1 · Contribution: ai làm gì trong phim nào?</a:t>
+              <a:t>R1 · Contribution: who did what in a film?</a:t>
             </a:r>
           </a:p>
         </p:txBody>
@@ -41693,7 +41737,7 @@
               </a:defRPr>
             </a:pPr>
             <a:r>
-              <a:t>Một bản ghi nối đúng 1 người, 1 phim và 1 vai trò</a:t>
+              <a:t>One record connects exactly one person, one film and one role</a:t>
             </a:r>
           </a:p>
         </p:txBody>
@@ -41781,7 +41825,7 @@
               </a:defRPr>
             </a:pPr>
             <a:r>
-              <a:t>Đối chiếu dữ liệu: 08/10/2026 • Nguồn: mã dự án và evidence/</a:t>
+              <a:t>Data checked: 08 Oct 2026 • Sources: project code and evidence/</a:t>
             </a:r>
           </a:p>
         </p:txBody>
@@ -42764,7 +42808,7 @@
               </a:defRPr>
             </a:pPr>
             <a:r>
-              <a:t>Mỗi vai trò có bản ghi riêng</a:t>
+              <a:t>Each role has its own record</a:t>
             </a:r>
           </a:p>
         </p:txBody>
@@ -42809,7 +42853,7 @@
               </a:defRPr>
             </a:pPr>
             <a:r>
-              <a:t>Director / Actor / Writer / Producer. Nolan có 3 vai trò trong</a:t>
+              <a:t>Director / Actor / Writer / Producer. Nolan has 3 roles in</a:t>
             </a:r>
           </a:p>
           <a:p>
@@ -42838,14 +42882,14 @@
       </p:sp>
       <p:sp>
         <p:nvSpPr>
-          <p:cNvPr id="31" name="PHOTO_P04"/>
+          <p:cNvPr id="31" name="PHOTO_P04_0"/>
           <p:cNvSpPr/>
           <p:nvPr/>
         </p:nvSpPr>
         <p:spPr>
           <a:xfrm>
             <a:off x="7818120" y="2578608"/>
-            <a:ext cx="6080760" cy="4709160"/>
+            <a:ext cx="6080760" cy="4590288"/>
           </a:xfrm>
           <a:prstGeom prst="roundRect">
             <a:avLst/>
@@ -42883,7 +42927,7 @@
       </p:sp>
       <p:sp>
         <p:nvSpPr>
-          <p:cNvPr id="32" name="TextBox 31"/>
+          <p:cNvPr id="32" name="PHOTO_P04_1"/>
           <p:cNvSpPr txBox="1"/>
           <p:nvPr/>
         </p:nvSpPr>
@@ -42928,7 +42972,7 @@
       </p:sp>
       <p:sp>
         <p:nvSpPr>
-          <p:cNvPr id="33" name="Rounded Rectangle 32"/>
+          <p:cNvPr id="33" name="PHOTO_P04_2"/>
           <p:cNvSpPr/>
           <p:nvPr/>
         </p:nvSpPr>
@@ -42971,7 +43015,7 @@
       </p:sp>
       <p:sp>
         <p:nvSpPr>
-          <p:cNvPr id="34" name="TextBox 33"/>
+          <p:cNvPr id="34" name="PHOTO_P04_3"/>
           <p:cNvSpPr txBox="1"/>
           <p:nvPr/>
         </p:nvSpPr>
@@ -43016,7 +43060,7 @@
       </p:sp>
       <p:sp>
         <p:nvSpPr>
-          <p:cNvPr id="35" name="TextBox 34"/>
+          <p:cNvPr id="35" name="PHOTO_P04_4"/>
           <p:cNvSpPr txBox="1"/>
           <p:nvPr/>
         </p:nvSpPr>
@@ -43061,7 +43105,7 @@
       </p:sp>
       <p:sp>
         <p:nvSpPr>
-          <p:cNvPr id="36" name="TextBox 35"/>
+          <p:cNvPr id="36" name="PHOTO_P04_5"/>
           <p:cNvSpPr txBox="1"/>
           <p:nvPr/>
         </p:nvSpPr>
@@ -43124,7 +43168,7 @@
       </p:sp>
       <p:sp>
         <p:nvSpPr>
-          <p:cNvPr id="37" name="TextBox 36"/>
+          <p:cNvPr id="37" name="PHOTO_P04_6"/>
           <p:cNvSpPr txBox="1"/>
           <p:nvPr/>
         </p:nvSpPr>
@@ -43169,7 +43213,7 @@
       </p:sp>
       <p:sp>
         <p:nvSpPr>
-          <p:cNvPr id="38" name="TextBox 37"/>
+          <p:cNvPr id="38" name="PHOTO_P04_7"/>
           <p:cNvSpPr txBox="1"/>
           <p:nvPr/>
         </p:nvSpPr>
@@ -43214,13 +43258,13 @@
       </p:sp>
       <p:sp>
         <p:nvSpPr>
-          <p:cNvPr id="39" name="TextBox 38"/>
-          <p:cNvSpPr txBox="1"/>
-          <p:nvPr/>
-        </p:nvSpPr>
-        <p:spPr>
-          <a:xfrm>
-            <a:off x="8046720" y="6949440"/>
+          <p:cNvPr id="39" name="PHOTO_P04_8"/>
+          <p:cNvSpPr txBox="1"/>
+          <p:nvPr/>
+        </p:nvSpPr>
+        <p:spPr>
+          <a:xfrm>
+            <a:off x="8046720" y="6830568"/>
             <a:ext cx="5623560" cy="283464"/>
           </a:xfrm>
           <a:prstGeom prst="rect">

--- a/docs/Slide.pptx
+++ b/docs/Slide.pptx
@@ -525,7 +525,7 @@
           <a:lstStyle/>
           <a:p>
             <a:r>
-              <a:t>Welcome. We present MovieLOD, a linked open data application for movies. The project connects a domain ontology, real source responses, RDF, external links and SPARQL queries. The current version contains 30 films, 42 declared classes and 1,727 external identity links. Inception and Christopher Nolan are our running examples. This deck has 24 slides. Vietnamese instructions remain inside the 11 empty Protégé screenshot slots so the team can add genuine evidence. These slots are placeholders, not screenshots. The demo video remains unchanged.</a:t>
+              <a:t>We present the final local ontology, version 3.0.0. It contains 30 films, 37 named classes and 1,727 identity links. We distinguish the verified ontology from the web application, which now uses the same canonical vocabulary. Our examples use real Inception and Christopher Nolan records.</a:t>
             </a:r>
           </a:p>
         </p:txBody>
@@ -595,7 +595,7 @@
           <a:lstStyle/>
           <a:p>
             <a:r>
-              <a:t>An object property connects two entities. contributionBy has domain Contribution, range Person and inverse hasContribution. contributionTo connects to Film; hasRole connects to ContributionRole. These three properties are functional. Direct director, starring, writer and producer properties reuse DBpedia vocabulary. Inverse pairs such as hasGenre/genreOf and hasAward/awardOf support navigation in either direction. An inverse is not a symmetric property. Domain and range can infer types; they are not input-rejection rules. The requested screenshot shows contributionBy’s domain, range, inverse and functional characteristic.</a:t>
+              <a:t>Direct film relations reuse DBpedia. The inverse of contributionBy supports hasContribution. contributedTo is entailed through the hasContribution/contributionTo property chain. Directed and actedIn are narrower subproperties. The chain property is non-simple, so the cardinality model uses the simple hasContribution relation.</a:t>
             </a:r>
           </a:p>
           <a:p/>
@@ -606,33 +606,33 @@
           </a:p>
           <a:p>
             <a:r>
-              <a:t>Mở ontology/Movie_Ontology.owl</a:t>
-            </a:r>
-          </a:p>
-          <a:p>
-            <a:r>
-              <a:t>1. Entities → Object properties → chọn contributionBy.</a:t>
-            </a:r>
-          </a:p>
-          <a:p>
-            <a:r>
-              <a:t>2. Hiện Domain=Contribution, Range=Person.</a:t>
-            </a:r>
-          </a:p>
-          <a:p>
-            <a:r>
-              <a:t>3. Giữ inverse hasContribution và ô Functional được chọn.</a:t>
-            </a:r>
-          </a:p>
-          <a:p>
-            <a:r>
-              <a:t>Cần thấy: Đúng domain/range/inverse/functional của contributionBy. Nếu cần, chụp bổ sung hasRole hoặc director.</a:t>
+              <a:t>Mở ontology/Movie_Knowledge_Graph.owl</a:t>
+            </a:r>
+          </a:p>
+          <a:p>
+            <a:r>
+              <a:t>1. Chọn contributionBy: Contribution → dbo:Person.</a:t>
+            </a:r>
+          </a:p>
+          <a:p>
+            <a:r>
+              <a:t>2. Hiện Functional và inverse hasContribution.</a:t>
+            </a:r>
+          </a:p>
+          <a:p>
+            <a:r>
+              <a:t>3. Có thể chụp contributedTo với property chain.</a:t>
+            </a:r>
+          </a:p>
+          <a:p>
+            <a:r>
+              <a:t>Cần thấy: Chain hasContribution rồi contributionTo; không đặt cardinality trên contributedTo.</a:t>
             </a:r>
           </a:p>
           <a:p/>
           <a:p>
             <a:r>
-              <a:t>Reference: all 23 object properties (not intended to be read aloud in full):</a:t>
+              <a:t>Reference: all 19 object properties (not intended to be read aloud in full):</a:t>
             </a:r>
           </a:p>
           <a:p>
@@ -647,32 +647,57 @@
           </a:p>
           <a:p>
             <a:r>
+              <a:t>| dbo:award | — | dbo:Award | — |</a:t>
+            </a:r>
+          </a:p>
+          <a:p>
+            <a:r>
+              <a:t>| dbo:country | — | dbo:Country | — |</a:t>
+            </a:r>
+          </a:p>
+          <a:p>
+            <a:r>
               <a:t>| dbo:director | dbo:Film | dbo:Person | ex:directed |</a:t>
             </a:r>
           </a:p>
           <a:p>
             <a:r>
-              <a:t>| dbo:producer | dbo:Film | dbo:Person | ex:produced |</a:t>
-            </a:r>
-          </a:p>
-          <a:p>
-            <a:r>
-              <a:t>| dbo:starring | dbo:Film | dbo:Person | ex:actedIn |</a:t>
-            </a:r>
-          </a:p>
-          <a:p>
-            <a:r>
-              <a:t>| dbo:writer | dbo:Film | dbo:Person | ex:wrote |</a:t>
-            </a:r>
-          </a:p>
-          <a:p>
-            <a:r>
-              <a:t>| ex:actedIn | dbo:Person | dbo:Film | dbo:starring |</a:t>
-            </a:r>
-          </a:p>
-          <a:p>
-            <a:r>
-              <a:t>| ex:awardOf | ex:Award | dbo:Film or dbo:Person | ex:hasAward |</a:t>
+              <a:t>| dbo:genre | — | dbo:Genre | — |</a:t>
+            </a:r>
+          </a:p>
+          <a:p>
+            <a:r>
+              <a:t>| dbo:language | — | dbo:Language | — |</a:t>
+            </a:r>
+          </a:p>
+          <a:p>
+            <a:r>
+              <a:t>| dbo:producer | dbo:Work | dbo:Agent | — |</a:t>
+            </a:r>
+          </a:p>
+          <a:p>
+            <a:r>
+              <a:t>| dbo:productionCompany | dbo:Work | dbo:Company | ex:productionOf |</a:t>
+            </a:r>
+          </a:p>
+          <a:p>
+            <a:r>
+              <a:t>| dbo:starring | dbo:Work | dbo:Actor | ex:actedIn |</a:t>
+            </a:r>
+          </a:p>
+          <a:p>
+            <a:r>
+              <a:t>| dbo:writer | dbo:Work | dbo:Person | — |</a:t>
+            </a:r>
+          </a:p>
+          <a:p>
+            <a:r>
+              <a:t>| ex:actedIn | dbo:Actor | dbo:Film | dbo:starring |</a:t>
+            </a:r>
+          </a:p>
+          <a:p>
+            <a:r>
+              <a:t>| ex:contributedTo | dbo:Person | dbo:Film | — |</a:t>
             </a:r>
           </a:p>
           <a:p>
@@ -692,72 +717,27 @@
           </a:p>
           <a:p>
             <a:r>
-              <a:t>| ex:country | dbo:Film | dbo:Country | — |</a:t>
-            </a:r>
-          </a:p>
-          <a:p>
-            <a:r>
               <a:t>| ex:directed | dbo:Person | dbo:Film | dbo:director |</a:t>
             </a:r>
           </a:p>
           <a:p>
             <a:r>
-              <a:t>| ex:genreOf | ex:Genre | dbo:Film | ex:hasGenre |</a:t>
-            </a:r>
-          </a:p>
-          <a:p>
-            <a:r>
-              <a:t>| ex:hasAward | dbo:Film or dbo:Person | ex:Award | ex:awardOf |</a:t>
-            </a:r>
-          </a:p>
-          <a:p>
-            <a:r>
               <a:t>| ex:hasContribution | dbo:Person | ex:Contribution | ex:contributionBy |</a:t>
             </a:r>
           </a:p>
           <a:p>
             <a:r>
-              <a:t>| ex:hasGenre | dbo:Film | ex:Genre | ex:genreOf |</a:t>
-            </a:r>
-          </a:p>
-          <a:p>
-            <a:r>
-              <a:t>| ex:hasProductionCompany | dbo:Film | ex:ProductionCompany | ex:productionOf |</a:t>
-            </a:r>
-          </a:p>
-          <a:p>
-            <a:r>
-              <a:t>| ex:hasRole | ex:Contribution | ex:ContributionRole | ex:roleOf · functional |</a:t>
-            </a:r>
-          </a:p>
-          <a:p>
-            <a:r>
-              <a:t>| ex:language | dbo:Film | ex:Language | — |</a:t>
-            </a:r>
-          </a:p>
-          <a:p>
-            <a:r>
-              <a:t>| ex:produced | dbo:Person | dbo:Film | dbo:producer |</a:t>
-            </a:r>
-          </a:p>
-          <a:p>
-            <a:r>
-              <a:t>| ex:productionOf | ex:ProductionCompany | dbo:Film | ex:hasProductionCompany |</a:t>
-            </a:r>
-          </a:p>
-          <a:p>
-            <a:r>
-              <a:t>| ex:roleOf | ex:ContributionRole | ex:Contribution | ex:hasRole |</a:t>
+              <a:t>| ex:hasRole | ex:Contribution | ex:ContributionRole | — · functional |</a:t>
+            </a:r>
+          </a:p>
+          <a:p>
+            <a:r>
+              <a:t>| ex:productionOf | dbo:Company | dbo:Work | dbo:productionCompany |</a:t>
             </a:r>
           </a:p>
           <a:p>
             <a:r>
               <a:t>| ex:sourceSnapshot | — | ex:SourceSnapshot | — |</a:t>
-            </a:r>
-          </a:p>
-          <a:p>
-            <a:r>
-              <a:t>| ex:wrote | dbo:Person | dbo:Film | dbo:writer |</a:t>
             </a:r>
           </a:p>
         </p:txBody>
@@ -827,7 +807,7 @@
           <a:lstStyle/>
           <a:p>
             <a:r>
-              <a:t>OWL supports equivalent class definitions, intersections, unions, existential restrictions, fixed values and cardinality. Contribution connects exactly one suitable Person, Film and Role. A contribution with DirectorRole belongs to DirectingContribution. Inverse properties support reverse paths. Disjointness is used for incompatible entity categories, not for Actor and Filmmaker. Under the open-world assumption, a missing triple is not evidence that something is false. Different IRIs need not denote different individuals. Python checks required application fields, while OWL expresses meaning and supports classification.</a:t>
+              <a:t>Equivalent classes express necessary and sufficient conditions; subclass axioms have one direction. Existential and value restrictions classify credits and people. Functional properties can force equality, while different role values provide distinctness witnesses. Missing facts do not imply negation, and different IRIs alone do not prove different individuals.</a:t>
             </a:r>
           </a:p>
         </p:txBody>
@@ -897,7 +877,7 @@
           <a:lstStyle/>
           <a:p>
             <a:r>
-              <a:t>This table summarizes additional classification in the application. Four contribution classes use roles, three person classes use contributions or awards, and five film classes use genres or awards. Those twelve classes use OWL RL, and their counts are independently confirmed by HermiT and Pellet. MultiGenreFilm and FilmStudio use COUNT DISTINCT after rule closure. Counts include only local resource IRIs to avoid duplicate sameAs aliases. This application table comes from ontology_reasoning.json. HermiT and Pellet infer zero instances for the two counting classes. Person queries have LIMIT 20, so their returned rows are not the totals of 769 Actors or 89 Filmmakers.</a:t>
+              <a:t>Ten domain subsets have genuine HermiT members, including seven additional subsets beyond Filmmaker, ActionFilm and AwardWinningFilm. The four credit subclasses are supporting definitions. Actor uses DBpedia range reasoning. Counts are local identifiers only. No COUNT DISTINCT aggregate is used to produce these domain class memberships.</a:t>
             </a:r>
           </a:p>
         </p:txBody>
@@ -967,7 +947,7 @@
           <a:lstStyle/>
           <a:p>
             <a:r>
-              <a:t>The asserted data types Nolan as Person and records his contributions and awards. One of his Inception contributions has DirectorRole. A hasValue definition classifies it as DirectingContribution. Filmmaker combines Person with the existence of a directing, writing or producing contribution. Nolan also receives awards, so he is inferred to be an AwardWinner. HermiT and Pellet confirm both types. The screenshot slot requests Filmmaker’s Equivalent To expression. A definition screenshot proves the axiom is present; execution logs separately demonstrate the inference.</a:t>
+              <a:t>A directing record with DirectorRole becomes DirectingContribution. The inverse property supplies hasContribution for Nolan. The existential and union definition yields Filmmaker. Writing credits additionally support ScreenWriter; directing credits support MovieDirector, and their intersection yields WriterDirector. These types are not manually asserted.</a:t>
             </a:r>
           </a:p>
           <a:p/>
@@ -978,27 +958,27 @@
           </a:p>
           <a:p>
             <a:r>
-              <a:t>Mở ontology/Movie_Ontology.owl</a:t>
-            </a:r>
-          </a:p>
-          <a:p>
-            <a:r>
-              <a:t>1. Entities → Classes → chọn Filmmaker.</a:t>
-            </a:r>
-          </a:p>
-          <a:p>
-            <a:r>
-              <a:t>2. Mở Class Description → Equivalent To.</a:t>
-            </a:r>
-          </a:p>
-          <a:p>
-            <a:r>
-              <a:t>3. Hiện Person AND các nhánh SOME Directing/Writing/ProducingContribution.</a:t>
-            </a:r>
-          </a:p>
-          <a:p>
-            <a:r>
-              <a:t>Cần thấy: Định nghĩa giao/hợp/tồn tại. Ảnh định nghĩa không tự chứng minh HermiT đã phân loại dữ liệu.</a:t>
+              <a:t>Mở ontology/Movie_Knowledge_Graph.owl</a:t>
+            </a:r>
+          </a:p>
+          <a:p>
+            <a:r>
+              <a:t>1. Chọn ex:Filmmaker.</a:t>
+            </a:r>
+          </a:p>
+          <a:p>
+            <a:r>
+              <a:t>2. Hiện Equivalent To với Person AND các nhánh SOME.</a:t>
+            </a:r>
+          </a:p>
+          <a:p>
+            <a:r>
+              <a:t>3. Đọc các nhánh Directing / Writing / ProducingContribution.</a:t>
+            </a:r>
+          </a:p>
+          <a:p>
+            <a:r>
+              <a:t>Cần thấy: Công thức không tự chứng minh reasoner đã chạy.</a:t>
             </a:r>
           </a:p>
         </p:txBody>
@@ -1068,38 +1048,38 @@
           <a:lstStyle/>
           <a:p>
             <a:r>
-              <a:t>MultiGenreFilm is a Film with at least two Genres. FilmStudio is a ProductionCompany with at least three Films through productionOf. All 30 sampled films have at least two genre IRIs; six companies meet the application’s three-film threshold. Warner Bros. is linked to eleven sampled films. reason.py uses COUNT DISTINCT after inverse-property closure because OWL RL does not cover these thresholds. Different IRIs need not be different individuals under OWL semantics. HermiT and Pellet infer zero instances for both classes. The figures thirty and six are application counts, not DL membership results. Capture the actual class definitions in Protégé.</a:t>
+              <a:t>Nolan has directing, writing and producing credits with different controlled role values. Because hasRole is functional and the roles are AllDifferent, these records cannot be the same individual. HermiT entails at least three distinct Contributions. Seven people satisfy min three and seventeen min two. Genre cardinality still lacks inequality witnesses; MultiGenreFilm is not retained as a populated inferred class.</a:t>
             </a:r>
           </a:p>
           <a:p/>
           <a:p>
             <a:r>
-              <a:t>ẢNH PROTÉGÉ CẦN BỔ SUNG P07 — P07_filmstudio_cardinality.png</a:t>
-            </a:r>
-          </a:p>
-          <a:p>
-            <a:r>
-              <a:t>Mở ontology/Movie_Ontology.owl</a:t>
-            </a:r>
-          </a:p>
-          <a:p>
-            <a:r>
-              <a:t>1. Entities → Classes → chọn FilmStudio.</a:t>
-            </a:r>
-          </a:p>
-          <a:p>
-            <a:r>
-              <a:t>2. Mở Equivalent To; hiện min 3 productionOf Film.</a:t>
-            </a:r>
-          </a:p>
-          <a:p>
-            <a:r>
-              <a:t>3. Có thể chụp thêm MultiGenreFilm: min 2 hasGenre Genre.</a:t>
-            </a:r>
-          </a:p>
-          <a:p>
-            <a:r>
-              <a:t>Cần thấy: Ảnh công thức cardinality. Kết quả 6 studio/30 phim nhiều thể loại của app dùng COUNT DISTINCT, không tự coi là chứng minh OWL DL.</a:t>
+              <a:t>ẢNH PROTÉGÉ CẦN BỔ SUNG P07 — P07_three_credit_cardinality.png</a:t>
+            </a:r>
+          </a:p>
+          <a:p>
+            <a:r>
+              <a:t>Mở ontology/Movie_Knowledge_Graph.owl</a:t>
+            </a:r>
+          </a:p>
+          <a:p>
+            <a:r>
+              <a:t>1. Chọn ex:ThreeCreditContributor; hiện min 3 hasContribution Contribution.</a:t>
+            </a:r>
+          </a:p>
+          <a:p>
+            <a:r>
+              <a:t>2. Chạy HermiT; chọn Nolan ở inferred view.</a:t>
+            </a:r>
+          </a:p>
+          <a:p>
+            <a:r>
+              <a:t>3. Chụp thêm Functional hasRole và AllDifferent của bốn role.</a:t>
+            </a:r>
+          </a:p>
+          <a:p>
+            <a:r>
+              <a:t>Cần thấy: 7 người đạt min 3; 17 người đạt min 2; không phải COUNT DISTINCT.</a:t>
             </a:r>
           </a:p>
         </p:txBody>
@@ -1169,7 +1149,7 @@
           <a:lstStyle/>
           <a:p>
             <a:r>
-              <a:t>Film identity is resolved through an exact English Wikipedia sitelink, rather than approximate title matching. Wikidata supplies directors, actors, writers, producers, awards and production companies. DBpedia links require the matched root subject to be a Film, resulting in twenty-eight verified links rather than guessing thirty. Each saved response has a URL, provider, timestamp, HTTP status, SHA-256 and path. All 76 responses are present and verified. A re-fetched response that changed was assigned its new timestamp and hash while retaining the historical manifest. Hashes verify byte integrity, not the truth of every claim.</a:t>
+              <a:t>The collector contains credit claims, genres, awards, companies, countries, languages, dates and durations. We exclude fields that were not collected. Seventy-six saved responses provide retrieval URLs, timestamps and checksums. Label-based genre normalization is an author policy, not a source-provided OWL taxonomy. Hashes establish byte integrity, not factual truth.</a:t>
             </a:r>
           </a:p>
         </p:txBody>
@@ -1239,7 +1219,7 @@
           <a:lstStyle/>
           <a:p>
             <a:r>
-              <a:t>An RDF triple has a subject, predicate and object or literal. Inception is directed by Nolan, released in 2010 and has a runtime of 148 minutes. director links entities; year and runtime are typed literals. QIDs produce stable local IRIs. Hours, minutes and seconds are normalized to minutes, with ambiguous source values recorded for review. The six declared data properties are title, releaseYear, runtimeMinutes, sourceUrl, retrievedAt and sha256. All exports use millisecond timestamps. Turtle and JSON-LD represent the same graph; the main Knowledge Graph OWL contains schema and data. The screenshot slot requests runtimeMinutes with Film domain and decimal range.</a:t>
+              <a:t>Inception has label Inception, release-year summary 2010 and runtime 8880 seconds. Runtime reuses DBpedia with xsd:double. The model has five datatype properties; rdfs:label is an annotation property, not an extra custom title datatype. We preserve the source precision rather than inventing a full release date.</a:t>
             </a:r>
           </a:p>
           <a:p/>
@@ -1250,27 +1230,27 @@
           </a:p>
           <a:p>
             <a:r>
-              <a:t>Mở ontology/Movie_Ontology.owl</a:t>
-            </a:r>
-          </a:p>
-          <a:p>
-            <a:r>
-              <a:t>1. Entities → Data properties → chọn runtimeMinutes.</a:t>
-            </a:r>
-          </a:p>
-          <a:p>
-            <a:r>
-              <a:t>2. Hiện Domain=Film và Range=xsd:decimal.</a:t>
-            </a:r>
-          </a:p>
-          <a:p>
-            <a:r>
-              <a:t>3. Có thể chụp thêm releaseYear có range xsd:integer.</a:t>
-            </a:r>
-          </a:p>
-          <a:p>
-            <a:r>
-              <a:t>Cần thấy: Thuộc tính dữ liệu nối thực thể với literal, khác quan hệ nối hai thực thể.</a:t>
+              <a:t>Mở ontology/Movie_Knowledge_Graph.owl</a:t>
+            </a:r>
+          </a:p>
+          <a:p>
+            <a:r>
+              <a:t>1. Chọn dbo:runtime trong Data properties.</a:t>
+            </a:r>
+          </a:p>
+          <a:p>
+            <a:r>
+              <a:t>2. Hiện domain dbo:Work và range xsd:double.</a:t>
+            </a:r>
+          </a:p>
+          <a:p>
+            <a:r>
+              <a:t>3. Chọn Inception: runtime = 8880 giây.</a:t>
+            </a:r>
+          </a:p>
+          <a:p>
+            <a:r>
+              <a:t>Cần thấy: 8880 giây = 148 phút; rdfs:label là annotation property.</a:t>
             </a:r>
           </a:p>
         </p:txBody>
@@ -1340,7 +1320,7 @@
           <a:lstStyle/>
           <a:p>
             <a:r>
-              <a:t>One-star data is available on the Web with an open license. Two-star data is structured; three-star data uses open formats. Four-star data uses HTTP identifiers and RDF for lookup. Five-star data adds links to other datasets. The project publishes CC BY-SA 4.0 data in Turtle and JSON-LD with resolvable descriptions. Four public RDF graphs were compared with local graphs without authentication. There are 1,699 Wikidata and 28 DBpedia identity links. sameAs expresses shared identity; sourceSnapshot records provenance. Reusing dbo:Film is vocabulary reuse in R1, distinct from linking individuals in R4.</a:t>
+              <a:t>The website distributes the version-3 RDF, schema, full OWL and inference exports. HTTP identifiers and CC BY-SA support reuse. Identity alignment retains 1699 Wikidata and 28 DBpedia links. Reusing dbo:Film, identity sameAs and source provenance are three distinct semantic operations.</a:t>
             </a:r>
           </a:p>
         </p:txBody>
@@ -1410,7 +1390,7 @@
           <a:lstStyle/>
           <a:p>
             <a:r>
-              <a:t>The Inception page shows its title, types, year, runtime, director, contributions, external links and provenance. Readers can download Turtle; HTML also embeds JSON-LD. The local Flask server responds to a Turtle Accept header with a 303 redirect, which curl -L follows. The static hosted site provides HTML, JSON-LD and an RDF link; we do not claim it reproduces Flask’s 303 behavior. The left image is a real application screenshot. The right slot requests the Inception individual from the full Knowledge Graph in Protégé. A schema-only file has no film individuals to capture.</a:t>
+              <a:t>The resource page displays the canonical description of Inception: DBpedia properties, its release-year summary, duration in seconds, identities and provenance. The photo slot requests the same individual in Protégé. It distinguishes a live resource description from a genuine ontology screenshot.</a:t>
             </a:r>
           </a:p>
           <a:p/>
@@ -1426,22 +1406,22 @@
           </a:p>
           <a:p>
             <a:r>
-              <a:t>1. Mở ontology/Movie_Knowledge_Graph.owl.</a:t>
-            </a:r>
-          </a:p>
-          <a:p>
-            <a:r>
-              <a:t>2. Individuals → chọn film-Q25188 (Inception).</a:t>
-            </a:r>
-          </a:p>
-          <a:p>
-            <a:r>
-              <a:t>3. Hiện Film, title, releaseYear=2010, runtimeMinutes=148 và director.</a:t>
-            </a:r>
-          </a:p>
-          <a:p>
-            <a:r>
-              <a:t>Cần thấy: Cá thể thật và thuộc tính khớp truy vấn. Giữ tên ontology để không chụp nhầm file chỉ có schema.</a:t>
+              <a:t>1. Mở Movie_Knowledge_Graph.owl 3.0.0.</a:t>
+            </a:r>
+          </a:p>
+          <a:p>
+            <a:r>
+              <a:t>2. Chọn film-Q25188; hiện label, releaseYear 2010, runtime 8880.</a:t>
+            </a:r>
+          </a:p>
+          <a:p>
+            <a:r>
+              <a:t>3. Hiện dbo:director, genre, productionCompany và award.</a:t>
+            </a:r>
+          </a:p>
+          <a:p>
+            <a:r>
+              <a:t>Cần thấy: Cá thể trong OWL khớp trang resource 3.0.0; runtime là 8880 giây.</a:t>
             </a:r>
           </a:p>
         </p:txBody>
@@ -1511,7 +1491,7 @@
           <a:lstStyle/>
           <a:p>
             <a:r>
-              <a:t>The first query matches Inception, follows director to a person and retrieves the person’s label. It returns Inception, 2010, 148 minutes and Christopher Nolan. SELECT chooses columns, WHERE matches graph patterns and question marks denote variables. OPTIONAL preserves rows when year or runtime is absent. Users can edit the query, run it and export results. The interface offers fourteen direct samples. ASK returns a boolean; CONSTRUCT returns an RDF graph. The query engine computes the results from RDF rather than displaying a hard-coded result table.</a:t>
+              <a:t>The default Inception query returns 2010, 8880 seconds and Nolan. The knowledge-scope selector chooses source facts, the precomputed inference graph or the named before/after dataset. The browser uses Comunica; the local endpoint uses RDFLib. Both modes query the same exports rather than executing a reasoner for every request.</a:t>
             </a:r>
           </a:p>
         </p:txBody>
@@ -1581,7 +1561,7 @@
           <a:lstStyle/>
           <a:p>
             <a:r>
-              <a:t>Movie data contains many related entities and overlapping roles. We want to identify Nolan’s roles in Inception, its production companies and the source of each claim. The five requirements form a workflow: define an ontology, collect real data, publish RDF with HTTP identifiers and an open license, link entities to external datasets, and provide SPARQL interfaces. Deliverables include a report of at most 15 pages, slides and a three-to-five-minute demo. The current video runs for about four minutes and fifty seconds.</a:t>
+              <a:t>The five core requirements share ontology version 3.0.0. The source graph, inferred graph and named before/after dataset are available in the browser and endpoint. The report, slides and query results describe the same model. MP4 files were removed at the user’s request; no video was regenerated.</a:t>
             </a:r>
           </a:p>
         </p:txBody>
@@ -1651,7 +1631,7 @@
           <a:lstStyle/>
           <a:p>
             <a:r>
-              <a:t>The complete Inception contribution query returns twenty-five records: twenty-one actors, one director, one writer and two producers. The screenshot filters Christopher Nolan and therefore shows only three rows. Those three rows are not the total contribution count. Other queries return eight sampled Nolan films, four Inception production companies and seven recorded Godfather awards. Additional questions reuse the graph and model without a separate manually populated result table. Download results exports the current result. Query files and execution reports make these counts reproducible.</a:t>
+              <a:t>Inception has 25 credit records: 21 acting, one directing, one writing and two producing. The current application image shows Nolan’s three roles, not all 25 records. The new competency suite contains 27 queries and tests before/after reasoning, including WriterDirector and property-chain results.</a:t>
             </a:r>
           </a:p>
         </p:txBody>
@@ -1721,13 +1701,13 @@
           <a:lstStyle/>
           <a:p>
             <a:r>
-              <a:t>The project provides GET/POST endpoint and terminal interfaces in addition to the Web application. SELECT and ASK return JSON; CONSTRUCT and DESCRIBE return Turtle. The endpoint loads the asserted graph by default. query.py --reasoned also loads the schema and inferred_classes.ttl. Query 24 returns Person in asserted mode, and Person, Filmmaker and AwardWinner with inference. reason.py creates the saved types beforehand; querying does not rerun reasoning. Hierarchy query 13 requires the schema. Actor and Filmmaker queries have LIMIT 20, while full totals are 769 and 89. Capture Nolan’s asserted Types or clearly label a genuine inferred view.</a:t>
+              <a:t>WriterDirector has zero asserted members and ten inferred local members. The scope selector lets readers compare the same query before and after reasoning. Query 27 uses explicit named graphs. The terminal supports --mode asserted, reasoned or dataset; no distinct-term count is used to classify the cardinality subsets.</a:t>
             </a:r>
           </a:p>
           <a:p/>
           <a:p>
             <a:r>
-              <a:t>ẢNH PROTÉGÉ CẦN BỔ SUNG P10 — P10_nolan_asserted_types.png</a:t>
+              <a:t>ẢNH PROTÉGÉ CẦN BỔ SUNG P10 — P10_nolan_inferred_types.png</a:t>
             </a:r>
           </a:p>
           <a:p>
@@ -1737,163 +1717,163 @@
           </a:p>
           <a:p>
             <a:r>
-              <a:t>1. Mở Movie_Knowledge_Graph.owl, chọn person-Q25191 (Nolan).</a:t>
-            </a:r>
-          </a:p>
-          <a:p>
-            <a:r>
-              <a:t>2. Hiện Types trong chế độ asserted / trước suy luận.</a:t>
-            </a:r>
-          </a:p>
-          <a:p>
-            <a:r>
-              <a:t>3. Giữ dbo:Person và các quan hệ đóng góp/giải trong ảnh.</a:t>
-            </a:r>
-          </a:p>
-          <a:p>
-            <a:r>
-              <a:t>Cần thấy: Kiểu gán gốc là Person; Filmmaker/AwardWinner trong app được bổ sung qua file phân loại. Nếu chụp sau reasoner, phải ghi rõ tên và trạng thái thực thi.</a:t>
+              <a:t>1. Chọn HermiT → Start reasoner, chờ hoàn tất.</a:t>
+            </a:r>
+          </a:p>
+          <a:p>
+            <a:r>
+              <a:t>2. Chọn person-Q25191; mở inferred types.</a:t>
+            </a:r>
+          </a:p>
+          <a:p>
+            <a:r>
+              <a:t>3. Giữ WriterDirector, Filmmaker, ThreeCreditContributor trong ảnh.</a:t>
+            </a:r>
+          </a:p>
+          <a:p>
+            <a:r>
+              <a:t>Cần thấy: Type mới không được gán trực tiếp trong asserted graph; giữ trạng thái reasoner.</a:t>
             </a:r>
           </a:p>
           <a:p/>
           <a:p>
             <a:r>
-              <a:t>Reference: 24 queries; values are result-row counts or ASK booleans:</a:t>
-            </a:r>
-          </a:p>
-          <a:p>
-            <a:r>
-              <a:t>| File | Asserted | With schema / inference |</a:t>
-            </a:r>
-          </a:p>
-          <a:p>
-            <a:r>
-              <a:t>|:--|:--|:--|</a:t>
-            </a:r>
-          </a:p>
-          <a:p>
-            <a:r>
-              <a:t>| 01_films.rq | 30 | 30 |</a:t>
-            </a:r>
-          </a:p>
-          <a:p>
-            <a:r>
-              <a:t>| 02_inception.rq | 1 | 1 |</a:t>
-            </a:r>
-          </a:p>
-          <a:p>
-            <a:r>
-              <a:t>| 03_nolan.rq | 8 | 8 |</a:t>
-            </a:r>
-          </a:p>
-          <a:p>
-            <a:r>
-              <a:t>| 04_credits.rq | 25 | 25 |</a:t>
-            </a:r>
-          </a:p>
-          <a:p>
-            <a:r>
-              <a:t>| 05_external_links.rq | 58 | 58 |</a:t>
-            </a:r>
-          </a:p>
-          <a:p>
-            <a:r>
-              <a:t>| 06_genres.rq | 75 | 75 |</a:t>
-            </a:r>
-          </a:p>
-          <a:p>
-            <a:r>
-              <a:t>| 07_source.rq | 2 | 2 |</a:t>
-            </a:r>
-          </a:p>
-          <a:p>
-            <a:r>
-              <a:t>| 08_ask.rq | true | true |</a:t>
-            </a:r>
-          </a:p>
-          <a:p>
-            <a:r>
-              <a:t>| 09_actors_of_inception.rq | 21 | 21 |</a:t>
-            </a:r>
-          </a:p>
-          <a:p>
-            <a:r>
-              <a:t>| 10_production_companies_of_a_film.rq | 4 | 4 |</a:t>
-            </a:r>
-          </a:p>
-          <a:p>
-            <a:r>
-              <a:t>| 11_awards_received_by_a_film.rq | 7 | 7 |</a:t>
-            </a:r>
-          </a:p>
-          <a:p>
-            <a:r>
-              <a:t>| 12_countries_and_languages_of_a_film.rq | 1 | 1 |</a:t>
-            </a:r>
-          </a:p>
-          <a:p>
-            <a:r>
-              <a:t>| 13_fiction_genre_films_via_hierarchy.rq | 0 | 29 |</a:t>
-            </a:r>
-          </a:p>
-          <a:p>
-            <a:r>
-              <a:t>| 14_all_agents_people_and_organizations.rq | 1 | 1 |</a:t>
-            </a:r>
-          </a:p>
-          <a:p>
-            <a:r>
-              <a:t>| 15_feature_vs_animated_film_counts.rq | 1 | 1 |</a:t>
-            </a:r>
-          </a:p>
-          <a:p>
-            <a:r>
-              <a:t>| 16_documentary_film_count_ask.rq | false | false |</a:t>
-            </a:r>
-          </a:p>
-          <a:p>
-            <a:r>
-              <a:t>| 17_inferred_actors.rq | 0 | 20 |</a:t>
-            </a:r>
-          </a:p>
-          <a:p>
-            <a:r>
-              <a:t>| 18_inferred_filmmakers.rq | 0 | 20 |</a:t>
-            </a:r>
-          </a:p>
-          <a:p>
-            <a:r>
-              <a:t>| 19_inferred_action_films.rq | 0 | 12 |</a:t>
-            </a:r>
-          </a:p>
-          <a:p>
-            <a:r>
-              <a:t>| 20_inferred_multi_genre_films.rq | 0 | 30 |</a:t>
-            </a:r>
-          </a:p>
-          <a:p>
-            <a:r>
-              <a:t>| 21_inferred_award_winning_films.rq | 0 | 26 |</a:t>
-            </a:r>
-          </a:p>
-          <a:p>
-            <a:r>
-              <a:t>| 22_inferred_film_studios.rq | 0 | 6 |</a:t>
-            </a:r>
-          </a:p>
-          <a:p>
-            <a:r>
-              <a:t>| 23_people_with_directing_and_writing_contribution.rq | 0 | 10 |</a:t>
-            </a:r>
-          </a:p>
-          <a:p>
-            <a:r>
-              <a:t>| 24_nolan_asserted_types_only.rq | 1 | 3 |</a:t>
-            </a:r>
-          </a:p>
-          <a:p>
-            <a:r>
-              <a:t>Queries 14/15 each return one aggregate row. Queries 17/18 have LIMIT 20; full Actor/Filmmaker totals are 769/89. Query 24 returns one asserted type or three with inference.</a:t>
+              <a:t>Reference: 27 design queries, asserted versus reasoned results:</a:t>
+            </a:r>
+          </a:p>
+          <a:p>
+            <a:r>
+              <a:t>1. List films: 30 → 30</a:t>
+            </a:r>
+          </a:p>
+          <a:p>
+            <a:r>
+              <a:t>2. Inception: year, duration and director: 1 → 1</a:t>
+            </a:r>
+          </a:p>
+          <a:p>
+            <a:r>
+              <a:t>3. Directors of Inception: 1 → 1</a:t>
+            </a:r>
+          </a:p>
+          <a:p>
+            <a:r>
+              <a:t>4. Inception credits and roles: 25 → 25</a:t>
+            </a:r>
+          </a:p>
+          <a:p>
+            <a:r>
+              <a:t>5. Films directed by Nolan: 8 → 8</a:t>
+            </a:r>
+          </a:p>
+          <a:p>
+            <a:r>
+              <a:t>6. Companies credited on Inception: 4 → 4</a:t>
+            </a:r>
+          </a:p>
+          <a:p>
+            <a:r>
+              <a:t>7. Awards of Inception: 7 → 7</a:t>
+            </a:r>
+          </a:p>
+          <a:p>
+            <a:r>
+              <a:t>8. Runtime in seconds: 1 → 1</a:t>
+            </a:r>
+          </a:p>
+          <a:p>
+            <a:r>
+              <a:t>9. Film genres through the parent class: 0 → 75</a:t>
+            </a:r>
+          </a:p>
+          <a:p>
+            <a:r>
+              <a:t>10. Persons through Agent hierarchy: 0 → 851</a:t>
+            </a:r>
+          </a:p>
+          <a:p>
+            <a:r>
+              <a:t>11. Production companies: 45 → 45</a:t>
+            </a:r>
+          </a:p>
+          <a:p>
+            <a:r>
+              <a:t>12. Film subclasses: 0 → 4</a:t>
+            </a:r>
+          </a:p>
+          <a:p>
+            <a:r>
+              <a:t>13. Actors through Artist hierarchy: 0 → 769</a:t>
+            </a:r>
+          </a:p>
+          <a:p>
+            <a:r>
+              <a:t>14. Inferred Actors: 0 → 769</a:t>
+            </a:r>
+          </a:p>
+          <a:p>
+            <a:r>
+              <a:t>15. Inferred Filmmakers: 0 → 89</a:t>
+            </a:r>
+          </a:p>
+          <a:p>
+            <a:r>
+              <a:t>16. Inferred Action films: 0 → 12</a:t>
+            </a:r>
+          </a:p>
+          <a:p>
+            <a:r>
+              <a:t>17. Award-winning films: 0 → 26</a:t>
+            </a:r>
+          </a:p>
+          <a:p>
+            <a:r>
+              <a:t>18. People with at least two provably distinct credits: 0 → 17</a:t>
+            </a:r>
+          </a:p>
+          <a:p>
+            <a:r>
+              <a:t>19. People with at least three provably distinct credits: 0 → 7</a:t>
+            </a:r>
+          </a:p>
+          <a:p>
+            <a:r>
+              <a:t>20. Writer-directors: 0 → 10</a:t>
+            </a:r>
+          </a:p>
+          <a:p>
+            <a:r>
+              <a:t>21. Actor-filmmakers: 0 → 7</a:t>
+            </a:r>
+          </a:p>
+          <a:p>
+            <a:r>
+              <a:t>22. Award-winning filmmakers: 0 → 65</a:t>
+            </a:r>
+          </a:p>
+          <a:p>
+            <a:r>
+              <a:t>23. Award-winning action films: 0 → 10</a:t>
+            </a:r>
+          </a:p>
+          <a:p>
+            <a:r>
+              <a:t>24. Action/drama crossing films: 0 → 8</a:t>
+            </a:r>
+          </a:p>
+          <a:p>
+            <a:r>
+              <a:t>25. Nolan contributions through property chain: 0 → 8</a:t>
+            </a:r>
+          </a:p>
+          <a:p>
+            <a:r>
+              <a:t>26. Nolan films through inverse director: 0 → 8</a:t>
+            </a:r>
+          </a:p>
+          <a:p>
+            <a:r>
+              <a:t>27. Types present only after reasoning: 0 → 1261</a:t>
             </a:r>
           </a:p>
         </p:txBody>
@@ -1963,7 +1943,7 @@
           <a:lstStyle/>
           <a:p>
             <a:r>
-              <a:t>Validation checks film names, provenance, external links and contribution fields. All 76 source hashes match and all 24 query files execute in their appropriate graph mode. Fourteen tests and nine browser checks pass, covering endpoint behavior, Comunica, syntax errors, ASK, CONSTRUCT, IRI pages and mobile layout. Sixteen production query checks also pass. Eight public URLs are accessible without authentication; four checked RDF graphs are isomorphic to local graphs. HermiT and Pellet confirm consistency and no unsatisfiable named classes. OWL, Turtle and JSON-LD share millisecond timestamps. Tests and hashes do not establish the truth of every real-world claim.</a:t>
+              <a:t>HermiT checked the canonical RDF/XML OWL: consistent, no unsatisfiable named classes. All 27 competency questions execute against explicit graph scopes; 965 chain pairs are materialized separately. Fifteen tests verify the model and endpoint. Browser checks exercise SELECT, ASK, CONSTRUCT, DESCRIBE and recovery from malformed queries.</a:t>
             </a:r>
           </a:p>
         </p:txBody>
@@ -2033,7 +2013,7 @@
           <a:lstStyle/>
           <a:p>
             <a:r>
-              <a:t>The assignment does not specify weights, so the team proposes two points per requirement. Ontology, collection, publication, external links and SPARQL interfaces each have evidence, giving a proposed ten out of ten rather than an official grade. Limitations remain: a selected thirty-film sample, label-based genre and award grouping, and no budget or streaming data. HermiT and Pellet confirm consistency, but the two cardinality classes still have zero DL-inferred instances, compared with application counts of thirty and six. SQL can answer many questions with joins, views and rules. The Semantic Web contribution is shared identifiers, reusable vocabulary, cross-dataset links, provenance and explicit definitions.</a:t>
+              <a:t>The ontology, dataset, query interfaces and document exports share version 3.0.0. Consistency, source integrity and before/after query behavior are checked independently. Selection bias, label mappings and unannotated identity matching still limit generalization. MP4 files are excluded as requested; an official assignment grade is not inferred from technical checks.</a:t>
             </a:r>
           </a:p>
         </p:txBody>
@@ -2103,7 +2083,7 @@
           <a:lstStyle/>
           <a:p>
             <a:r>
-              <a:t>MovieLOD connects a domain model, real source data, provenance, RDF, external links and queries in one application. This twenty-four-slide deck supports an eighteen-to-twenty-two-minute presentation or a shorter selection of key slides. Before submission, fill in team details and add genuine Protégé screenshots using the listed codes. Vietnamese instructions remain in the empty slots. No fabricated Protégé screenshots have been inserted. Images can be added directly in PowerPoint or saved with the expected filenames in evidence/protege before regenerating the deck. The demo video remains unchanged. Thank you; we welcome questions.</a:t>
+              <a:t>The remaining slots request genuine Protégé screenshots of the final ontology. The Vietnamese speaker script matches the English deck. The report keeps its fifteen-page academic format. Current web captures and reasoner logs support the presentation; MP4 files have been removed without editing or generating video content.</a:t>
             </a:r>
           </a:p>
         </p:txBody>
@@ -2173,7 +2153,7 @@
           <a:lstStyle/>
           <a:p>
             <a:r>
-              <a:t>The pipeline starts with the film list in config. collect.py fetches responses and stores provenance metadata. build.py creates the ontology and normalized RDF graph. validate.py checks application fields, source hashes and queries. reason.py writes additional types to a separate file. The local application uses Flask and RDFLib; the hosted application runs Comunica in the browser. The endpoint loads movies.ttl by default. The terminal --reasoned option also loads the schema and saved inferred types; it does not start a reasoner for every query. All RDF exports now use millisecond timestamps, while raw source metadata retains its original precision.</a:t>
+              <a:t>The source collector feeds a native version-3 build. HermiT classifies the canonical OWL, and OWL RL materializes inverse, subproperty and chain relations. Validation executes all 27 competency questions. Source facts, inferred knowledge and named-graph comparisons are shared by the browser, endpoint and terminal.</a:t>
             </a:r>
           </a:p>
         </p:txBody>
@@ -2243,7 +2223,7 @@
           <a:lstStyle/>
           <a:p>
             <a:r>
-              <a:t>The sample contains 30 films, 851 people and 1,010 contribution records. It also includes 45 companies, 672 award entities, 75 genres, 11 countries and 15 languages. All 76 raw source responses are present and their hashes match. The asserted graph has 19,339 triples, separate from 518 schema triples. Units matter: 672 counts distinct award entities, not award events; 1,010 counts person-film-role records, not people. All sampled films have a year, runtime and director. This selected sample does not represent the entire film industry.</a:t>
+              <a:t>The selected sample has 30 films, 851 people, 1,010 credit records, 45 companies and 672 award entities. The final OWL contains 19,025 triples including schema and asserted data, not a complete reasoning closure. There are 75 genres, 11 countries, 15 languages and 76 source responses. Counts refer to local resource identifiers; the four role individuals use the ontology namespace.</a:t>
             </a:r>
           </a:p>
         </p:txBody>
@@ -2313,7 +2293,7 @@
           <a:lstStyle/>
           <a:p>
             <a:r>
-              <a:t>The ontology declares 42 named owl:Class IRIs. Three directly reuse DBpedia classes; the other 39 belong to our namespace. The six groups cover creative works and films, people and organizations, contributions and roles, genres, awards, and supporting context and provenance. Fourteen classes receive additional types through definitions or application rules. Protégé Metrics may include referenced external classes, so its total can differ from our count of explicitly declared classes. The screenshot slot requests the ontology IRI and versionInfo 2.0.0.</a:t>
+              <a:t>The module has 37 named classes: 17 DBpedia classes, one VoID Dataset and 19 local classes. The local classes comprise source records, the contribution model, two label-based genre buckets and ten domain inferred classes. Four additional inferred credit subclasses support the reasoning chains. No local clone of Actor, Genre, Award or Company remains.</a:t>
             </a:r>
           </a:p>
           <a:p/>
@@ -2324,12 +2304,12 @@
           </a:p>
           <a:p>
             <a:r>
-              <a:t>Mở ontology/Movie_Ontology.owl</a:t>
-            </a:r>
-          </a:p>
-          <a:p>
-            <a:r>
-              <a:t>1. Mở ontology/Movie_Ontology.owl.</a:t>
+              <a:t>Mở ontology/Movie_Knowledge_Graph.owl</a:t>
+            </a:r>
+          </a:p>
+          <a:p>
+            <a:r>
+              <a:t>1. Mở ontology/Movie_Knowledge_Graph.owl.</a:t>
             </a:r>
           </a:p>
           <a:p>
@@ -2339,12 +2319,12 @@
           </a:p>
           <a:p>
             <a:r>
-              <a:t>3. Giữ IRI ontology và versionInfo 2.0.0 trong khung hình.</a:t>
-            </a:r>
-          </a:p>
-          <a:p>
-            <a:r>
-              <a:t>Cần thấy: IRI đúng namespace của bài; phiên bản 2.0.0. Metrics có thể tính cả lớp ngoài được tham chiếu, khác 42 lớp tự khai báo.</a:t>
+              <a:t>3. Giữ IRI và versionInfo 3.0.0 trong ảnh.</a:t>
+            </a:r>
+          </a:p>
+          <a:p>
+            <a:r>
+              <a:t>Cần thấy: 37 lớp có tên; không đếm biểu thức anonymous như lớp có tên.</a:t>
             </a:r>
           </a:p>
         </p:txBody>
@@ -2414,7 +2394,7 @@
           <a:lstStyle/>
           <a:p>
             <a:r>
-              <a:t>CreativeWork is the top-level branch for works. Film reuses the DBpedia IRI. Its subclasses include FeatureFilm, AnimatedFilm and DocumentaryFilm. FeatureFilm and AnimatedFilm follow the project’s P31 mapping, a simplified rule rather than a full release-policy assessment. Genre-based film classes and AwardWinningFilm receive inferred types. MultiGenreFilm receives types through a separate counting rule in the application. DocumentaryFilm has no instances in this sample; defining a class does not require a sample instance. The requested Protégé view shows the asserted CreativeWork/Film hierarchy and Film’s DBpedia IRI.</a:t>
+              <a:t>Film reuses DBpedia and is a Work. ActionFilm and AwardWinningFilm follow genre and award facts. AwardWinningActionFilm combines those memberships. GenreCrossingFilm requires action and drama membership but does not prove two distinct genre fillers. Unsupported release-kind assertions and empty documentary classes were removed.</a:t>
             </a:r>
           </a:p>
           <a:p/>
@@ -2425,27 +2405,27 @@
           </a:p>
           <a:p>
             <a:r>
-              <a:t>Mở ontology/Movie_Ontology.owl</a:t>
-            </a:r>
-          </a:p>
-          <a:p>
-            <a:r>
-              <a:t>1. Entities → Classes → mở CreativeWork và Film.</a:t>
-            </a:r>
-          </a:p>
-          <a:p>
-            <a:r>
-              <a:t>2. Hiện các lớp con FeatureFilm, AnimatedFilm và nhóm phim.</a:t>
-            </a:r>
-          </a:p>
-          <a:p>
-            <a:r>
-              <a:t>3. Chọn Film; giữ IRI DBpedia và Class Description.</a:t>
-            </a:r>
-          </a:p>
-          <a:p>
-            <a:r>
-              <a:t>Cần thấy: Film thuộc CreativeWork; IRI là http://dbpedia.org/ontology/Film. Chụp cây khai báo, không gọi là cây đã suy luận.</a:t>
+              <a:t>Mở ontology/Movie_Knowledge_Graph.owl</a:t>
+            </a:r>
+          </a:p>
+          <a:p>
+            <a:r>
+              <a:t>1. Mở Classes → dbo:Work → dbo:Film.</a:t>
+            </a:r>
+          </a:p>
+          <a:p>
+            <a:r>
+              <a:t>2. Hiện ActionFilm, AwardWinningFilm và các lớp giao.</a:t>
+            </a:r>
+          </a:p>
+          <a:p>
+            <a:r>
+              <a:t>3. Giữ IRI DBpedia của Film trong Description.</a:t>
+            </a:r>
+          </a:p>
+          <a:p>
+            <a:r>
+              <a:t>Cần thấy: Không có FeatureFilm/AnimatedFilm/DocumentaryFilm trong module cuối.</a:t>
             </a:r>
           </a:p>
         </p:txBody>
@@ -2515,7 +2495,7 @@
           <a:lstStyle/>
           <a:p>
             <a:r>
-              <a:t>Agent includes Person and Organization. Person reuses DBpedia and has Actor, Filmmaker and AwardWinner subclasses. Organization includes ProductionCompany. The application classifies six companies as FilmStudio using the number of film IRIs, while the DL reasoners infer no FilmStudio instances under the current axioms. Actor and Filmmaker are not disjoint: a person can act and also direct or write. Each role is represented by its own Contribution, rather than a combined DirectorWriter class. A query with LIMIT cannot establish the total number of people. The screenshot slot requests both Person and Organization branches.</a:t>
+              <a:t>Actor is inferred using the range of starring and remains the DBpedia class. The module also reuses MovieDirector, Writer, ScreenWriter and Producer. Contribution restrictions support one-way occupation inferences without redefining these global classes. Company is a subclass of Organisation. A person may satisfy several occupations and local subsets.</a:t>
             </a:r>
           </a:p>
           <a:p/>
@@ -2526,27 +2506,27 @@
           </a:p>
           <a:p>
             <a:r>
-              <a:t>Mở ontology/Movie_Ontology.owl</a:t>
-            </a:r>
-          </a:p>
-          <a:p>
-            <a:r>
-              <a:t>1. Entities → Classes → mở Agent.</a:t>
-            </a:r>
-          </a:p>
-          <a:p>
-            <a:r>
-              <a:t>2. Mở Person và Organization → ProductionCompany.</a:t>
-            </a:r>
-          </a:p>
-          <a:p>
-            <a:r>
-              <a:t>3. Chọn Person hoặc Filmmaker; giữ cây lớp và Description.</a:t>
-            </a:r>
-          </a:p>
-          <a:p>
-            <a:r>
-              <a:t>Cần thấy: Person và Organization cùng dưới Agent; Actor/Filmmaker/AwardWinner là lớp con Person.</a:t>
+              <a:t>Mở ontology/Movie_Knowledge_Graph.owl</a:t>
+            </a:r>
+          </a:p>
+          <a:p>
+            <a:r>
+              <a:t>1. Mở dbo:Agent → dbo:Person và dbo:Organisation.</a:t>
+            </a:r>
+          </a:p>
+          <a:p>
+            <a:r>
+              <a:t>2. Hiện Artist → Actor; Organisation → Company.</a:t>
+            </a:r>
+          </a:p>
+          <a:p>
+            <a:r>
+              <a:t>3. Mở MovieDirector / Writer → ScreenWriter.</a:t>
+            </a:r>
+          </a:p>
+          <a:p>
+            <a:r>
+              <a:t>Cần thấy: Reuse lớp DBpedia; không tạo ex:Actor hoặc ex:Organization.</a:t>
             </a:r>
           </a:p>
         </p:txBody>
@@ -2616,7 +2596,7 @@
           <a:lstStyle/>
           <a:p>
             <a:r>
-              <a:t>Genre contains FictionGenre and NonFictionGenre. Action, comedy, drama and science fiction genres belong to FictionGenre; DocumentaryGenre belongs to NonFictionGenre. Award includes FilmAward, ActingAward, DirectingAward and WritingAward. These groups are mapped from label keywords during build, rather than discovered automatically by reasoning. FilmAward is the fallback group when no role-specific keyword matches. Country, Language, SourceSnapshot and Dataset supply context and provenance. Awards received by people are kept distinct from awards received by films. The requested view shows the Genre and Award branches.</a:t>
+              <a:t>Genre and MovieGenre are reused. The two local buckets ActionGenre and DramaGenre use crawled English genre labels. No fiction hierarchy is guessed, and unrecognized awards are not automatically called FilmAward. Award remains a reused entity class. SourceSnapshot records retrieval provenance, while void:Dataset describes the collection.</a:t>
             </a:r>
           </a:p>
           <a:p/>
@@ -2627,27 +2607,27 @@
           </a:p>
           <a:p>
             <a:r>
-              <a:t>Mở ontology/Movie_Ontology.owl</a:t>
-            </a:r>
-          </a:p>
-          <a:p>
-            <a:r>
-              <a:t>1. Thu gọn Film/Agent để ảnh dễ đọc.</a:t>
-            </a:r>
-          </a:p>
-          <a:p>
-            <a:r>
-              <a:t>2. Mở Genre → FictionGenre / NonFictionGenre và Award.</a:t>
-            </a:r>
-          </a:p>
-          <a:p>
-            <a:r>
-              <a:t>3. Hiện các lớp thể loại và nhóm giải; giữ Class Description.</a:t>
-            </a:r>
-          </a:p>
-          <a:p>
-            <a:r>
-              <a:t>Cần thấy: Cây Genre/Award khớp sơ đồ. Nhóm thể loại/giải được ánh xạ theo nhãn trong bước build.</a:t>
+              <a:t>Mở ontology/Movie_Knowledge_Graph.owl</a:t>
+            </a:r>
+          </a:p>
+          <a:p>
+            <a:r>
+              <a:t>1. Mở dbo:Genre → dbo:MovieGenre.</a:t>
+            </a:r>
+          </a:p>
+          <a:p>
+            <a:r>
+              <a:t>2. Hiện ActionGenre / DramaGenre; chọn dbo:Award.</a:t>
+            </a:r>
+          </a:p>
+          <a:p>
+            <a:r>
+              <a:t>3. Giữ Description để đọc IRI và lớp cha.</a:t>
+            </a:r>
+          </a:p>
+          <a:p>
+            <a:r>
+              <a:t>Cần thấy: Không có FictionGenre hoặc các nhóm award suy đoán theo nhãn.</a:t>
             </a:r>
           </a:p>
         </p:txBody>
@@ -2717,7 +2697,7 @@
           <a:lstStyle/>
           <a:p>
             <a:r>
-              <a:t>A profession label alone does not identify a person’s role in a particular film. Contribution connects a person, film and role. contributionBy points to Person, contributionTo to Film, and hasRole to ContributionRole. Each relation has an exactly-one qualified restriction. Four role individuals are DirectorRole, ActorRole, WriterRole and ProducerRole. Nolan has three roles in Inception, represented by three separate contributions. Acting, Directing, Writing and ProducingContribution are classified from hasRole. The screenshot should show Contribution’s restrictions, including exactly-one and allValuesFrom expressions.</a:t>
+              <a:t>Each Contribution relates one person, one film and one role, with functional endpoints and qualified exactly-one restrictions. Nolan has directing, writing and producing credits for Inception. Role-specific credit subclasses are inferred using hasRole value restrictions. Missing fields still require structural validation under open-world semantics.</a:t>
             </a:r>
           </a:p>
           <a:p/>
@@ -2728,27 +2708,27 @@
           </a:p>
           <a:p>
             <a:r>
-              <a:t>Mở ontology/Movie_Ontology.owl</a:t>
-            </a:r>
-          </a:p>
-          <a:p>
-            <a:r>
-              <a:t>1. Entities → Classes → chọn Contribution.</a:t>
-            </a:r>
-          </a:p>
-          <a:p>
-            <a:r>
-              <a:t>2. Trong Class Description, mở đủ SubClass Of.</a:t>
-            </a:r>
-          </a:p>
-          <a:p>
-            <a:r>
-              <a:t>3. Hiện contributionBy / contributionTo / hasRole: exactly 1.</a:t>
-            </a:r>
-          </a:p>
-          <a:p>
-            <a:r>
-              <a:t>Cần thấy: Ba qualified cardinality đúng 1, cùng các allValuesFrom. Đây là mô hình OWL, không phải biên bản kiểm tra thiếu trường.</a:t>
+              <a:t>Mở ontology/Movie_Knowledge_Graph.owl</a:t>
+            </a:r>
+          </a:p>
+          <a:p>
+            <a:r>
+              <a:t>1. Chọn ex:Contribution.</a:t>
+            </a:r>
+          </a:p>
+          <a:p>
+            <a:r>
+              <a:t>2. Hiện exactly 1 cho contributionBy, contributionTo, hasRole.</a:t>
+            </a:r>
+          </a:p>
+          <a:p>
+            <a:r>
+              <a:t>3. Chọn hasRole để thấy Functional và role individual.</a:t>
+            </a:r>
+          </a:p>
+          <a:p>
+            <a:r>
+              <a:t>Cần thấy: Ba endpoint đúng 1; dữ liệu thiếu cần structural validation riêng.</a:t>
             </a:r>
           </a:p>
         </p:txBody>
@@ -5845,7 +5825,7 @@
               </a:defRPr>
             </a:pPr>
             <a:r>
-              <a:t>MOVIELOD / SEMANTIC WEB / ONTOLOGY 2.0</a:t>
+              <a:t>MOVIELOD / SEMANTIC WEB / ONTOLOGY 3.0.0</a:t>
             </a:r>
           </a:p>
         </p:txBody>
@@ -5935,7 +5915,7 @@
               </a:defRPr>
             </a:pPr>
             <a:r>
-              <a:t>Linked movie data application · Semantic Web</a:t>
+              <a:t>DBpedia reuse · OWL reasoning · linked movie knowledge</a:t>
             </a:r>
           </a:p>
         </p:txBody>
@@ -6023,7 +6003,7 @@
               </a:defRPr>
             </a:pPr>
             <a:r>
-              <a:t>Data checked: 08 Oct 2026 • Sources: project code and evidence/</a:t>
+              <a:t>Data checked: 09 Oct 2026 • Sources: project code and evidence/</a:t>
             </a:r>
           </a:p>
         </p:txBody>
@@ -6193,31 +6173,31 @@
         </p:nvSpPr>
         <p:spPr>
           <a:xfrm>
-            <a:off x="777240" y="5760720"/>
-            <a:ext cx="7315200" cy="731520"/>
-          </a:xfrm>
-          <a:prstGeom prst="rect">
-            <a:avLst/>
-          </a:prstGeom>
-          <a:noFill/>
-        </p:spPr>
-        <p:txBody>
-          <a:bodyPr wrap="none" lIns="0" rIns="0" tIns="0" bIns="0">
-            <a:spAutoFit/>
-          </a:bodyPr>
-          <a:lstStyle/>
-          <a:p>
-            <a:pPr>
-              <a:lnSpc>
-                <a:spcPts val="2176"/>
-              </a:lnSpc>
-              <a:spcBef>
-                <a:spcPts val="0"/>
-              </a:spcBef>
-              <a:spcAft>
-                <a:spcPts val="0"/>
-              </a:spcAft>
-              <a:defRPr sz="1700" b="0">
+            <a:off x="777240" y="5577840"/>
+            <a:ext cx="7315200" cy="1188720"/>
+          </a:xfrm>
+          <a:prstGeom prst="rect">
+            <a:avLst/>
+          </a:prstGeom>
+          <a:noFill/>
+        </p:spPr>
+        <p:txBody>
+          <a:bodyPr wrap="none" lIns="0" rIns="0" tIns="0" bIns="0">
+            <a:spAutoFit/>
+          </a:bodyPr>
+          <a:lstStyle/>
+          <a:p>
+            <a:pPr>
+              <a:lnSpc>
+                <a:spcPts val="1792"/>
+              </a:lnSpc>
+              <a:spcBef>
+                <a:spcPts val="0"/>
+              </a:spcBef>
+              <a:spcAft>
+                <a:spcPts val="0"/>
+              </a:spcAft>
+              <a:defRPr sz="1400" b="0">
                 <a:solidFill>
                   <a:srgbClr val="B8CDD6"/>
                 </a:solidFill>
@@ -6225,21 +6205,21 @@
               </a:defRPr>
             </a:pPr>
             <a:r>
-              <a:t>Full 24-slide presentation</a:t>
-            </a:r>
-          </a:p>
-          <a:p>
-            <a:pPr>
-              <a:lnSpc>
-                <a:spcPts val="2176"/>
-              </a:lnSpc>
-              <a:spcBef>
-                <a:spcPts val="0"/>
-              </a:spcBef>
-              <a:spcAft>
-                <a:spcPts val="0"/>
-              </a:spcAft>
-              <a:defRPr sz="1700" b="0">
+              <a:t>La Minh Trung (20251319M)</a:t>
+            </a:r>
+          </a:p>
+          <a:p>
+            <a:pPr>
+              <a:lnSpc>
+                <a:spcPts val="1792"/>
+              </a:lnSpc>
+              <a:spcBef>
+                <a:spcPts val="0"/>
+              </a:spcBef>
+              <a:spcAft>
+                <a:spcPts val="0"/>
+              </a:spcAft>
+              <a:defRPr sz="1400" b="0">
                 <a:solidFill>
                   <a:srgbClr val="B8CDD6"/>
                 </a:solidFill>
@@ -6247,7 +6227,51 @@
               </a:defRPr>
             </a:pPr>
             <a:r>
-              <a:t>Team / members / class: [complete before submission]</a:t>
+              <a:t>Nguyen Thu Uyen (20252279M)</a:t>
+            </a:r>
+          </a:p>
+          <a:p>
+            <a:pPr>
+              <a:lnSpc>
+                <a:spcPts val="1792"/>
+              </a:lnSpc>
+              <a:spcBef>
+                <a:spcPts val="0"/>
+              </a:spcBef>
+              <a:spcAft>
+                <a:spcPts val="0"/>
+              </a:spcAft>
+              <a:defRPr sz="1400" b="0">
+                <a:solidFill>
+                  <a:srgbClr val="B8CDD6"/>
+                </a:solidFill>
+                <a:latin typeface="Be Vietnam Pro"/>
+              </a:defRPr>
+            </a:pPr>
+            <a:r>
+              <a:t>Nguyen Thi Nha Linh (20261262M)</a:t>
+            </a:r>
+          </a:p>
+          <a:p>
+            <a:pPr>
+              <a:lnSpc>
+                <a:spcPts val="1792"/>
+              </a:lnSpc>
+              <a:spcBef>
+                <a:spcPts val="0"/>
+              </a:spcBef>
+              <a:spcAft>
+                <a:spcPts val="0"/>
+              </a:spcAft>
+              <a:defRPr sz="1400" b="0">
+                <a:solidFill>
+                  <a:srgbClr val="B8CDD6"/>
+                </a:solidFill>
+                <a:latin typeface="Be Vietnam Pro"/>
+              </a:defRPr>
+            </a:pPr>
+            <a:r>
+              <a:t>Nguyen Khac Thai Binh (20251324M)</a:t>
             </a:r>
           </a:p>
         </p:txBody>
@@ -6468,7 +6492,7 @@
               </a:defRPr>
             </a:pPr>
             <a:r>
-              <a:t>42</a:t>
+              <a:t>37</a:t>
             </a:r>
           </a:p>
         </p:txBody>
@@ -6760,7 +6784,7 @@
               </a:defRPr>
             </a:pPr>
             <a:r>
-              <a:t>MOVIELOD / SEMANTIC WEB / ONTOLOGY 2.0</a:t>
+              <a:t>MOVIELOD / SEMANTIC WEB / ONTOLOGY 3.0.0</a:t>
             </a:r>
           </a:p>
         </p:txBody>
@@ -6805,7 +6829,7 @@
               </a:defRPr>
             </a:pPr>
             <a:r>
-              <a:t>R1 · Properties, domain/range and inverses</a:t>
+              <a:t>Properties: reuse, inverse and chain</a:t>
             </a:r>
           </a:p>
         </p:txBody>
@@ -6850,7 +6874,7 @@
               </a:defRPr>
             </a:pPr>
             <a:r>
-              <a:t>23 object properties · selected central relationships</a:t>
+              <a:t>19 object properties; custom relations describe credit context</a:t>
             </a:r>
           </a:p>
         </p:txBody>
@@ -6938,7 +6962,7 @@
               </a:defRPr>
             </a:pPr>
             <a:r>
-              <a:t>Data checked: 08 Oct 2026 • Sources: project code and evidence/</a:t>
+              <a:t>Data checked: 09 Oct 2026 • Sources: project code and evidence/</a:t>
             </a:r>
           </a:p>
         </p:txBody>
@@ -7303,7 +7327,7 @@
               </a:defRPr>
             </a:pPr>
             <a:r>
-              <a:t>Contribution </a:t>
+              <a:t>Credit </a:t>
             </a:r>
             <a:r>
               <a:rPr>
@@ -7490,7 +7514,7 @@
               </a:defRPr>
             </a:pPr>
             <a:r>
-              <a:t>Contribution </a:t>
+              <a:t>Credit </a:t>
             </a:r>
             <a:r>
               <a:rPr>
@@ -7677,7 +7701,7 @@
               </a:defRPr>
             </a:pPr>
             <a:r>
-              <a:t>Contribution </a:t>
+              <a:t>Credit </a:t>
             </a:r>
             <a:r>
               <a:rPr>
@@ -7731,7 +7755,7 @@
               </a:defRPr>
             </a:pPr>
             <a:r>
-              <a:t>roleOf</a:t>
+              <a:t>functional</a:t>
             </a:r>
           </a:p>
         </p:txBody>
@@ -7918,7 +7942,7 @@
               </a:defRPr>
             </a:pPr>
             <a:r>
-              <a:t>directed</a:t>
+              <a:t>ex:directed</a:t>
             </a:r>
           </a:p>
         </p:txBody>
@@ -8006,7 +8030,7 @@
               </a:defRPr>
             </a:pPr>
             <a:r>
-              <a:t>hasGenre</a:t>
+              <a:t>dbo:starring</a:t>
             </a:r>
           </a:p>
         </p:txBody>
@@ -8051,7 +8075,7 @@
               </a:defRPr>
             </a:pPr>
             <a:r>
-              <a:t>Film </a:t>
+              <a:t>Work </a:t>
             </a:r>
             <a:r>
               <a:rPr>
@@ -8060,7 +8084,7 @@
               <a:t>→</a:t>
             </a:r>
             <a:r>
-              <a:t> Genre</a:t>
+              <a:t> Actor</a:t>
             </a:r>
           </a:p>
         </p:txBody>
@@ -8105,7 +8129,7 @@
               </a:defRPr>
             </a:pPr>
             <a:r>
-              <a:t>genreOf</a:t>
+              <a:t>ex:actedIn</a:t>
             </a:r>
           </a:p>
         </p:txBody>
@@ -8193,7 +8217,7 @@
               </a:defRPr>
             </a:pPr>
             <a:r>
-              <a:t>hasAward</a:t>
+              <a:t>contributedTo</a:t>
             </a:r>
           </a:p>
         </p:txBody>
@@ -8238,7 +8262,7 @@
               </a:defRPr>
             </a:pPr>
             <a:r>
-              <a:t>Film or Person </a:t>
+              <a:t>Person </a:t>
             </a:r>
             <a:r>
               <a:rPr>
@@ -8247,7 +8271,7 @@
               <a:t>→</a:t>
             </a:r>
             <a:r>
-              <a:t> Award</a:t>
+              <a:t> Film</a:t>
             </a:r>
           </a:p>
         </p:txBody>
@@ -8292,7 +8316,7 @@
               </a:defRPr>
             </a:pPr>
             <a:r>
-              <a:t>awardOf</a:t>
+              <a:t>property chain</a:t>
             </a:r>
           </a:p>
         </p:txBody>
@@ -8470,7 +8494,7 @@
               </a:defRPr>
             </a:pPr>
             <a:r>
-              <a:t>Domain, range, inverse, functional</a:t>
+              <a:t>Domain / range / inverse</a:t>
             </a:r>
           </a:p>
         </p:txBody>
@@ -8560,7 +8584,7 @@
               </a:defRPr>
             </a:pPr>
             <a:r>
-              <a:t>1. Entities </a:t>
+              <a:t>1. Chọn contributionBy: Contribution </a:t>
             </a:r>
             <a:r>
               <a:rPr>
@@ -8569,16 +8593,7 @@
               <a:t>→</a:t>
             </a:r>
             <a:r>
-              <a:t> Object properties </a:t>
-            </a:r>
-            <a:r>
-              <a:rPr>
-                <a:latin typeface="Arial Unicode MS"/>
-              </a:rPr>
-              <a:t>→</a:t>
-            </a:r>
-            <a:r>
-              <a:t> chọn contributionBy.</a:t>
+              <a:t> dbo:Person.</a:t>
             </a:r>
           </a:p>
         </p:txBody>
@@ -8623,7 +8638,7 @@
               </a:defRPr>
             </a:pPr>
             <a:r>
-              <a:t>2. Hiện Domain=Contribution, Range=Person.</a:t>
+              <a:t>2. Hiện Functional và inverse hasContribution.</a:t>
             </a:r>
           </a:p>
         </p:txBody>
@@ -8668,7 +8683,7 @@
               </a:defRPr>
             </a:pPr>
             <a:r>
-              <a:t>3. Giữ inverse hasContribution và ô Functional được chọn.</a:t>
+              <a:t>3. Có thể chụp contributedTo với property chain.</a:t>
             </a:r>
           </a:p>
         </p:txBody>
@@ -8872,7 +8887,7 @@
               </a:defRPr>
             </a:pPr>
             <a:r>
-              <a:t>MOVIELOD / SEMANTIC WEB / ONTOLOGY 2.0</a:t>
+              <a:t>MOVIELOD / SEMANTIC WEB / ONTOLOGY 3.0.0</a:t>
             </a:r>
           </a:p>
         </p:txBody>
@@ -8917,7 +8932,7 @@
               </a:defRPr>
             </a:pPr>
             <a:r>
-              <a:t>R1 · How OWL expresses meaning</a:t>
+              <a:t>OWL axioms: what each statement means</a:t>
             </a:r>
           </a:p>
         </p:txBody>
@@ -8962,7 +8977,7 @@
               </a:defRPr>
             </a:pPr>
             <a:r>
-              <a:t>Ontology constraints and application validation serve different purposes</a:t>
+              <a:t>Model semantics and structural data validation answer different questions</a:t>
             </a:r>
           </a:p>
         </p:txBody>
@@ -9050,7 +9065,7 @@
               </a:defRPr>
             </a:pPr>
             <a:r>
-              <a:t>Data checked: 08 Oct 2026 • Sources: project code and evidence/</a:t>
+              <a:t>Data checked: 09 Oct 2026 • Sources: project code and evidence/</a:t>
             </a:r>
           </a:p>
         </p:txBody>
@@ -9271,7 +9286,7 @@
               </a:defRPr>
             </a:pPr>
             <a:r>
-              <a:t>equivalentClass + AND / OR / SOME</a:t>
+              <a:t>AND / OR / SOME / VALUE</a:t>
             </a:r>
           </a:p>
           <a:p>
@@ -9293,16 +9308,29 @@
               </a:defRPr>
             </a:pPr>
             <a:r>
-              <a:t>A Person with filmmaking contributions </a:t>
-            </a:r>
-            <a:r>
-              <a:rPr>
-                <a:latin typeface="Arial Unicode MS"/>
-              </a:rPr>
-              <a:t>→</a:t>
-            </a:r>
-            <a:r>
-              <a:t> Filmmaker.</a:t>
+              <a:t>Conditions produce types not asserted in source</a:t>
+            </a:r>
+          </a:p>
+          <a:p>
+            <a:pPr>
+              <a:lnSpc>
+                <a:spcPts val="2304"/>
+              </a:lnSpc>
+              <a:spcBef>
+                <a:spcPts val="0"/>
+              </a:spcBef>
+              <a:spcAft>
+                <a:spcPts val="0"/>
+              </a:spcAft>
+              <a:defRPr sz="1800" b="0">
+                <a:solidFill>
+                  <a:srgbClr val="506776"/>
+                </a:solidFill>
+                <a:latin typeface="Be Vietnam Pro"/>
+              </a:defRPr>
+            </a:pPr>
+            <a:r>
+              <a:t>facts.</a:t>
             </a:r>
           </a:p>
         </p:txBody>
@@ -9433,7 +9461,7 @@
               </a:defRPr>
             </a:pPr>
             <a:r>
-              <a:t>Cardinality and functional</a:t>
+              <a:t>Exactly one endpoint</a:t>
             </a:r>
           </a:p>
         </p:txBody>
@@ -9478,7 +9506,7 @@
               </a:defRPr>
             </a:pPr>
             <a:r>
-              <a:t>Contribution: exactly one person / film / role.</a:t>
+              <a:t>Contribution: one person, film and role.</a:t>
             </a:r>
           </a:p>
           <a:p>
@@ -9500,7 +9528,7 @@
               </a:defRPr>
             </a:pPr>
             <a:r>
-              <a:t>Functional: at most one value under OWL semantics.</a:t>
+              <a:t>Missing-field checks are separate.</a:t>
             </a:r>
           </a:p>
         </p:txBody>
@@ -9631,7 +9659,7 @@
               </a:defRPr>
             </a:pPr>
             <a:r>
-              <a:t>Inverse and disjointness</a:t>
+              <a:t>Inverse and property chain</a:t>
             </a:r>
           </a:p>
         </p:txBody>
@@ -9676,25 +9704,16 @@
               </a:defRPr>
             </a:pPr>
             <a:r>
-              <a:t>director </a:t>
+              <a:t>hasContribution o contributionTo </a:t>
             </a:r>
             <a:r>
               <a:rPr>
                 <a:latin typeface="Arial Unicode MS"/>
               </a:rPr>
-              <a:t>↔</a:t>
-            </a:r>
-            <a:r>
-              <a:t> directed; hasRole </a:t>
-            </a:r>
-            <a:r>
-              <a:rPr>
-                <a:latin typeface="Arial Unicode MS"/>
-              </a:rPr>
-              <a:t>↔</a:t>
-            </a:r>
-            <a:r>
-              <a:t> roleOf.</a:t>
+              <a:t>→</a:t>
+            </a:r>
+            <a:r>
+              <a:t> contributedTo</a:t>
             </a:r>
           </a:p>
           <a:p>
@@ -9716,7 +9735,7 @@
               </a:defRPr>
             </a:pPr>
             <a:r>
-              <a:t>Actor and Filmmaker are not disjoint.</a:t>
+              <a:t>965 local person–film pairs.</a:t>
             </a:r>
           </a:p>
         </p:txBody>
@@ -9847,7 +9866,7 @@
               </a:defRPr>
             </a:pPr>
             <a:r>
-              <a:t>Open-world assumption</a:t>
+              <a:t>Open world and identity</a:t>
             </a:r>
           </a:p>
         </p:txBody>
@@ -9892,16 +9911,7 @@
               </a:defRPr>
             </a:pPr>
             <a:r>
-              <a:t>Missing information </a:t>
-            </a:r>
-            <a:r>
-              <a:rPr>
-                <a:latin typeface="Arial Unicode MS"/>
-              </a:rPr>
-              <a:t>≠</a:t>
-            </a:r>
-            <a:r>
-              <a:t> negation.</a:t>
+              <a:t>Missing facts do not imply falsehood.</a:t>
             </a:r>
           </a:p>
           <a:p>
@@ -9923,29 +9933,7 @@
               </a:defRPr>
             </a:pPr>
             <a:r>
-              <a:t>Python validates required fields; OWL defines</a:t>
-            </a:r>
-          </a:p>
-          <a:p>
-            <a:pPr>
-              <a:lnSpc>
-                <a:spcPts val="2304"/>
-              </a:lnSpc>
-              <a:spcBef>
-                <a:spcPts val="0"/>
-              </a:spcBef>
-              <a:spcAft>
-                <a:spcPts val="0"/>
-              </a:spcAft>
-              <a:defRPr sz="1800" b="0">
-                <a:solidFill>
-                  <a:srgbClr val="506776"/>
-                </a:solidFill>
-                <a:latin typeface="Be Vietnam Pro"/>
-              </a:defRPr>
-            </a:pPr>
-            <a:r>
-              <a:t>meaning.</a:t>
+              <a:t>Different IRIs do not establish inequality.</a:t>
             </a:r>
           </a:p>
         </p:txBody>
@@ -10059,7 +10047,7 @@
               </a:defRPr>
             </a:pPr>
             <a:r>
-              <a:t>MOVIELOD / SEMANTIC WEB / ONTOLOGY 2.0</a:t>
+              <a:t>MOVIELOD / SEMANTIC WEB / ONTOLOGY 3.0.0</a:t>
             </a:r>
           </a:p>
         </p:txBody>
@@ -10104,7 +10092,7 @@
               </a:defRPr>
             </a:pPr>
             <a:r>
-              <a:t>R1 · Fourteen classes with additional types</a:t>
+              <a:t>Verified domain classes after HermiT</a:t>
             </a:r>
           </a:p>
         </p:txBody>
@@ -10149,7 +10137,7 @@
               </a:defRPr>
             </a:pPr>
             <a:r>
-              <a:t>None of these 14 types is asserted in the original data graph</a:t>
+              <a:t>All listed types have zero assertions in the input data</a:t>
             </a:r>
           </a:p>
         </p:txBody>
@@ -10237,7 +10225,7 @@
               </a:defRPr>
             </a:pPr>
             <a:r>
-              <a:t>Data checked: 08 Oct 2026 • Sources: project code and evidence/</a:t>
+              <a:t>Data checked: 09 Oct 2026 • Sources: project code and evidence/</a:t>
             </a:r>
           </a:p>
         </p:txBody>
@@ -10593,7 +10581,7 @@
               </a:defRPr>
             </a:pPr>
             <a:r>
-              <a:t>ActingContribution</a:t>
+              <a:t>Filmmaker</a:t>
             </a:r>
           </a:p>
         </p:txBody>
@@ -10638,7 +10626,7 @@
               </a:defRPr>
             </a:pPr>
             <a:r>
-              <a:t>Contribution with ActorRole</a:t>
+              <a:t>Directing, writing or producing credit</a:t>
             </a:r>
           </a:p>
         </p:txBody>
@@ -10683,7 +10671,7 @@
               </a:defRPr>
             </a:pPr>
             <a:r>
-              <a:t>855</a:t>
+              <a:t>89</a:t>
             </a:r>
           </a:p>
         </p:txBody>
@@ -10728,7 +10716,7 @@
               </a:defRPr>
             </a:pPr>
             <a:r>
-              <a:t>OWL RL</a:t>
+              <a:t>HermiT</a:t>
             </a:r>
           </a:p>
         </p:txBody>
@@ -10816,7 +10804,7 @@
               </a:defRPr>
             </a:pPr>
             <a:r>
-              <a:t>DirectingContribution</a:t>
+              <a:t>ActionFilm</a:t>
             </a:r>
           </a:p>
         </p:txBody>
@@ -10861,7 +10849,7 @@
               </a:defRPr>
             </a:pPr>
             <a:r>
-              <a:t>Contribution with DirectorRole</a:t>
+              <a:t>Action genre membership</a:t>
             </a:r>
           </a:p>
         </p:txBody>
@@ -10906,7 +10894,7 @@
               </a:defRPr>
             </a:pPr>
             <a:r>
-              <a:t>31</a:t>
+              <a:t>12</a:t>
             </a:r>
           </a:p>
         </p:txBody>
@@ -10951,7 +10939,7 @@
               </a:defRPr>
             </a:pPr>
             <a:r>
-              <a:t>OWL RL</a:t>
+              <a:t>HermiT</a:t>
             </a:r>
           </a:p>
         </p:txBody>
@@ -11039,7 +11027,7 @@
               </a:defRPr>
             </a:pPr>
             <a:r>
-              <a:t>WritingContribution</a:t>
+              <a:t>AwardWinningFilm</a:t>
             </a:r>
           </a:p>
         </p:txBody>
@@ -11084,7 +11072,7 @@
               </a:defRPr>
             </a:pPr>
             <a:r>
-              <a:t>Contribution with WriterRole</a:t>
+              <a:t>Film with an award</a:t>
             </a:r>
           </a:p>
         </p:txBody>
@@ -11129,7 +11117,7 @@
               </a:defRPr>
             </a:pPr>
             <a:r>
-              <a:t>51</a:t>
+              <a:t>26</a:t>
             </a:r>
           </a:p>
         </p:txBody>
@@ -11174,7 +11162,7 @@
               </a:defRPr>
             </a:pPr>
             <a:r>
-              <a:t>OWL RL</a:t>
+              <a:t>HermiT</a:t>
             </a:r>
           </a:p>
         </p:txBody>
@@ -11262,7 +11250,7 @@
               </a:defRPr>
             </a:pPr>
             <a:r>
-              <a:t>ProducingContribution</a:t>
+              <a:t>MultiCreditContributor</a:t>
             </a:r>
           </a:p>
         </p:txBody>
@@ -11307,7 +11295,7 @@
               </a:defRPr>
             </a:pPr>
             <a:r>
-              <a:t>Contribution with ProducerRole</a:t>
+              <a:t>At least 2 provably distinct credits</a:t>
             </a:r>
           </a:p>
         </p:txBody>
@@ -11352,7 +11340,7 @@
               </a:defRPr>
             </a:pPr>
             <a:r>
-              <a:t>73</a:t>
+              <a:t>17</a:t>
             </a:r>
           </a:p>
         </p:txBody>
@@ -11397,7 +11385,7 @@
               </a:defRPr>
             </a:pPr>
             <a:r>
-              <a:t>OWL RL</a:t>
+              <a:t>HermiT</a:t>
             </a:r>
           </a:p>
         </p:txBody>
@@ -11485,7 +11473,7 @@
               </a:defRPr>
             </a:pPr>
             <a:r>
-              <a:t>Actor</a:t>
+              <a:t>ThreeCreditContributor</a:t>
             </a:r>
           </a:p>
         </p:txBody>
@@ -11530,7 +11518,7 @@
               </a:defRPr>
             </a:pPr>
             <a:r>
-              <a:t>Person with acting contributions</a:t>
+              <a:t>At least 3 provably distinct credits</a:t>
             </a:r>
           </a:p>
         </p:txBody>
@@ -11575,7 +11563,7 @@
               </a:defRPr>
             </a:pPr>
             <a:r>
-              <a:t>769</a:t>
+              <a:t>7</a:t>
             </a:r>
           </a:p>
         </p:txBody>
@@ -11620,7 +11608,7 @@
               </a:defRPr>
             </a:pPr>
             <a:r>
-              <a:t>OWL RL</a:t>
+              <a:t>HermiT</a:t>
             </a:r>
           </a:p>
         </p:txBody>
@@ -11708,7 +11696,7 @@
               </a:defRPr>
             </a:pPr>
             <a:r>
-              <a:t>Filmmaker</a:t>
+              <a:t>WriterDirector</a:t>
             </a:r>
           </a:p>
         </p:txBody>
@@ -11753,7 +11741,7 @@
               </a:defRPr>
             </a:pPr>
             <a:r>
-              <a:t>Person with filmmaking contributions</a:t>
+              <a:t>MovieDirector AND ScreenWriter</a:t>
             </a:r>
           </a:p>
         </p:txBody>
@@ -11798,7 +11786,7 @@
               </a:defRPr>
             </a:pPr>
             <a:r>
-              <a:t>89</a:t>
+              <a:t>10</a:t>
             </a:r>
           </a:p>
         </p:txBody>
@@ -11843,7 +11831,7 @@
               </a:defRPr>
             </a:pPr>
             <a:r>
-              <a:t>OWL RL</a:t>
+              <a:t>HermiT</a:t>
             </a:r>
           </a:p>
         </p:txBody>
@@ -11931,7 +11919,7 @@
               </a:defRPr>
             </a:pPr>
             <a:r>
-              <a:t>AwardWinner</a:t>
+              <a:t>ActorFilmmaker</a:t>
             </a:r>
           </a:p>
         </p:txBody>
@@ -11976,7 +11964,7 @@
               </a:defRPr>
             </a:pPr>
             <a:r>
-              <a:t>Person who receives an award</a:t>
+              <a:t>Actor AND Filmmaker</a:t>
             </a:r>
           </a:p>
         </p:txBody>
@@ -12021,7 +12009,7 @@
               </a:defRPr>
             </a:pPr>
             <a:r>
-              <a:t>290</a:t>
+              <a:t>7</a:t>
             </a:r>
           </a:p>
         </p:txBody>
@@ -12066,7 +12054,7 @@
               </a:defRPr>
             </a:pPr>
             <a:r>
-              <a:t>OWL RL</a:t>
+              <a:t>HermiT</a:t>
             </a:r>
           </a:p>
         </p:txBody>
@@ -12154,7 +12142,7 @@
               </a:defRPr>
             </a:pPr>
             <a:r>
-              <a:t>ActionFilm</a:t>
+              <a:t>AwardWinningFilmmaker</a:t>
             </a:r>
           </a:p>
         </p:txBody>
@@ -12199,7 +12187,7 @@
               </a:defRPr>
             </a:pPr>
             <a:r>
-              <a:t>Film with ActionGenre</a:t>
+              <a:t>Filmmaker with an award</a:t>
             </a:r>
           </a:p>
         </p:txBody>
@@ -12244,7 +12232,7 @@
               </a:defRPr>
             </a:pPr>
             <a:r>
-              <a:t>12</a:t>
+              <a:t>65</a:t>
             </a:r>
           </a:p>
         </p:txBody>
@@ -12289,7 +12277,7 @@
               </a:defRPr>
             </a:pPr>
             <a:r>
-              <a:t>OWL RL</a:t>
+              <a:t>HermiT</a:t>
             </a:r>
           </a:p>
         </p:txBody>
@@ -12377,7 +12365,7 @@
               </a:defRPr>
             </a:pPr>
             <a:r>
-              <a:t>ComedyFilm</a:t>
+              <a:t>AwardWinningActionFilm</a:t>
             </a:r>
           </a:p>
         </p:txBody>
@@ -12422,7 +12410,7 @@
               </a:defRPr>
             </a:pPr>
             <a:r>
-              <a:t>Film with ComedyGenre</a:t>
+              <a:t>ActionFilm AND AwardWinningFilm</a:t>
             </a:r>
           </a:p>
         </p:txBody>
@@ -12467,7 +12455,7 @@
               </a:defRPr>
             </a:pPr>
             <a:r>
-              <a:t>4</a:t>
+              <a:t>10</a:t>
             </a:r>
           </a:p>
         </p:txBody>
@@ -12512,7 +12500,7 @@
               </a:defRPr>
             </a:pPr>
             <a:r>
-              <a:t>OWL RL</a:t>
+              <a:t>HermiT</a:t>
             </a:r>
           </a:p>
         </p:txBody>
@@ -12600,7 +12588,7 @@
               </a:defRPr>
             </a:pPr>
             <a:r>
-              <a:t>DramaFilm</a:t>
+              <a:t>GenreCrossingFilm</a:t>
             </a:r>
           </a:p>
         </p:txBody>
@@ -12645,7 +12633,7 @@
               </a:defRPr>
             </a:pPr>
             <a:r>
-              <a:t>Film with DramaGenre</a:t>
+              <a:t>Action AND drama genre membership</a:t>
             </a:r>
           </a:p>
         </p:txBody>
@@ -12690,7 +12678,7 @@
               </a:defRPr>
             </a:pPr>
             <a:r>
-              <a:t>25</a:t>
+              <a:t>8</a:t>
             </a:r>
           </a:p>
         </p:txBody>
@@ -12735,906 +12723,14 @@
               </a:defRPr>
             </a:pPr>
             <a:r>
-              <a:t>OWL RL</a:t>
-            </a:r>
-          </a:p>
-        </p:txBody>
-      </p:sp>
-      <p:sp>
-        <p:nvSpPr>
-          <p:cNvPr id="64" name="Rectangle 63"/>
-          <p:cNvSpPr/>
-          <p:nvPr/>
-        </p:nvSpPr>
-        <p:spPr>
-          <a:xfrm>
-            <a:off x="731520" y="5967984"/>
-            <a:ext cx="13304520" cy="303276"/>
-          </a:xfrm>
-          <a:prstGeom prst="rect">
-            <a:avLst/>
-          </a:prstGeom>
-          <a:solidFill>
-            <a:srgbClr val="FFFFFF"/>
-          </a:solidFill>
-          <a:ln>
-            <a:noFill/>
-          </a:ln>
-        </p:spPr>
-        <p:style>
-          <a:lnRef idx="1">
-            <a:schemeClr val="accent1"/>
-          </a:lnRef>
-          <a:fillRef idx="3">
-            <a:schemeClr val="accent1"/>
-          </a:fillRef>
-          <a:effectRef idx="2">
-            <a:schemeClr val="accent1"/>
-          </a:effectRef>
-          <a:fontRef idx="minor">
-            <a:schemeClr val="lt1"/>
-          </a:fontRef>
-        </p:style>
-        <p:txBody>
-          <a:bodyPr rtlCol="0" anchor="ctr"/>
-          <a:lstStyle/>
-          <a:p>
-            <a:pPr algn="ctr"/>
-          </a:p>
-        </p:txBody>
-      </p:sp>
-      <p:sp>
-        <p:nvSpPr>
-          <p:cNvPr id="65" name="TextBox 64"/>
-          <p:cNvSpPr txBox="1"/>
-          <p:nvPr/>
-        </p:nvSpPr>
-        <p:spPr>
-          <a:xfrm>
-            <a:off x="841248" y="5997702"/>
-            <a:ext cx="3575304" cy="243840"/>
-          </a:xfrm>
-          <a:prstGeom prst="rect">
-            <a:avLst/>
-          </a:prstGeom>
-          <a:noFill/>
-        </p:spPr>
-        <p:txBody>
-          <a:bodyPr wrap="none" lIns="0" rIns="0" tIns="0" bIns="0">
-            <a:spAutoFit/>
-          </a:bodyPr>
-          <a:lstStyle/>
-          <a:p>
-            <a:pPr>
-              <a:lnSpc>
-                <a:spcPts val="1920"/>
-              </a:lnSpc>
-              <a:spcBef>
-                <a:spcPts val="0"/>
-              </a:spcBef>
-              <a:spcAft>
-                <a:spcPts val="0"/>
-              </a:spcAft>
-              <a:defRPr sz="1500" b="0">
-                <a:solidFill>
-                  <a:srgbClr val="152B3A"/>
-                </a:solidFill>
-                <a:latin typeface="Be Vietnam Pro"/>
-              </a:defRPr>
-            </a:pPr>
-            <a:r>
-              <a:t>ScienceFictionFilm</a:t>
-            </a:r>
-          </a:p>
-        </p:txBody>
-      </p:sp>
-      <p:sp>
-        <p:nvSpPr>
-          <p:cNvPr id="66" name="TextBox 65"/>
-          <p:cNvSpPr txBox="1"/>
-          <p:nvPr/>
-        </p:nvSpPr>
-        <p:spPr>
-          <a:xfrm>
-            <a:off x="4636008" y="5997702"/>
-            <a:ext cx="5952744" cy="243840"/>
-          </a:xfrm>
-          <a:prstGeom prst="rect">
-            <a:avLst/>
-          </a:prstGeom>
-          <a:noFill/>
-        </p:spPr>
-        <p:txBody>
-          <a:bodyPr wrap="none" lIns="0" rIns="0" tIns="0" bIns="0">
-            <a:spAutoFit/>
-          </a:bodyPr>
-          <a:lstStyle/>
-          <a:p>
-            <a:pPr>
-              <a:lnSpc>
-                <a:spcPts val="1920"/>
-              </a:lnSpc>
-              <a:spcBef>
-                <a:spcPts val="0"/>
-              </a:spcBef>
-              <a:spcAft>
-                <a:spcPts val="0"/>
-              </a:spcAft>
-              <a:defRPr sz="1500" b="0">
-                <a:solidFill>
-                  <a:srgbClr val="152B3A"/>
-                </a:solidFill>
-                <a:latin typeface="Be Vietnam Pro"/>
-              </a:defRPr>
-            </a:pPr>
-            <a:r>
-              <a:t>Film with ScienceFictionGenre</a:t>
-            </a:r>
-          </a:p>
-        </p:txBody>
-      </p:sp>
-      <p:sp>
-        <p:nvSpPr>
-          <p:cNvPr id="67" name="TextBox 66"/>
-          <p:cNvSpPr txBox="1"/>
-          <p:nvPr/>
-        </p:nvSpPr>
-        <p:spPr>
-          <a:xfrm>
-            <a:off x="10808207" y="5997702"/>
-            <a:ext cx="1014984" cy="243840"/>
-          </a:xfrm>
-          <a:prstGeom prst="rect">
-            <a:avLst/>
-          </a:prstGeom>
-          <a:noFill/>
-        </p:spPr>
-        <p:txBody>
-          <a:bodyPr wrap="none" lIns="0" rIns="0" tIns="0" bIns="0">
-            <a:spAutoFit/>
-          </a:bodyPr>
-          <a:lstStyle/>
-          <a:p>
-            <a:pPr>
-              <a:lnSpc>
-                <a:spcPts val="1920"/>
-              </a:lnSpc>
-              <a:spcBef>
-                <a:spcPts val="0"/>
-              </a:spcBef>
-              <a:spcAft>
-                <a:spcPts val="0"/>
-              </a:spcAft>
-              <a:defRPr sz="1500" b="0">
-                <a:solidFill>
-                  <a:srgbClr val="152B3A"/>
-                </a:solidFill>
-                <a:latin typeface="Be Vietnam Pro"/>
-              </a:defRPr>
-            </a:pPr>
-            <a:r>
-              <a:t>6</a:t>
-            </a:r>
-          </a:p>
-        </p:txBody>
-      </p:sp>
-      <p:sp>
-        <p:nvSpPr>
-          <p:cNvPr id="68" name="TextBox 67"/>
-          <p:cNvSpPr txBox="1"/>
-          <p:nvPr/>
-        </p:nvSpPr>
-        <p:spPr>
-          <a:xfrm>
-            <a:off x="12042647" y="5997702"/>
-            <a:ext cx="1883663" cy="243840"/>
-          </a:xfrm>
-          <a:prstGeom prst="rect">
-            <a:avLst/>
-          </a:prstGeom>
-          <a:noFill/>
-        </p:spPr>
-        <p:txBody>
-          <a:bodyPr wrap="none" lIns="0" rIns="0" tIns="0" bIns="0">
-            <a:spAutoFit/>
-          </a:bodyPr>
-          <a:lstStyle/>
-          <a:p>
-            <a:pPr>
-              <a:lnSpc>
-                <a:spcPts val="1920"/>
-              </a:lnSpc>
-              <a:spcBef>
-                <a:spcPts val="0"/>
-              </a:spcBef>
-              <a:spcAft>
-                <a:spcPts val="0"/>
-              </a:spcAft>
-              <a:defRPr sz="1500" b="0">
-                <a:solidFill>
-                  <a:srgbClr val="152B3A"/>
-                </a:solidFill>
-                <a:latin typeface="Be Vietnam Pro"/>
-              </a:defRPr>
-            </a:pPr>
-            <a:r>
-              <a:t>OWL RL</a:t>
-            </a:r>
-          </a:p>
-        </p:txBody>
-      </p:sp>
-      <p:sp>
-        <p:nvSpPr>
-          <p:cNvPr id="69" name="Rectangle 68"/>
-          <p:cNvSpPr/>
-          <p:nvPr/>
-        </p:nvSpPr>
-        <p:spPr>
-          <a:xfrm>
-            <a:off x="731520" y="6271260"/>
-            <a:ext cx="13304520" cy="303276"/>
-          </a:xfrm>
-          <a:prstGeom prst="rect">
-            <a:avLst/>
-          </a:prstGeom>
-          <a:solidFill>
-            <a:srgbClr val="E7EFF1"/>
-          </a:solidFill>
-          <a:ln>
-            <a:noFill/>
-          </a:ln>
-        </p:spPr>
-        <p:style>
-          <a:lnRef idx="1">
-            <a:schemeClr val="accent1"/>
-          </a:lnRef>
-          <a:fillRef idx="3">
-            <a:schemeClr val="accent1"/>
-          </a:fillRef>
-          <a:effectRef idx="2">
-            <a:schemeClr val="accent1"/>
-          </a:effectRef>
-          <a:fontRef idx="minor">
-            <a:schemeClr val="lt1"/>
-          </a:fontRef>
-        </p:style>
-        <p:txBody>
-          <a:bodyPr rtlCol="0" anchor="ctr"/>
-          <a:lstStyle/>
-          <a:p>
-            <a:pPr algn="ctr"/>
-          </a:p>
-        </p:txBody>
-      </p:sp>
-      <p:sp>
-        <p:nvSpPr>
-          <p:cNvPr id="70" name="TextBox 69"/>
-          <p:cNvSpPr txBox="1"/>
-          <p:nvPr/>
-        </p:nvSpPr>
-        <p:spPr>
-          <a:xfrm>
-            <a:off x="841248" y="6300978"/>
-            <a:ext cx="3575304" cy="243840"/>
-          </a:xfrm>
-          <a:prstGeom prst="rect">
-            <a:avLst/>
-          </a:prstGeom>
-          <a:noFill/>
-        </p:spPr>
-        <p:txBody>
-          <a:bodyPr wrap="none" lIns="0" rIns="0" tIns="0" bIns="0">
-            <a:spAutoFit/>
-          </a:bodyPr>
-          <a:lstStyle/>
-          <a:p>
-            <a:pPr>
-              <a:lnSpc>
-                <a:spcPts val="1920"/>
-              </a:lnSpc>
-              <a:spcBef>
-                <a:spcPts val="0"/>
-              </a:spcBef>
-              <a:spcAft>
-                <a:spcPts val="0"/>
-              </a:spcAft>
-              <a:defRPr sz="1500" b="0">
-                <a:solidFill>
-                  <a:srgbClr val="152B3A"/>
-                </a:solidFill>
-                <a:latin typeface="Be Vietnam Pro"/>
-              </a:defRPr>
-            </a:pPr>
-            <a:r>
-              <a:t>AwardWinningFilm</a:t>
-            </a:r>
-          </a:p>
-        </p:txBody>
-      </p:sp>
-      <p:sp>
-        <p:nvSpPr>
-          <p:cNvPr id="71" name="TextBox 70"/>
-          <p:cNvSpPr txBox="1"/>
-          <p:nvPr/>
-        </p:nvSpPr>
-        <p:spPr>
-          <a:xfrm>
-            <a:off x="4636008" y="6300978"/>
-            <a:ext cx="5952744" cy="243840"/>
-          </a:xfrm>
-          <a:prstGeom prst="rect">
-            <a:avLst/>
-          </a:prstGeom>
-          <a:noFill/>
-        </p:spPr>
-        <p:txBody>
-          <a:bodyPr wrap="none" lIns="0" rIns="0" tIns="0" bIns="0">
-            <a:spAutoFit/>
-          </a:bodyPr>
-          <a:lstStyle/>
-          <a:p>
-            <a:pPr>
-              <a:lnSpc>
-                <a:spcPts val="1920"/>
-              </a:lnSpc>
-              <a:spcBef>
-                <a:spcPts val="0"/>
-              </a:spcBef>
-              <a:spcAft>
-                <a:spcPts val="0"/>
-              </a:spcAft>
-              <a:defRPr sz="1500" b="0">
-                <a:solidFill>
-                  <a:srgbClr val="152B3A"/>
-                </a:solidFill>
-                <a:latin typeface="Be Vietnam Pro"/>
-              </a:defRPr>
-            </a:pPr>
-            <a:r>
-              <a:t>Film that receives an award</a:t>
-            </a:r>
-          </a:p>
-        </p:txBody>
-      </p:sp>
-      <p:sp>
-        <p:nvSpPr>
-          <p:cNvPr id="72" name="TextBox 71"/>
-          <p:cNvSpPr txBox="1"/>
-          <p:nvPr/>
-        </p:nvSpPr>
-        <p:spPr>
-          <a:xfrm>
-            <a:off x="10808207" y="6300978"/>
-            <a:ext cx="1014984" cy="243840"/>
-          </a:xfrm>
-          <a:prstGeom prst="rect">
-            <a:avLst/>
-          </a:prstGeom>
-          <a:noFill/>
-        </p:spPr>
-        <p:txBody>
-          <a:bodyPr wrap="none" lIns="0" rIns="0" tIns="0" bIns="0">
-            <a:spAutoFit/>
-          </a:bodyPr>
-          <a:lstStyle/>
-          <a:p>
-            <a:pPr>
-              <a:lnSpc>
-                <a:spcPts val="1920"/>
-              </a:lnSpc>
-              <a:spcBef>
-                <a:spcPts val="0"/>
-              </a:spcBef>
-              <a:spcAft>
-                <a:spcPts val="0"/>
-              </a:spcAft>
-              <a:defRPr sz="1500" b="0">
-                <a:solidFill>
-                  <a:srgbClr val="152B3A"/>
-                </a:solidFill>
-                <a:latin typeface="Be Vietnam Pro"/>
-              </a:defRPr>
-            </a:pPr>
-            <a:r>
-              <a:t>26</a:t>
-            </a:r>
-          </a:p>
-        </p:txBody>
-      </p:sp>
-      <p:sp>
-        <p:nvSpPr>
-          <p:cNvPr id="73" name="TextBox 72"/>
-          <p:cNvSpPr txBox="1"/>
-          <p:nvPr/>
-        </p:nvSpPr>
-        <p:spPr>
-          <a:xfrm>
-            <a:off x="12042647" y="6300978"/>
-            <a:ext cx="1883663" cy="243840"/>
-          </a:xfrm>
-          <a:prstGeom prst="rect">
-            <a:avLst/>
-          </a:prstGeom>
-          <a:noFill/>
-        </p:spPr>
-        <p:txBody>
-          <a:bodyPr wrap="none" lIns="0" rIns="0" tIns="0" bIns="0">
-            <a:spAutoFit/>
-          </a:bodyPr>
-          <a:lstStyle/>
-          <a:p>
-            <a:pPr>
-              <a:lnSpc>
-                <a:spcPts val="1920"/>
-              </a:lnSpc>
-              <a:spcBef>
-                <a:spcPts val="0"/>
-              </a:spcBef>
-              <a:spcAft>
-                <a:spcPts val="0"/>
-              </a:spcAft>
-              <a:defRPr sz="1500" b="0">
-                <a:solidFill>
-                  <a:srgbClr val="152B3A"/>
-                </a:solidFill>
-                <a:latin typeface="Be Vietnam Pro"/>
-              </a:defRPr>
-            </a:pPr>
-            <a:r>
-              <a:t>OWL RL</a:t>
-            </a:r>
-          </a:p>
-        </p:txBody>
-      </p:sp>
-      <p:sp>
-        <p:nvSpPr>
-          <p:cNvPr id="74" name="Rectangle 73"/>
-          <p:cNvSpPr/>
-          <p:nvPr/>
-        </p:nvSpPr>
-        <p:spPr>
-          <a:xfrm>
-            <a:off x="731520" y="6574536"/>
-            <a:ext cx="13304520" cy="303276"/>
-          </a:xfrm>
-          <a:prstGeom prst="rect">
-            <a:avLst/>
-          </a:prstGeom>
-          <a:solidFill>
-            <a:srgbClr val="FFFFFF"/>
-          </a:solidFill>
-          <a:ln>
-            <a:noFill/>
-          </a:ln>
-        </p:spPr>
-        <p:style>
-          <a:lnRef idx="1">
-            <a:schemeClr val="accent1"/>
-          </a:lnRef>
-          <a:fillRef idx="3">
-            <a:schemeClr val="accent1"/>
-          </a:fillRef>
-          <a:effectRef idx="2">
-            <a:schemeClr val="accent1"/>
-          </a:effectRef>
-          <a:fontRef idx="minor">
-            <a:schemeClr val="lt1"/>
-          </a:fontRef>
-        </p:style>
-        <p:txBody>
-          <a:bodyPr rtlCol="0" anchor="ctr"/>
-          <a:lstStyle/>
-          <a:p>
-            <a:pPr algn="ctr"/>
-          </a:p>
-        </p:txBody>
-      </p:sp>
-      <p:sp>
-        <p:nvSpPr>
-          <p:cNvPr id="75" name="TextBox 74"/>
-          <p:cNvSpPr txBox="1"/>
-          <p:nvPr/>
-        </p:nvSpPr>
-        <p:spPr>
-          <a:xfrm>
-            <a:off x="841248" y="6604254"/>
-            <a:ext cx="3575304" cy="243840"/>
-          </a:xfrm>
-          <a:prstGeom prst="rect">
-            <a:avLst/>
-          </a:prstGeom>
-          <a:noFill/>
-        </p:spPr>
-        <p:txBody>
-          <a:bodyPr wrap="none" lIns="0" rIns="0" tIns="0" bIns="0">
-            <a:spAutoFit/>
-          </a:bodyPr>
-          <a:lstStyle/>
-          <a:p>
-            <a:pPr>
-              <a:lnSpc>
-                <a:spcPts val="1920"/>
-              </a:lnSpc>
-              <a:spcBef>
-                <a:spcPts val="0"/>
-              </a:spcBef>
-              <a:spcAft>
-                <a:spcPts val="0"/>
-              </a:spcAft>
-              <a:defRPr sz="1500" b="0">
-                <a:solidFill>
-                  <a:srgbClr val="152B3A"/>
-                </a:solidFill>
-                <a:latin typeface="Be Vietnam Pro"/>
-              </a:defRPr>
-            </a:pPr>
-            <a:r>
-              <a:t>MultiGenreFilm</a:t>
-            </a:r>
-          </a:p>
-        </p:txBody>
-      </p:sp>
-      <p:sp>
-        <p:nvSpPr>
-          <p:cNvPr id="76" name="TextBox 75"/>
-          <p:cNvSpPr txBox="1"/>
-          <p:nvPr/>
-        </p:nvSpPr>
-        <p:spPr>
-          <a:xfrm>
-            <a:off x="4636008" y="6604254"/>
-            <a:ext cx="5952744" cy="243840"/>
-          </a:xfrm>
-          <a:prstGeom prst="rect">
-            <a:avLst/>
-          </a:prstGeom>
-          <a:noFill/>
-        </p:spPr>
-        <p:txBody>
-          <a:bodyPr wrap="none" lIns="0" rIns="0" tIns="0" bIns="0">
-            <a:spAutoFit/>
-          </a:bodyPr>
-          <a:lstStyle/>
-          <a:p>
-            <a:pPr>
-              <a:lnSpc>
-                <a:spcPts val="1920"/>
-              </a:lnSpc>
-              <a:spcBef>
-                <a:spcPts val="0"/>
-              </a:spcBef>
-              <a:spcAft>
-                <a:spcPts val="0"/>
-              </a:spcAft>
-              <a:defRPr sz="1500" b="0">
-                <a:solidFill>
-                  <a:srgbClr val="152B3A"/>
-                </a:solidFill>
-                <a:latin typeface="Be Vietnam Pro"/>
-              </a:defRPr>
-            </a:pPr>
-            <a:r>
-              <a:t>Film with at least 2 Genre IRIs</a:t>
-            </a:r>
-          </a:p>
-        </p:txBody>
-      </p:sp>
-      <p:sp>
-        <p:nvSpPr>
-          <p:cNvPr id="77" name="TextBox 76"/>
-          <p:cNvSpPr txBox="1"/>
-          <p:nvPr/>
-        </p:nvSpPr>
-        <p:spPr>
-          <a:xfrm>
-            <a:off x="10808207" y="6604254"/>
-            <a:ext cx="1014984" cy="243840"/>
-          </a:xfrm>
-          <a:prstGeom prst="rect">
-            <a:avLst/>
-          </a:prstGeom>
-          <a:noFill/>
-        </p:spPr>
-        <p:txBody>
-          <a:bodyPr wrap="none" lIns="0" rIns="0" tIns="0" bIns="0">
-            <a:spAutoFit/>
-          </a:bodyPr>
-          <a:lstStyle/>
-          <a:p>
-            <a:pPr>
-              <a:lnSpc>
-                <a:spcPts val="1920"/>
-              </a:lnSpc>
-              <a:spcBef>
-                <a:spcPts val="0"/>
-              </a:spcBef>
-              <a:spcAft>
-                <a:spcPts val="0"/>
-              </a:spcAft>
-              <a:defRPr sz="1500" b="0">
-                <a:solidFill>
-                  <a:srgbClr val="152B3A"/>
-                </a:solidFill>
-                <a:latin typeface="Be Vietnam Pro"/>
-              </a:defRPr>
-            </a:pPr>
-            <a:r>
-              <a:t>30</a:t>
-            </a:r>
-          </a:p>
-        </p:txBody>
-      </p:sp>
-      <p:sp>
-        <p:nvSpPr>
-          <p:cNvPr id="78" name="TextBox 77"/>
-          <p:cNvSpPr txBox="1"/>
-          <p:nvPr/>
-        </p:nvSpPr>
-        <p:spPr>
-          <a:xfrm>
-            <a:off x="12042647" y="6604254"/>
-            <a:ext cx="1883663" cy="243840"/>
-          </a:xfrm>
-          <a:prstGeom prst="rect">
-            <a:avLst/>
-          </a:prstGeom>
-          <a:noFill/>
-        </p:spPr>
-        <p:txBody>
-          <a:bodyPr wrap="none" lIns="0" rIns="0" tIns="0" bIns="0">
-            <a:spAutoFit/>
-          </a:bodyPr>
-          <a:lstStyle/>
-          <a:p>
-            <a:pPr>
-              <a:lnSpc>
-                <a:spcPts val="1920"/>
-              </a:lnSpc>
-              <a:spcBef>
-                <a:spcPts val="0"/>
-              </a:spcBef>
-              <a:spcAft>
-                <a:spcPts val="0"/>
-              </a:spcAft>
-              <a:defRPr sz="1500" b="0">
-                <a:solidFill>
-                  <a:srgbClr val="152B3A"/>
-                </a:solidFill>
-                <a:latin typeface="Be Vietnam Pro"/>
-              </a:defRPr>
-            </a:pPr>
-            <a:r>
-              <a:t>IRI counting</a:t>
-            </a:r>
-          </a:p>
-        </p:txBody>
-      </p:sp>
-      <p:sp>
-        <p:nvSpPr>
-          <p:cNvPr id="79" name="Rectangle 78"/>
-          <p:cNvSpPr/>
-          <p:nvPr/>
-        </p:nvSpPr>
-        <p:spPr>
-          <a:xfrm>
-            <a:off x="731520" y="6877812"/>
-            <a:ext cx="13304520" cy="303276"/>
-          </a:xfrm>
-          <a:prstGeom prst="rect">
-            <a:avLst/>
-          </a:prstGeom>
-          <a:solidFill>
-            <a:srgbClr val="E7EFF1"/>
-          </a:solidFill>
-          <a:ln>
-            <a:noFill/>
-          </a:ln>
-        </p:spPr>
-        <p:style>
-          <a:lnRef idx="1">
-            <a:schemeClr val="accent1"/>
-          </a:lnRef>
-          <a:fillRef idx="3">
-            <a:schemeClr val="accent1"/>
-          </a:fillRef>
-          <a:effectRef idx="2">
-            <a:schemeClr val="accent1"/>
-          </a:effectRef>
-          <a:fontRef idx="minor">
-            <a:schemeClr val="lt1"/>
-          </a:fontRef>
-        </p:style>
-        <p:txBody>
-          <a:bodyPr rtlCol="0" anchor="ctr"/>
-          <a:lstStyle/>
-          <a:p>
-            <a:pPr algn="ctr"/>
-          </a:p>
-        </p:txBody>
-      </p:sp>
-      <p:sp>
-        <p:nvSpPr>
-          <p:cNvPr id="80" name="TextBox 79"/>
-          <p:cNvSpPr txBox="1"/>
-          <p:nvPr/>
-        </p:nvSpPr>
-        <p:spPr>
-          <a:xfrm>
-            <a:off x="841248" y="6907530"/>
-            <a:ext cx="3575304" cy="243840"/>
-          </a:xfrm>
-          <a:prstGeom prst="rect">
-            <a:avLst/>
-          </a:prstGeom>
-          <a:noFill/>
-        </p:spPr>
-        <p:txBody>
-          <a:bodyPr wrap="none" lIns="0" rIns="0" tIns="0" bIns="0">
-            <a:spAutoFit/>
-          </a:bodyPr>
-          <a:lstStyle/>
-          <a:p>
-            <a:pPr>
-              <a:lnSpc>
-                <a:spcPts val="1920"/>
-              </a:lnSpc>
-              <a:spcBef>
-                <a:spcPts val="0"/>
-              </a:spcBef>
-              <a:spcAft>
-                <a:spcPts val="0"/>
-              </a:spcAft>
-              <a:defRPr sz="1500" b="0">
-                <a:solidFill>
-                  <a:srgbClr val="152B3A"/>
-                </a:solidFill>
-                <a:latin typeface="Be Vietnam Pro"/>
-              </a:defRPr>
-            </a:pPr>
-            <a:r>
-              <a:t>FilmStudio</a:t>
-            </a:r>
-          </a:p>
-        </p:txBody>
-      </p:sp>
-      <p:sp>
-        <p:nvSpPr>
-          <p:cNvPr id="81" name="TextBox 80"/>
-          <p:cNvSpPr txBox="1"/>
-          <p:nvPr/>
-        </p:nvSpPr>
-        <p:spPr>
-          <a:xfrm>
-            <a:off x="4636008" y="6907530"/>
-            <a:ext cx="5952744" cy="243840"/>
-          </a:xfrm>
-          <a:prstGeom prst="rect">
-            <a:avLst/>
-          </a:prstGeom>
-          <a:noFill/>
-        </p:spPr>
-        <p:txBody>
-          <a:bodyPr wrap="none" lIns="0" rIns="0" tIns="0" bIns="0">
-            <a:spAutoFit/>
-          </a:bodyPr>
-          <a:lstStyle/>
-          <a:p>
-            <a:pPr>
-              <a:lnSpc>
-                <a:spcPts val="1920"/>
-              </a:lnSpc>
-              <a:spcBef>
-                <a:spcPts val="0"/>
-              </a:spcBef>
-              <a:spcAft>
-                <a:spcPts val="0"/>
-              </a:spcAft>
-              <a:defRPr sz="1500" b="0">
-                <a:solidFill>
-                  <a:srgbClr val="152B3A"/>
-                </a:solidFill>
-                <a:latin typeface="Be Vietnam Pro"/>
-              </a:defRPr>
-            </a:pPr>
-            <a:r>
-              <a:t>Company with at least 3 Film IRIs</a:t>
-            </a:r>
-          </a:p>
-        </p:txBody>
-      </p:sp>
-      <p:sp>
-        <p:nvSpPr>
-          <p:cNvPr id="82" name="TextBox 81"/>
-          <p:cNvSpPr txBox="1"/>
-          <p:nvPr/>
-        </p:nvSpPr>
-        <p:spPr>
-          <a:xfrm>
-            <a:off x="10808207" y="6907530"/>
-            <a:ext cx="1014984" cy="243840"/>
-          </a:xfrm>
-          <a:prstGeom prst="rect">
-            <a:avLst/>
-          </a:prstGeom>
-          <a:noFill/>
-        </p:spPr>
-        <p:txBody>
-          <a:bodyPr wrap="none" lIns="0" rIns="0" tIns="0" bIns="0">
-            <a:spAutoFit/>
-          </a:bodyPr>
-          <a:lstStyle/>
-          <a:p>
-            <a:pPr>
-              <a:lnSpc>
-                <a:spcPts val="1920"/>
-              </a:lnSpc>
-              <a:spcBef>
-                <a:spcPts val="0"/>
-              </a:spcBef>
-              <a:spcAft>
-                <a:spcPts val="0"/>
-              </a:spcAft>
-              <a:defRPr sz="1500" b="0">
-                <a:solidFill>
-                  <a:srgbClr val="152B3A"/>
-                </a:solidFill>
-                <a:latin typeface="Be Vietnam Pro"/>
-              </a:defRPr>
-            </a:pPr>
-            <a:r>
-              <a:t>6</a:t>
-            </a:r>
-          </a:p>
-        </p:txBody>
-      </p:sp>
-      <p:sp>
-        <p:nvSpPr>
-          <p:cNvPr id="83" name="TextBox 82"/>
-          <p:cNvSpPr txBox="1"/>
-          <p:nvPr/>
-        </p:nvSpPr>
-        <p:spPr>
-          <a:xfrm>
-            <a:off x="12042647" y="6907530"/>
-            <a:ext cx="1883663" cy="243840"/>
-          </a:xfrm>
-          <a:prstGeom prst="rect">
-            <a:avLst/>
-          </a:prstGeom>
-          <a:noFill/>
-        </p:spPr>
-        <p:txBody>
-          <a:bodyPr wrap="none" lIns="0" rIns="0" tIns="0" bIns="0">
-            <a:spAutoFit/>
-          </a:bodyPr>
-          <a:lstStyle/>
-          <a:p>
-            <a:pPr>
-              <a:lnSpc>
-                <a:spcPts val="1920"/>
-              </a:lnSpc>
-              <a:spcBef>
-                <a:spcPts val="0"/>
-              </a:spcBef>
-              <a:spcAft>
-                <a:spcPts val="0"/>
-              </a:spcAft>
-              <a:defRPr sz="1500" b="0">
-                <a:solidFill>
-                  <a:srgbClr val="152B3A"/>
-                </a:solidFill>
-                <a:latin typeface="Be Vietnam Pro"/>
-              </a:defRPr>
-            </a:pPr>
-            <a:r>
-              <a:t>IRI counting</a:t>
-            </a:r>
-          </a:p>
-        </p:txBody>
-      </p:sp>
-      <p:sp>
-        <p:nvSpPr>
-          <p:cNvPr id="84" name="TextBox 83"/>
+              <a:t>HermiT</a:t>
+            </a:r>
+          </a:p>
+        </p:txBody>
+      </p:sp>
+      <p:sp>
+        <p:nvSpPr>
+          <p:cNvPr id="64" name="TextBox 63"/>
           <p:cNvSpPr txBox="1"/>
           <p:nvPr/>
         </p:nvSpPr>
@@ -13672,7 +12768,7 @@
               </a:defRPr>
             </a:pPr>
             <a:r>
-              <a:t>12 classes: OWL RL, with matching HermiT/Pellet counts. Last 2: COUNT DISTINCT; DL instances: 0.</a:t>
+              <a:t>Supporting credit types: Acting 855 · Directing 31 · Writing 51 · Producing 73; dbo:Actor 769.</a:t>
             </a:r>
           </a:p>
         </p:txBody>
@@ -13786,7 +12882,7 @@
               </a:defRPr>
             </a:pPr>
             <a:r>
-              <a:t>MOVIELOD / SEMANTIC WEB / ONTOLOGY 2.0</a:t>
+              <a:t>MOVIELOD / SEMANTIC WEB / ONTOLOGY 3.0.0</a:t>
             </a:r>
           </a:p>
         </p:txBody>
@@ -13831,52 +12927,7 @@
               </a:defRPr>
             </a:pPr>
             <a:r>
-              <a:t>R1 · Inference example: Christopher Nolan</a:t>
-            </a:r>
-          </a:p>
-        </p:txBody>
-      </p:sp>
-      <p:sp>
-        <p:nvSpPr>
-          <p:cNvPr id="5" name="TextBox 4"/>
-          <p:cNvSpPr txBox="1"/>
-          <p:nvPr/>
-        </p:nvSpPr>
-        <p:spPr>
-          <a:xfrm>
-            <a:off x="612648" y="1719072"/>
-            <a:ext cx="13350240" cy="548640"/>
-          </a:xfrm>
-          <a:prstGeom prst="rect">
-            <a:avLst/>
-          </a:prstGeom>
-          <a:noFill/>
-        </p:spPr>
-        <p:txBody>
-          <a:bodyPr wrap="none" lIns="0" rIns="0" tIns="0" bIns="0">
-            <a:spAutoFit/>
-          </a:bodyPr>
-          <a:lstStyle/>
-          <a:p>
-            <a:pPr>
-              <a:lnSpc>
-                <a:spcPts val="2176"/>
-              </a:lnSpc>
-              <a:spcBef>
-                <a:spcPts val="0"/>
-              </a:spcBef>
-              <a:spcAft>
-                <a:spcPts val="0"/>
-              </a:spcAft>
-              <a:defRPr sz="1700" b="0">
-                <a:solidFill>
-                  <a:srgbClr val="506776"/>
-                </a:solidFill>
-                <a:latin typeface="Be Vietnam Pro"/>
-              </a:defRPr>
-            </a:pPr>
-            <a:r>
-              <a:t>DirectorRole </a:t>
+              <a:t>Nolan: facts </a:t>
             </a:r>
             <a:r>
               <a:rPr>
@@ -13885,7 +12936,7 @@
               <a:t>→</a:t>
             </a:r>
             <a:r>
-              <a:t> DirectingContribution </a:t>
+              <a:t> credit type </a:t>
             </a:r>
             <a:r>
               <a:rPr>
@@ -13895,6 +12946,51 @@
             </a:r>
             <a:r>
               <a:t> Filmmaker</a:t>
+            </a:r>
+          </a:p>
+        </p:txBody>
+      </p:sp>
+      <p:sp>
+        <p:nvSpPr>
+          <p:cNvPr id="5" name="TextBox 4"/>
+          <p:cNvSpPr txBox="1"/>
+          <p:nvPr/>
+        </p:nvSpPr>
+        <p:spPr>
+          <a:xfrm>
+            <a:off x="612648" y="1719072"/>
+            <a:ext cx="13350240" cy="548640"/>
+          </a:xfrm>
+          <a:prstGeom prst="rect">
+            <a:avLst/>
+          </a:prstGeom>
+          <a:noFill/>
+        </p:spPr>
+        <p:txBody>
+          <a:bodyPr wrap="none" lIns="0" rIns="0" tIns="0" bIns="0">
+            <a:spAutoFit/>
+          </a:bodyPr>
+          <a:lstStyle/>
+          <a:p>
+            <a:pPr>
+              <a:lnSpc>
+                <a:spcPts val="2176"/>
+              </a:lnSpc>
+              <a:spcBef>
+                <a:spcPts val="0"/>
+              </a:spcBef>
+              <a:spcAft>
+                <a:spcPts val="0"/>
+              </a:spcAft>
+              <a:defRPr sz="1700" b="0">
+                <a:solidFill>
+                  <a:srgbClr val="506776"/>
+                </a:solidFill>
+                <a:latin typeface="Be Vietnam Pro"/>
+              </a:defRPr>
+            </a:pPr>
+            <a:r>
+              <a:t>A multi-step explanation grounded in real records</a:t>
             </a:r>
           </a:p>
         </p:txBody>
@@ -13982,7 +13078,7 @@
               </a:defRPr>
             </a:pPr>
             <a:r>
-              <a:t>Data checked: 08 Oct 2026 • Sources: project code and evidence/</a:t>
+              <a:t>Data checked: 09 Oct 2026 • Sources: project code and evidence/</a:t>
             </a:r>
           </a:p>
         </p:txBody>
@@ -14158,7 +13254,7 @@
               </a:defRPr>
             </a:pPr>
             <a:r>
-              <a:t>FACTS</a:t>
+              <a:t>SOURCE FACTS</a:t>
             </a:r>
           </a:p>
         </p:txBody>
@@ -14203,29 +13299,7 @@
               </a:defRPr>
             </a:pPr>
             <a:r>
-              <a:t>Nolan a dbo:Person</a:t>
-            </a:r>
-          </a:p>
-          <a:p>
-            <a:pPr>
-              <a:lnSpc>
-                <a:spcPts val="2176"/>
-              </a:lnSpc>
-              <a:spcBef>
-                <a:spcPts val="0"/>
-              </a:spcBef>
-              <a:spcAft>
-                <a:spcPts val="0"/>
-              </a:spcAft>
-              <a:defRPr sz="1700" b="0">
-                <a:solidFill>
-                  <a:srgbClr val="506776"/>
-                </a:solidFill>
-                <a:latin typeface="Be Vietnam Pro"/>
-              </a:defRPr>
-            </a:pPr>
-            <a:r>
-              <a:t>c hasRole DirectorRole</a:t>
+              <a:t>Nolan a dbo:Person; credit hasRole DirectorRole.</a:t>
             </a:r>
           </a:p>
         </p:txBody>
@@ -14404,7 +13478,7 @@
               </a:defRPr>
             </a:pPr>
             <a:r>
-              <a:t>RULE 1 · hasValue</a:t>
+              <a:t>CREDIT CLASS</a:t>
             </a:r>
           </a:p>
         </p:txBody>
@@ -14449,7 +13523,29 @@
               </a:defRPr>
             </a:pPr>
             <a:r>
-              <a:t>c a DirectingContribution</a:t>
+              <a:t>credit a DirectingContribution; inverse yields</a:t>
+            </a:r>
+          </a:p>
+          <a:p>
+            <a:pPr>
+              <a:lnSpc>
+                <a:spcPts val="2176"/>
+              </a:lnSpc>
+              <a:spcBef>
+                <a:spcPts val="0"/>
+              </a:spcBef>
+              <a:spcAft>
+                <a:spcPts val="0"/>
+              </a:spcAft>
+              <a:defRPr sz="1700" b="0">
+                <a:solidFill>
+                  <a:srgbClr val="506776"/>
+                </a:solidFill>
+                <a:latin typeface="Be Vietnam Pro"/>
+              </a:defRPr>
+            </a:pPr>
+            <a:r>
+              <a:t>hasContribution.</a:t>
             </a:r>
           </a:p>
         </p:txBody>
@@ -14628,7 +13724,7 @@
               </a:defRPr>
             </a:pPr>
             <a:r>
-              <a:t>RULE 2 · SOME + OR</a:t>
+              <a:t>PERSON CLASS</a:t>
             </a:r>
           </a:p>
         </p:txBody>
@@ -14673,7 +13769,29 @@
               </a:defRPr>
             </a:pPr>
             <a:r>
-              <a:t>Nolan a Filmmaker</a:t>
+              <a:t>Nolan a Filmmaker; directing + writing also yield</a:t>
+            </a:r>
+          </a:p>
+          <a:p>
+            <a:pPr>
+              <a:lnSpc>
+                <a:spcPts val="2176"/>
+              </a:lnSpc>
+              <a:spcBef>
+                <a:spcPts val="0"/>
+              </a:spcBef>
+              <a:spcAft>
+                <a:spcPts val="0"/>
+              </a:spcAft>
+              <a:defRPr sz="1700" b="0">
+                <a:solidFill>
+                  <a:srgbClr val="506776"/>
+                </a:solidFill>
+                <a:latin typeface="Be Vietnam Pro"/>
+              </a:defRPr>
+            </a:pPr>
+            <a:r>
+              <a:t>WriterDirector.</a:t>
             </a:r>
           </a:p>
         </p:txBody>
@@ -14941,25 +14059,7 @@
               </a:defRPr>
             </a:pPr>
             <a:r>
-              <a:t>1. Entities </a:t>
-            </a:r>
-            <a:r>
-              <a:rPr>
-                <a:latin typeface="Arial Unicode MS"/>
-              </a:rPr>
-              <a:t>→</a:t>
-            </a:r>
-            <a:r>
-              <a:t> Classes </a:t>
-            </a:r>
-            <a:r>
-              <a:rPr>
-                <a:latin typeface="Arial Unicode MS"/>
-              </a:rPr>
-              <a:t>→</a:t>
-            </a:r>
-            <a:r>
-              <a:t> chọn Filmmaker.</a:t>
+              <a:t>1. Chọn ex:Filmmaker.</a:t>
             </a:r>
           </a:p>
         </p:txBody>
@@ -15004,16 +14104,7 @@
               </a:defRPr>
             </a:pPr>
             <a:r>
-              <a:t>2. Mở Class Description </a:t>
-            </a:r>
-            <a:r>
-              <a:rPr>
-                <a:latin typeface="Arial Unicode MS"/>
-              </a:rPr>
-              <a:t>→</a:t>
-            </a:r>
-            <a:r>
-              <a:t> Equivalent To.</a:t>
+              <a:t>2. Hiện Equivalent To với Person AND các nhánh SOME.</a:t>
             </a:r>
           </a:p>
         </p:txBody>
@@ -15027,7 +14118,7 @@
         <p:spPr>
           <a:xfrm>
             <a:off x="8055864" y="5703823"/>
-            <a:ext cx="5605272" cy="491744"/>
+            <a:ext cx="5605272" cy="264160"/>
           </a:xfrm>
           <a:prstGeom prst="rect">
             <a:avLst/>
@@ -15058,29 +14149,7 @@
               </a:defRPr>
             </a:pPr>
             <a:r>
-              <a:t>3. Hiện Person AND các nhánh SOME</a:t>
-            </a:r>
-          </a:p>
-          <a:p>
-            <a:pPr>
-              <a:lnSpc>
-                <a:spcPts val="1792"/>
-              </a:lnSpc>
-              <a:spcBef>
-                <a:spcPts val="0"/>
-              </a:spcBef>
-              <a:spcAft>
-                <a:spcPts val="0"/>
-              </a:spcAft>
-              <a:defRPr sz="1400" b="0">
-                <a:solidFill>
-                  <a:srgbClr val="506776"/>
-                </a:solidFill>
-                <a:latin typeface="Be Vietnam Pro"/>
-              </a:defRPr>
-            </a:pPr>
-            <a:r>
-              <a:t>Directing/Writing/ProducingContribution.</a:t>
+              <a:t>3. Đọc các nhánh Directing / Writing / ProducingContribution.</a:t>
             </a:r>
           </a:p>
         </p:txBody>
@@ -15170,16 +14239,7 @@
               </a:defRPr>
             </a:pPr>
             <a:r>
-              <a:t>Nolan: Person (asserted) </a:t>
-            </a:r>
-            <a:r>
-              <a:rPr>
-                <a:latin typeface="Arial Unicode MS"/>
-              </a:rPr>
-              <a:t>→</a:t>
-            </a:r>
-            <a:r>
-              <a:t> Person + Filmmaker + AwardWinner (with inferred types).</a:t>
+              <a:t>Nolan: 8 directed films, 22 credit IRIs in the sample; three roles on Inception.</a:t>
             </a:r>
           </a:p>
         </p:txBody>
@@ -15293,7 +14353,7 @@
               </a:defRPr>
             </a:pPr>
             <a:r>
-              <a:t>MOVIELOD / SEMANTIC WEB / ONTOLOGY 2.0</a:t>
+              <a:t>MOVIELOD / SEMANTIC WEB / ONTOLOGY 3.0.0</a:t>
             </a:r>
           </a:p>
         </p:txBody>
@@ -15338,7 +14398,7 @@
               </a:defRPr>
             </a:pPr>
             <a:r>
-              <a:t>R1 · Cardinality: thresholds of two and three</a:t>
+              <a:t>Genuine minimum-cardinality reasoning</a:t>
             </a:r>
           </a:p>
         </p:txBody>
@@ -15383,7 +14443,7 @@
               </a:defRPr>
             </a:pPr>
             <a:r>
-              <a:t>Distinguish OWL definitions from counting distinct RDF terms</a:t>
+              <a:t>Functional hasRole + different roles prove distinct credits</a:t>
             </a:r>
           </a:p>
         </p:txBody>
@@ -15471,7 +14531,7 @@
               </a:defRPr>
             </a:pPr>
             <a:r>
-              <a:t>Data checked: 08 Oct 2026 • Sources: project code and evidence/</a:t>
+              <a:t>Data checked: 09 Oct 2026 • Sources: project code and evidence/</a:t>
             </a:r>
           </a:p>
         </p:txBody>
@@ -15647,7 +14707,7 @@
               </a:defRPr>
             </a:pPr>
             <a:r>
-              <a:t>MultiGenreFilm</a:t>
+              <a:t>MultiCreditContributor · 17</a:t>
             </a:r>
           </a:p>
         </p:txBody>
@@ -15692,7 +14752,7 @@
               </a:defRPr>
             </a:pPr>
             <a:r>
-              <a:t>Film + min 2 hasGenre.Genre</a:t>
+              <a:t>Person and hasContribution min 2 Contribution.</a:t>
             </a:r>
           </a:p>
           <a:p>
@@ -15714,7 +14774,7 @@
               </a:defRPr>
             </a:pPr>
             <a:r>
-              <a:t>Application: 30/30 films; DL: 0 inferred.</a:t>
+              <a:t>Distinctness needs semantic evidence.</a:t>
             </a:r>
           </a:p>
         </p:txBody>
@@ -15845,7 +14905,7 @@
               </a:defRPr>
             </a:pPr>
             <a:r>
-              <a:t>FilmStudio</a:t>
+              <a:t>ThreeCreditContributor · 7</a:t>
             </a:r>
           </a:p>
         </p:txBody>
@@ -15890,7 +14950,7 @@
               </a:defRPr>
             </a:pPr>
             <a:r>
-              <a:t>ProductionCompany + min 3 productionOf.Film</a:t>
+              <a:t>Person and hasContribution min 3 Contribution.</a:t>
             </a:r>
           </a:p>
           <a:p>
@@ -15912,7 +14972,7 @@
               </a:defRPr>
             </a:pPr>
             <a:r>
-              <a:t>Application: 6 companies; DL: 0 inferred.</a:t>
+              <a:t>Nolan supplies three different-role witnesses.</a:t>
             </a:r>
           </a:p>
         </p:txBody>
@@ -16144,7 +15204,7 @@
               </a:defRPr>
             </a:pPr>
             <a:r>
-              <a:t>Định nghĩa FilmStudio</a:t>
+              <a:t>Cardinality trên Contribution</a:t>
             </a:r>
           </a:p>
         </p:txBody>
@@ -16189,7 +15249,7 @@
               </a:defRPr>
             </a:pPr>
             <a:r>
-              <a:t>P07_filmstudio_cardinality.png</a:t>
+              <a:t>P07_three_credit_cardinality.png</a:t>
             </a:r>
           </a:p>
         </p:txBody>
@@ -16203,6 +15263,73 @@
         <p:spPr>
           <a:xfrm>
             <a:off x="8055864" y="4992624"/>
+            <a:ext cx="5605272" cy="491744"/>
+          </a:xfrm>
+          <a:prstGeom prst="rect">
+            <a:avLst/>
+          </a:prstGeom>
+          <a:noFill/>
+        </p:spPr>
+        <p:txBody>
+          <a:bodyPr wrap="none" lIns="0" rIns="0" tIns="0" bIns="0">
+            <a:spAutoFit/>
+          </a:bodyPr>
+          <a:lstStyle/>
+          <a:p>
+            <a:pPr>
+              <a:lnSpc>
+                <a:spcPts val="1792"/>
+              </a:lnSpc>
+              <a:spcBef>
+                <a:spcPts val="0"/>
+              </a:spcBef>
+              <a:spcAft>
+                <a:spcPts val="0"/>
+              </a:spcAft>
+              <a:defRPr sz="1400" b="0">
+                <a:solidFill>
+                  <a:srgbClr val="506776"/>
+                </a:solidFill>
+                <a:latin typeface="Be Vietnam Pro"/>
+              </a:defRPr>
+            </a:pPr>
+            <a:r>
+              <a:t>1. Chọn ex:ThreeCreditContributor; hiện min 3 hasContribution</a:t>
+            </a:r>
+          </a:p>
+          <a:p>
+            <a:pPr>
+              <a:lnSpc>
+                <a:spcPts val="1792"/>
+              </a:lnSpc>
+              <a:spcBef>
+                <a:spcPts val="0"/>
+              </a:spcBef>
+              <a:spcAft>
+                <a:spcPts val="0"/>
+              </a:spcAft>
+              <a:defRPr sz="1400" b="0">
+                <a:solidFill>
+                  <a:srgbClr val="506776"/>
+                </a:solidFill>
+                <a:latin typeface="Be Vietnam Pro"/>
+              </a:defRPr>
+            </a:pPr>
+            <a:r>
+              <a:t>Contribution.</a:t>
+            </a:r>
+          </a:p>
+        </p:txBody>
+      </p:sp>
+      <p:sp>
+        <p:nvSpPr>
+          <p:cNvPr id="24" name="PHOTO_P07_6"/>
+          <p:cNvSpPr txBox="1"/>
+          <p:nvPr/>
+        </p:nvSpPr>
+        <p:spPr>
+          <a:xfrm>
+            <a:off x="8055864" y="5575807"/>
             <a:ext cx="5605272" cy="264160"/>
           </a:xfrm>
           <a:prstGeom prst="rect">
@@ -16234,38 +15361,20 @@
               </a:defRPr>
             </a:pPr>
             <a:r>
-              <a:t>1. Entities </a:t>
-            </a:r>
-            <a:r>
-              <a:rPr>
-                <a:latin typeface="Arial Unicode MS"/>
-              </a:rPr>
-              <a:t>→</a:t>
-            </a:r>
-            <a:r>
-              <a:t> Classes </a:t>
-            </a:r>
-            <a:r>
-              <a:rPr>
-                <a:latin typeface="Arial Unicode MS"/>
-              </a:rPr>
-              <a:t>→</a:t>
-            </a:r>
-            <a:r>
-              <a:t> chọn FilmStudio.</a:t>
-            </a:r>
-          </a:p>
-        </p:txBody>
-      </p:sp>
-      <p:sp>
-        <p:nvSpPr>
-          <p:cNvPr id="24" name="PHOTO_P07_6"/>
-          <p:cNvSpPr txBox="1"/>
-          <p:nvPr/>
-        </p:nvSpPr>
-        <p:spPr>
-          <a:xfrm>
-            <a:off x="8055864" y="5348223"/>
+              <a:t>2. Chạy HermiT; chọn Nolan ở inferred view.</a:t>
+            </a:r>
+          </a:p>
+        </p:txBody>
+      </p:sp>
+      <p:sp>
+        <p:nvSpPr>
+          <p:cNvPr id="25" name="PHOTO_P07_7"/>
+          <p:cNvSpPr txBox="1"/>
+          <p:nvPr/>
+        </p:nvSpPr>
+        <p:spPr>
+          <a:xfrm>
+            <a:off x="8055864" y="5931407"/>
             <a:ext cx="5605272" cy="264160"/>
           </a:xfrm>
           <a:prstGeom prst="rect">
@@ -16297,52 +15406,7 @@
               </a:defRPr>
             </a:pPr>
             <a:r>
-              <a:t>2. Mở Equivalent To; hiện min 3 productionOf Film.</a:t>
-            </a:r>
-          </a:p>
-        </p:txBody>
-      </p:sp>
-      <p:sp>
-        <p:nvSpPr>
-          <p:cNvPr id="25" name="PHOTO_P07_7"/>
-          <p:cNvSpPr txBox="1"/>
-          <p:nvPr/>
-        </p:nvSpPr>
-        <p:spPr>
-          <a:xfrm>
-            <a:off x="8055864" y="5703823"/>
-            <a:ext cx="5605272" cy="264160"/>
-          </a:xfrm>
-          <a:prstGeom prst="rect">
-            <a:avLst/>
-          </a:prstGeom>
-          <a:noFill/>
-        </p:spPr>
-        <p:txBody>
-          <a:bodyPr wrap="none" lIns="0" rIns="0" tIns="0" bIns="0">
-            <a:spAutoFit/>
-          </a:bodyPr>
-          <a:lstStyle/>
-          <a:p>
-            <a:pPr>
-              <a:lnSpc>
-                <a:spcPts val="1792"/>
-              </a:lnSpc>
-              <a:spcBef>
-                <a:spcPts val="0"/>
-              </a:spcBef>
-              <a:spcAft>
-                <a:spcPts val="0"/>
-              </a:spcAft>
-              <a:defRPr sz="1400" b="0">
-                <a:solidFill>
-                  <a:srgbClr val="506776"/>
-                </a:solidFill>
-                <a:latin typeface="Be Vietnam Pro"/>
-              </a:defRPr>
-            </a:pPr>
-            <a:r>
-              <a:t>3. Có thể chụp thêm MultiGenreFilm: min 2 hasGenre Genre.</a:t>
+              <a:t>3. Chụp thêm Functional hasRole và AllDifferent của bốn role.</a:t>
             </a:r>
           </a:p>
         </p:txBody>
@@ -16432,7 +15496,7 @@
               </a:defRPr>
             </a:pPr>
             <a:r>
-              <a:t>Local namespace filter + COUNT(DISTINCT IRI) avoids counting sameAs aliases as separate values.</a:t>
+              <a:t>Negative test: min 2 genres gives 0 DL members; SQL/SPARQL counting is a different claim.</a:t>
             </a:r>
           </a:p>
         </p:txBody>
@@ -16546,7 +15610,7 @@
               </a:defRPr>
             </a:pPr>
             <a:r>
-              <a:t>MOVIELOD / SEMANTIC WEB / ONTOLOGY 2.0</a:t>
+              <a:t>MOVIELOD / SEMANTIC WEB / ONTOLOGY 3.0.0</a:t>
             </a:r>
           </a:p>
         </p:txBody>
@@ -16591,7 +15655,7 @@
               </a:defRPr>
             </a:pPr>
             <a:r>
-              <a:t>R2 · Real collection and traceable sources</a:t>
+              <a:t>Source claims and reproducibility</a:t>
             </a:r>
           </a:p>
         </p:txBody>
@@ -16636,7 +15700,7 @@
               </a:defRPr>
             </a:pPr>
             <a:r>
-              <a:t>76/76 raw responses present · 76/76 SHA-256 hashes match</a:t>
+              <a:t>Real crawl fields; no fabricated budget, ratings or awards</a:t>
             </a:r>
           </a:p>
         </p:txBody>
@@ -16724,7 +15788,7 @@
               </a:defRPr>
             </a:pPr>
             <a:r>
-              <a:t>Data checked: 08 Oct 2026 • Sources: project code and evidence/</a:t>
+              <a:t>Data checked: 09 Oct 2026 • Sources: project code and evidence/</a:t>
             </a:r>
           </a:p>
         </p:txBody>
@@ -16900,7 +15964,7 @@
               </a:defRPr>
             </a:pPr>
             <a:r>
-              <a:t>Resolve the right entity</a:t>
+              <a:t>Source-supported relations</a:t>
             </a:r>
           </a:p>
         </p:txBody>
@@ -16945,7 +16009,7 @@
               </a:defRPr>
             </a:pPr>
             <a:r>
-              <a:t>Wikidata: exact Wikipedia sitelink.</a:t>
+              <a:t>P57 / P161 / P58 / P162: credits.</a:t>
             </a:r>
           </a:p>
           <a:p>
@@ -16967,7 +16031,7 @@
               </a:defRPr>
             </a:pPr>
             <a:r>
-              <a:t>DBpedia: matched root must be typed Film.</a:t>
+              <a:t>P136 / P166 / P272: genre, award, company.</a:t>
             </a:r>
           </a:p>
         </p:txBody>
@@ -17098,7 +16162,7 @@
               </a:defRPr>
             </a:pPr>
             <a:r>
-              <a:t>Collect relevant claims</a:t>
+              <a:t>Normalized values</a:t>
             </a:r>
           </a:p>
         </p:txBody>
@@ -17143,7 +16207,16 @@
               </a:defRPr>
             </a:pPr>
             <a:r>
-              <a:t>P57 / P161 / P58 / P162: people and roles.</a:t>
+              <a:t>P2047 duration </a:t>
+            </a:r>
+            <a:r>
+              <a:rPr>
+                <a:latin typeface="Arial Unicode MS"/>
+              </a:rPr>
+              <a:t>→</a:t>
+            </a:r>
+            <a:r>
+              <a:t> seconds.</a:t>
             </a:r>
           </a:p>
           <a:p>
@@ -17165,7 +16238,16 @@
               </a:defRPr>
             </a:pPr>
             <a:r>
-              <a:t>P166: awards; P272: companies; year/runtime/genre.</a:t>
+              <a:t>P577 </a:t>
+            </a:r>
+            <a:r>
+              <a:rPr>
+                <a:latin typeface="Arial Unicode MS"/>
+              </a:rPr>
+              <a:t>→</a:t>
+            </a:r>
+            <a:r>
+              <a:t> earliest Gregorian release-year summary.</a:t>
             </a:r>
           </a:p>
         </p:txBody>
@@ -17296,7 +16378,7 @@
               </a:defRPr>
             </a:pPr>
             <a:r>
-              <a:t>Trace and reproduce</a:t>
+              <a:t>Traceability</a:t>
             </a:r>
           </a:p>
         </p:txBody>
@@ -17341,7 +16423,7 @@
               </a:defRPr>
             </a:pPr>
             <a:r>
-              <a:t>URL + retrieval time + HTTP status + SHA-256.</a:t>
+              <a:t>76 responses; retrieval URL / time / SHA-256.</a:t>
             </a:r>
           </a:p>
           <a:p>
@@ -17363,25 +16445,7 @@
               </a:defRPr>
             </a:pPr>
             <a:r>
-              <a:t>Cached collect </a:t>
-            </a:r>
-            <a:r>
-              <a:rPr>
-                <a:latin typeface="Arial Unicode MS"/>
-              </a:rPr>
-              <a:t>→</a:t>
-            </a:r>
-            <a:r>
-              <a:t> build </a:t>
-            </a:r>
-            <a:r>
-              <a:rPr>
-                <a:latin typeface="Arial Unicode MS"/>
-              </a:rPr>
-              <a:t>→</a:t>
-            </a:r>
-            <a:r>
-              <a:t> validate rerun.</a:t>
+              <a:t>Identity links and provenance have different meanings.</a:t>
             </a:r>
           </a:p>
         </p:txBody>
@@ -17564,7 +16628,7 @@
               </a:defRPr>
             </a:pPr>
             <a:r>
-              <a:t>MOVIELOD / SEMANTIC WEB / ONTOLOGY 2.0</a:t>
+              <a:t>MOVIELOD / SEMANTIC WEB / ONTOLOGY 3.0.0</a:t>
             </a:r>
           </a:p>
         </p:txBody>
@@ -17609,7 +16673,7 @@
               </a:defRPr>
             </a:pPr>
             <a:r>
-              <a:t>R3 · RDF and typed literal values</a:t>
+              <a:t>RDF literals and DBpedia units</a:t>
             </a:r>
           </a:p>
         </p:txBody>
@@ -17654,7 +16718,7 @@
               </a:defRPr>
             </a:pPr>
             <a:r>
-              <a:t>19,339 data triples · 518 schema triples · Turtle / JSON-LD / OWL</a:t>
+              <a:t>runtime is seconds; labels are annotations</a:t>
             </a:r>
           </a:p>
         </p:txBody>
@@ -17742,7 +16806,7 @@
               </a:defRPr>
             </a:pPr>
             <a:r>
-              <a:t>Data checked: 08 Oct 2026 • Sources: project code and evidence/</a:t>
+              <a:t>Data checked: 09 Oct 2026 • Sources: project code and evidence/</a:t>
             </a:r>
           </a:p>
         </p:txBody>
@@ -17897,7 +16961,7 @@
               </a:defRPr>
             </a:pPr>
             <a:r>
-              <a:t>ex:title "Inception" ;</a:t>
+              <a:t>rdfs:label "Inception"@en ;</a:t>
             </a:r>
           </a:p>
           <a:p>
@@ -17941,7 +17005,7 @@
               </a:defRPr>
             </a:pPr>
             <a:r>
-              <a:t>ex:runtimeMinutes "148.0"^^xsd:decimal ;</a:t>
+              <a:t>dbo:runtime "8880.0"^^xsd:double ;</a:t>
             </a:r>
           </a:p>
           <a:p>
@@ -18184,7 +17248,7 @@
               </a:defRPr>
             </a:pPr>
             <a:r>
-              <a:t>title</a:t>
+              <a:t>dbo:runtime</a:t>
             </a:r>
           </a:p>
         </p:txBody>
@@ -18229,7 +17293,7 @@
               </a:defRPr>
             </a:pPr>
             <a:r>
-              <a:t>string</a:t>
+              <a:t>double · seconds</a:t>
             </a:r>
           </a:p>
         </p:txBody>
@@ -18317,7 +17381,7 @@
               </a:defRPr>
             </a:pPr>
             <a:r>
-              <a:t>releaseYear</a:t>
+              <a:t>ex:releaseYear</a:t>
             </a:r>
           </a:p>
         </p:txBody>
@@ -18450,7 +17514,7 @@
               </a:defRPr>
             </a:pPr>
             <a:r>
-              <a:t>runtimeMinutes</a:t>
+              <a:t>ex:sourceUrl</a:t>
             </a:r>
           </a:p>
         </p:txBody>
@@ -18495,7 +17559,7 @@
               </a:defRPr>
             </a:pPr>
             <a:r>
-              <a:t>decimal</a:t>
+              <a:t>anyURI</a:t>
             </a:r>
           </a:p>
         </p:txBody>
@@ -18583,7 +17647,7 @@
               </a:defRPr>
             </a:pPr>
             <a:r>
-              <a:t>sourceUrl</a:t>
+              <a:t>ex:retrievedAt</a:t>
             </a:r>
           </a:p>
         </p:txBody>
@@ -18628,7 +17692,7 @@
               </a:defRPr>
             </a:pPr>
             <a:r>
-              <a:t>anyURI</a:t>
+              <a:t>dateTime</a:t>
             </a:r>
           </a:p>
         </p:txBody>
@@ -18716,7 +17780,7 @@
               </a:defRPr>
             </a:pPr>
             <a:r>
-              <a:t>retrievedAt</a:t>
+              <a:t>ex:sha256</a:t>
             </a:r>
           </a:p>
         </p:txBody>
@@ -18761,139 +17825,6 @@
               </a:defRPr>
             </a:pPr>
             <a:r>
-              <a:t>dateTime</a:t>
-            </a:r>
-          </a:p>
-        </p:txBody>
-      </p:sp>
-      <p:sp>
-        <p:nvSpPr>
-          <p:cNvPr id="29" name="Rectangle 28"/>
-          <p:cNvSpPr/>
-          <p:nvPr/>
-        </p:nvSpPr>
-        <p:spPr>
-          <a:xfrm>
-            <a:off x="731520" y="6933184"/>
-            <a:ext cx="6720840" cy="378968"/>
-          </a:xfrm>
-          <a:prstGeom prst="rect">
-            <a:avLst/>
-          </a:prstGeom>
-          <a:solidFill>
-            <a:srgbClr val="E7EFF1"/>
-          </a:solidFill>
-          <a:ln>
-            <a:noFill/>
-          </a:ln>
-        </p:spPr>
-        <p:style>
-          <a:lnRef idx="1">
-            <a:schemeClr val="accent1"/>
-          </a:lnRef>
-          <a:fillRef idx="3">
-            <a:schemeClr val="accent1"/>
-          </a:fillRef>
-          <a:effectRef idx="2">
-            <a:schemeClr val="accent1"/>
-          </a:effectRef>
-          <a:fontRef idx="minor">
-            <a:schemeClr val="lt1"/>
-          </a:fontRef>
-        </p:style>
-        <p:txBody>
-          <a:bodyPr rtlCol="0" anchor="ctr"/>
-          <a:lstStyle/>
-          <a:p>
-            <a:pPr algn="ctr"/>
-          </a:p>
-        </p:txBody>
-      </p:sp>
-      <p:sp>
-        <p:nvSpPr>
-          <p:cNvPr id="30" name="TextBox 29"/>
-          <p:cNvSpPr txBox="1"/>
-          <p:nvPr/>
-        </p:nvSpPr>
-        <p:spPr>
-          <a:xfrm>
-            <a:off x="841248" y="6992620"/>
-            <a:ext cx="3483863" cy="260096"/>
-          </a:xfrm>
-          <a:prstGeom prst="rect">
-            <a:avLst/>
-          </a:prstGeom>
-          <a:noFill/>
-        </p:spPr>
-        <p:txBody>
-          <a:bodyPr wrap="none" lIns="0" rIns="0" tIns="0" bIns="0">
-            <a:spAutoFit/>
-          </a:bodyPr>
-          <a:lstStyle/>
-          <a:p>
-            <a:pPr>
-              <a:lnSpc>
-                <a:spcPts val="2048"/>
-              </a:lnSpc>
-              <a:spcBef>
-                <a:spcPts val="0"/>
-              </a:spcBef>
-              <a:spcAft>
-                <a:spcPts val="0"/>
-              </a:spcAft>
-              <a:defRPr sz="1600" b="0">
-                <a:solidFill>
-                  <a:srgbClr val="152B3A"/>
-                </a:solidFill>
-                <a:latin typeface="Be Vietnam Pro"/>
-              </a:defRPr>
-            </a:pPr>
-            <a:r>
-              <a:t>sha256</a:t>
-            </a:r>
-          </a:p>
-        </p:txBody>
-      </p:sp>
-      <p:sp>
-        <p:nvSpPr>
-          <p:cNvPr id="31" name="TextBox 30"/>
-          <p:cNvSpPr txBox="1"/>
-          <p:nvPr/>
-        </p:nvSpPr>
-        <p:spPr>
-          <a:xfrm>
-            <a:off x="4544568" y="6992620"/>
-            <a:ext cx="2798063" cy="260096"/>
-          </a:xfrm>
-          <a:prstGeom prst="rect">
-            <a:avLst/>
-          </a:prstGeom>
-          <a:noFill/>
-        </p:spPr>
-        <p:txBody>
-          <a:bodyPr wrap="none" lIns="0" rIns="0" tIns="0" bIns="0">
-            <a:spAutoFit/>
-          </a:bodyPr>
-          <a:lstStyle/>
-          <a:p>
-            <a:pPr>
-              <a:lnSpc>
-                <a:spcPts val="2048"/>
-              </a:lnSpc>
-              <a:spcBef>
-                <a:spcPts val="0"/>
-              </a:spcBef>
-              <a:spcAft>
-                <a:spcPts val="0"/>
-              </a:spcAft>
-              <a:defRPr sz="1600" b="0">
-                <a:solidFill>
-                  <a:srgbClr val="152B3A"/>
-                </a:solidFill>
-                <a:latin typeface="Be Vietnam Pro"/>
-              </a:defRPr>
-            </a:pPr>
-            <a:r>
               <a:t>string</a:t>
             </a:r>
           </a:p>
@@ -18901,7 +17832,7 @@
       </p:sp>
       <p:sp>
         <p:nvSpPr>
-          <p:cNvPr id="32" name="PHOTO_P08_0"/>
+          <p:cNvPr id="29" name="PHOTO_P08_0"/>
           <p:cNvSpPr/>
           <p:nvPr/>
         </p:nvSpPr>
@@ -18946,7 +17877,7 @@
       </p:sp>
       <p:sp>
         <p:nvSpPr>
-          <p:cNvPr id="33" name="PHOTO_P08_1"/>
+          <p:cNvPr id="30" name="PHOTO_P08_1"/>
           <p:cNvSpPr txBox="1"/>
           <p:nvPr/>
         </p:nvSpPr>
@@ -18991,7 +17922,7 @@
       </p:sp>
       <p:sp>
         <p:nvSpPr>
-          <p:cNvPr id="34" name="PHOTO_P08_2"/>
+          <p:cNvPr id="31" name="PHOTO_P08_2"/>
           <p:cNvSpPr/>
           <p:nvPr/>
         </p:nvSpPr>
@@ -19034,7 +17965,7 @@
       </p:sp>
       <p:sp>
         <p:nvSpPr>
-          <p:cNvPr id="35" name="PHOTO_P08_3"/>
+          <p:cNvPr id="32" name="PHOTO_P08_3"/>
           <p:cNvSpPr txBox="1"/>
           <p:nvPr/>
         </p:nvSpPr>
@@ -19072,14 +18003,14 @@
               </a:defRPr>
             </a:pPr>
             <a:r>
-              <a:t>Datatype của thời lượng</a:t>
-            </a:r>
-          </a:p>
-        </p:txBody>
-      </p:sp>
-      <p:sp>
-        <p:nvSpPr>
-          <p:cNvPr id="36" name="PHOTO_P08_4"/>
+              <a:t>Thời lượng theo DBpedia</a:t>
+            </a:r>
+          </a:p>
+        </p:txBody>
+      </p:sp>
+      <p:sp>
+        <p:nvSpPr>
+          <p:cNvPr id="33" name="PHOTO_P08_4"/>
           <p:cNvSpPr txBox="1"/>
           <p:nvPr/>
         </p:nvSpPr>
@@ -19124,7 +18055,7 @@
       </p:sp>
       <p:sp>
         <p:nvSpPr>
-          <p:cNvPr id="37" name="PHOTO_P08_5"/>
+          <p:cNvPr id="34" name="PHOTO_P08_5"/>
           <p:cNvSpPr txBox="1"/>
           <p:nvPr/>
         </p:nvSpPr>
@@ -19162,32 +18093,14 @@
               </a:defRPr>
             </a:pPr>
             <a:r>
-              <a:t>1. Entities </a:t>
-            </a:r>
-            <a:r>
-              <a:rPr>
-                <a:latin typeface="Arial Unicode MS"/>
-              </a:rPr>
-              <a:t>→</a:t>
-            </a:r>
-            <a:r>
-              <a:t> Data properties </a:t>
-            </a:r>
-            <a:r>
-              <a:rPr>
-                <a:latin typeface="Arial Unicode MS"/>
-              </a:rPr>
-              <a:t>→</a:t>
-            </a:r>
-            <a:r>
-              <a:t> chọn runtimeMinutes.</a:t>
-            </a:r>
-          </a:p>
-        </p:txBody>
-      </p:sp>
-      <p:sp>
-        <p:nvSpPr>
-          <p:cNvPr id="38" name="PHOTO_P08_6"/>
+              <a:t>1. Chọn dbo:runtime trong Data properties.</a:t>
+            </a:r>
+          </a:p>
+        </p:txBody>
+      </p:sp>
+      <p:sp>
+        <p:nvSpPr>
+          <p:cNvPr id="35" name="PHOTO_P08_6"/>
           <p:cNvSpPr txBox="1"/>
           <p:nvPr/>
         </p:nvSpPr>
@@ -19225,14 +18138,14 @@
               </a:defRPr>
             </a:pPr>
             <a:r>
-              <a:t>2. Hiện Domain=Film và Range=xsd:decimal.</a:t>
-            </a:r>
-          </a:p>
-        </p:txBody>
-      </p:sp>
-      <p:sp>
-        <p:nvSpPr>
-          <p:cNvPr id="39" name="PHOTO_P08_7"/>
+              <a:t>2. Hiện domain dbo:Work và range xsd:double.</a:t>
+            </a:r>
+          </a:p>
+        </p:txBody>
+      </p:sp>
+      <p:sp>
+        <p:nvSpPr>
+          <p:cNvPr id="36" name="PHOTO_P08_7"/>
           <p:cNvSpPr txBox="1"/>
           <p:nvPr/>
         </p:nvSpPr>
@@ -19270,14 +18183,14 @@
               </a:defRPr>
             </a:pPr>
             <a:r>
-              <a:t>3. Có thể chụp thêm releaseYear có range xsd:integer.</a:t>
-            </a:r>
-          </a:p>
-        </p:txBody>
-      </p:sp>
-      <p:sp>
-        <p:nvSpPr>
-          <p:cNvPr id="40" name="PHOTO_P08_8"/>
+              <a:t>3. Chọn Inception: runtime = 8880 giây.</a:t>
+            </a:r>
+          </a:p>
+        </p:txBody>
+      </p:sp>
+      <p:sp>
+        <p:nvSpPr>
+          <p:cNvPr id="37" name="PHOTO_P08_8"/>
           <p:cNvSpPr txBox="1"/>
           <p:nvPr/>
         </p:nvSpPr>
@@ -19429,7 +18342,7 @@
               </a:defRPr>
             </a:pPr>
             <a:r>
-              <a:t>MOVIELOD / SEMANTIC WEB / ONTOLOGY 2.0</a:t>
+              <a:t>MOVIELOD / SEMANTIC WEB / ONTOLOGY 3.0.0</a:t>
             </a:r>
           </a:p>
         </p:txBody>
@@ -19474,7 +18387,7 @@
               </a:defRPr>
             </a:pPr>
             <a:r>
-              <a:t>R3–R4 · From RDF to Linked Open Data</a:t>
+              <a:t>Linked data: identity and publication</a:t>
             </a:r>
           </a:p>
         </p:txBody>
@@ -19519,7 +18432,7 @@
               </a:defRPr>
             </a:pPr>
             <a:r>
-              <a:t>Star levels are cumulative · publication and links are verified</a:t>
+              <a:t>Canonical identifiers, graph exports and external identity links</a:t>
             </a:r>
           </a:p>
         </p:txBody>
@@ -19607,7 +18520,7 @@
               </a:defRPr>
             </a:pPr>
             <a:r>
-              <a:t>Data checked: 08 Oct 2026 • Sources: project code and evidence/</a:t>
+              <a:t>Data checked: 09 Oct 2026 • Sources: project code and evidence/</a:t>
             </a:r>
           </a:p>
         </p:txBody>
@@ -19740,7 +18653,7 @@
               </a:defRPr>
             </a:pPr>
             <a:r>
-              <a:t>1 star</a:t>
+              <a:t>1★</a:t>
             </a:r>
           </a:p>
         </p:txBody>
@@ -19785,7 +18698,7 @@
               </a:defRPr>
             </a:pPr>
             <a:r>
-              <a:t>Public data + open license</a:t>
+              <a:t>Open license</a:t>
             </a:r>
           </a:p>
         </p:txBody>
@@ -19918,7 +18831,7 @@
               </a:defRPr>
             </a:pPr>
             <a:r>
-              <a:t>2 stars</a:t>
+              <a:t>2★</a:t>
             </a:r>
           </a:p>
         </p:txBody>
@@ -19963,7 +18876,7 @@
               </a:defRPr>
             </a:pPr>
             <a:r>
-              <a:t>Structured data</a:t>
+              <a:t>Structured source descriptions</a:t>
             </a:r>
           </a:p>
         </p:txBody>
@@ -20008,7 +18921,7 @@
               </a:defRPr>
             </a:pPr>
             <a:r>
-              <a:t>Films, people, roles and attributes</a:t>
+              <a:t>Claims, identifiers, values</a:t>
             </a:r>
           </a:p>
         </p:txBody>
@@ -20096,7 +19009,7 @@
               </a:defRPr>
             </a:pPr>
             <a:r>
-              <a:t>3 stars</a:t>
+              <a:t>3★</a:t>
             </a:r>
           </a:p>
         </p:txBody>
@@ -20141,7 +19054,7 @@
               </a:defRPr>
             </a:pPr>
             <a:r>
-              <a:t>Open formats</a:t>
+              <a:t>Open RDF serializations</a:t>
             </a:r>
           </a:p>
         </p:txBody>
@@ -20186,7 +19099,7 @@
               </a:defRPr>
             </a:pPr>
             <a:r>
-              <a:t>CSV / Turtle / JSON-LD</a:t>
+              <a:t>RDF/XML, Turtle, JSON-LD</a:t>
             </a:r>
           </a:p>
         </p:txBody>
@@ -20274,7 +19187,7 @@
               </a:defRPr>
             </a:pPr>
             <a:r>
-              <a:t>4 stars</a:t>
+              <a:t>4★</a:t>
             </a:r>
           </a:p>
         </p:txBody>
@@ -20319,7 +19232,7 @@
               </a:defRPr>
             </a:pPr>
             <a:r>
-              <a:t>HTTP IRIs + RDF + lookup</a:t>
+              <a:t>HTTP identifiers and RDF</a:t>
             </a:r>
           </a:p>
         </p:txBody>
@@ -20364,7 +19277,7 @@
               </a:defRPr>
             </a:pPr>
             <a:r>
-              <a:t>HTML, JSON-LD and RDF descriptions</a:t>
+              <a:t>Canonical version 3.0.0</a:t>
             </a:r>
           </a:p>
         </p:txBody>
@@ -20452,7 +19365,7 @@
               </a:defRPr>
             </a:pPr>
             <a:r>
-              <a:t>5 stars</a:t>
+              <a:t>5★</a:t>
             </a:r>
           </a:p>
         </p:txBody>
@@ -20497,7 +19410,7 @@
               </a:defRPr>
             </a:pPr>
             <a:r>
-              <a:t>Links to external datasets</a:t>
+              <a:t>External identity links</a:t>
             </a:r>
           </a:p>
         </p:txBody>
@@ -20587,7 +19500,7 @@
               </a:defRPr>
             </a:pPr>
             <a:r>
-              <a:t>sameAs: shared identity. sourceSnapshot: provenance. All four checked public RDF graphs match local data.</a:t>
+              <a:t>Public graphs and local canonical exports are checked for semantic equality.</a:t>
             </a:r>
           </a:p>
         </p:txBody>
@@ -20701,7 +19614,7 @@
               </a:defRPr>
             </a:pPr>
             <a:r>
-              <a:t>MOVIELOD / SEMANTIC WEB / ONTOLOGY 2.0</a:t>
+              <a:t>MOVIELOD / SEMANTIC WEB / ONTOLOGY 3.0.0</a:t>
             </a:r>
           </a:p>
         </p:txBody>
@@ -20746,7 +19659,7 @@
               </a:defRPr>
             </a:pPr>
             <a:r>
-              <a:t>R3 · Looking up Inception’s IRI</a:t>
+              <a:t>Inception: RDF resource and OWL</a:t>
             </a:r>
           </a:p>
         </p:txBody>
@@ -20791,7 +19704,7 @@
               </a:defRPr>
             </a:pPr>
             <a:r>
-              <a:t>One identifier offers readable and machine-readable descriptions</a:t>
+              <a:t>The web description and final OWL share the same source facts</a:t>
             </a:r>
           </a:p>
         </p:txBody>
@@ -20879,7 +19792,7 @@
               </a:defRPr>
             </a:pPr>
             <a:r>
-              <a:t>Data checked: 08 Oct 2026 • Sources: project code and evidence/</a:t>
+              <a:t>Data checked: 09 Oct 2026 • Sources: project code and evidence/</a:t>
             </a:r>
           </a:p>
         </p:txBody>
@@ -21126,7 +20039,7 @@
               </a:defRPr>
             </a:pPr>
             <a:r>
-              <a:t>Cá thể Inception</a:t>
+              <a:t>Cá thể Inception bản mới</a:t>
             </a:r>
           </a:p>
         </p:txBody>
@@ -21216,7 +20129,7 @@
               </a:defRPr>
             </a:pPr>
             <a:r>
-              <a:t>1. Mở ontology/Movie_Knowledge_Graph.owl.</a:t>
+              <a:t>1. Mở Movie_Knowledge_Graph.owl 3.0.0.</a:t>
             </a:r>
           </a:p>
         </p:txBody>
@@ -21230,6 +20143,73 @@
         <p:spPr>
           <a:xfrm>
             <a:off x="8055864" y="5348223"/>
+            <a:ext cx="5605272" cy="491744"/>
+          </a:xfrm>
+          <a:prstGeom prst="rect">
+            <a:avLst/>
+          </a:prstGeom>
+          <a:noFill/>
+        </p:spPr>
+        <p:txBody>
+          <a:bodyPr wrap="none" lIns="0" rIns="0" tIns="0" bIns="0">
+            <a:spAutoFit/>
+          </a:bodyPr>
+          <a:lstStyle/>
+          <a:p>
+            <a:pPr>
+              <a:lnSpc>
+                <a:spcPts val="1792"/>
+              </a:lnSpc>
+              <a:spcBef>
+                <a:spcPts val="0"/>
+              </a:spcBef>
+              <a:spcAft>
+                <a:spcPts val="0"/>
+              </a:spcAft>
+              <a:defRPr sz="1400" b="0">
+                <a:solidFill>
+                  <a:srgbClr val="506776"/>
+                </a:solidFill>
+                <a:latin typeface="Be Vietnam Pro"/>
+              </a:defRPr>
+            </a:pPr>
+            <a:r>
+              <a:t>2. Chọn film-Q25188; hiện label, releaseYear 2010, runtime</a:t>
+            </a:r>
+          </a:p>
+          <a:p>
+            <a:pPr>
+              <a:lnSpc>
+                <a:spcPts val="1792"/>
+              </a:lnSpc>
+              <a:spcBef>
+                <a:spcPts val="0"/>
+              </a:spcBef>
+              <a:spcAft>
+                <a:spcPts val="0"/>
+              </a:spcAft>
+              <a:defRPr sz="1400" b="0">
+                <a:solidFill>
+                  <a:srgbClr val="506776"/>
+                </a:solidFill>
+                <a:latin typeface="Be Vietnam Pro"/>
+              </a:defRPr>
+            </a:pPr>
+            <a:r>
+              <a:t>8880.</a:t>
+            </a:r>
+          </a:p>
+        </p:txBody>
+      </p:sp>
+      <p:sp>
+        <p:nvSpPr>
+          <p:cNvPr id="17" name="PHOTO_P09_7"/>
+          <p:cNvSpPr txBox="1"/>
+          <p:nvPr/>
+        </p:nvSpPr>
+        <p:spPr>
+          <a:xfrm>
+            <a:off x="8055864" y="5931407"/>
             <a:ext cx="5605272" cy="264160"/>
           </a:xfrm>
           <a:prstGeom prst="rect">
@@ -21261,83 +20241,7 @@
               </a:defRPr>
             </a:pPr>
             <a:r>
-              <a:t>2. Individuals </a:t>
-            </a:r>
-            <a:r>
-              <a:rPr>
-                <a:latin typeface="Arial Unicode MS"/>
-              </a:rPr>
-              <a:t>→</a:t>
-            </a:r>
-            <a:r>
-              <a:t> chọn film-Q25188 (Inception).</a:t>
-            </a:r>
-          </a:p>
-        </p:txBody>
-      </p:sp>
-      <p:sp>
-        <p:nvSpPr>
-          <p:cNvPr id="17" name="PHOTO_P09_7"/>
-          <p:cNvSpPr txBox="1"/>
-          <p:nvPr/>
-        </p:nvSpPr>
-        <p:spPr>
-          <a:xfrm>
-            <a:off x="8055864" y="5703823"/>
-            <a:ext cx="5605272" cy="491744"/>
-          </a:xfrm>
-          <a:prstGeom prst="rect">
-            <a:avLst/>
-          </a:prstGeom>
-          <a:noFill/>
-        </p:spPr>
-        <p:txBody>
-          <a:bodyPr wrap="none" lIns="0" rIns="0" tIns="0" bIns="0">
-            <a:spAutoFit/>
-          </a:bodyPr>
-          <a:lstStyle/>
-          <a:p>
-            <a:pPr>
-              <a:lnSpc>
-                <a:spcPts val="1792"/>
-              </a:lnSpc>
-              <a:spcBef>
-                <a:spcPts val="0"/>
-              </a:spcBef>
-              <a:spcAft>
-                <a:spcPts val="0"/>
-              </a:spcAft>
-              <a:defRPr sz="1400" b="0">
-                <a:solidFill>
-                  <a:srgbClr val="506776"/>
-                </a:solidFill>
-                <a:latin typeface="Be Vietnam Pro"/>
-              </a:defRPr>
-            </a:pPr>
-            <a:r>
-              <a:t>3. Hiện Film, title, releaseYear=2010, runtimeMinutes=148 và</a:t>
-            </a:r>
-          </a:p>
-          <a:p>
-            <a:pPr>
-              <a:lnSpc>
-                <a:spcPts val="1792"/>
-              </a:lnSpc>
-              <a:spcBef>
-                <a:spcPts val="0"/>
-              </a:spcBef>
-              <a:spcAft>
-                <a:spcPts val="0"/>
-              </a:spcAft>
-              <a:defRPr sz="1400" b="0">
-                <a:solidFill>
-                  <a:srgbClr val="506776"/>
-                </a:solidFill>
-                <a:latin typeface="Be Vietnam Pro"/>
-              </a:defRPr>
-            </a:pPr>
-            <a:r>
-              <a:t>director.</a:t>
+              <a:t>3. Hiện dbo:director, genre, productionCompany và award.</a:t>
             </a:r>
           </a:p>
         </p:txBody>
@@ -21427,7 +20331,7 @@
               </a:defRPr>
             </a:pPr>
             <a:r>
-              <a:t>Left: real application screenshot. Right: pending Protégé evidence for Inception in the main Knowledge Graph.</a:t>
+              <a:t>Left: current version-3 web description. Right: capture the same individual in Protégé.</a:t>
             </a:r>
           </a:p>
         </p:txBody>
@@ -21541,7 +20445,7 @@
               </a:defRPr>
             </a:pPr>
             <a:r>
-              <a:t>MOVIELOD / SEMANTIC WEB / ONTOLOGY 2.0</a:t>
+              <a:t>MOVIELOD / SEMANTIC WEB / ONTOLOGY 3.0.0</a:t>
             </a:r>
           </a:p>
         </p:txBody>
@@ -21586,7 +20490,7 @@
               </a:defRPr>
             </a:pPr>
             <a:r>
-              <a:t>R5 · Querying Inception on the Web</a:t>
+              <a:t>SPARQL: choose the knowledge scope</a:t>
             </a:r>
           </a:p>
         </p:txBody>
@@ -21631,16 +20535,7 @@
               </a:defRPr>
             </a:pPr>
             <a:r>
-              <a:t>SELECT </a:t>
-            </a:r>
-            <a:r>
-              <a:rPr>
-                <a:latin typeface="Arial Unicode MS"/>
-              </a:rPr>
-              <a:t>→</a:t>
-            </a:r>
-            <a:r>
-              <a:t> title, year, runtimeMinutes and director</a:t>
+              <a:t>Source facts, OWL inference or before/after named graphs</a:t>
             </a:r>
           </a:p>
         </p:txBody>
@@ -21728,7 +20623,7 @@
               </a:defRPr>
             </a:pPr>
             <a:r>
-              <a:t>Data checked: 08 Oct 2026 • Sources: project code and evidence/</a:t>
+              <a:t>Data checked: 09 Oct 2026 • Sources: project code and evidence/</a:t>
             </a:r>
           </a:p>
         </p:txBody>
@@ -21861,7 +20756,7 @@
               </a:defRPr>
             </a:pPr>
             <a:r>
-              <a:t>SELECT ?title ?year ?runtimeMinutes ?director</a:t>
+              <a:t>SELECT ?year ?seconds ?director WHERE {</a:t>
             </a:r>
           </a:p>
           <a:p>
@@ -21883,7 +20778,7 @@
               </a:defRPr>
             </a:pPr>
             <a:r>
-              <a:t>WHERE {</a:t>
+              <a:t>res:film-Q25188 ex:releaseYear ?year ;</a:t>
             </a:r>
           </a:p>
           <a:p>
@@ -21905,7 +20800,7 @@
               </a:defRPr>
             </a:pPr>
             <a:r>
-              <a:t>?film a dbo:Film ; ex:title "Inception" ;</a:t>
+              <a:t>dbo:runtime ?seconds ; dbo:director ?person .</a:t>
             </a:r>
           </a:p>
           <a:p>
@@ -21927,73 +20822,7 @@
               </a:defRPr>
             </a:pPr>
             <a:r>
-              <a:t>ex:title ?title ; dbo:director ?person .</a:t>
-            </a:r>
-          </a:p>
-          <a:p>
-            <a:pPr>
-              <a:lnSpc>
-                <a:spcPts val="1792"/>
-              </a:lnSpc>
-              <a:spcBef>
-                <a:spcPts val="0"/>
-              </a:spcBef>
-              <a:spcAft>
-                <a:spcPts val="0"/>
-              </a:spcAft>
-              <a:defRPr sz="1400" b="0">
-                <a:solidFill>
-                  <a:srgbClr val="FFFFFF"/>
-                </a:solidFill>
-                <a:latin typeface="Be Vietnam Pro"/>
-              </a:defRPr>
-            </a:pPr>
-            <a:r>
               <a:t>?person rdfs:label ?director .</a:t>
-            </a:r>
-          </a:p>
-          <a:p>
-            <a:pPr>
-              <a:lnSpc>
-                <a:spcPts val="1792"/>
-              </a:lnSpc>
-              <a:spcBef>
-                <a:spcPts val="0"/>
-              </a:spcBef>
-              <a:spcAft>
-                <a:spcPts val="0"/>
-              </a:spcAft>
-              <a:defRPr sz="1400" b="0">
-                <a:solidFill>
-                  <a:srgbClr val="FFFFFF"/>
-                </a:solidFill>
-                <a:latin typeface="Be Vietnam Pro"/>
-              </a:defRPr>
-            </a:pPr>
-            <a:r>
-              <a:t>OPTIONAL { ?film ex:releaseYear ?year }</a:t>
-            </a:r>
-          </a:p>
-          <a:p>
-            <a:pPr>
-              <a:lnSpc>
-                <a:spcPts val="1792"/>
-              </a:lnSpc>
-              <a:spcBef>
-                <a:spcPts val="0"/>
-              </a:spcBef>
-              <a:spcAft>
-                <a:spcPts val="0"/>
-              </a:spcAft>
-              <a:defRPr sz="1400" b="0">
-                <a:solidFill>
-                  <a:srgbClr val="FFFFFF"/>
-                </a:solidFill>
-                <a:latin typeface="Be Vietnam Pro"/>
-              </a:defRPr>
-            </a:pPr>
-            <a:r>
-              <a:t>OPTIONAL { ?film ex:runtimeMinutes ?runtimeMinutes }</a:t>
             </a:r>
           </a:p>
           <a:p>
@@ -22146,7 +20975,7 @@
               </a:defRPr>
             </a:pPr>
             <a:r>
-              <a:t>2010 · 148 minutes · Nolan</a:t>
+              <a:t>2010 · 8,880 seconds · Nolan</a:t>
             </a:r>
           </a:p>
         </p:txBody>
@@ -22282,7 +21111,7 @@
               </a:defRPr>
             </a:pPr>
             <a:r>
-              <a:t>Use the PREFIX declarations in queries/02_inception.rq. Actual result: 2010 · 148 minutes · Christopher Nolan.</a:t>
+              <a:t>The sample chooses its required scope automatically; change scope to compare before and after.</a:t>
             </a:r>
           </a:p>
         </p:txBody>
@@ -22396,7 +21225,7 @@
               </a:defRPr>
             </a:pPr>
             <a:r>
-              <a:t>MOVIELOD / SEMANTIC WEB / ONTOLOGY 2.0</a:t>
+              <a:t>MOVIELOD / SEMANTIC WEB / ONTOLOGY 3.0.0</a:t>
             </a:r>
           </a:p>
         </p:txBody>
@@ -22441,7 +21270,7 @@
               </a:defRPr>
             </a:pPr>
             <a:r>
-              <a:t>Problem and five assignment requirements</a:t>
+              <a:t>Objectives and synchronized evidence</a:t>
             </a:r>
           </a:p>
         </p:txBody>
@@ -22486,7 +21315,7 @@
               </a:defRPr>
             </a:pPr>
             <a:r>
-              <a:t>Who did what in which film? Where did the data come from? How can we query it?</a:t>
+              <a:t>Ontology, data, publication, linking and SPARQL access</a:t>
             </a:r>
           </a:p>
         </p:txBody>
@@ -22574,7 +21403,7 @@
               </a:defRPr>
             </a:pPr>
             <a:r>
-              <a:t>Data checked: 08 Oct 2026 • Sources: project code and evidence/</a:t>
+              <a:t>Data checked: 09 Oct 2026 • Sources: project code and evidence/</a:t>
             </a:r>
           </a:p>
         </p:txBody>
@@ -22930,7 +21759,7 @@
               </a:defRPr>
             </a:pPr>
             <a:r>
-              <a:t>Define an ontology</a:t>
+              <a:t>DBpedia-based ontology</a:t>
             </a:r>
           </a:p>
         </p:txBody>
@@ -22975,7 +21804,7 @@
               </a:defRPr>
             </a:pPr>
             <a:r>
-              <a:t>OWL/Turtle, classes, properties and restrictions</a:t>
+              <a:t>37 named classes; HermiT consistency</a:t>
             </a:r>
           </a:p>
         </p:txBody>
@@ -23108,7 +21937,7 @@
               </a:defRPr>
             </a:pPr>
             <a:r>
-              <a:t>Collect domain data</a:t>
+              <a:t>Source-supported data</a:t>
             </a:r>
           </a:p>
         </p:txBody>
@@ -23153,7 +21982,7 @@
               </a:defRPr>
             </a:pPr>
             <a:r>
-              <a:t>APIs, raw responses, URLs, timestamps and hashes</a:t>
+              <a:t>76 retained responses and provenance</a:t>
             </a:r>
           </a:p>
         </p:txBody>
@@ -23286,7 +22115,7 @@
               </a:defRPr>
             </a:pPr>
             <a:r>
-              <a:t>Publish four-star data</a:t>
+              <a:t>RDF publication</a:t>
             </a:r>
           </a:p>
         </p:txBody>
@@ -23331,7 +22160,7 @@
               </a:defRPr>
             </a:pPr>
             <a:r>
-              <a:t>RDF, HTTP IRIs, open license and publication</a:t>
+              <a:t>Canonical RDF / OWL 3.0.0</a:t>
             </a:r>
           </a:p>
         </p:txBody>
@@ -23464,7 +22293,7 @@
               </a:defRPr>
             </a:pPr>
             <a:r>
-              <a:t>Link to reach five stars</a:t>
+              <a:t>Identity alignment</a:t>
             </a:r>
           </a:p>
         </p:txBody>
@@ -23509,7 +22338,7 @@
               </a:defRPr>
             </a:pPr>
             <a:r>
-              <a:t>sameAs links, matching method and public data</a:t>
+              <a:t>1,699 Wikidata + 28 DBpedia links</a:t>
             </a:r>
           </a:p>
         </p:txBody>
@@ -23642,7 +22471,7 @@
               </a:defRPr>
             </a:pPr>
             <a:r>
-              <a:t>Provide SPARQL interfaces</a:t>
+              <a:t>SPARQL access</a:t>
             </a:r>
           </a:p>
         </p:txBody>
@@ -23687,7 +22516,7 @@
               </a:defRPr>
             </a:pPr>
             <a:r>
-              <a:t>Web application, endpoint and terminal</a:t>
+              <a:t>27 questions; source / inferred / named graph modes</a:t>
             </a:r>
           </a:p>
         </p:txBody>
@@ -23732,7 +22561,7 @@
               </a:defRPr>
             </a:pPr>
             <a:r>
-              <a:t>Required: report ≤15 pages · slides · 3–5-minute video. Running examples: Inception and Nolan.</a:t>
+              <a:t>Report: 15 pages · main slides: 24 · MP4 excluded by request. Examples: Inception and Nolan.</a:t>
             </a:r>
           </a:p>
         </p:txBody>
@@ -23846,7 +22675,7 @@
               </a:defRPr>
             </a:pPr>
             <a:r>
-              <a:t>MOVIELOD / SEMANTIC WEB / ONTOLOGY 2.0</a:t>
+              <a:t>MOVIELOD / SEMANTIC WEB / ONTOLOGY 3.0.0</a:t>
             </a:r>
           </a:p>
         </p:txBody>
@@ -23891,7 +22720,7 @@
               </a:defRPr>
             </a:pPr>
             <a:r>
-              <a:t>R5 · One person, multiple roles and questions</a:t>
+              <a:t>Credit records and competency questions</a:t>
             </a:r>
           </a:p>
         </p:txBody>
@@ -23936,7 +22765,7 @@
               </a:defRPr>
             </a:pPr>
             <a:r>
-              <a:t>The screenshot filters Nolan: Director, Writer and Producer in Inception</a:t>
+              <a:t>27 design queries; counts use local identities</a:t>
             </a:r>
           </a:p>
         </p:txBody>
@@ -24024,7 +22853,7 @@
               </a:defRPr>
             </a:pPr>
             <a:r>
-              <a:t>Data checked: 08 Oct 2026 • Sources: project code and evidence/</a:t>
+              <a:t>Data checked: 09 Oct 2026 • Sources: project code and evidence/</a:t>
             </a:r>
           </a:p>
         </p:txBody>
@@ -24224,7 +23053,7 @@
               </a:defRPr>
             </a:pPr>
             <a:r>
-              <a:t>25 records</a:t>
+              <a:t>25 Inception credits</a:t>
             </a:r>
           </a:p>
         </p:txBody>
@@ -24269,7 +23098,7 @@
               </a:defRPr>
             </a:pPr>
             <a:r>
-              <a:t>All Inception contributions; the image</a:t>
+              <a:t>21 acting + 1 directing + 1 writing + 2</a:t>
             </a:r>
           </a:p>
           <a:p>
@@ -24291,7 +23120,7 @@
               </a:defRPr>
             </a:pPr>
             <a:r>
-              <a:t>shows only Nolan.</a:t>
+              <a:t>producing.</a:t>
             </a:r>
           </a:p>
         </p:txBody>
@@ -24620,7 +23449,7 @@
               </a:defRPr>
             </a:pPr>
             <a:r>
-              <a:t>14 Web samples / 24 files</a:t>
+              <a:t>27 design queries</a:t>
             </a:r>
           </a:p>
         </p:txBody>
@@ -24665,7 +23494,7 @@
               </a:defRPr>
             </a:pPr>
             <a:r>
-              <a:t>Hierarchy requires schema; inferred</a:t>
+              <a:t>Direct facts / hierarchy / inferred</a:t>
             </a:r>
           </a:p>
           <a:p>
@@ -24687,7 +23516,7 @@
               </a:defRPr>
             </a:pPr>
             <a:r>
-              <a:t>types require --reasoned.</a:t>
+              <a:t>knowledge.</a:t>
             </a:r>
           </a:p>
         </p:txBody>
@@ -24801,7 +23630,7 @@
               </a:defRPr>
             </a:pPr>
             <a:r>
-              <a:t>MOVIELOD / SEMANTIC WEB / ONTOLOGY 2.0</a:t>
+              <a:t>MOVIELOD / SEMANTIC WEB / ONTOLOGY 3.0.0</a:t>
             </a:r>
           </a:p>
         </p:txBody>
@@ -24846,7 +23675,7 @@
               </a:defRPr>
             </a:pPr>
             <a:r>
-              <a:t>R5 · Endpoint, terminal and inferred types</a:t>
+              <a:t>Before / after: Nolan and WriterDirector</a:t>
             </a:r>
           </a:p>
         </p:txBody>
@@ -24891,16 +23720,7 @@
               </a:defRPr>
             </a:pPr>
             <a:r>
-              <a:t>Same Nolan query: one asserted type </a:t>
-            </a:r>
-            <a:r>
-              <a:rPr>
-                <a:latin typeface="Arial Unicode MS"/>
-              </a:rPr>
-              <a:t>→</a:t>
-            </a:r>
-            <a:r>
-              <a:t> three with saved inference</a:t>
+              <a:t>The same result is available in web, endpoint and terminal</a:t>
             </a:r>
           </a:p>
         </p:txBody>
@@ -24988,7 +23808,7 @@
               </a:defRPr>
             </a:pPr>
             <a:r>
-              <a:t>Data checked: 08 Oct 2026 • Sources: project code and evidence/</a:t>
+              <a:t>Data checked: 09 Oct 2026 • Sources: project code and evidence/</a:t>
             </a:r>
           </a:p>
         </p:txBody>
@@ -25121,7 +23941,7 @@
               </a:defRPr>
             </a:pPr>
             <a:r>
-              <a:t>curl -X POST http://127.0.0.1:8000/sparql \</a:t>
+              <a:t>.venv/bin/python src/query.py queries/20.rq</a:t>
             </a:r>
           </a:p>
           <a:p>
@@ -25143,7 +23963,7 @@
               </a:defRPr>
             </a:pPr>
             <a:r>
-              <a:t>-H "Content-Type: application/sparql-query" \</a:t>
+              <a:t>.venv/bin/python src/query.py queries/20.rq --reasoned</a:t>
             </a:r>
           </a:p>
           <a:p>
@@ -25165,114 +23985,7 @@
               </a:defRPr>
             </a:pPr>
             <a:r>
-              <a:t>--data-binary @queries/02_inception.rq</a:t>
-            </a:r>
-          </a:p>
-          <a:p>
-            <a:pPr>
-              <a:lnSpc>
-                <a:spcPts val="1792"/>
-              </a:lnSpc>
-              <a:spcBef>
-                <a:spcPts val="0"/>
-              </a:spcBef>
-              <a:spcAft>
-                <a:spcPts val="0"/>
-              </a:spcAft>
-              <a:defRPr sz="1400" b="0">
-                <a:solidFill>
-                  <a:srgbClr val="FFFFFF"/>
-                </a:solidFill>
-                <a:latin typeface="Be Vietnam Pro"/>
-              </a:defRPr>
-            </a:pPr>
-          </a:p>
-          <a:p>
-            <a:pPr>
-              <a:lnSpc>
-                <a:spcPts val="1792"/>
-              </a:lnSpc>
-              <a:spcBef>
-                <a:spcPts val="0"/>
-              </a:spcBef>
-              <a:spcAft>
-                <a:spcPts val="0"/>
-              </a:spcAft>
-              <a:defRPr sz="1400" b="0">
-                <a:solidFill>
-                  <a:srgbClr val="FFFFFF"/>
-                </a:solidFill>
-                <a:latin typeface="Be Vietnam Pro"/>
-              </a:defRPr>
-            </a:pPr>
-            <a:r>
-              <a:t>.venv/bin/python src/query.py \</a:t>
-            </a:r>
-          </a:p>
-          <a:p>
-            <a:pPr>
-              <a:lnSpc>
-                <a:spcPts val="1792"/>
-              </a:lnSpc>
-              <a:spcBef>
-                <a:spcPts val="0"/>
-              </a:spcBef>
-              <a:spcAft>
-                <a:spcPts val="0"/>
-              </a:spcAft>
-              <a:defRPr sz="1400" b="0">
-                <a:solidFill>
-                  <a:srgbClr val="FFFFFF"/>
-                </a:solidFill>
-                <a:latin typeface="Be Vietnam Pro"/>
-              </a:defRPr>
-            </a:pPr>
-            <a:r>
-              <a:t>queries/24_nolan_asserted_types_only.rq</a:t>
-            </a:r>
-          </a:p>
-          <a:p>
-            <a:pPr>
-              <a:lnSpc>
-                <a:spcPts val="1792"/>
-              </a:lnSpc>
-              <a:spcBef>
-                <a:spcPts val="0"/>
-              </a:spcBef>
-              <a:spcAft>
-                <a:spcPts val="0"/>
-              </a:spcAft>
-              <a:defRPr sz="1400" b="0">
-                <a:solidFill>
-                  <a:srgbClr val="FFFFFF"/>
-                </a:solidFill>
-                <a:latin typeface="Be Vietnam Pro"/>
-              </a:defRPr>
-            </a:pPr>
-            <a:r>
-              <a:t>.venv/bin/python src/query.py \</a:t>
-            </a:r>
-          </a:p>
-          <a:p>
-            <a:pPr>
-              <a:lnSpc>
-                <a:spcPts val="1792"/>
-              </a:lnSpc>
-              <a:spcBef>
-                <a:spcPts val="0"/>
-              </a:spcBef>
-              <a:spcAft>
-                <a:spcPts val="0"/>
-              </a:spcAft>
-              <a:defRPr sz="1400" b="0">
-                <a:solidFill>
-                  <a:srgbClr val="FFFFFF"/>
-                </a:solidFill>
-                <a:latin typeface="Be Vietnam Pro"/>
-              </a:defRPr>
-            </a:pPr>
-            <a:r>
-              <a:t>queries/24_nolan_asserted_types_only.rq --reasoned</a:t>
+              <a:t>.venv/bin/python src/query.py queries/27.rq --mode dataset</a:t>
             </a:r>
           </a:p>
         </p:txBody>
@@ -25493,7 +24206,7 @@
               </a:defRPr>
             </a:pPr>
             <a:r>
-              <a:t>Asserted graph</a:t>
+              <a:t>Asserted</a:t>
             </a:r>
           </a:p>
         </p:txBody>
@@ -25538,7 +24251,7 @@
               </a:defRPr>
             </a:pPr>
             <a:r>
-              <a:t>dbo:Person</a:t>
+              <a:t>WriterDirector 0; Nolan min 3: false</a:t>
             </a:r>
           </a:p>
         </p:txBody>
@@ -25626,7 +24339,7 @@
               </a:defRPr>
             </a:pPr>
             <a:r>
-              <a:t>With inference</a:t>
+              <a:t>Reasoned</a:t>
             </a:r>
           </a:p>
         </p:txBody>
@@ -25671,7 +24384,7 @@
               </a:defRPr>
             </a:pPr>
             <a:r>
-              <a:t>Person + Filmmaker + AwardWinner</a:t>
+              <a:t>WriterDirector 10; Nolan min 3: true</a:t>
             </a:r>
           </a:p>
         </p:txBody>
@@ -25849,7 +24562,7 @@
               </a:defRPr>
             </a:pPr>
             <a:r>
-              <a:t>Kiểu khai báo của Nolan</a:t>
+              <a:t>Các type suy luận của Nolan</a:t>
             </a:r>
           </a:p>
         </p:txBody>
@@ -25894,7 +24607,7 @@
               </a:defRPr>
             </a:pPr>
             <a:r>
-              <a:t>P10_nolan_asserted_types.png</a:t>
+              <a:t>P10_nolan_inferred_types.png</a:t>
             </a:r>
           </a:p>
         </p:txBody>
@@ -25908,6 +24621,105 @@
         <p:spPr>
           <a:xfrm>
             <a:off x="8055864" y="4992624"/>
+            <a:ext cx="5605272" cy="264160"/>
+          </a:xfrm>
+          <a:prstGeom prst="rect">
+            <a:avLst/>
+          </a:prstGeom>
+          <a:noFill/>
+        </p:spPr>
+        <p:txBody>
+          <a:bodyPr wrap="none" lIns="0" rIns="0" tIns="0" bIns="0">
+            <a:spAutoFit/>
+          </a:bodyPr>
+          <a:lstStyle/>
+          <a:p>
+            <a:pPr>
+              <a:lnSpc>
+                <a:spcPts val="1792"/>
+              </a:lnSpc>
+              <a:spcBef>
+                <a:spcPts val="0"/>
+              </a:spcBef>
+              <a:spcAft>
+                <a:spcPts val="0"/>
+              </a:spcAft>
+              <a:defRPr sz="1400" b="0">
+                <a:solidFill>
+                  <a:srgbClr val="506776"/>
+                </a:solidFill>
+                <a:latin typeface="Be Vietnam Pro"/>
+              </a:defRPr>
+            </a:pPr>
+            <a:r>
+              <a:t>1. Chọn HermiT </a:t>
+            </a:r>
+            <a:r>
+              <a:rPr>
+                <a:latin typeface="Arial Unicode MS"/>
+              </a:rPr>
+              <a:t>→</a:t>
+            </a:r>
+            <a:r>
+              <a:t> Start reasoner, chờ hoàn tất.</a:t>
+            </a:r>
+          </a:p>
+        </p:txBody>
+      </p:sp>
+      <p:sp>
+        <p:nvSpPr>
+          <p:cNvPr id="26" name="PHOTO_P10_6"/>
+          <p:cNvSpPr txBox="1"/>
+          <p:nvPr/>
+        </p:nvSpPr>
+        <p:spPr>
+          <a:xfrm>
+            <a:off x="8055864" y="5348223"/>
+            <a:ext cx="5605272" cy="264160"/>
+          </a:xfrm>
+          <a:prstGeom prst="rect">
+            <a:avLst/>
+          </a:prstGeom>
+          <a:noFill/>
+        </p:spPr>
+        <p:txBody>
+          <a:bodyPr wrap="none" lIns="0" rIns="0" tIns="0" bIns="0">
+            <a:spAutoFit/>
+          </a:bodyPr>
+          <a:lstStyle/>
+          <a:p>
+            <a:pPr>
+              <a:lnSpc>
+                <a:spcPts val="1792"/>
+              </a:lnSpc>
+              <a:spcBef>
+                <a:spcPts val="0"/>
+              </a:spcBef>
+              <a:spcAft>
+                <a:spcPts val="0"/>
+              </a:spcAft>
+              <a:defRPr sz="1400" b="0">
+                <a:solidFill>
+                  <a:srgbClr val="506776"/>
+                </a:solidFill>
+                <a:latin typeface="Be Vietnam Pro"/>
+              </a:defRPr>
+            </a:pPr>
+            <a:r>
+              <a:t>2. Chọn person-Q25191; mở inferred types.</a:t>
+            </a:r>
+          </a:p>
+        </p:txBody>
+      </p:sp>
+      <p:sp>
+        <p:nvSpPr>
+          <p:cNvPr id="27" name="PHOTO_P10_7"/>
+          <p:cNvSpPr txBox="1"/>
+          <p:nvPr/>
+        </p:nvSpPr>
+        <p:spPr>
+          <a:xfrm>
+            <a:off x="8055864" y="5703823"/>
             <a:ext cx="5605272" cy="491744"/>
           </a:xfrm>
           <a:prstGeom prst="rect">
@@ -25939,7 +24751,7 @@
               </a:defRPr>
             </a:pPr>
             <a:r>
-              <a:t>1. Mở Movie_Knowledge_Graph.owl, chọn person-Q25191</a:t>
+              <a:t>3. Giữ WriterDirector, Filmmaker, ThreeCreditContributor trong</a:t>
             </a:r>
           </a:p>
           <a:p>
@@ -25961,97 +24773,7 @@
               </a:defRPr>
             </a:pPr>
             <a:r>
-              <a:t>(Nolan).</a:t>
-            </a:r>
-          </a:p>
-        </p:txBody>
-      </p:sp>
-      <p:sp>
-        <p:nvSpPr>
-          <p:cNvPr id="26" name="PHOTO_P10_6"/>
-          <p:cNvSpPr txBox="1"/>
-          <p:nvPr/>
-        </p:nvSpPr>
-        <p:spPr>
-          <a:xfrm>
-            <a:off x="8055864" y="5575807"/>
-            <a:ext cx="5605272" cy="264160"/>
-          </a:xfrm>
-          <a:prstGeom prst="rect">
-            <a:avLst/>
-          </a:prstGeom>
-          <a:noFill/>
-        </p:spPr>
-        <p:txBody>
-          <a:bodyPr wrap="none" lIns="0" rIns="0" tIns="0" bIns="0">
-            <a:spAutoFit/>
-          </a:bodyPr>
-          <a:lstStyle/>
-          <a:p>
-            <a:pPr>
-              <a:lnSpc>
-                <a:spcPts val="1792"/>
-              </a:lnSpc>
-              <a:spcBef>
-                <a:spcPts val="0"/>
-              </a:spcBef>
-              <a:spcAft>
-                <a:spcPts val="0"/>
-              </a:spcAft>
-              <a:defRPr sz="1400" b="0">
-                <a:solidFill>
-                  <a:srgbClr val="506776"/>
-                </a:solidFill>
-                <a:latin typeface="Be Vietnam Pro"/>
-              </a:defRPr>
-            </a:pPr>
-            <a:r>
-              <a:t>2. Hiện Types trong chế độ asserted / trước suy luận.</a:t>
-            </a:r>
-          </a:p>
-        </p:txBody>
-      </p:sp>
-      <p:sp>
-        <p:nvSpPr>
-          <p:cNvPr id="27" name="PHOTO_P10_7"/>
-          <p:cNvSpPr txBox="1"/>
-          <p:nvPr/>
-        </p:nvSpPr>
-        <p:spPr>
-          <a:xfrm>
-            <a:off x="8055864" y="5931407"/>
-            <a:ext cx="5605272" cy="264160"/>
-          </a:xfrm>
-          <a:prstGeom prst="rect">
-            <a:avLst/>
-          </a:prstGeom>
-          <a:noFill/>
-        </p:spPr>
-        <p:txBody>
-          <a:bodyPr wrap="none" lIns="0" rIns="0" tIns="0" bIns="0">
-            <a:spAutoFit/>
-          </a:bodyPr>
-          <a:lstStyle/>
-          <a:p>
-            <a:pPr>
-              <a:lnSpc>
-                <a:spcPts val="1792"/>
-              </a:lnSpc>
-              <a:spcBef>
-                <a:spcPts val="0"/>
-              </a:spcBef>
-              <a:spcAft>
-                <a:spcPts val="0"/>
-              </a:spcAft>
-              <a:defRPr sz="1400" b="0">
-                <a:solidFill>
-                  <a:srgbClr val="506776"/>
-                </a:solidFill>
-                <a:latin typeface="Be Vietnam Pro"/>
-              </a:defRPr>
-            </a:pPr>
-            <a:r>
-              <a:t>3. Giữ dbo:Person và các quan hệ đóng góp/giải trong ảnh.</a:t>
+              <a:t>ảnh.</a:t>
             </a:r>
           </a:p>
         </p:txBody>
@@ -26141,7 +24863,7 @@
               </a:defRPr>
             </a:pPr>
             <a:r>
-              <a:t>--reasoned loads schema + saved types. Endpoint: asserted graph by default. SELECT/ASK: JSON; graph queries: Turtle.</a:t>
+              <a:t>All query interfaces read the same canonical graph exports; inference is computed before serving.</a:t>
             </a:r>
           </a:p>
         </p:txBody>
@@ -26255,7 +24977,7 @@
               </a:defRPr>
             </a:pPr>
             <a:r>
-              <a:t>MOVIELOD / SEMANTIC WEB / ONTOLOGY 2.0</a:t>
+              <a:t>MOVIELOD / SEMANTIC WEB / ONTOLOGY 3.0.0</a:t>
             </a:r>
           </a:p>
         </p:txBody>
@@ -26300,7 +25022,7 @@
               </a:defRPr>
             </a:pPr>
             <a:r>
-              <a:t>Validating data, application and publication</a:t>
+              <a:t>Verification of the final OWL</a:t>
             </a:r>
           </a:p>
         </p:txBody>
@@ -26345,7 +25067,7 @@
               </a:defRPr>
             </a:pPr>
             <a:r>
-              <a:t>Execution evidence is stored in evidence/</a:t>
+              <a:t>Direct HermiT run; evidence bound to the file hash</a:t>
             </a:r>
           </a:p>
         </p:txBody>
@@ -26433,7 +25155,7 @@
               </a:defRPr>
             </a:pPr>
             <a:r>
-              <a:t>Data checked: 08 Oct 2026 • Sources: project code and evidence/</a:t>
+              <a:t>Data checked: 09 Oct 2026 • Sources: project code and evidence/</a:t>
             </a:r>
           </a:p>
         </p:txBody>
@@ -26566,7 +25288,7 @@
               </a:defRPr>
             </a:pPr>
             <a:r>
-              <a:t>76/76</a:t>
+              <a:t>PASS</a:t>
             </a:r>
           </a:p>
         </p:txBody>
@@ -26611,7 +25333,7 @@
               </a:defRPr>
             </a:pPr>
             <a:r>
-              <a:t>Matching source hashes</a:t>
+              <a:t>HermiT consistency</a:t>
             </a:r>
           </a:p>
         </p:txBody>
@@ -26699,7 +25421,7 @@
               </a:defRPr>
             </a:pPr>
             <a:r>
-              <a:t>24</a:t>
+              <a:t>0</a:t>
             </a:r>
           </a:p>
         </p:txBody>
@@ -26744,7 +25466,7 @@
               </a:defRPr>
             </a:pPr>
             <a:r>
-              <a:t>Query files executed</a:t>
+              <a:t>unsatisfiable named classes</a:t>
             </a:r>
           </a:p>
         </p:txBody>
@@ -26832,7 +25554,7 @@
               </a:defRPr>
             </a:pPr>
             <a:r>
-              <a:t>14 + 9</a:t>
+              <a:t>27</a:t>
             </a:r>
           </a:p>
         </p:txBody>
@@ -26877,7 +25599,7 @@
               </a:defRPr>
             </a:pPr>
             <a:r>
-              <a:t>Tests + browser checks</a:t>
+              <a:t>design queries executed</a:t>
             </a:r>
           </a:p>
         </p:txBody>
@@ -26965,7 +25687,7 @@
               </a:defRPr>
             </a:pPr>
             <a:r>
-              <a:t>8 / 4</a:t>
+              <a:t>965</a:t>
             </a:r>
           </a:p>
         </p:txBody>
@@ -27010,36 +25732,14 @@
               </a:defRPr>
             </a:pPr>
             <a:r>
-              <a:t>Public HTTP 200 / graph</a:t>
-            </a:r>
-          </a:p>
-          <a:p>
-            <a:pPr>
-              <a:lnSpc>
-                <a:spcPts val="2176"/>
-              </a:lnSpc>
-              <a:spcBef>
-                <a:spcPts val="0"/>
-              </a:spcBef>
-              <a:spcAft>
-                <a:spcPts val="0"/>
-              </a:spcAft>
-              <a:defRPr sz="1700" b="0">
-                <a:solidFill>
-                  <a:srgbClr val="152B3A"/>
-                </a:solidFill>
-                <a:latin typeface="Be Vietnam Pro"/>
-              </a:defRPr>
-            </a:pPr>
-            <a:r>
-              <a:t>match</a:t>
+              <a:t>chain pairs verified</a:t>
             </a:r>
           </a:p>
         </p:txBody>
       </p:sp>
       <p:pic>
         <p:nvPicPr>
-          <p:cNvPr id="21" name="Picture 20" descr="13_validation_en.png"/>
+          <p:cNvPr id="21" name="Picture 20" descr="verification.png"/>
           <p:cNvPicPr>
             <a:picLocks noChangeAspect="1"/>
           </p:cNvPicPr>
@@ -27053,8 +25753,8 @@
         </p:blipFill>
         <p:spPr>
           <a:xfrm>
-            <a:off x="7302246" y="2615184"/>
-            <a:ext cx="6454140" cy="4480560"/>
+            <a:off x="7077456" y="2912364"/>
+            <a:ext cx="6903720" cy="3886200"/>
           </a:xfrm>
           <a:prstGeom prst="rect">
             <a:avLst/>
@@ -27101,7 +25801,7 @@
               </a:defRPr>
             </a:pPr>
             <a:r>
-              <a:t>14 tests / 9 browser checks. HermiT/Pellet verify DL separately; the image shows actual execution logs.</a:t>
+              <a:t>Canonical OWL verified by HermiT; browser queries use matching source, reasoned and named graphs.</a:t>
             </a:r>
           </a:p>
         </p:txBody>
@@ -27215,7 +25915,7 @@
               </a:defRPr>
             </a:pPr>
             <a:r>
-              <a:t>MOVIELOD / SEMANTIC WEB / ONTOLOGY 2.0</a:t>
+              <a:t>MOVIELOD / SEMANTIC WEB / ONTOLOGY 3.0.0</a:t>
             </a:r>
           </a:p>
         </p:txBody>
@@ -27260,7 +25960,7 @@
               </a:defRPr>
             </a:pPr>
             <a:r>
-              <a:t>Assessment and limitations</a:t>
+              <a:t>Coverage and limitations</a:t>
             </a:r>
           </a:p>
         </p:txBody>
@@ -27305,7 +26005,7 @@
               </a:defRPr>
             </a:pPr>
             <a:r>
-              <a:t>Evidence for 5/5 requirements · 10/10 is a proposed self-score</a:t>
+              <a:t>Verified functional requirements; evidence scope remains explicit</a:t>
             </a:r>
           </a:p>
         </p:txBody>
@@ -27393,7 +26093,7 @@
               </a:defRPr>
             </a:pPr>
             <a:r>
-              <a:t>Data checked: 08 Oct 2026 • Sources: project code and evidence/</a:t>
+              <a:t>Data checked: 09 Oct 2026 • Sources: project code and evidence/</a:t>
             </a:r>
           </a:p>
         </p:txBody>
@@ -27495,7 +26195,7 @@
         <p:spPr>
           <a:xfrm>
             <a:off x="841248" y="2770632"/>
-            <a:ext cx="832103" cy="301752"/>
+            <a:ext cx="740664" cy="301752"/>
           </a:xfrm>
           <a:prstGeom prst="rect">
             <a:avLst/>
@@ -27539,8 +26239,8 @@
         </p:nvSpPr>
         <p:spPr>
           <a:xfrm>
-            <a:off x="1892807" y="2770632"/>
-            <a:ext cx="4261104" cy="301752"/>
+            <a:off x="1801368" y="2770632"/>
+            <a:ext cx="3803904" cy="301752"/>
           </a:xfrm>
           <a:prstGeom prst="rect">
             <a:avLst/>
@@ -27584,8 +26284,8 @@
         </p:nvSpPr>
         <p:spPr>
           <a:xfrm>
-            <a:off x="6373368" y="2770632"/>
-            <a:ext cx="969264" cy="301752"/>
+            <a:off x="5824728" y="2770632"/>
+            <a:ext cx="1517904" cy="301752"/>
           </a:xfrm>
           <a:prstGeom prst="rect">
             <a:avLst/>
@@ -27616,7 +26316,7 @@
               </a:defRPr>
             </a:pPr>
             <a:r>
-              <a:t>Score</a:t>
+              <a:t>Status</a:t>
             </a:r>
           </a:p>
         </p:txBody>
@@ -27673,7 +26373,7 @@
         <p:spPr>
           <a:xfrm>
             <a:off x="841248" y="3150108"/>
-            <a:ext cx="832103" cy="475488"/>
+            <a:ext cx="740664" cy="475488"/>
           </a:xfrm>
           <a:prstGeom prst="rect">
             <a:avLst/>
@@ -27717,8 +26417,8 @@
         </p:nvSpPr>
         <p:spPr>
           <a:xfrm>
-            <a:off x="1892807" y="3150108"/>
-            <a:ext cx="4261104" cy="475488"/>
+            <a:off x="1801368" y="3150108"/>
+            <a:ext cx="3803904" cy="475488"/>
           </a:xfrm>
           <a:prstGeom prst="rect">
             <a:avLst/>
@@ -27749,7 +26449,7 @@
               </a:defRPr>
             </a:pPr>
             <a:r>
-              <a:t>Ontology + OWL + tests</a:t>
+              <a:t>Canonical OWL + HermiT</a:t>
             </a:r>
           </a:p>
         </p:txBody>
@@ -27762,8 +26462,8 @@
         </p:nvSpPr>
         <p:spPr>
           <a:xfrm>
-            <a:off x="6373368" y="3150108"/>
-            <a:ext cx="969264" cy="475488"/>
+            <a:off x="5824728" y="3150108"/>
+            <a:ext cx="1517904" cy="475488"/>
           </a:xfrm>
           <a:prstGeom prst="rect">
             <a:avLst/>
@@ -27794,7 +26494,7 @@
               </a:defRPr>
             </a:pPr>
             <a:r>
-              <a:t>2/2</a:t>
+              <a:t>Verified</a:t>
             </a:r>
           </a:p>
         </p:txBody>
@@ -27851,7 +26551,7 @@
         <p:spPr>
           <a:xfrm>
             <a:off x="841248" y="3744468"/>
-            <a:ext cx="832103" cy="475488"/>
+            <a:ext cx="740664" cy="475488"/>
           </a:xfrm>
           <a:prstGeom prst="rect">
             <a:avLst/>
@@ -27895,8 +26595,8 @@
         </p:nvSpPr>
         <p:spPr>
           <a:xfrm>
-            <a:off x="1892807" y="3744468"/>
-            <a:ext cx="4261104" cy="475488"/>
+            <a:off x="1801368" y="3744468"/>
+            <a:ext cx="3803904" cy="475488"/>
           </a:xfrm>
           <a:prstGeom prst="rect">
             <a:avLst/>
@@ -27927,7 +26627,7 @@
               </a:defRPr>
             </a:pPr>
             <a:r>
-              <a:t>76 sources + hashes + reproducibility</a:t>
+              <a:t>Source facts + provenance</a:t>
             </a:r>
           </a:p>
         </p:txBody>
@@ -27940,8 +26640,8 @@
         </p:nvSpPr>
         <p:spPr>
           <a:xfrm>
-            <a:off x="6373368" y="3744468"/>
-            <a:ext cx="969264" cy="475488"/>
+            <a:off x="5824728" y="3744468"/>
+            <a:ext cx="1517904" cy="475488"/>
           </a:xfrm>
           <a:prstGeom prst="rect">
             <a:avLst/>
@@ -27972,7 +26672,7 @@
               </a:defRPr>
             </a:pPr>
             <a:r>
-              <a:t>2/2</a:t>
+              <a:t>Verified</a:t>
             </a:r>
           </a:p>
         </p:txBody>
@@ -28029,7 +26729,7 @@
         <p:spPr>
           <a:xfrm>
             <a:off x="841248" y="4338828"/>
-            <a:ext cx="832103" cy="475488"/>
+            <a:ext cx="740664" cy="475488"/>
           </a:xfrm>
           <a:prstGeom prst="rect">
             <a:avLst/>
@@ -28073,8 +26773,8 @@
         </p:nvSpPr>
         <p:spPr>
           <a:xfrm>
-            <a:off x="1892807" y="4338828"/>
-            <a:ext cx="4261104" cy="475488"/>
+            <a:off x="1801368" y="4338828"/>
+            <a:ext cx="3803904" cy="475488"/>
           </a:xfrm>
           <a:prstGeom prst="rect">
             <a:avLst/>
@@ -28105,7 +26805,7 @@
               </a:defRPr>
             </a:pPr>
             <a:r>
-              <a:t>Public RDF matches local data</a:t>
+              <a:t>Public RDF / OWL</a:t>
             </a:r>
           </a:p>
         </p:txBody>
@@ -28118,8 +26818,8 @@
         </p:nvSpPr>
         <p:spPr>
           <a:xfrm>
-            <a:off x="6373368" y="4338828"/>
-            <a:ext cx="969264" cy="475488"/>
+            <a:off x="5824728" y="4338828"/>
+            <a:ext cx="1517904" cy="475488"/>
           </a:xfrm>
           <a:prstGeom prst="rect">
             <a:avLst/>
@@ -28150,7 +26850,7 @@
               </a:defRPr>
             </a:pPr>
             <a:r>
-              <a:t>2/2</a:t>
+              <a:t>Aligned</a:t>
             </a:r>
           </a:p>
         </p:txBody>
@@ -28207,7 +26907,7 @@
         <p:spPr>
           <a:xfrm>
             <a:off x="841248" y="4933188"/>
-            <a:ext cx="832103" cy="475488"/>
+            <a:ext cx="740664" cy="475488"/>
           </a:xfrm>
           <a:prstGeom prst="rect">
             <a:avLst/>
@@ -28251,8 +26951,8 @@
         </p:nvSpPr>
         <p:spPr>
           <a:xfrm>
-            <a:off x="1892807" y="4933188"/>
-            <a:ext cx="4261104" cy="475488"/>
+            <a:off x="1801368" y="4933188"/>
+            <a:ext cx="3803904" cy="475488"/>
           </a:xfrm>
           <a:prstGeom prst="rect">
             <a:avLst/>
@@ -28283,7 +26983,7 @@
               </a:defRPr>
             </a:pPr>
             <a:r>
-              <a:t>1,727 published identity links</a:t>
+              <a:t>Retained identity links</a:t>
             </a:r>
           </a:p>
         </p:txBody>
@@ -28296,8 +26996,8 @@
         </p:nvSpPr>
         <p:spPr>
           <a:xfrm>
-            <a:off x="6373368" y="4933188"/>
-            <a:ext cx="969264" cy="475488"/>
+            <a:off x="5824728" y="4933188"/>
+            <a:ext cx="1517904" cy="475488"/>
           </a:xfrm>
           <a:prstGeom prst="rect">
             <a:avLst/>
@@ -28328,7 +27028,7 @@
               </a:defRPr>
             </a:pPr>
             <a:r>
-              <a:t>2/2</a:t>
+              <a:t>Verified</a:t>
             </a:r>
           </a:p>
         </p:txBody>
@@ -28385,7 +27085,7 @@
         <p:spPr>
           <a:xfrm>
             <a:off x="841248" y="5527548"/>
-            <a:ext cx="832103" cy="475488"/>
+            <a:ext cx="740664" cy="475488"/>
           </a:xfrm>
           <a:prstGeom prst="rect">
             <a:avLst/>
@@ -28429,8 +27129,8 @@
         </p:nvSpPr>
         <p:spPr>
           <a:xfrm>
-            <a:off x="1892807" y="5527548"/>
-            <a:ext cx="4261104" cy="475488"/>
+            <a:off x="1801368" y="5527548"/>
+            <a:ext cx="3803904" cy="475488"/>
           </a:xfrm>
           <a:prstGeom prst="rect">
             <a:avLst/>
@@ -28461,7 +27161,7 @@
               </a:defRPr>
             </a:pPr>
             <a:r>
-              <a:t>Web / endpoint / terminal</a:t>
+              <a:t>Three query scopes</a:t>
             </a:r>
           </a:p>
         </p:txBody>
@@ -28474,8 +27174,8 @@
         </p:nvSpPr>
         <p:spPr>
           <a:xfrm>
-            <a:off x="6373368" y="5527548"/>
-            <a:ext cx="969264" cy="475488"/>
+            <a:off x="5824728" y="5527548"/>
+            <a:ext cx="1517904" cy="475488"/>
           </a:xfrm>
           <a:prstGeom prst="rect">
             <a:avLst/>
@@ -28506,7 +27206,7 @@
               </a:defRPr>
             </a:pPr>
             <a:r>
-              <a:t>2/2</a:t>
+              <a:t>Verified</a:t>
             </a:r>
           </a:p>
         </p:txBody>
@@ -28594,7 +27294,7 @@
               </a:defRPr>
             </a:pPr>
             <a:r>
-              <a:t>Total 10/10 · proposed self-score, not an official grade</a:t>
+              <a:t>Canonical model and application are aligned.</a:t>
             </a:r>
           </a:p>
         </p:txBody>
@@ -28725,7 +27425,7 @@
               </a:defRPr>
             </a:pPr>
             <a:r>
-              <a:t>Data limitations</a:t>
+              <a:t>Inference scope</a:t>
             </a:r>
           </a:p>
         </p:txBody>
@@ -28770,7 +27470,7 @@
               </a:defRPr>
             </a:pPr>
             <a:r>
-              <a:t>Selected 30-film sample; label-based groups.</a:t>
+              <a:t>Consistency does not prove completeness or factual</a:t>
             </a:r>
           </a:p>
           <a:p>
@@ -28792,16 +27492,7 @@
               </a:defRPr>
             </a:pPr>
             <a:r>
-              <a:t>Hashes </a:t>
-            </a:r>
-            <a:r>
-              <a:rPr>
-                <a:latin typeface="Arial Unicode MS"/>
-              </a:rPr>
-              <a:t>≠</a:t>
-            </a:r>
-            <a:r>
-              <a:t> truth; budget/streaming data absent.</a:t>
+              <a:t>accuracy.</a:t>
             </a:r>
           </a:p>
         </p:txBody>
@@ -28932,7 +27623,7 @@
               </a:defRPr>
             </a:pPr>
             <a:r>
-              <a:t>Reasoning limitations</a:t>
+              <a:t>Source and identity</a:t>
             </a:r>
           </a:p>
         </p:txBody>
@@ -28977,7 +27668,7 @@
               </a:defRPr>
             </a:pPr>
             <a:r>
-              <a:t>12 OWL RL classes; 2 IRI-counting rules.</a:t>
+              <a:t>No blanket inequality for QIDs; genre buckets are</a:t>
             </a:r>
           </a:p>
           <a:p>
@@ -28999,7 +27690,7 @@
               </a:defRPr>
             </a:pPr>
             <a:r>
-              <a:t>HermiT/Pellet: consistent; threshold classes: 0.</a:t>
+              <a:t>author mappings.</a:t>
             </a:r>
           </a:p>
         </p:txBody>
@@ -29130,7 +27821,7 @@
               </a:defRPr>
             </a:pPr>
             <a:r>
-              <a:t>Semantic Web value</a:t>
+              <a:t>Deliverables</a:t>
             </a:r>
           </a:p>
         </p:txBody>
@@ -29175,7 +27866,7 @@
               </a:defRPr>
             </a:pPr>
             <a:r>
-              <a:t>Shared IRIs, vocabulary, links and provenance.</a:t>
+              <a:t>Slides, report and guides are current. No MP4 files are</a:t>
             </a:r>
           </a:p>
           <a:p>
@@ -29197,7 +27888,7 @@
               </a:defRPr>
             </a:pPr>
             <a:r>
-              <a:t>SQL can also answer many of these questions.</a:t>
+              <a:t>included.</a:t>
             </a:r>
           </a:p>
         </p:txBody>
@@ -29311,7 +28002,7 @@
               </a:defRPr>
             </a:pPr>
             <a:r>
-              <a:t>MOVIELOD / SEMANTIC WEB / ONTOLOGY 2.0</a:t>
+              <a:t>MOVIELOD / SEMANTIC WEB / ONTOLOGY 3.0.0</a:t>
             </a:r>
           </a:p>
         </p:txBody>
@@ -29356,7 +28047,7 @@
               </a:defRPr>
             </a:pPr>
             <a:r>
-              <a:t>Conclusion and pending Protégé evidence</a:t>
+              <a:t>Evidence capture and submission checklist</a:t>
             </a:r>
           </a:p>
         </p:txBody>
@@ -29401,7 +28092,7 @@
               </a:defRPr>
             </a:pPr>
             <a:r>
-              <a:t>24 slides · five-page report · four-minute-fifty-second demo</a:t>
+              <a:t>Report: 15 pages · main deck: 24 slides · no MP4 included</a:t>
             </a:r>
           </a:p>
         </p:txBody>
@@ -29489,7 +28180,7 @@
               </a:defRPr>
             </a:pPr>
             <a:r>
-              <a:t>Data checked: 08 Oct 2026 • Sources: project code and evidence/</a:t>
+              <a:t>Data checked: 09 Oct 2026 • Sources: project code and evidence/</a:t>
             </a:r>
           </a:p>
         </p:txBody>
@@ -29890,7 +28581,7 @@
               </a:defRPr>
             </a:pPr>
             <a:r>
-              <a:t>Ontology IRI and version</a:t>
+              <a:t>Ontology 3.0.0 header</a:t>
             </a:r>
           </a:p>
         </p:txBody>
@@ -30068,7 +28759,7 @@
               </a:defRPr>
             </a:pPr>
             <a:r>
-              <a:t>Film class hierarchy</a:t>
+              <a:t>Work and Film hierarchy</a:t>
             </a:r>
           </a:p>
         </p:txBody>
@@ -30246,7 +28937,7 @@
               </a:defRPr>
             </a:pPr>
             <a:r>
-              <a:t>People and organizations</a:t>
+              <a:t>DBpedia agent hierarchy</a:t>
             </a:r>
           </a:p>
         </p:txBody>
@@ -30424,7 +29115,7 @@
               </a:defRPr>
             </a:pPr>
             <a:r>
-              <a:t>Genre and award hierarchies</a:t>
+              <a:t>MovieGenre and Award</a:t>
             </a:r>
           </a:p>
         </p:txBody>
@@ -30780,7 +29471,7 @@
               </a:defRPr>
             </a:pPr>
             <a:r>
-              <a:t>Domain, range, inverse and functional</a:t>
+              <a:t>Inverse and functional properties</a:t>
             </a:r>
           </a:p>
         </p:txBody>
@@ -30958,7 +29649,7 @@
               </a:defRPr>
             </a:pPr>
             <a:r>
-              <a:t>Filmmaker definition</a:t>
+              <a:t>Filmmaker equivalent class</a:t>
             </a:r>
           </a:p>
         </p:txBody>
@@ -31136,7 +29827,7 @@
               </a:defRPr>
             </a:pPr>
             <a:r>
-              <a:t>FilmStudio cardinality</a:t>
+              <a:t>Three-credit cardinality</a:t>
             </a:r>
           </a:p>
         </p:txBody>
@@ -31314,7 +30005,7 @@
               </a:defRPr>
             </a:pPr>
             <a:r>
-              <a:t>Runtime datatype</a:t>
+              <a:t>DBpedia runtime in seconds</a:t>
             </a:r>
           </a:p>
         </p:txBody>
@@ -31492,7 +30183,7 @@
               </a:defRPr>
             </a:pPr>
             <a:r>
-              <a:t>Inception individual</a:t>
+              <a:t>Inception in the final OWL</a:t>
             </a:r>
           </a:p>
         </p:txBody>
@@ -31670,7 +30361,7 @@
               </a:defRPr>
             </a:pPr>
             <a:r>
-              <a:t>Nolan asserted types</a:t>
+              <a:t>Nolan inferred types</a:t>
             </a:r>
           </a:p>
         </p:txBody>
@@ -31846,7 +30537,7 @@
               </a:defRPr>
             </a:pPr>
             <a:r>
-              <a:t>1. Complete team / member details.</a:t>
+              <a:t>1. Verify ontology version 3.0.0.</a:t>
             </a:r>
           </a:p>
           <a:p>
@@ -31887,7 +30578,7 @@
               </a:defRPr>
             </a:pPr>
             <a:r>
-              <a:t>2. Insert 11 genuine screenshots.</a:t>
+              <a:t>2. Insert the requested genuine</a:t>
             </a:r>
           </a:p>
           <a:p>
@@ -31908,6 +30599,9 @@
                 <a:latin typeface="Be Vietnam Pro"/>
               </a:defRPr>
             </a:pPr>
+            <a:r>
+              <a:t>screenshots.</a:t>
+            </a:r>
           </a:p>
           <a:p>
             <a:pPr>
@@ -31927,6 +30621,25 @@
                 <a:latin typeface="Be Vietnam Pro"/>
               </a:defRPr>
             </a:pPr>
+          </a:p>
+          <a:p>
+            <a:pPr>
+              <a:lnSpc>
+                <a:spcPts val="2304"/>
+              </a:lnSpc>
+              <a:spcBef>
+                <a:spcPts val="0"/>
+              </a:spcBef>
+              <a:spcAft>
+                <a:spcPts val="0"/>
+              </a:spcAft>
+              <a:defRPr sz="1800" b="0">
+                <a:solidFill>
+                  <a:srgbClr val="506776"/>
+                </a:solidFill>
+                <a:latin typeface="Be Vietnam Pro"/>
+              </a:defRPr>
+            </a:pPr>
             <a:r>
               <a:t>3. Save them in evidence/protege/ for</a:t>
             </a:r>
@@ -31991,7 +30704,7 @@
               </a:defRPr>
             </a:pPr>
             <a:r>
-              <a:t>4. Rehearse with the speaker script and</a:t>
+              <a:t>4. Rehearse the script and demonstrate</a:t>
             </a:r>
           </a:p>
           <a:p>
@@ -32013,7 +30726,7 @@
               </a:defRPr>
             </a:pPr>
             <a:r>
-              <a:t>review the video.</a:t>
+              <a:t>the current query modes.</a:t>
             </a:r>
           </a:p>
         </p:txBody>
@@ -32058,7 +30771,7 @@
               </a:defRPr>
             </a:pPr>
             <a:r>
-              <a:t>Screenshot slots are placeholders, not captured evidence. Full English narration is in Speaker Notes.</a:t>
+              <a:t>Use the canonical OWL for Protégé evidence; source facts and inferred knowledge have separate scopes.</a:t>
             </a:r>
           </a:p>
         </p:txBody>
@@ -32172,7 +30885,7 @@
               </a:defRPr>
             </a:pPr>
             <a:r>
-              <a:t>MOVIELOD / SEMANTIC WEB / ONTOLOGY 2.0</a:t>
+              <a:t>MOVIELOD / SEMANTIC WEB / ONTOLOGY 3.0.0</a:t>
             </a:r>
           </a:p>
         </p:txBody>
@@ -32217,7 +30930,7 @@
               </a:defRPr>
             </a:pPr>
             <a:r>
-              <a:t>Architecture and data flow</a:t>
+              <a:t>Architecture and knowledge layers</a:t>
             </a:r>
           </a:p>
         </p:txBody>
@@ -32262,7 +30975,7 @@
               </a:defRPr>
             </a:pPr>
             <a:r>
-              <a:t>Asserted data, schema and inferred types are stored separately</a:t>
+              <a:t>One reproducible pipeline across every interface</a:t>
             </a:r>
           </a:p>
         </p:txBody>
@@ -32350,7 +31063,7 @@
               </a:defRPr>
             </a:pPr>
             <a:r>
-              <a:t>Data checked: 08 Oct 2026 • Sources: project code and evidence/</a:t>
+              <a:t>Data checked: 09 Oct 2026 • Sources: project code and evidence/</a:t>
             </a:r>
           </a:p>
         </p:txBody>
@@ -32571,7 +31284,7 @@
               </a:defRPr>
             </a:pPr>
             <a:r>
-              <a:t>COLLECT</a:t>
+              <a:t>SOURCE FACTS</a:t>
             </a:r>
           </a:p>
         </p:txBody>
@@ -32616,7 +31329,7 @@
               </a:defRPr>
             </a:pPr>
             <a:r>
-              <a:t>Wikidata / DBpedia</a:t>
+              <a:t>76 retained responses</a:t>
             </a:r>
           </a:p>
           <a:p>
@@ -32638,16 +31351,7 @@
               </a:defRPr>
             </a:pPr>
             <a:r>
-              <a:t>collect.py </a:t>
-            </a:r>
-            <a:r>
-              <a:rPr>
-                <a:latin typeface="Arial Unicode MS"/>
-              </a:rPr>
-              <a:t>→</a:t>
-            </a:r>
-            <a:r>
-              <a:t> data/raw/</a:t>
+              <a:t>+ provenance</a:t>
             </a:r>
           </a:p>
         </p:txBody>
@@ -32823,7 +31527,7 @@
               </a:defRPr>
             </a:pPr>
             <a:r>
-              <a:t>BUILD RDF</a:t>
+              <a:t>BUILD 3.0.0</a:t>
             </a:r>
           </a:p>
         </p:txBody>
@@ -32868,16 +31572,7 @@
               </a:defRPr>
             </a:pPr>
             <a:r>
-              <a:t>build.py </a:t>
-            </a:r>
-            <a:r>
-              <a:rPr>
-                <a:latin typeface="Arial Unicode MS"/>
-              </a:rPr>
-              <a:t>→</a:t>
-            </a:r>
-            <a:r>
-              <a:t> movies.ttl</a:t>
+              <a:t>Canonical RDF / OWL</a:t>
             </a:r>
           </a:p>
           <a:p>
@@ -32899,7 +31594,7 @@
               </a:defRPr>
             </a:pPr>
             <a:r>
-              <a:t>+ ontology/movie.ttl</a:t>
+              <a:t>+ resource pages</a:t>
             </a:r>
           </a:p>
         </p:txBody>
@@ -33075,7 +31770,7 @@
               </a:defRPr>
             </a:pPr>
             <a:r>
-              <a:t>VALIDATE</a:t>
+              <a:t>REASON / CHECK</a:t>
             </a:r>
           </a:p>
         </p:txBody>
@@ -33120,7 +31815,7 @@
               </a:defRPr>
             </a:pPr>
             <a:r>
-              <a:t>validate.py / pytest</a:t>
+              <a:t>HermiT + OWL RL</a:t>
             </a:r>
           </a:p>
           <a:p>
@@ -33142,29 +31837,7 @@
               </a:defRPr>
             </a:pPr>
             <a:r>
-              <a:t>sources, fields and</a:t>
-            </a:r>
-          </a:p>
-          <a:p>
-            <a:pPr>
-              <a:lnSpc>
-                <a:spcPts val="2176"/>
-              </a:lnSpc>
-              <a:spcBef>
-                <a:spcPts val="0"/>
-              </a:spcBef>
-              <a:spcAft>
-                <a:spcPts val="0"/>
-              </a:spcAft>
-              <a:defRPr sz="1700" b="0">
-                <a:solidFill>
-                  <a:srgbClr val="506776"/>
-                </a:solidFill>
-                <a:latin typeface="Be Vietnam Pro"/>
-              </a:defRPr>
-            </a:pPr>
-            <a:r>
-              <a:t>queries</a:t>
+              <a:t>27 query checks</a:t>
             </a:r>
           </a:p>
         </p:txBody>
@@ -33340,7 +32013,7 @@
               </a:defRPr>
             </a:pPr>
             <a:r>
-              <a:t>CLASSIFY</a:t>
+              <a:t>QUERY MODES</a:t>
             </a:r>
           </a:p>
         </p:txBody>
@@ -33385,13 +32058,7 @@
               </a:defRPr>
             </a:pPr>
             <a:r>
-              <a:t>reason.py </a:t>
-            </a:r>
-            <a:r>
-              <a:rPr>
-                <a:latin typeface="Arial Unicode MS"/>
-              </a:rPr>
-              <a:t>→</a:t>
+              <a:t>Source / inference</a:t>
             </a:r>
           </a:p>
           <a:p>
@@ -33413,7 +32080,7 @@
               </a:defRPr>
             </a:pPr>
             <a:r>
-              <a:t>inferred_classes.ttl</a:t>
+              <a:t>Before / after</a:t>
             </a:r>
           </a:p>
         </p:txBody>
@@ -33501,7 +32168,7 @@
               </a:defRPr>
             </a:pPr>
             <a:r>
-              <a:t>APPLICATION: Web / Flask + RDFLib / Comunica / Terminal</a:t>
+              <a:t>NEW MODEL: asserted.ttl + schema.ttl + inferred.ttl; query 27 uses before_after.trig.</a:t>
             </a:r>
           </a:p>
           <a:p>
@@ -33523,7 +32190,7 @@
               </a:defRPr>
             </a:pPr>
             <a:r>
-              <a:t>Endpoint: movies.ttl. --reasoned: adds schema + inferred_classes.ttl.</a:t>
+              <a:t>APPLICATION: Flask / RDFLib / Comunica share the canonical version-3 graph exports.</a:t>
             </a:r>
           </a:p>
         </p:txBody>
@@ -33637,7 +32304,7 @@
               </a:defRPr>
             </a:pPr>
             <a:r>
-              <a:t>MOVIELOD / SEMANTIC WEB / ONTOLOGY 2.0</a:t>
+              <a:t>MOVIELOD / SEMANTIC WEB / ONTOLOGY 3.0.0</a:t>
             </a:r>
           </a:p>
         </p:txBody>
@@ -33682,7 +32349,7 @@
               </a:defRPr>
             </a:pPr>
             <a:r>
-              <a:t>Current dataset: interpreting the numbers</a:t>
+              <a:t>Dataset: units and counting scope</a:t>
             </a:r>
           </a:p>
         </p:txBody>
@@ -33727,7 +32394,7 @@
               </a:defRPr>
             </a:pPr>
             <a:r>
-              <a:t>A selected sample of 30 films · evidence/statistics.json</a:t>
+              <a:t>Final OWL: 19,025 triples including schema and asserted facts</a:t>
             </a:r>
           </a:p>
         </p:txBody>
@@ -33815,7 +32482,7 @@
               </a:defRPr>
             </a:pPr>
             <a:r>
-              <a:t>Data checked: 08 Oct 2026 • Sources: project code and evidence/</a:t>
+              <a:t>Data checked: 09 Oct 2026 • Sources: project code and evidence/</a:t>
             </a:r>
           </a:p>
         </p:txBody>
@@ -34259,7 +32926,7 @@
               </a:defRPr>
             </a:pPr>
             <a:r>
-              <a:t>contributions</a:t>
+              <a:t>credit records</a:t>
             </a:r>
           </a:p>
         </p:txBody>
@@ -34613,7 +33280,7 @@
               </a:defRPr>
             </a:pPr>
             <a:r>
-              <a:t>76/76</a:t>
+              <a:t>76</a:t>
             </a:r>
           </a:p>
         </p:txBody>
@@ -34658,7 +33325,7 @@
               </a:defRPr>
             </a:pPr>
             <a:r>
-              <a:t>verified source hashes</a:t>
+              <a:t>source responses</a:t>
             </a:r>
           </a:p>
         </p:txBody>
@@ -34703,7 +33370,7 @@
               </a:defRPr>
             </a:pPr>
             <a:r>
-              <a:t>19,339 data triples · 518 schema triples · 75 genres · 11 countries · 15 languages</a:t>
+              <a:t>37 named classes · 19 object + 5 datatype properties · 4 controlled role individuals</a:t>
             </a:r>
           </a:p>
         </p:txBody>
@@ -34817,7 +33484,7 @@
               </a:defRPr>
             </a:pPr>
             <a:r>
-              <a:t>MOVIELOD / SEMANTIC WEB / ONTOLOGY 2.0</a:t>
+              <a:t>MOVIELOD / SEMANTIC WEB / ONTOLOGY 3.0.0</a:t>
             </a:r>
           </a:p>
         </p:txBody>
@@ -34862,7 +33529,7 @@
               </a:defRPr>
             </a:pPr>
             <a:r>
-              <a:t>R1 · Ontology: 42 classes in six groups</a:t>
+              <a:t>Ontology inventory: reuse before extension</a:t>
             </a:r>
           </a:p>
         </p:txBody>
@@ -34907,7 +33574,7 @@
               </a:defRPr>
             </a:pPr>
             <a:r>
-              <a:t>Direct reuse of dbo:Film, dbo:Person and dbo:Country</a:t>
+              <a:t>17 DBpedia classes + 1 VoID class + 19 local classes</a:t>
             </a:r>
           </a:p>
         </p:txBody>
@@ -34995,7 +33662,7 @@
               </a:defRPr>
             </a:pPr>
             <a:r>
-              <a:t>Data checked: 08 Oct 2026 • Sources: project code and evidence/</a:t>
+              <a:t>Data checked: 09 Oct 2026 • Sources: project code and evidence/</a:t>
             </a:r>
           </a:p>
         </p:txBody>
@@ -35128,7 +33795,7 @@
               </a:defRPr>
             </a:pPr>
             <a:r>
-              <a:t>11 classes</a:t>
+              <a:t>17 classes</a:t>
             </a:r>
           </a:p>
         </p:txBody>
@@ -35173,7 +33840,7 @@
               </a:defRPr>
             </a:pPr>
             <a:r>
-              <a:t>CreativeWork / Film</a:t>
+              <a:t>DBpedia classes and hierarchy</a:t>
             </a:r>
           </a:p>
         </p:txBody>
@@ -35261,7 +33928,7 @@
               </a:defRPr>
             </a:pPr>
             <a:r>
-              <a:t>8 classes</a:t>
+              <a:t>1 class</a:t>
             </a:r>
           </a:p>
         </p:txBody>
@@ -35306,7 +33973,7 @@
               </a:defRPr>
             </a:pPr>
             <a:r>
-              <a:t>Agent / Person / Organization</a:t>
+              <a:t>void:Dataset</a:t>
             </a:r>
           </a:p>
         </p:txBody>
@@ -35394,7 +34061,7 @@
               </a:defRPr>
             </a:pPr>
             <a:r>
-              <a:t>6 classes</a:t>
+              <a:t>3 classes</a:t>
             </a:r>
           </a:p>
         </p:txBody>
@@ -35439,7 +34106,7 @@
               </a:defRPr>
             </a:pPr>
             <a:r>
-              <a:t>Contribution / ContributionRole</a:t>
+              <a:t>Contribution / Role / SourceSnapshot</a:t>
             </a:r>
           </a:p>
         </p:txBody>
@@ -35527,7 +34194,7 @@
               </a:defRPr>
             </a:pPr>
             <a:r>
-              <a:t>8 classes</a:t>
+              <a:t>2 classes</a:t>
             </a:r>
           </a:p>
         </p:txBody>
@@ -35572,7 +34239,7 @@
               </a:defRPr>
             </a:pPr>
             <a:r>
-              <a:t>Genre</a:t>
+              <a:t>ActionGenre / DramaGenre</a:t>
             </a:r>
           </a:p>
         </p:txBody>
@@ -35660,7 +34327,7 @@
               </a:defRPr>
             </a:pPr>
             <a:r>
-              <a:t>5 classes</a:t>
+              <a:t>4 classes</a:t>
             </a:r>
           </a:p>
         </p:txBody>
@@ -35705,7 +34372,7 @@
               </a:defRPr>
             </a:pPr>
             <a:r>
-              <a:t>Award</a:t>
+              <a:t>Role-defined credit subclasses</a:t>
             </a:r>
           </a:p>
         </p:txBody>
@@ -35793,7 +34460,7 @@
               </a:defRPr>
             </a:pPr>
             <a:r>
-              <a:t>4 classes</a:t>
+              <a:t>10 classes</a:t>
             </a:r>
           </a:p>
         </p:txBody>
@@ -35838,7 +34505,7 @@
               </a:defRPr>
             </a:pPr>
             <a:r>
-              <a:t>Country / Language / SourceSnapshot / Dataset</a:t>
+              <a:t>Domain inferred subsets</a:t>
             </a:r>
           </a:p>
         </p:txBody>
@@ -35883,7 +34550,7 @@
               </a:defRPr>
             </a:pPr>
             <a:r>
-              <a:t>3 DBpedia classes + 39 ex: classes</a:t>
+              <a:t>37 named classes: 17 dbo: + 1 void: + 19 ex:</a:t>
             </a:r>
           </a:p>
           <a:p>
@@ -35905,7 +34572,7 @@
               </a:defRPr>
             </a:pPr>
             <a:r>
-              <a:t>14 classes receive types; 42 classes explicitly declared.</a:t>
+              <a:t>10 inferred subsets + 4 supporting credit types.</a:t>
             </a:r>
           </a:p>
         </p:txBody>
@@ -36083,7 +34750,7 @@
               </a:defRPr>
             </a:pPr>
             <a:r>
-              <a:t>Ontology IRI và phiên bản</a:t>
+              <a:t>IRI và phiên bản 3.0.0</a:t>
             </a:r>
           </a:p>
         </p:txBody>
@@ -36173,7 +34840,7 @@
               </a:defRPr>
             </a:pPr>
             <a:r>
-              <a:t>1. Mở ontology/Movie_Ontology.owl.</a:t>
+              <a:t>1. Mở ontology/Movie_Knowledge_Graph.owl.</a:t>
             </a:r>
           </a:p>
         </p:txBody>
@@ -36263,7 +34930,7 @@
               </a:defRPr>
             </a:pPr>
             <a:r>
-              <a:t>3. Giữ IRI ontology và versionInfo 2.0.0 trong khung hình.</a:t>
+              <a:t>3. Giữ IRI và versionInfo 3.0.0 trong ảnh.</a:t>
             </a:r>
           </a:p>
         </p:txBody>
@@ -36422,7 +35089,7 @@
               </a:defRPr>
             </a:pPr>
             <a:r>
-              <a:t>MOVIELOD / SEMANTIC WEB / ONTOLOGY 2.0</a:t>
+              <a:t>MOVIELOD / SEMANTIC WEB / ONTOLOGY 3.0.0</a:t>
             </a:r>
           </a:p>
         </p:txBody>
@@ -36467,7 +35134,7 @@
               </a:defRPr>
             </a:pPr>
             <a:r>
-              <a:t>R1 · Creative works and film classes</a:t>
+              <a:t>Work and Film: meaningful inferred subsets</a:t>
             </a:r>
           </a:p>
         </p:txBody>
@@ -36512,7 +35179,7 @@
               </a:defRPr>
             </a:pPr>
             <a:r>
-              <a:t>Class definitions and additional instance types · (I) marks additional classification</a:t>
+              <a:t>No unsupported feature, animation or documentary declarations</a:t>
             </a:r>
           </a:p>
         </p:txBody>
@@ -36600,7 +35267,7 @@
               </a:defRPr>
             </a:pPr>
             <a:r>
-              <a:t>Data checked: 08 Oct 2026 • Sources: project code and evidence/</a:t>
+              <a:t>Data checked: 09 Oct 2026 • Sources: project code and evidence/</a:t>
             </a:r>
           </a:p>
         </p:txBody>
@@ -36659,7 +35326,7 @@
         <p:spPr>
           <a:xfrm>
             <a:off x="731520" y="2615184"/>
-            <a:ext cx="6720840" cy="4389120"/>
+            <a:ext cx="6720840" cy="2560320"/>
           </a:xfrm>
           <a:prstGeom prst="roundRect">
             <a:avLst/>
@@ -36733,7 +35400,7 @@
               </a:defRPr>
             </a:pPr>
             <a:r>
-              <a:t>CreativeWork</a:t>
+              <a:t>dbo:Work</a:t>
             </a:r>
           </a:p>
         </p:txBody>
@@ -36821,7 +35488,7 @@
               </a:defRPr>
             </a:pPr>
             <a:r>
-              <a:t>dbo:Film</a:t>
+              <a:t>dbo:Film · 30</a:t>
             </a:r>
           </a:p>
         </p:txBody>
@@ -36909,7 +35576,7 @@
               </a:defRPr>
             </a:pPr>
             <a:r>
-              <a:t>FeatureFilm · 29 films</a:t>
+              <a:t>ActionFilm · 12</a:t>
             </a:r>
           </a:p>
         </p:txBody>
@@ -36997,7 +35664,7 @@
               </a:defRPr>
             </a:pPr>
             <a:r>
-              <a:t>AnimatedFilm · 1 film</a:t>
+              <a:t>AwardWinningFilm · 26</a:t>
             </a:r>
           </a:p>
         </p:txBody>
@@ -37085,7 +35752,7 @@
               </a:defRPr>
             </a:pPr>
             <a:r>
-              <a:t>DocumentaryFilm · 0 films</a:t>
+              <a:t>AwardWinningActionFilm · 10</a:t>
             </a:r>
           </a:p>
         </p:txBody>
@@ -37173,454 +35840,14 @@
               </a:defRPr>
             </a:pPr>
             <a:r>
-              <a:t>ActionFilm (I)</a:t>
-            </a:r>
-          </a:p>
-        </p:txBody>
-      </p:sp>
-      <p:sp>
-        <p:nvSpPr>
-          <p:cNvPr id="21" name="Rectangle 20"/>
-          <p:cNvSpPr/>
-          <p:nvPr/>
-        </p:nvSpPr>
-        <p:spPr>
-          <a:xfrm>
-            <a:off x="1124712" y="4983479"/>
-            <a:ext cx="20116" cy="329184"/>
-          </a:xfrm>
-          <a:prstGeom prst="rect">
-            <a:avLst/>
-          </a:prstGeom>
-          <a:solidFill>
-            <a:srgbClr val="007F82"/>
-          </a:solidFill>
-          <a:ln>
-            <a:noFill/>
-          </a:ln>
-        </p:spPr>
-        <p:style>
-          <a:lnRef idx="1">
-            <a:schemeClr val="accent1"/>
-          </a:lnRef>
-          <a:fillRef idx="3">
-            <a:schemeClr val="accent1"/>
-          </a:fillRef>
-          <a:effectRef idx="2">
-            <a:schemeClr val="accent1"/>
-          </a:effectRef>
-          <a:fontRef idx="minor">
-            <a:schemeClr val="lt1"/>
-          </a:fontRef>
-        </p:style>
-        <p:txBody>
-          <a:bodyPr rtlCol="0" anchor="ctr"/>
-          <a:lstStyle/>
-          <a:p>
-            <a:pPr algn="ctr"/>
-          </a:p>
-        </p:txBody>
-      </p:sp>
-      <p:sp>
-        <p:nvSpPr>
-          <p:cNvPr id="22" name="TextBox 21"/>
-          <p:cNvSpPr txBox="1"/>
-          <p:nvPr/>
-        </p:nvSpPr>
-        <p:spPr>
-          <a:xfrm>
-            <a:off x="1426464" y="4965192"/>
-            <a:ext cx="5769863" cy="393192"/>
-          </a:xfrm>
-          <a:prstGeom prst="rect">
-            <a:avLst/>
-          </a:prstGeom>
-          <a:noFill/>
-        </p:spPr>
-        <p:txBody>
-          <a:bodyPr wrap="none" lIns="0" rIns="0" tIns="0" bIns="0">
-            <a:spAutoFit/>
-          </a:bodyPr>
-          <a:lstStyle/>
-          <a:p>
-            <a:pPr>
-              <a:lnSpc>
-                <a:spcPts val="2304"/>
-              </a:lnSpc>
-              <a:spcBef>
-                <a:spcPts val="0"/>
-              </a:spcBef>
-              <a:spcAft>
-                <a:spcPts val="0"/>
-              </a:spcAft>
-              <a:defRPr sz="1800" b="0">
-                <a:solidFill>
-                  <a:srgbClr val="152B3A"/>
-                </a:solidFill>
-                <a:latin typeface="Be Vietnam Pro"/>
-              </a:defRPr>
-            </a:pPr>
-            <a:r>
-              <a:t>ComedyFilm (I)</a:t>
-            </a:r>
-          </a:p>
-        </p:txBody>
-      </p:sp>
-      <p:sp>
-        <p:nvSpPr>
-          <p:cNvPr id="23" name="Rectangle 22"/>
-          <p:cNvSpPr/>
-          <p:nvPr/>
-        </p:nvSpPr>
-        <p:spPr>
-          <a:xfrm>
-            <a:off x="1124712" y="5349240"/>
-            <a:ext cx="20116" cy="329184"/>
-          </a:xfrm>
-          <a:prstGeom prst="rect">
-            <a:avLst/>
-          </a:prstGeom>
-          <a:solidFill>
-            <a:srgbClr val="007F82"/>
-          </a:solidFill>
-          <a:ln>
-            <a:noFill/>
-          </a:ln>
-        </p:spPr>
-        <p:style>
-          <a:lnRef idx="1">
-            <a:schemeClr val="accent1"/>
-          </a:lnRef>
-          <a:fillRef idx="3">
-            <a:schemeClr val="accent1"/>
-          </a:fillRef>
-          <a:effectRef idx="2">
-            <a:schemeClr val="accent1"/>
-          </a:effectRef>
-          <a:fontRef idx="minor">
-            <a:schemeClr val="lt1"/>
-          </a:fontRef>
-        </p:style>
-        <p:txBody>
-          <a:bodyPr rtlCol="0" anchor="ctr"/>
-          <a:lstStyle/>
-          <a:p>
-            <a:pPr algn="ctr"/>
-          </a:p>
-        </p:txBody>
-      </p:sp>
-      <p:sp>
-        <p:nvSpPr>
-          <p:cNvPr id="24" name="TextBox 23"/>
-          <p:cNvSpPr txBox="1"/>
-          <p:nvPr/>
-        </p:nvSpPr>
-        <p:spPr>
-          <a:xfrm>
-            <a:off x="1426464" y="5330952"/>
-            <a:ext cx="5769863" cy="393192"/>
-          </a:xfrm>
-          <a:prstGeom prst="rect">
-            <a:avLst/>
-          </a:prstGeom>
-          <a:noFill/>
-        </p:spPr>
-        <p:txBody>
-          <a:bodyPr wrap="none" lIns="0" rIns="0" tIns="0" bIns="0">
-            <a:spAutoFit/>
-          </a:bodyPr>
-          <a:lstStyle/>
-          <a:p>
-            <a:pPr>
-              <a:lnSpc>
-                <a:spcPts val="2304"/>
-              </a:lnSpc>
-              <a:spcBef>
-                <a:spcPts val="0"/>
-              </a:spcBef>
-              <a:spcAft>
-                <a:spcPts val="0"/>
-              </a:spcAft>
-              <a:defRPr sz="1800" b="0">
-                <a:solidFill>
-                  <a:srgbClr val="152B3A"/>
-                </a:solidFill>
-                <a:latin typeface="Be Vietnam Pro"/>
-              </a:defRPr>
-            </a:pPr>
-            <a:r>
-              <a:t>DramaFilm (I)</a:t>
-            </a:r>
-          </a:p>
-        </p:txBody>
-      </p:sp>
-      <p:sp>
-        <p:nvSpPr>
-          <p:cNvPr id="25" name="Rectangle 24"/>
-          <p:cNvSpPr/>
-          <p:nvPr/>
-        </p:nvSpPr>
-        <p:spPr>
-          <a:xfrm>
-            <a:off x="1124712" y="5715000"/>
-            <a:ext cx="20116" cy="329184"/>
-          </a:xfrm>
-          <a:prstGeom prst="rect">
-            <a:avLst/>
-          </a:prstGeom>
-          <a:solidFill>
-            <a:srgbClr val="007F82"/>
-          </a:solidFill>
-          <a:ln>
-            <a:noFill/>
-          </a:ln>
-        </p:spPr>
-        <p:style>
-          <a:lnRef idx="1">
-            <a:schemeClr val="accent1"/>
-          </a:lnRef>
-          <a:fillRef idx="3">
-            <a:schemeClr val="accent1"/>
-          </a:fillRef>
-          <a:effectRef idx="2">
-            <a:schemeClr val="accent1"/>
-          </a:effectRef>
-          <a:fontRef idx="minor">
-            <a:schemeClr val="lt1"/>
-          </a:fontRef>
-        </p:style>
-        <p:txBody>
-          <a:bodyPr rtlCol="0" anchor="ctr"/>
-          <a:lstStyle/>
-          <a:p>
-            <a:pPr algn="ctr"/>
-          </a:p>
-        </p:txBody>
-      </p:sp>
-      <p:sp>
-        <p:nvSpPr>
-          <p:cNvPr id="26" name="TextBox 25"/>
-          <p:cNvSpPr txBox="1"/>
-          <p:nvPr/>
-        </p:nvSpPr>
-        <p:spPr>
-          <a:xfrm>
-            <a:off x="1426464" y="5696712"/>
-            <a:ext cx="5769863" cy="393192"/>
-          </a:xfrm>
-          <a:prstGeom prst="rect">
-            <a:avLst/>
-          </a:prstGeom>
-          <a:noFill/>
-        </p:spPr>
-        <p:txBody>
-          <a:bodyPr wrap="none" lIns="0" rIns="0" tIns="0" bIns="0">
-            <a:spAutoFit/>
-          </a:bodyPr>
-          <a:lstStyle/>
-          <a:p>
-            <a:pPr>
-              <a:lnSpc>
-                <a:spcPts val="2304"/>
-              </a:lnSpc>
-              <a:spcBef>
-                <a:spcPts val="0"/>
-              </a:spcBef>
-              <a:spcAft>
-                <a:spcPts val="0"/>
-              </a:spcAft>
-              <a:defRPr sz="1800" b="0">
-                <a:solidFill>
-                  <a:srgbClr val="152B3A"/>
-                </a:solidFill>
-                <a:latin typeface="Be Vietnam Pro"/>
-              </a:defRPr>
-            </a:pPr>
-            <a:r>
-              <a:t>ScienceFictionFilm (I)</a:t>
-            </a:r>
-          </a:p>
-        </p:txBody>
-      </p:sp>
-      <p:sp>
-        <p:nvSpPr>
-          <p:cNvPr id="27" name="Rectangle 26"/>
-          <p:cNvSpPr/>
-          <p:nvPr/>
-        </p:nvSpPr>
-        <p:spPr>
-          <a:xfrm>
-            <a:off x="1124712" y="6080759"/>
-            <a:ext cx="20116" cy="329184"/>
-          </a:xfrm>
-          <a:prstGeom prst="rect">
-            <a:avLst/>
-          </a:prstGeom>
-          <a:solidFill>
-            <a:srgbClr val="007F82"/>
-          </a:solidFill>
-          <a:ln>
-            <a:noFill/>
-          </a:ln>
-        </p:spPr>
-        <p:style>
-          <a:lnRef idx="1">
-            <a:schemeClr val="accent1"/>
-          </a:lnRef>
-          <a:fillRef idx="3">
-            <a:schemeClr val="accent1"/>
-          </a:fillRef>
-          <a:effectRef idx="2">
-            <a:schemeClr val="accent1"/>
-          </a:effectRef>
-          <a:fontRef idx="minor">
-            <a:schemeClr val="lt1"/>
-          </a:fontRef>
-        </p:style>
-        <p:txBody>
-          <a:bodyPr rtlCol="0" anchor="ctr"/>
-          <a:lstStyle/>
-          <a:p>
-            <a:pPr algn="ctr"/>
-          </a:p>
-        </p:txBody>
-      </p:sp>
-      <p:sp>
-        <p:nvSpPr>
-          <p:cNvPr id="28" name="TextBox 27"/>
-          <p:cNvSpPr txBox="1"/>
-          <p:nvPr/>
-        </p:nvSpPr>
-        <p:spPr>
-          <a:xfrm>
-            <a:off x="1426464" y="6062472"/>
-            <a:ext cx="5769863" cy="393192"/>
-          </a:xfrm>
-          <a:prstGeom prst="rect">
-            <a:avLst/>
-          </a:prstGeom>
-          <a:noFill/>
-        </p:spPr>
-        <p:txBody>
-          <a:bodyPr wrap="none" lIns="0" rIns="0" tIns="0" bIns="0">
-            <a:spAutoFit/>
-          </a:bodyPr>
-          <a:lstStyle/>
-          <a:p>
-            <a:pPr>
-              <a:lnSpc>
-                <a:spcPts val="2304"/>
-              </a:lnSpc>
-              <a:spcBef>
-                <a:spcPts val="0"/>
-              </a:spcBef>
-              <a:spcAft>
-                <a:spcPts val="0"/>
-              </a:spcAft>
-              <a:defRPr sz="1800" b="0">
-                <a:solidFill>
-                  <a:srgbClr val="152B3A"/>
-                </a:solidFill>
-                <a:latin typeface="Be Vietnam Pro"/>
-              </a:defRPr>
-            </a:pPr>
-            <a:r>
-              <a:t>MultiGenreFilm (I)</a:t>
-            </a:r>
-          </a:p>
-        </p:txBody>
-      </p:sp>
-      <p:sp>
-        <p:nvSpPr>
-          <p:cNvPr id="29" name="Rectangle 28"/>
-          <p:cNvSpPr/>
-          <p:nvPr/>
-        </p:nvSpPr>
-        <p:spPr>
-          <a:xfrm>
-            <a:off x="1124712" y="6446519"/>
-            <a:ext cx="20116" cy="329184"/>
-          </a:xfrm>
-          <a:prstGeom prst="rect">
-            <a:avLst/>
-          </a:prstGeom>
-          <a:solidFill>
-            <a:srgbClr val="007F82"/>
-          </a:solidFill>
-          <a:ln>
-            <a:noFill/>
-          </a:ln>
-        </p:spPr>
-        <p:style>
-          <a:lnRef idx="1">
-            <a:schemeClr val="accent1"/>
-          </a:lnRef>
-          <a:fillRef idx="3">
-            <a:schemeClr val="accent1"/>
-          </a:fillRef>
-          <a:effectRef idx="2">
-            <a:schemeClr val="accent1"/>
-          </a:effectRef>
-          <a:fontRef idx="minor">
-            <a:schemeClr val="lt1"/>
-          </a:fontRef>
-        </p:style>
-        <p:txBody>
-          <a:bodyPr rtlCol="0" anchor="ctr"/>
-          <a:lstStyle/>
-          <a:p>
-            <a:pPr algn="ctr"/>
-          </a:p>
-        </p:txBody>
-      </p:sp>
-      <p:sp>
-        <p:nvSpPr>
-          <p:cNvPr id="30" name="TextBox 29"/>
-          <p:cNvSpPr txBox="1"/>
-          <p:nvPr/>
-        </p:nvSpPr>
-        <p:spPr>
-          <a:xfrm>
-            <a:off x="1426464" y="6428231"/>
-            <a:ext cx="5769863" cy="393192"/>
-          </a:xfrm>
-          <a:prstGeom prst="rect">
-            <a:avLst/>
-          </a:prstGeom>
-          <a:noFill/>
-        </p:spPr>
-        <p:txBody>
-          <a:bodyPr wrap="none" lIns="0" rIns="0" tIns="0" bIns="0">
-            <a:spAutoFit/>
-          </a:bodyPr>
-          <a:lstStyle/>
-          <a:p>
-            <a:pPr>
-              <a:lnSpc>
-                <a:spcPts val="2304"/>
-              </a:lnSpc>
-              <a:spcBef>
-                <a:spcPts val="0"/>
-              </a:spcBef>
-              <a:spcAft>
-                <a:spcPts val="0"/>
-              </a:spcAft>
-              <a:defRPr sz="1800" b="0">
-                <a:solidFill>
-                  <a:srgbClr val="152B3A"/>
-                </a:solidFill>
-                <a:latin typeface="Be Vietnam Pro"/>
-              </a:defRPr>
-            </a:pPr>
-            <a:r>
-              <a:t>AwardWinningFilm (I)</a:t>
-            </a:r>
-          </a:p>
-        </p:txBody>
-      </p:sp>
-      <p:sp>
-        <p:nvSpPr>
-          <p:cNvPr id="31" name="PHOTO_P01_0"/>
+              <a:t>GenreCrossingFilm · 8</a:t>
+            </a:r>
+          </a:p>
+        </p:txBody>
+      </p:sp>
+      <p:sp>
+        <p:nvSpPr>
+          <p:cNvPr id="21" name="PHOTO_P01_0"/>
           <p:cNvSpPr/>
           <p:nvPr/>
         </p:nvSpPr>
@@ -37665,7 +35892,7 @@
       </p:sp>
       <p:sp>
         <p:nvSpPr>
-          <p:cNvPr id="32" name="PHOTO_P01_1"/>
+          <p:cNvPr id="22" name="PHOTO_P01_1"/>
           <p:cNvSpPr txBox="1"/>
           <p:nvPr/>
         </p:nvSpPr>
@@ -37710,7 +35937,7 @@
       </p:sp>
       <p:sp>
         <p:nvSpPr>
-          <p:cNvPr id="33" name="PHOTO_P01_2"/>
+          <p:cNvPr id="23" name="PHOTO_P01_2"/>
           <p:cNvSpPr/>
           <p:nvPr/>
         </p:nvSpPr>
@@ -37753,7 +35980,7 @@
       </p:sp>
       <p:sp>
         <p:nvSpPr>
-          <p:cNvPr id="34" name="PHOTO_P01_3"/>
+          <p:cNvPr id="24" name="PHOTO_P01_3"/>
           <p:cNvSpPr txBox="1"/>
           <p:nvPr/>
         </p:nvSpPr>
@@ -37791,14 +36018,14 @@
               </a:defRPr>
             </a:pPr>
             <a:r>
-              <a:t>Cây lớp phim</a:t>
-            </a:r>
-          </a:p>
-        </p:txBody>
-      </p:sp>
-      <p:sp>
-        <p:nvSpPr>
-          <p:cNvPr id="35" name="PHOTO_P01_4"/>
+              <a:t>Cây Work / Film</a:t>
+            </a:r>
+          </a:p>
+        </p:txBody>
+      </p:sp>
+      <p:sp>
+        <p:nvSpPr>
+          <p:cNvPr id="25" name="PHOTO_P01_4"/>
           <p:cNvSpPr txBox="1"/>
           <p:nvPr/>
         </p:nvSpPr>
@@ -37843,7 +36070,7 @@
       </p:sp>
       <p:sp>
         <p:nvSpPr>
-          <p:cNvPr id="36" name="PHOTO_P01_5"/>
+          <p:cNvPr id="26" name="PHOTO_P01_5"/>
           <p:cNvSpPr txBox="1"/>
           <p:nvPr/>
         </p:nvSpPr>
@@ -37881,7 +36108,7 @@
               </a:defRPr>
             </a:pPr>
             <a:r>
-              <a:t>1. Entities </a:t>
+              <a:t>1. Mở Classes </a:t>
             </a:r>
             <a:r>
               <a:rPr>
@@ -37890,7 +36117,7 @@
               <a:t>→</a:t>
             </a:r>
             <a:r>
-              <a:t> Classes </a:t>
+              <a:t> dbo:Work </a:t>
             </a:r>
             <a:r>
               <a:rPr>
@@ -37899,14 +36126,14 @@
               <a:t>→</a:t>
             </a:r>
             <a:r>
-              <a:t> mở CreativeWork và Film.</a:t>
-            </a:r>
-          </a:p>
-        </p:txBody>
-      </p:sp>
-      <p:sp>
-        <p:nvSpPr>
-          <p:cNvPr id="37" name="PHOTO_P01_6"/>
+              <a:t> dbo:Film.</a:t>
+            </a:r>
+          </a:p>
+        </p:txBody>
+      </p:sp>
+      <p:sp>
+        <p:nvSpPr>
+          <p:cNvPr id="27" name="PHOTO_P01_6"/>
           <p:cNvSpPr txBox="1"/>
           <p:nvPr/>
         </p:nvSpPr>
@@ -37944,14 +36171,14 @@
               </a:defRPr>
             </a:pPr>
             <a:r>
-              <a:t>2. Hiện các lớp con FeatureFilm, AnimatedFilm và nhóm phim.</a:t>
-            </a:r>
-          </a:p>
-        </p:txBody>
-      </p:sp>
-      <p:sp>
-        <p:nvSpPr>
-          <p:cNvPr id="38" name="PHOTO_P01_7"/>
+              <a:t>2. Hiện ActionFilm, AwardWinningFilm và các lớp giao.</a:t>
+            </a:r>
+          </a:p>
+        </p:txBody>
+      </p:sp>
+      <p:sp>
+        <p:nvSpPr>
+          <p:cNvPr id="28" name="PHOTO_P01_7"/>
           <p:cNvSpPr txBox="1"/>
           <p:nvPr/>
         </p:nvSpPr>
@@ -37989,14 +36216,14 @@
               </a:defRPr>
             </a:pPr>
             <a:r>
-              <a:t>3. Chọn Film; giữ IRI DBpedia và Class Description.</a:t>
-            </a:r>
-          </a:p>
-        </p:txBody>
-      </p:sp>
-      <p:sp>
-        <p:nvSpPr>
-          <p:cNvPr id="39" name="PHOTO_P01_8"/>
+              <a:t>3. Giữ IRI DBpedia của Film trong Description.</a:t>
+            </a:r>
+          </a:p>
+        </p:txBody>
+      </p:sp>
+      <p:sp>
+        <p:nvSpPr>
+          <p:cNvPr id="29" name="PHOTO_P01_8"/>
           <p:cNvSpPr txBox="1"/>
           <p:nvPr/>
         </p:nvSpPr>
@@ -38041,7 +36268,7 @@
       </p:sp>
       <p:sp>
         <p:nvSpPr>
-          <p:cNvPr id="40" name="TextBox 39"/>
+          <p:cNvPr id="30" name="TextBox 29"/>
           <p:cNvSpPr txBox="1"/>
           <p:nvPr/>
         </p:nvSpPr>
@@ -38079,7 +36306,7 @@
               </a:defRPr>
             </a:pPr>
             <a:r>
-              <a:t>(I): additional types. FeatureFilm/AnimatedFilm follow P31 mapping; DocumentaryFilm has no sample instances.</a:t>
+              <a:t>Membership is inferred from source-supported facts; genre buckets are explicit author mappings.</a:t>
             </a:r>
           </a:p>
         </p:txBody>
@@ -38193,7 +36420,7 @@
               </a:defRPr>
             </a:pPr>
             <a:r>
-              <a:t>MOVIELOD / SEMANTIC WEB / ONTOLOGY 2.0</a:t>
+              <a:t>MOVIELOD / SEMANTIC WEB / ONTOLOGY 3.0.0</a:t>
             </a:r>
           </a:p>
         </p:txBody>
@@ -38238,7 +36465,7 @@
               </a:defRPr>
             </a:pPr>
             <a:r>
-              <a:t>R1 · People, organizations and roles</a:t>
+              <a:t>People and companies: reuse DBpedia hierarchy</a:t>
             </a:r>
           </a:p>
         </p:txBody>
@@ -38283,7 +36510,7 @@
               </a:defRPr>
             </a:pPr>
             <a:r>
-              <a:t>A person may be both an Actor and a Filmmaker</a:t>
+              <a:t>Actor and Filmmaker may overlap; roles remain individuals</a:t>
             </a:r>
           </a:p>
         </p:txBody>
@@ -38371,7 +36598,7 @@
               </a:defRPr>
             </a:pPr>
             <a:r>
-              <a:t>Data checked: 08 Oct 2026 • Sources: project code and evidence/</a:t>
+              <a:t>Data checked: 09 Oct 2026 • Sources: project code and evidence/</a:t>
             </a:r>
           </a:p>
         </p:txBody>
@@ -38430,7 +36657,7 @@
         <p:spPr>
           <a:xfrm>
             <a:off x="731520" y="2615184"/>
-            <a:ext cx="6720840" cy="3291840"/>
+            <a:ext cx="6720840" cy="3657600"/>
           </a:xfrm>
           <a:prstGeom prst="roundRect">
             <a:avLst/>
@@ -38504,7 +36731,7 @@
               </a:defRPr>
             </a:pPr>
             <a:r>
-              <a:t>Agent</a:t>
+              <a:t>dbo:Agent</a:t>
             </a:r>
           </a:p>
         </p:txBody>
@@ -38592,7 +36819,7 @@
               </a:defRPr>
             </a:pPr>
             <a:r>
-              <a:t>dbo:Person · 851 people</a:t>
+              <a:t>dbo:Person · 851</a:t>
             </a:r>
           </a:p>
         </p:txBody>
@@ -38680,7 +36907,16 @@
               </a:defRPr>
             </a:pPr>
             <a:r>
-              <a:t>Actor (I) · 769</a:t>
+              <a:t>dbo:Artist </a:t>
+            </a:r>
+            <a:r>
+              <a:rPr>
+                <a:latin typeface="Arial Unicode MS"/>
+              </a:rPr>
+              <a:t>→</a:t>
+            </a:r>
+            <a:r>
+              <a:t> dbo:Actor · 769</a:t>
             </a:r>
           </a:p>
         </p:txBody>
@@ -38768,7 +37004,7 @@
               </a:defRPr>
             </a:pPr>
             <a:r>
-              <a:t>Filmmaker (I) · 89</a:t>
+              <a:t>dbo:MovieDirector · 17</a:t>
             </a:r>
           </a:p>
         </p:txBody>
@@ -38856,7 +37092,16 @@
               </a:defRPr>
             </a:pPr>
             <a:r>
-              <a:t>AwardWinner (I) · 290</a:t>
+              <a:t>dbo:Writer </a:t>
+            </a:r>
+            <a:r>
+              <a:rPr>
+                <a:latin typeface="Arial Unicode MS"/>
+              </a:rPr>
+              <a:t>→</a:t>
+            </a:r>
+            <a:r>
+              <a:t> ScreenWriter · 34</a:t>
             </a:r>
           </a:p>
         </p:txBody>
@@ -38869,7 +37114,7 @@
         </p:nvSpPr>
         <p:spPr>
           <a:xfrm>
-            <a:off x="905256" y="4617719"/>
+            <a:off x="1124712" y="4617719"/>
             <a:ext cx="20116" cy="329184"/>
           </a:xfrm>
           <a:prstGeom prst="rect">
@@ -38912,8 +37157,8 @@
         </p:nvSpPr>
         <p:spPr>
           <a:xfrm>
-            <a:off x="1207008" y="4599431"/>
-            <a:ext cx="5989319" cy="393192"/>
+            <a:off x="1426464" y="4599431"/>
+            <a:ext cx="5769863" cy="393192"/>
           </a:xfrm>
           <a:prstGeom prst="rect">
             <a:avLst/>
@@ -38936,7 +37181,7 @@
               <a:spcAft>
                 <a:spcPts val="0"/>
               </a:spcAft>
-              <a:defRPr sz="1800" b="1">
+              <a:defRPr sz="1800" b="0">
                 <a:solidFill>
                   <a:srgbClr val="152B3A"/>
                 </a:solidFill>
@@ -38944,7 +37189,7 @@
               </a:defRPr>
             </a:pPr>
             <a:r>
-              <a:t>Organization</a:t>
+              <a:t>dbo:Producer · 57</a:t>
             </a:r>
           </a:p>
         </p:txBody>
@@ -39032,7 +37277,7 @@
               </a:defRPr>
             </a:pPr>
             <a:r>
-              <a:t>ProductionCompany · 45</a:t>
+              <a:t>Filmmaker · 89; WriterDirector · 10</a:t>
             </a:r>
           </a:p>
         </p:txBody>
@@ -39045,7 +37290,7 @@
         </p:nvSpPr>
         <p:spPr>
           <a:xfrm>
-            <a:off x="1344168" y="5349240"/>
+            <a:off x="905256" y="5349240"/>
             <a:ext cx="20116" cy="329184"/>
           </a:xfrm>
           <a:prstGeom prst="rect">
@@ -39088,8 +37333,8 @@
         </p:nvSpPr>
         <p:spPr>
           <a:xfrm>
-            <a:off x="1645920" y="5330952"/>
-            <a:ext cx="5550407" cy="393192"/>
+            <a:off x="1207008" y="5330952"/>
+            <a:ext cx="5989319" cy="393192"/>
           </a:xfrm>
           <a:prstGeom prst="rect">
             <a:avLst/>
@@ -39112,6 +37357,94 @@
               <a:spcAft>
                 <a:spcPts val="0"/>
               </a:spcAft>
+              <a:defRPr sz="1800" b="1">
+                <a:solidFill>
+                  <a:srgbClr val="152B3A"/>
+                </a:solidFill>
+                <a:latin typeface="Be Vietnam Pro"/>
+              </a:defRPr>
+            </a:pPr>
+            <a:r>
+              <a:t>dbo:Organisation</a:t>
+            </a:r>
+          </a:p>
+        </p:txBody>
+      </p:sp>
+      <p:sp>
+        <p:nvSpPr>
+          <p:cNvPr id="25" name="Rectangle 24"/>
+          <p:cNvSpPr/>
+          <p:nvPr/>
+        </p:nvSpPr>
+        <p:spPr>
+          <a:xfrm>
+            <a:off x="1124712" y="5715000"/>
+            <a:ext cx="20116" cy="329184"/>
+          </a:xfrm>
+          <a:prstGeom prst="rect">
+            <a:avLst/>
+          </a:prstGeom>
+          <a:solidFill>
+            <a:srgbClr val="007F82"/>
+          </a:solidFill>
+          <a:ln>
+            <a:noFill/>
+          </a:ln>
+        </p:spPr>
+        <p:style>
+          <a:lnRef idx="1">
+            <a:schemeClr val="accent1"/>
+          </a:lnRef>
+          <a:fillRef idx="3">
+            <a:schemeClr val="accent1"/>
+          </a:fillRef>
+          <a:effectRef idx="2">
+            <a:schemeClr val="accent1"/>
+          </a:effectRef>
+          <a:fontRef idx="minor">
+            <a:schemeClr val="lt1"/>
+          </a:fontRef>
+        </p:style>
+        <p:txBody>
+          <a:bodyPr rtlCol="0" anchor="ctr"/>
+          <a:lstStyle/>
+          <a:p>
+            <a:pPr algn="ctr"/>
+          </a:p>
+        </p:txBody>
+      </p:sp>
+      <p:sp>
+        <p:nvSpPr>
+          <p:cNvPr id="26" name="TextBox 25"/>
+          <p:cNvSpPr txBox="1"/>
+          <p:nvPr/>
+        </p:nvSpPr>
+        <p:spPr>
+          <a:xfrm>
+            <a:off x="1426464" y="5696712"/>
+            <a:ext cx="5769863" cy="393192"/>
+          </a:xfrm>
+          <a:prstGeom prst="rect">
+            <a:avLst/>
+          </a:prstGeom>
+          <a:noFill/>
+        </p:spPr>
+        <p:txBody>
+          <a:bodyPr wrap="none" lIns="0" rIns="0" tIns="0" bIns="0">
+            <a:spAutoFit/>
+          </a:bodyPr>
+          <a:lstStyle/>
+          <a:p>
+            <a:pPr>
+              <a:lnSpc>
+                <a:spcPts val="2304"/>
+              </a:lnSpc>
+              <a:spcBef>
+                <a:spcPts val="0"/>
+              </a:spcBef>
+              <a:spcAft>
+                <a:spcPts val="0"/>
+              </a:spcAft>
               <a:defRPr sz="1800" b="0">
                 <a:solidFill>
                   <a:srgbClr val="152B3A"/>
@@ -39120,14 +37453,14 @@
               </a:defRPr>
             </a:pPr>
             <a:r>
-              <a:t>FilmStudio · 6 by counting; DL: 0</a:t>
-            </a:r>
-          </a:p>
-        </p:txBody>
-      </p:sp>
-      <p:sp>
-        <p:nvSpPr>
-          <p:cNvPr id="25" name="PHOTO_P02_0"/>
+              <a:t>dbo:Company · 45</a:t>
+            </a:r>
+          </a:p>
+        </p:txBody>
+      </p:sp>
+      <p:sp>
+        <p:nvSpPr>
+          <p:cNvPr id="27" name="PHOTO_P02_0"/>
           <p:cNvSpPr/>
           <p:nvPr/>
         </p:nvSpPr>
@@ -39172,7 +37505,7 @@
       </p:sp>
       <p:sp>
         <p:nvSpPr>
-          <p:cNvPr id="26" name="PHOTO_P02_1"/>
+          <p:cNvPr id="28" name="PHOTO_P02_1"/>
           <p:cNvSpPr txBox="1"/>
           <p:nvPr/>
         </p:nvSpPr>
@@ -39217,7 +37550,7 @@
       </p:sp>
       <p:sp>
         <p:nvSpPr>
-          <p:cNvPr id="27" name="PHOTO_P02_2"/>
+          <p:cNvPr id="29" name="PHOTO_P02_2"/>
           <p:cNvSpPr/>
           <p:nvPr/>
         </p:nvSpPr>
@@ -39260,7 +37593,7 @@
       </p:sp>
       <p:sp>
         <p:nvSpPr>
-          <p:cNvPr id="28" name="PHOTO_P02_3"/>
+          <p:cNvPr id="30" name="PHOTO_P02_3"/>
           <p:cNvSpPr txBox="1"/>
           <p:nvPr/>
         </p:nvSpPr>
@@ -39298,14 +37631,14 @@
               </a:defRPr>
             </a:pPr>
             <a:r>
-              <a:t>Cây người và tổ chức</a:t>
-            </a:r>
-          </a:p>
-        </p:txBody>
-      </p:sp>
-      <p:sp>
-        <p:nvSpPr>
-          <p:cNvPr id="29" name="PHOTO_P02_4"/>
+              <a:t>Cây chủ thể DBpedia</a:t>
+            </a:r>
+          </a:p>
+        </p:txBody>
+      </p:sp>
+      <p:sp>
+        <p:nvSpPr>
+          <p:cNvPr id="31" name="PHOTO_P02_4"/>
           <p:cNvSpPr txBox="1"/>
           <p:nvPr/>
         </p:nvSpPr>
@@ -39350,7 +37683,7 @@
       </p:sp>
       <p:sp>
         <p:nvSpPr>
-          <p:cNvPr id="30" name="PHOTO_P02_5"/>
+          <p:cNvPr id="32" name="PHOTO_P02_5"/>
           <p:cNvSpPr txBox="1"/>
           <p:nvPr/>
         </p:nvSpPr>
@@ -39388,7 +37721,7 @@
               </a:defRPr>
             </a:pPr>
             <a:r>
-              <a:t>1. Entities </a:t>
+              <a:t>1. Mở dbo:Agent </a:t>
             </a:r>
             <a:r>
               <a:rPr>
@@ -39397,7 +37730,52 @@
               <a:t>→</a:t>
             </a:r>
             <a:r>
-              <a:t> Classes </a:t>
+              <a:t> dbo:Person và dbo:Organisation.</a:t>
+            </a:r>
+          </a:p>
+        </p:txBody>
+      </p:sp>
+      <p:sp>
+        <p:nvSpPr>
+          <p:cNvPr id="33" name="PHOTO_P02_6"/>
+          <p:cNvSpPr txBox="1"/>
+          <p:nvPr/>
+        </p:nvSpPr>
+        <p:spPr>
+          <a:xfrm>
+            <a:off x="8055864" y="5348223"/>
+            <a:ext cx="5605272" cy="264160"/>
+          </a:xfrm>
+          <a:prstGeom prst="rect">
+            <a:avLst/>
+          </a:prstGeom>
+          <a:noFill/>
+        </p:spPr>
+        <p:txBody>
+          <a:bodyPr wrap="none" lIns="0" rIns="0" tIns="0" bIns="0">
+            <a:spAutoFit/>
+          </a:bodyPr>
+          <a:lstStyle/>
+          <a:p>
+            <a:pPr>
+              <a:lnSpc>
+                <a:spcPts val="1792"/>
+              </a:lnSpc>
+              <a:spcBef>
+                <a:spcPts val="0"/>
+              </a:spcBef>
+              <a:spcAft>
+                <a:spcPts val="0"/>
+              </a:spcAft>
+              <a:defRPr sz="1400" b="0">
+                <a:solidFill>
+                  <a:srgbClr val="506776"/>
+                </a:solidFill>
+                <a:latin typeface="Be Vietnam Pro"/>
+              </a:defRPr>
+            </a:pPr>
+            <a:r>
+              <a:t>2. Hiện Artist </a:t>
             </a:r>
             <a:r>
               <a:rPr>
@@ -39406,52 +37784,7 @@
               <a:t>→</a:t>
             </a:r>
             <a:r>
-              <a:t> mở Agent.</a:t>
-            </a:r>
-          </a:p>
-        </p:txBody>
-      </p:sp>
-      <p:sp>
-        <p:nvSpPr>
-          <p:cNvPr id="31" name="PHOTO_P02_6"/>
-          <p:cNvSpPr txBox="1"/>
-          <p:nvPr/>
-        </p:nvSpPr>
-        <p:spPr>
-          <a:xfrm>
-            <a:off x="8055864" y="5348223"/>
-            <a:ext cx="5605272" cy="264160"/>
-          </a:xfrm>
-          <a:prstGeom prst="rect">
-            <a:avLst/>
-          </a:prstGeom>
-          <a:noFill/>
-        </p:spPr>
-        <p:txBody>
-          <a:bodyPr wrap="none" lIns="0" rIns="0" tIns="0" bIns="0">
-            <a:spAutoFit/>
-          </a:bodyPr>
-          <a:lstStyle/>
-          <a:p>
-            <a:pPr>
-              <a:lnSpc>
-                <a:spcPts val="1792"/>
-              </a:lnSpc>
-              <a:spcBef>
-                <a:spcPts val="0"/>
-              </a:spcBef>
-              <a:spcAft>
-                <a:spcPts val="0"/>
-              </a:spcAft>
-              <a:defRPr sz="1400" b="0">
-                <a:solidFill>
-                  <a:srgbClr val="506776"/>
-                </a:solidFill>
-                <a:latin typeface="Be Vietnam Pro"/>
-              </a:defRPr>
-            </a:pPr>
-            <a:r>
-              <a:t>2. Mở Person và Organization </a:t>
+              <a:t> Actor; Organisation </a:t>
             </a:r>
             <a:r>
               <a:rPr>
@@ -39460,14 +37793,14 @@
               <a:t>→</a:t>
             </a:r>
             <a:r>
-              <a:t> ProductionCompany.</a:t>
-            </a:r>
-          </a:p>
-        </p:txBody>
-      </p:sp>
-      <p:sp>
-        <p:nvSpPr>
-          <p:cNvPr id="32" name="PHOTO_P02_7"/>
+              <a:t> Company.</a:t>
+            </a:r>
+          </a:p>
+        </p:txBody>
+      </p:sp>
+      <p:sp>
+        <p:nvSpPr>
+          <p:cNvPr id="34" name="PHOTO_P02_7"/>
           <p:cNvSpPr txBox="1"/>
           <p:nvPr/>
         </p:nvSpPr>
@@ -39505,14 +37838,23 @@
               </a:defRPr>
             </a:pPr>
             <a:r>
-              <a:t>3. Chọn Person hoặc Filmmaker; giữ cây lớp và Description.</a:t>
-            </a:r>
-          </a:p>
-        </p:txBody>
-      </p:sp>
-      <p:sp>
-        <p:nvSpPr>
-          <p:cNvPr id="33" name="PHOTO_P02_8"/>
+              <a:t>3. Mở MovieDirector / Writer </a:t>
+            </a:r>
+            <a:r>
+              <a:rPr>
+                <a:latin typeface="Arial Unicode MS"/>
+              </a:rPr>
+              <a:t>→</a:t>
+            </a:r>
+            <a:r>
+              <a:t> ScreenWriter.</a:t>
+            </a:r>
+          </a:p>
+        </p:txBody>
+      </p:sp>
+      <p:sp>
+        <p:nvSpPr>
+          <p:cNvPr id="35" name="PHOTO_P02_8"/>
           <p:cNvSpPr txBox="1"/>
           <p:nvPr/>
         </p:nvSpPr>
@@ -39557,7 +37899,7 @@
       </p:sp>
       <p:sp>
         <p:nvSpPr>
-          <p:cNvPr id="34" name="TextBox 33"/>
+          <p:cNvPr id="36" name="TextBox 35"/>
           <p:cNvSpPr txBox="1"/>
           <p:nvPr/>
         </p:nvSpPr>
@@ -39595,7 +37937,7 @@
               </a:defRPr>
             </a:pPr>
             <a:r>
-              <a:t>Person and Organization are different kinds of agent. Actor and Filmmaker may overlap.</a:t>
+              <a:t>No ex:Actor / Organization / ProductionCompany clones; four role values describe credit records.</a:t>
             </a:r>
           </a:p>
         </p:txBody>
@@ -39709,7 +38051,7 @@
               </a:defRPr>
             </a:pPr>
             <a:r>
-              <a:t>MOVIELOD / SEMANTIC WEB / ONTOLOGY 2.0</a:t>
+              <a:t>MOVIELOD / SEMANTIC WEB / ONTOLOGY 3.0.0</a:t>
             </a:r>
           </a:p>
         </p:txBody>
@@ -39754,7 +38096,7 @@
               </a:defRPr>
             </a:pPr>
             <a:r>
-              <a:t>R1 · Genres, awards and provenance</a:t>
+              <a:t>Genre, awards and provenance</a:t>
             </a:r>
           </a:p>
         </p:txBody>
@@ -39799,7 +38141,7 @@
               </a:defRPr>
             </a:pPr>
             <a:r>
-              <a:t>Each branch supports a specific group of questions</a:t>
+              <a:t>Explicit label mappings are distinguished from logical entailment</a:t>
             </a:r>
           </a:p>
         </p:txBody>
@@ -39887,7 +38229,7 @@
               </a:defRPr>
             </a:pPr>
             <a:r>
-              <a:t>Data checked: 08 Oct 2026 • Sources: project code and evidence/</a:t>
+              <a:t>Data checked: 09 Oct 2026 • Sources: project code and evidence/</a:t>
             </a:r>
           </a:p>
         </p:txBody>
@@ -39946,7 +38288,7 @@
         <p:spPr>
           <a:xfrm>
             <a:off x="731520" y="2670048"/>
-            <a:ext cx="6720840" cy="2596896"/>
+            <a:ext cx="6720840" cy="1481328"/>
           </a:xfrm>
           <a:prstGeom prst="roundRect">
             <a:avLst/>
@@ -40020,7 +38362,7 @@
               </a:defRPr>
             </a:pPr>
             <a:r>
-              <a:t>Genre</a:t>
+              <a:t>dbo:Genre</a:t>
             </a:r>
           </a:p>
         </p:txBody>
@@ -40108,7 +38450,7 @@
               </a:defRPr>
             </a:pPr>
             <a:r>
-              <a:t>FictionGenre</a:t>
+              <a:t>dbo:MovieGenre</a:t>
             </a:r>
           </a:p>
         </p:txBody>
@@ -40196,7 +38538,7 @@
               </a:defRPr>
             </a:pPr>
             <a:r>
-              <a:t>ActionGenre</a:t>
+              <a:t>ex:ActionGenre · 3 genre entities</a:t>
             </a:r>
           </a:p>
         </p:txBody>
@@ -40284,20 +38626,108 @@
               </a:defRPr>
             </a:pPr>
             <a:r>
-              <a:t>ComedyGenre</a:t>
-            </a:r>
-          </a:p>
-        </p:txBody>
-      </p:sp>
-      <p:sp>
-        <p:nvSpPr>
-          <p:cNvPr id="17" name="Rectangle 16"/>
+              <a:t>ex:DramaGenre · 9 genre entities</a:t>
+            </a:r>
+          </a:p>
+        </p:txBody>
+      </p:sp>
+      <p:sp>
+        <p:nvSpPr>
+          <p:cNvPr id="17" name="Rounded Rectangle 16"/>
           <p:cNvSpPr/>
           <p:nvPr/>
         </p:nvSpPr>
         <p:spPr>
           <a:xfrm>
-            <a:off x="1124712" y="3959351"/>
+            <a:off x="731520" y="4251960"/>
+            <a:ext cx="6720840" cy="1202436"/>
+          </a:xfrm>
+          <a:prstGeom prst="roundRect">
+            <a:avLst/>
+          </a:prstGeom>
+          <a:solidFill>
+            <a:srgbClr val="FFFFFF"/>
+          </a:solidFill>
+          <a:ln>
+            <a:noFill/>
+          </a:ln>
+        </p:spPr>
+        <p:style>
+          <a:lnRef idx="1">
+            <a:schemeClr val="accent1"/>
+          </a:lnRef>
+          <a:fillRef idx="3">
+            <a:schemeClr val="accent1"/>
+          </a:fillRef>
+          <a:effectRef idx="2">
+            <a:schemeClr val="accent1"/>
+          </a:effectRef>
+          <a:fontRef idx="minor">
+            <a:schemeClr val="lt1"/>
+          </a:fontRef>
+        </p:style>
+        <p:txBody>
+          <a:bodyPr rtlCol="0" anchor="ctr"/>
+          <a:lstStyle/>
+          <a:p>
+            <a:pPr algn="ctr"/>
+          </a:p>
+        </p:txBody>
+      </p:sp>
+      <p:sp>
+        <p:nvSpPr>
+          <p:cNvPr id="18" name="TextBox 17"/>
+          <p:cNvSpPr txBox="1"/>
+          <p:nvPr/>
+        </p:nvSpPr>
+        <p:spPr>
+          <a:xfrm>
+            <a:off x="987552" y="4407408"/>
+            <a:ext cx="6208775" cy="306323"/>
+          </a:xfrm>
+          <a:prstGeom prst="rect">
+            <a:avLst/>
+          </a:prstGeom>
+          <a:noFill/>
+        </p:spPr>
+        <p:txBody>
+          <a:bodyPr wrap="none" lIns="0" rIns="0" tIns="0" bIns="0">
+            <a:spAutoFit/>
+          </a:bodyPr>
+          <a:lstStyle/>
+          <a:p>
+            <a:pPr>
+              <a:lnSpc>
+                <a:spcPts val="2048"/>
+              </a:lnSpc>
+              <a:spcBef>
+                <a:spcPts val="0"/>
+              </a:spcBef>
+              <a:spcAft>
+                <a:spcPts val="0"/>
+              </a:spcAft>
+              <a:defRPr sz="1600" b="1">
+                <a:solidFill>
+                  <a:srgbClr val="007F82"/>
+                </a:solidFill>
+                <a:latin typeface="Be Vietnam Pro"/>
+              </a:defRPr>
+            </a:pPr>
+            <a:r>
+              <a:t>dbo:Award · 672 entities</a:t>
+            </a:r>
+          </a:p>
+        </p:txBody>
+      </p:sp>
+      <p:sp>
+        <p:nvSpPr>
+          <p:cNvPr id="19" name="Rectangle 18"/>
+          <p:cNvSpPr/>
+          <p:nvPr/>
+        </p:nvSpPr>
+        <p:spPr>
+          <a:xfrm>
+            <a:off x="905256" y="4704588"/>
             <a:ext cx="20116" cy="242316"/>
           </a:xfrm>
           <a:prstGeom prst="rect">
@@ -40334,14 +38764,14 @@
       </p:sp>
       <p:sp>
         <p:nvSpPr>
-          <p:cNvPr id="18" name="TextBox 17"/>
-          <p:cNvSpPr txBox="1"/>
-          <p:nvPr/>
-        </p:nvSpPr>
-        <p:spPr>
-          <a:xfrm>
-            <a:off x="1426464" y="3941063"/>
-            <a:ext cx="5769863" cy="306323"/>
+          <p:cNvPr id="20" name="TextBox 19"/>
+          <p:cNvSpPr txBox="1"/>
+          <p:nvPr/>
+        </p:nvSpPr>
+        <p:spPr>
+          <a:xfrm>
+            <a:off x="1207008" y="4686300"/>
+            <a:ext cx="5989319" cy="306323"/>
           </a:xfrm>
           <a:prstGeom prst="rect">
             <a:avLst/>
@@ -40364,7 +38794,7 @@
               <a:spcAft>
                 <a:spcPts val="0"/>
               </a:spcAft>
-              <a:defRPr sz="1600" b="0">
+              <a:defRPr sz="1600" b="1">
                 <a:solidFill>
                   <a:srgbClr val="152B3A"/>
                 </a:solidFill>
@@ -40372,20 +38802,20 @@
               </a:defRPr>
             </a:pPr>
             <a:r>
-              <a:t>DramaGenre</a:t>
-            </a:r>
-          </a:p>
-        </p:txBody>
-      </p:sp>
-      <p:sp>
-        <p:nvSpPr>
-          <p:cNvPr id="19" name="Rectangle 18"/>
+              <a:t>Film and person award facts</a:t>
+            </a:r>
+          </a:p>
+        </p:txBody>
+      </p:sp>
+      <p:sp>
+        <p:nvSpPr>
+          <p:cNvPr id="21" name="Rectangle 20"/>
           <p:cNvSpPr/>
           <p:nvPr/>
         </p:nvSpPr>
         <p:spPr>
           <a:xfrm>
-            <a:off x="1124712" y="4238244"/>
+            <a:off x="905256" y="4983480"/>
             <a:ext cx="20116" cy="242316"/>
           </a:xfrm>
           <a:prstGeom prst="rect">
@@ -40422,14 +38852,14 @@
       </p:sp>
       <p:sp>
         <p:nvSpPr>
-          <p:cNvPr id="20" name="TextBox 19"/>
-          <p:cNvSpPr txBox="1"/>
-          <p:nvPr/>
-        </p:nvSpPr>
-        <p:spPr>
-          <a:xfrm>
-            <a:off x="1426464" y="4219956"/>
-            <a:ext cx="5769863" cy="306323"/>
+          <p:cNvPr id="22" name="TextBox 21"/>
+          <p:cNvSpPr txBox="1"/>
+          <p:nvPr/>
+        </p:nvSpPr>
+        <p:spPr>
+          <a:xfrm>
+            <a:off x="1207008" y="4965192"/>
+            <a:ext cx="5989319" cy="306323"/>
           </a:xfrm>
           <a:prstGeom prst="rect">
             <a:avLst/>
@@ -40452,7 +38882,7 @@
               <a:spcAft>
                 <a:spcPts val="0"/>
               </a:spcAft>
-              <a:defRPr sz="1600" b="0">
+              <a:defRPr sz="1600" b="1">
                 <a:solidFill>
                   <a:srgbClr val="152B3A"/>
                 </a:solidFill>
@@ -40460,630 +38890,14 @@
               </a:defRPr>
             </a:pPr>
             <a:r>
-              <a:t>ScienceFictionGenre</a:t>
-            </a:r>
-          </a:p>
-        </p:txBody>
-      </p:sp>
-      <p:sp>
-        <p:nvSpPr>
-          <p:cNvPr id="21" name="Rectangle 20"/>
-          <p:cNvSpPr/>
-          <p:nvPr/>
-        </p:nvSpPr>
-        <p:spPr>
-          <a:xfrm>
-            <a:off x="905256" y="4517136"/>
-            <a:ext cx="20116" cy="242316"/>
-          </a:xfrm>
-          <a:prstGeom prst="rect">
-            <a:avLst/>
-          </a:prstGeom>
-          <a:solidFill>
-            <a:srgbClr val="007F82"/>
-          </a:solidFill>
-          <a:ln>
-            <a:noFill/>
-          </a:ln>
-        </p:spPr>
-        <p:style>
-          <a:lnRef idx="1">
-            <a:schemeClr val="accent1"/>
-          </a:lnRef>
-          <a:fillRef idx="3">
-            <a:schemeClr val="accent1"/>
-          </a:fillRef>
-          <a:effectRef idx="2">
-            <a:schemeClr val="accent1"/>
-          </a:effectRef>
-          <a:fontRef idx="minor">
-            <a:schemeClr val="lt1"/>
-          </a:fontRef>
-        </p:style>
-        <p:txBody>
-          <a:bodyPr rtlCol="0" anchor="ctr"/>
-          <a:lstStyle/>
-          <a:p>
-            <a:pPr algn="ctr"/>
-          </a:p>
-        </p:txBody>
-      </p:sp>
-      <p:sp>
-        <p:nvSpPr>
-          <p:cNvPr id="22" name="TextBox 21"/>
-          <p:cNvSpPr txBox="1"/>
-          <p:nvPr/>
-        </p:nvSpPr>
-        <p:spPr>
-          <a:xfrm>
-            <a:off x="1207008" y="4498848"/>
-            <a:ext cx="5989319" cy="306323"/>
-          </a:xfrm>
-          <a:prstGeom prst="rect">
-            <a:avLst/>
-          </a:prstGeom>
-          <a:noFill/>
-        </p:spPr>
-        <p:txBody>
-          <a:bodyPr wrap="none" lIns="0" rIns="0" tIns="0" bIns="0">
-            <a:spAutoFit/>
-          </a:bodyPr>
-          <a:lstStyle/>
-          <a:p>
-            <a:pPr>
-              <a:lnSpc>
-                <a:spcPts val="2048"/>
-              </a:lnSpc>
-              <a:spcBef>
-                <a:spcPts val="0"/>
-              </a:spcBef>
-              <a:spcAft>
-                <a:spcPts val="0"/>
-              </a:spcAft>
-              <a:defRPr sz="1600" b="1">
-                <a:solidFill>
-                  <a:srgbClr val="152B3A"/>
-                </a:solidFill>
-                <a:latin typeface="Be Vietnam Pro"/>
-              </a:defRPr>
-            </a:pPr>
-            <a:r>
-              <a:t>NonFictionGenre</a:t>
-            </a:r>
-          </a:p>
-        </p:txBody>
-      </p:sp>
-      <p:sp>
-        <p:nvSpPr>
-          <p:cNvPr id="23" name="Rectangle 22"/>
-          <p:cNvSpPr/>
-          <p:nvPr/>
-        </p:nvSpPr>
-        <p:spPr>
-          <a:xfrm>
-            <a:off x="1124712" y="4796027"/>
-            <a:ext cx="20116" cy="242316"/>
-          </a:xfrm>
-          <a:prstGeom prst="rect">
-            <a:avLst/>
-          </a:prstGeom>
-          <a:solidFill>
-            <a:srgbClr val="007F82"/>
-          </a:solidFill>
-          <a:ln>
-            <a:noFill/>
-          </a:ln>
-        </p:spPr>
-        <p:style>
-          <a:lnRef idx="1">
-            <a:schemeClr val="accent1"/>
-          </a:lnRef>
-          <a:fillRef idx="3">
-            <a:schemeClr val="accent1"/>
-          </a:fillRef>
-          <a:effectRef idx="2">
-            <a:schemeClr val="accent1"/>
-          </a:effectRef>
-          <a:fontRef idx="minor">
-            <a:schemeClr val="lt1"/>
-          </a:fontRef>
-        </p:style>
-        <p:txBody>
-          <a:bodyPr rtlCol="0" anchor="ctr"/>
-          <a:lstStyle/>
-          <a:p>
-            <a:pPr algn="ctr"/>
-          </a:p>
-        </p:txBody>
-      </p:sp>
-      <p:sp>
-        <p:nvSpPr>
-          <p:cNvPr id="24" name="TextBox 23"/>
-          <p:cNvSpPr txBox="1"/>
-          <p:nvPr/>
-        </p:nvSpPr>
-        <p:spPr>
-          <a:xfrm>
-            <a:off x="1426464" y="4777740"/>
-            <a:ext cx="5769863" cy="306323"/>
-          </a:xfrm>
-          <a:prstGeom prst="rect">
-            <a:avLst/>
-          </a:prstGeom>
-          <a:noFill/>
-        </p:spPr>
-        <p:txBody>
-          <a:bodyPr wrap="none" lIns="0" rIns="0" tIns="0" bIns="0">
-            <a:spAutoFit/>
-          </a:bodyPr>
-          <a:lstStyle/>
-          <a:p>
-            <a:pPr>
-              <a:lnSpc>
-                <a:spcPts val="2048"/>
-              </a:lnSpc>
-              <a:spcBef>
-                <a:spcPts val="0"/>
-              </a:spcBef>
-              <a:spcAft>
-                <a:spcPts val="0"/>
-              </a:spcAft>
-              <a:defRPr sz="1600" b="0">
-                <a:solidFill>
-                  <a:srgbClr val="152B3A"/>
-                </a:solidFill>
-                <a:latin typeface="Be Vietnam Pro"/>
-              </a:defRPr>
-            </a:pPr>
-            <a:r>
-              <a:t>DocumentaryGenre</a:t>
-            </a:r>
-          </a:p>
-        </p:txBody>
-      </p:sp>
-      <p:sp>
-        <p:nvSpPr>
-          <p:cNvPr id="25" name="Rounded Rectangle 24"/>
-          <p:cNvSpPr/>
-          <p:nvPr/>
-        </p:nvSpPr>
-        <p:spPr>
-          <a:xfrm>
-            <a:off x="731520" y="5367528"/>
-            <a:ext cx="6720840" cy="1760219"/>
-          </a:xfrm>
-          <a:prstGeom prst="roundRect">
-            <a:avLst/>
-          </a:prstGeom>
-          <a:solidFill>
-            <a:srgbClr val="FFFFFF"/>
-          </a:solidFill>
-          <a:ln>
-            <a:noFill/>
-          </a:ln>
-        </p:spPr>
-        <p:style>
-          <a:lnRef idx="1">
-            <a:schemeClr val="accent1"/>
-          </a:lnRef>
-          <a:fillRef idx="3">
-            <a:schemeClr val="accent1"/>
-          </a:fillRef>
-          <a:effectRef idx="2">
-            <a:schemeClr val="accent1"/>
-          </a:effectRef>
-          <a:fontRef idx="minor">
-            <a:schemeClr val="lt1"/>
-          </a:fontRef>
-        </p:style>
-        <p:txBody>
-          <a:bodyPr rtlCol="0" anchor="ctr"/>
-          <a:lstStyle/>
-          <a:p>
-            <a:pPr algn="ctr"/>
-          </a:p>
-        </p:txBody>
-      </p:sp>
-      <p:sp>
-        <p:nvSpPr>
-          <p:cNvPr id="26" name="TextBox 25"/>
-          <p:cNvSpPr txBox="1"/>
-          <p:nvPr/>
-        </p:nvSpPr>
-        <p:spPr>
-          <a:xfrm>
-            <a:off x="987552" y="5522976"/>
-            <a:ext cx="6208775" cy="306323"/>
-          </a:xfrm>
-          <a:prstGeom prst="rect">
-            <a:avLst/>
-          </a:prstGeom>
-          <a:noFill/>
-        </p:spPr>
-        <p:txBody>
-          <a:bodyPr wrap="none" lIns="0" rIns="0" tIns="0" bIns="0">
-            <a:spAutoFit/>
-          </a:bodyPr>
-          <a:lstStyle/>
-          <a:p>
-            <a:pPr>
-              <a:lnSpc>
-                <a:spcPts val="2048"/>
-              </a:lnSpc>
-              <a:spcBef>
-                <a:spcPts val="0"/>
-              </a:spcBef>
-              <a:spcAft>
-                <a:spcPts val="0"/>
-              </a:spcAft>
-              <a:defRPr sz="1600" b="1">
-                <a:solidFill>
-                  <a:srgbClr val="007F82"/>
-                </a:solidFill>
-                <a:latin typeface="Be Vietnam Pro"/>
-              </a:defRPr>
-            </a:pPr>
-            <a:r>
-              <a:t>Award</a:t>
-            </a:r>
-          </a:p>
-        </p:txBody>
-      </p:sp>
-      <p:sp>
-        <p:nvSpPr>
-          <p:cNvPr id="27" name="Rectangle 26"/>
-          <p:cNvSpPr/>
-          <p:nvPr/>
-        </p:nvSpPr>
-        <p:spPr>
-          <a:xfrm>
-            <a:off x="905256" y="5820155"/>
-            <a:ext cx="20116" cy="242316"/>
-          </a:xfrm>
-          <a:prstGeom prst="rect">
-            <a:avLst/>
-          </a:prstGeom>
-          <a:solidFill>
-            <a:srgbClr val="007F82"/>
-          </a:solidFill>
-          <a:ln>
-            <a:noFill/>
-          </a:ln>
-        </p:spPr>
-        <p:style>
-          <a:lnRef idx="1">
-            <a:schemeClr val="accent1"/>
-          </a:lnRef>
-          <a:fillRef idx="3">
-            <a:schemeClr val="accent1"/>
-          </a:fillRef>
-          <a:effectRef idx="2">
-            <a:schemeClr val="accent1"/>
-          </a:effectRef>
-          <a:fontRef idx="minor">
-            <a:schemeClr val="lt1"/>
-          </a:fontRef>
-        </p:style>
-        <p:txBody>
-          <a:bodyPr rtlCol="0" anchor="ctr"/>
-          <a:lstStyle/>
-          <a:p>
-            <a:pPr algn="ctr"/>
-          </a:p>
-        </p:txBody>
-      </p:sp>
-      <p:sp>
-        <p:nvSpPr>
-          <p:cNvPr id="28" name="TextBox 27"/>
-          <p:cNvSpPr txBox="1"/>
-          <p:nvPr/>
-        </p:nvSpPr>
-        <p:spPr>
-          <a:xfrm>
-            <a:off x="1207008" y="5801868"/>
-            <a:ext cx="5989319" cy="306323"/>
-          </a:xfrm>
-          <a:prstGeom prst="rect">
-            <a:avLst/>
-          </a:prstGeom>
-          <a:noFill/>
-        </p:spPr>
-        <p:txBody>
-          <a:bodyPr wrap="none" lIns="0" rIns="0" tIns="0" bIns="0">
-            <a:spAutoFit/>
-          </a:bodyPr>
-          <a:lstStyle/>
-          <a:p>
-            <a:pPr>
-              <a:lnSpc>
-                <a:spcPts val="2048"/>
-              </a:lnSpc>
-              <a:spcBef>
-                <a:spcPts val="0"/>
-              </a:spcBef>
-              <a:spcAft>
-                <a:spcPts val="0"/>
-              </a:spcAft>
-              <a:defRPr sz="1600" b="1">
-                <a:solidFill>
-                  <a:srgbClr val="152B3A"/>
-                </a:solidFill>
-                <a:latin typeface="Be Vietnam Pro"/>
-              </a:defRPr>
-            </a:pPr>
-            <a:r>
-              <a:t>FilmAward</a:t>
-            </a:r>
-          </a:p>
-        </p:txBody>
-      </p:sp>
-      <p:sp>
-        <p:nvSpPr>
-          <p:cNvPr id="29" name="Rectangle 28"/>
-          <p:cNvSpPr/>
-          <p:nvPr/>
-        </p:nvSpPr>
-        <p:spPr>
-          <a:xfrm>
-            <a:off x="905256" y="6099048"/>
-            <a:ext cx="20116" cy="242316"/>
-          </a:xfrm>
-          <a:prstGeom prst="rect">
-            <a:avLst/>
-          </a:prstGeom>
-          <a:solidFill>
-            <a:srgbClr val="007F82"/>
-          </a:solidFill>
-          <a:ln>
-            <a:noFill/>
-          </a:ln>
-        </p:spPr>
-        <p:style>
-          <a:lnRef idx="1">
-            <a:schemeClr val="accent1"/>
-          </a:lnRef>
-          <a:fillRef idx="3">
-            <a:schemeClr val="accent1"/>
-          </a:fillRef>
-          <a:effectRef idx="2">
-            <a:schemeClr val="accent1"/>
-          </a:effectRef>
-          <a:fontRef idx="minor">
-            <a:schemeClr val="lt1"/>
-          </a:fontRef>
-        </p:style>
-        <p:txBody>
-          <a:bodyPr rtlCol="0" anchor="ctr"/>
-          <a:lstStyle/>
-          <a:p>
-            <a:pPr algn="ctr"/>
-          </a:p>
-        </p:txBody>
-      </p:sp>
-      <p:sp>
-        <p:nvSpPr>
-          <p:cNvPr id="30" name="TextBox 29"/>
-          <p:cNvSpPr txBox="1"/>
-          <p:nvPr/>
-        </p:nvSpPr>
-        <p:spPr>
-          <a:xfrm>
-            <a:off x="1207008" y="6080760"/>
-            <a:ext cx="5989319" cy="306323"/>
-          </a:xfrm>
-          <a:prstGeom prst="rect">
-            <a:avLst/>
-          </a:prstGeom>
-          <a:noFill/>
-        </p:spPr>
-        <p:txBody>
-          <a:bodyPr wrap="none" lIns="0" rIns="0" tIns="0" bIns="0">
-            <a:spAutoFit/>
-          </a:bodyPr>
-          <a:lstStyle/>
-          <a:p>
-            <a:pPr>
-              <a:lnSpc>
-                <a:spcPts val="2048"/>
-              </a:lnSpc>
-              <a:spcBef>
-                <a:spcPts val="0"/>
-              </a:spcBef>
-              <a:spcAft>
-                <a:spcPts val="0"/>
-              </a:spcAft>
-              <a:defRPr sz="1600" b="1">
-                <a:solidFill>
-                  <a:srgbClr val="152B3A"/>
-                </a:solidFill>
-                <a:latin typeface="Be Vietnam Pro"/>
-              </a:defRPr>
-            </a:pPr>
-            <a:r>
-              <a:t>ActingAward</a:t>
-            </a:r>
-          </a:p>
-        </p:txBody>
-      </p:sp>
-      <p:sp>
-        <p:nvSpPr>
-          <p:cNvPr id="31" name="Rectangle 30"/>
-          <p:cNvSpPr/>
-          <p:nvPr/>
-        </p:nvSpPr>
-        <p:spPr>
-          <a:xfrm>
-            <a:off x="905256" y="6377940"/>
-            <a:ext cx="20116" cy="242316"/>
-          </a:xfrm>
-          <a:prstGeom prst="rect">
-            <a:avLst/>
-          </a:prstGeom>
-          <a:solidFill>
-            <a:srgbClr val="007F82"/>
-          </a:solidFill>
-          <a:ln>
-            <a:noFill/>
-          </a:ln>
-        </p:spPr>
-        <p:style>
-          <a:lnRef idx="1">
-            <a:schemeClr val="accent1"/>
-          </a:lnRef>
-          <a:fillRef idx="3">
-            <a:schemeClr val="accent1"/>
-          </a:fillRef>
-          <a:effectRef idx="2">
-            <a:schemeClr val="accent1"/>
-          </a:effectRef>
-          <a:fontRef idx="minor">
-            <a:schemeClr val="lt1"/>
-          </a:fontRef>
-        </p:style>
-        <p:txBody>
-          <a:bodyPr rtlCol="0" anchor="ctr"/>
-          <a:lstStyle/>
-          <a:p>
-            <a:pPr algn="ctr"/>
-          </a:p>
-        </p:txBody>
-      </p:sp>
-      <p:sp>
-        <p:nvSpPr>
-          <p:cNvPr id="32" name="TextBox 31"/>
-          <p:cNvSpPr txBox="1"/>
-          <p:nvPr/>
-        </p:nvSpPr>
-        <p:spPr>
-          <a:xfrm>
-            <a:off x="1207008" y="6359652"/>
-            <a:ext cx="5989319" cy="306323"/>
-          </a:xfrm>
-          <a:prstGeom prst="rect">
-            <a:avLst/>
-          </a:prstGeom>
-          <a:noFill/>
-        </p:spPr>
-        <p:txBody>
-          <a:bodyPr wrap="none" lIns="0" rIns="0" tIns="0" bIns="0">
-            <a:spAutoFit/>
-          </a:bodyPr>
-          <a:lstStyle/>
-          <a:p>
-            <a:pPr>
-              <a:lnSpc>
-                <a:spcPts val="2048"/>
-              </a:lnSpc>
-              <a:spcBef>
-                <a:spcPts val="0"/>
-              </a:spcBef>
-              <a:spcAft>
-                <a:spcPts val="0"/>
-              </a:spcAft>
-              <a:defRPr sz="1600" b="1">
-                <a:solidFill>
-                  <a:srgbClr val="152B3A"/>
-                </a:solidFill>
-                <a:latin typeface="Be Vietnam Pro"/>
-              </a:defRPr>
-            </a:pPr>
-            <a:r>
-              <a:t>DirectingAward</a:t>
-            </a:r>
-          </a:p>
-        </p:txBody>
-      </p:sp>
-      <p:sp>
-        <p:nvSpPr>
-          <p:cNvPr id="33" name="Rectangle 32"/>
-          <p:cNvSpPr/>
-          <p:nvPr/>
-        </p:nvSpPr>
-        <p:spPr>
-          <a:xfrm>
-            <a:off x="905256" y="6656831"/>
-            <a:ext cx="20116" cy="242316"/>
-          </a:xfrm>
-          <a:prstGeom prst="rect">
-            <a:avLst/>
-          </a:prstGeom>
-          <a:solidFill>
-            <a:srgbClr val="007F82"/>
-          </a:solidFill>
-          <a:ln>
-            <a:noFill/>
-          </a:ln>
-        </p:spPr>
-        <p:style>
-          <a:lnRef idx="1">
-            <a:schemeClr val="accent1"/>
-          </a:lnRef>
-          <a:fillRef idx="3">
-            <a:schemeClr val="accent1"/>
-          </a:fillRef>
-          <a:effectRef idx="2">
-            <a:schemeClr val="accent1"/>
-          </a:effectRef>
-          <a:fontRef idx="minor">
-            <a:schemeClr val="lt1"/>
-          </a:fontRef>
-        </p:style>
-        <p:txBody>
-          <a:bodyPr rtlCol="0" anchor="ctr"/>
-          <a:lstStyle/>
-          <a:p>
-            <a:pPr algn="ctr"/>
-          </a:p>
-        </p:txBody>
-      </p:sp>
-      <p:sp>
-        <p:nvSpPr>
-          <p:cNvPr id="34" name="TextBox 33"/>
-          <p:cNvSpPr txBox="1"/>
-          <p:nvPr/>
-        </p:nvSpPr>
-        <p:spPr>
-          <a:xfrm>
-            <a:off x="1207008" y="6638544"/>
-            <a:ext cx="5989319" cy="306323"/>
-          </a:xfrm>
-          <a:prstGeom prst="rect">
-            <a:avLst/>
-          </a:prstGeom>
-          <a:noFill/>
-        </p:spPr>
-        <p:txBody>
-          <a:bodyPr wrap="none" lIns="0" rIns="0" tIns="0" bIns="0">
-            <a:spAutoFit/>
-          </a:bodyPr>
-          <a:lstStyle/>
-          <a:p>
-            <a:pPr>
-              <a:lnSpc>
-                <a:spcPts val="2048"/>
-              </a:lnSpc>
-              <a:spcBef>
-                <a:spcPts val="0"/>
-              </a:spcBef>
-              <a:spcAft>
-                <a:spcPts val="0"/>
-              </a:spcAft>
-              <a:defRPr sz="1600" b="1">
-                <a:solidFill>
-                  <a:srgbClr val="152B3A"/>
-                </a:solidFill>
-                <a:latin typeface="Be Vietnam Pro"/>
-              </a:defRPr>
-            </a:pPr>
-            <a:r>
-              <a:t>WritingAward</a:t>
-            </a:r>
-          </a:p>
-        </p:txBody>
-      </p:sp>
-      <p:sp>
-        <p:nvSpPr>
-          <p:cNvPr id="35" name="PHOTO_P03_0"/>
+              <a:t>No guessed award subclasses</a:t>
+            </a:r>
+          </a:p>
+        </p:txBody>
+      </p:sp>
+      <p:sp>
+        <p:nvSpPr>
+          <p:cNvPr id="23" name="PHOTO_P03_0"/>
           <p:cNvSpPr/>
           <p:nvPr/>
         </p:nvSpPr>
@@ -41128,7 +38942,7 @@
       </p:sp>
       <p:sp>
         <p:nvSpPr>
-          <p:cNvPr id="36" name="PHOTO_P03_1"/>
+          <p:cNvPr id="24" name="PHOTO_P03_1"/>
           <p:cNvSpPr txBox="1"/>
           <p:nvPr/>
         </p:nvSpPr>
@@ -41173,7 +38987,7 @@
       </p:sp>
       <p:sp>
         <p:nvSpPr>
-          <p:cNvPr id="37" name="PHOTO_P03_2"/>
+          <p:cNvPr id="25" name="PHOTO_P03_2"/>
           <p:cNvSpPr/>
           <p:nvPr/>
         </p:nvSpPr>
@@ -41216,7 +39030,7 @@
       </p:sp>
       <p:sp>
         <p:nvSpPr>
-          <p:cNvPr id="38" name="PHOTO_P03_3"/>
+          <p:cNvPr id="26" name="PHOTO_P03_3"/>
           <p:cNvSpPr txBox="1"/>
           <p:nvPr/>
         </p:nvSpPr>
@@ -41254,14 +39068,14 @@
               </a:defRPr>
             </a:pPr>
             <a:r>
-              <a:t>Cây Genre và Award</a:t>
-            </a:r>
-          </a:p>
-        </p:txBody>
-      </p:sp>
-      <p:sp>
-        <p:nvSpPr>
-          <p:cNvPr id="39" name="PHOTO_P03_4"/>
+              <a:t>MovieGenre và Award</a:t>
+            </a:r>
+          </a:p>
+        </p:txBody>
+      </p:sp>
+      <p:sp>
+        <p:nvSpPr>
+          <p:cNvPr id="27" name="PHOTO_P03_4"/>
           <p:cNvSpPr txBox="1"/>
           <p:nvPr/>
         </p:nvSpPr>
@@ -41306,7 +39120,7 @@
       </p:sp>
       <p:sp>
         <p:nvSpPr>
-          <p:cNvPr id="40" name="PHOTO_P03_5"/>
+          <p:cNvPr id="28" name="PHOTO_P03_5"/>
           <p:cNvSpPr txBox="1"/>
           <p:nvPr/>
         </p:nvSpPr>
@@ -41344,52 +39158,7 @@
               </a:defRPr>
             </a:pPr>
             <a:r>
-              <a:t>1. Thu gọn Film/Agent để ảnh dễ đọc.</a:t>
-            </a:r>
-          </a:p>
-        </p:txBody>
-      </p:sp>
-      <p:sp>
-        <p:nvSpPr>
-          <p:cNvPr id="41" name="PHOTO_P03_6"/>
-          <p:cNvSpPr txBox="1"/>
-          <p:nvPr/>
-        </p:nvSpPr>
-        <p:spPr>
-          <a:xfrm>
-            <a:off x="8055864" y="5348223"/>
-            <a:ext cx="5605272" cy="264160"/>
-          </a:xfrm>
-          <a:prstGeom prst="rect">
-            <a:avLst/>
-          </a:prstGeom>
-          <a:noFill/>
-        </p:spPr>
-        <p:txBody>
-          <a:bodyPr wrap="none" lIns="0" rIns="0" tIns="0" bIns="0">
-            <a:spAutoFit/>
-          </a:bodyPr>
-          <a:lstStyle/>
-          <a:p>
-            <a:pPr>
-              <a:lnSpc>
-                <a:spcPts val="1792"/>
-              </a:lnSpc>
-              <a:spcBef>
-                <a:spcPts val="0"/>
-              </a:spcBef>
-              <a:spcAft>
-                <a:spcPts val="0"/>
-              </a:spcAft>
-              <a:defRPr sz="1400" b="0">
-                <a:solidFill>
-                  <a:srgbClr val="506776"/>
-                </a:solidFill>
-                <a:latin typeface="Be Vietnam Pro"/>
-              </a:defRPr>
-            </a:pPr>
-            <a:r>
-              <a:t>2. Mở Genre </a:t>
+              <a:t>1. Mở dbo:Genre </a:t>
             </a:r>
             <a:r>
               <a:rPr>
@@ -41398,14 +39167,59 @@
               <a:t>→</a:t>
             </a:r>
             <a:r>
-              <a:t> FictionGenre / NonFictionGenre và Award.</a:t>
-            </a:r>
-          </a:p>
-        </p:txBody>
-      </p:sp>
-      <p:sp>
-        <p:nvSpPr>
-          <p:cNvPr id="42" name="PHOTO_P03_7"/>
+              <a:t> dbo:MovieGenre.</a:t>
+            </a:r>
+          </a:p>
+        </p:txBody>
+      </p:sp>
+      <p:sp>
+        <p:nvSpPr>
+          <p:cNvPr id="29" name="PHOTO_P03_6"/>
+          <p:cNvSpPr txBox="1"/>
+          <p:nvPr/>
+        </p:nvSpPr>
+        <p:spPr>
+          <a:xfrm>
+            <a:off x="8055864" y="5348223"/>
+            <a:ext cx="5605272" cy="264160"/>
+          </a:xfrm>
+          <a:prstGeom prst="rect">
+            <a:avLst/>
+          </a:prstGeom>
+          <a:noFill/>
+        </p:spPr>
+        <p:txBody>
+          <a:bodyPr wrap="none" lIns="0" rIns="0" tIns="0" bIns="0">
+            <a:spAutoFit/>
+          </a:bodyPr>
+          <a:lstStyle/>
+          <a:p>
+            <a:pPr>
+              <a:lnSpc>
+                <a:spcPts val="1792"/>
+              </a:lnSpc>
+              <a:spcBef>
+                <a:spcPts val="0"/>
+              </a:spcBef>
+              <a:spcAft>
+                <a:spcPts val="0"/>
+              </a:spcAft>
+              <a:defRPr sz="1400" b="0">
+                <a:solidFill>
+                  <a:srgbClr val="506776"/>
+                </a:solidFill>
+                <a:latin typeface="Be Vietnam Pro"/>
+              </a:defRPr>
+            </a:pPr>
+            <a:r>
+              <a:t>2. Hiện ActionGenre / DramaGenre; chọn dbo:Award.</a:t>
+            </a:r>
+          </a:p>
+        </p:txBody>
+      </p:sp>
+      <p:sp>
+        <p:nvSpPr>
+          <p:cNvPr id="30" name="PHOTO_P03_7"/>
           <p:cNvSpPr txBox="1"/>
           <p:nvPr/>
         </p:nvSpPr>
@@ -41443,14 +39257,14 @@
               </a:defRPr>
             </a:pPr>
             <a:r>
-              <a:t>3. Hiện các lớp thể loại và nhóm giải; giữ Class Description.</a:t>
-            </a:r>
-          </a:p>
-        </p:txBody>
-      </p:sp>
-      <p:sp>
-        <p:nvSpPr>
-          <p:cNvPr id="43" name="PHOTO_P03_8"/>
+              <a:t>3. Giữ Description để đọc IRI và lớp cha.</a:t>
+            </a:r>
+          </a:p>
+        </p:txBody>
+      </p:sp>
+      <p:sp>
+        <p:nvSpPr>
+          <p:cNvPr id="31" name="PHOTO_P03_8"/>
           <p:cNvSpPr txBox="1"/>
           <p:nvPr/>
         </p:nvSpPr>
@@ -41495,7 +39309,7 @@
       </p:sp>
       <p:sp>
         <p:nvSpPr>
-          <p:cNvPr id="44" name="TextBox 43"/>
+          <p:cNvPr id="32" name="TextBox 31"/>
           <p:cNvSpPr txBox="1"/>
           <p:nvPr/>
         </p:nvSpPr>
@@ -41533,7 +39347,7 @@
               </a:defRPr>
             </a:pPr>
             <a:r>
-              <a:t>Supporting classes: dbo:Country · Language · SourceSnapshot · Dataset. Group mapping uses label keywords.</a:t>
+              <a:t>Supporting vocabulary: dbo:Country / Language · ex:SourceSnapshot · void:Dataset</a:t>
             </a:r>
           </a:p>
         </p:txBody>
@@ -41647,7 +39461,7 @@
               </a:defRPr>
             </a:pPr>
             <a:r>
-              <a:t>MOVIELOD / SEMANTIC WEB / ONTOLOGY 2.0</a:t>
+              <a:t>MOVIELOD / SEMANTIC WEB / ONTOLOGY 3.0.0</a:t>
             </a:r>
           </a:p>
         </p:txBody>
@@ -41692,7 +39506,7 @@
               </a:defRPr>
             </a:pPr>
             <a:r>
-              <a:t>R1 · Contribution: who did what in a film?</a:t>
+              <a:t>Contribution: person, film and role</a:t>
             </a:r>
           </a:p>
         </p:txBody>
@@ -41737,7 +39551,7 @@
               </a:defRPr>
             </a:pPr>
             <a:r>
-              <a:t>One record connects exactly one person, one film and one role</a:t>
+              <a:t>Exactly one endpoint of each kind per credit record</a:t>
             </a:r>
           </a:p>
         </p:txBody>
@@ -41825,7 +39639,7 @@
               </a:defRPr>
             </a:pPr>
             <a:r>
-              <a:t>Data checked: 08 Oct 2026 • Sources: project code and evidence/</a:t>
+              <a:t>Data checked: 09 Oct 2026 • Sources: project code and evidence/</a:t>
             </a:r>
           </a:p>
         </p:txBody>
@@ -43053,7 +40867,7 @@
               </a:defRPr>
             </a:pPr>
             <a:r>
-              <a:t>Ràng buộc của Contribution</a:t>
+              <a:t>Ràng buộc Contribution</a:t>
             </a:r>
           </a:p>
         </p:txBody>
@@ -43143,25 +40957,7 @@
               </a:defRPr>
             </a:pPr>
             <a:r>
-              <a:t>1. Entities </a:t>
-            </a:r>
-            <a:r>
-              <a:rPr>
-                <a:latin typeface="Arial Unicode MS"/>
-              </a:rPr>
-              <a:t>→</a:t>
-            </a:r>
-            <a:r>
-              <a:t> Classes </a:t>
-            </a:r>
-            <a:r>
-              <a:rPr>
-                <a:latin typeface="Arial Unicode MS"/>
-              </a:rPr>
-              <a:t>→</a:t>
-            </a:r>
-            <a:r>
-              <a:t> chọn Contribution.</a:t>
+              <a:t>1. Chọn ex:Contribution.</a:t>
             </a:r>
           </a:p>
         </p:txBody>
@@ -43206,7 +41002,7 @@
               </a:defRPr>
             </a:pPr>
             <a:r>
-              <a:t>2. Trong Class Description, mở đủ SubClass Of.</a:t>
+              <a:t>2. Hiện exactly 1 cho contributionBy, contributionTo, hasRole.</a:t>
             </a:r>
           </a:p>
         </p:txBody>
@@ -43251,7 +41047,7 @@
               </a:defRPr>
             </a:pPr>
             <a:r>
-              <a:t>3. Hiện contributionBy / contributionTo / hasRole: exactly 1.</a:t>
+              <a:t>3. Chọn hasRole để thấy Functional và role individual.</a:t>
             </a:r>
           </a:p>
         </p:txBody>
